--- a/BrainSpark_Director_Presentation.pptx
+++ b/BrainSpark_Director_Presentation.pptx
@@ -8110,13 +8110,13 @@
               </a:lnSpc>
             </a:pPr>
             <a:r>
-              <a:rPr sz="2000" b="1" i="0">
+              <a:rPr sz="1800" b="1" i="0">
                 <a:solidFill>
                   <a:srgbClr val="F8FAFC"/>
                 </a:solidFill>
-                <a:latin typeface="Segoe UI"/>
-              </a:rPr>
-              <a:t>🛒</a:t>
+                <a:latin typeface="Arial"/>
+              </a:rPr>
+              <a:t>★</a:t>
             </a:r>
           </a:p>
         </p:txBody>
@@ -8232,13 +8232,13 @@
               </a:lnSpc>
             </a:pPr>
             <a:r>
-              <a:rPr sz="2000" b="1" i="0">
+              <a:rPr sz="1800" b="1" i="0">
                 <a:solidFill>
                   <a:srgbClr val="F8FAFC"/>
                 </a:solidFill>
-                <a:latin typeface="Segoe UI"/>
-              </a:rPr>
-              <a:t>▹</a:t>
+                <a:latin typeface="Arial"/>
+              </a:rPr>
+              <a:t>▪</a:t>
             </a:r>
           </a:p>
         </p:txBody>
@@ -8354,13 +8354,13 @@
               </a:lnSpc>
             </a:pPr>
             <a:r>
-              <a:rPr sz="2000" b="1" i="0">
+              <a:rPr sz="1800" b="1" i="0">
                 <a:solidFill>
                   <a:srgbClr val="F8FAFC"/>
                 </a:solidFill>
-                <a:latin typeface="Segoe UI"/>
-              </a:rPr>
-              <a:t>▹</a:t>
+                <a:latin typeface="Arial"/>
+              </a:rPr>
+              <a:t>▪</a:t>
             </a:r>
           </a:p>
         </p:txBody>
@@ -8476,13 +8476,13 @@
               </a:lnSpc>
             </a:pPr>
             <a:r>
-              <a:rPr sz="2000" b="1" i="0">
+              <a:rPr sz="1800" b="1" i="0">
                 <a:solidFill>
                   <a:srgbClr val="F8FAFC"/>
                 </a:solidFill>
-                <a:latin typeface="Segoe UI"/>
-              </a:rPr>
-              <a:t>▹</a:t>
+                <a:latin typeface="Arial"/>
+              </a:rPr>
+              <a:t>▪</a:t>
             </a:r>
           </a:p>
         </p:txBody>
@@ -8598,13 +8598,13 @@
               </a:lnSpc>
             </a:pPr>
             <a:r>
-              <a:rPr sz="2000" b="1" i="0">
+              <a:rPr sz="1800" b="1" i="0">
                 <a:solidFill>
                   <a:srgbClr val="F8FAFC"/>
                 </a:solidFill>
-                <a:latin typeface="Segoe UI"/>
-              </a:rPr>
-              <a:t>▹</a:t>
+                <a:latin typeface="Arial"/>
+              </a:rPr>
+              <a:t>▪</a:t>
             </a:r>
           </a:p>
         </p:txBody>
@@ -8771,13 +8771,13 @@
               </a:lnSpc>
             </a:pPr>
             <a:r>
-              <a:rPr sz="2000" b="1" i="0">
+              <a:rPr sz="1800" b="1" i="0">
                 <a:solidFill>
                   <a:srgbClr val="F8FAFC"/>
                 </a:solidFill>
-                <a:latin typeface="Segoe UI"/>
-              </a:rPr>
-              <a:t>📊</a:t>
+                <a:latin typeface="Arial"/>
+              </a:rPr>
+              <a:t>▲</a:t>
             </a:r>
           </a:p>
         </p:txBody>
@@ -8893,13 +8893,13 @@
               </a:lnSpc>
             </a:pPr>
             <a:r>
-              <a:rPr sz="2000" b="1" i="0">
+              <a:rPr sz="1800" b="1" i="0">
                 <a:solidFill>
                   <a:srgbClr val="F8FAFC"/>
                 </a:solidFill>
-                <a:latin typeface="Segoe UI"/>
-              </a:rPr>
-              <a:t>▹</a:t>
+                <a:latin typeface="Arial"/>
+              </a:rPr>
+              <a:t>▪</a:t>
             </a:r>
           </a:p>
         </p:txBody>
@@ -9015,13 +9015,13 @@
               </a:lnSpc>
             </a:pPr>
             <a:r>
-              <a:rPr sz="2000" b="1" i="0">
+              <a:rPr sz="1800" b="1" i="0">
                 <a:solidFill>
                   <a:srgbClr val="F8FAFC"/>
                 </a:solidFill>
-                <a:latin typeface="Segoe UI"/>
-              </a:rPr>
-              <a:t>▹</a:t>
+                <a:latin typeface="Arial"/>
+              </a:rPr>
+              <a:t>▪</a:t>
             </a:r>
           </a:p>
         </p:txBody>
@@ -9137,13 +9137,13 @@
               </a:lnSpc>
             </a:pPr>
             <a:r>
-              <a:rPr sz="2000" b="1" i="0">
+              <a:rPr sz="1800" b="1" i="0">
                 <a:solidFill>
                   <a:srgbClr val="F8FAFC"/>
                 </a:solidFill>
-                <a:latin typeface="Segoe UI"/>
-              </a:rPr>
-              <a:t>▹</a:t>
+                <a:latin typeface="Arial"/>
+              </a:rPr>
+              <a:t>▪</a:t>
             </a:r>
           </a:p>
         </p:txBody>
@@ -9259,13 +9259,13 @@
               </a:lnSpc>
             </a:pPr>
             <a:r>
-              <a:rPr sz="2000" b="1" i="0">
+              <a:rPr sz="1800" b="1" i="0">
                 <a:solidFill>
                   <a:srgbClr val="F8FAFC"/>
                 </a:solidFill>
-                <a:latin typeface="Segoe UI"/>
-              </a:rPr>
-              <a:t>▹</a:t>
+                <a:latin typeface="Arial"/>
+              </a:rPr>
+              <a:t>▪</a:t>
             </a:r>
           </a:p>
         </p:txBody>
@@ -9960,13 +9960,13 @@
               </a:lnSpc>
             </a:pPr>
             <a:r>
-              <a:rPr sz="1800" b="1" i="0">
+              <a:rPr sz="1600" b="1" i="0">
                 <a:solidFill>
                   <a:srgbClr val="0B1E33"/>
                 </a:solidFill>
-                <a:latin typeface="Segoe UI"/>
-              </a:rPr>
-              <a:t>📥</a:t>
+                <a:latin typeface="Arial"/>
+              </a:rPr>
+              <a:t>↑</a:t>
             </a:r>
           </a:p>
         </p:txBody>
@@ -10299,13 +10299,13 @@
               </a:lnSpc>
             </a:pPr>
             <a:r>
-              <a:rPr sz="1800" b="1" i="0">
+              <a:rPr sz="1600" b="1" i="0">
                 <a:solidFill>
                   <a:srgbClr val="0B1E33"/>
                 </a:solidFill>
-                <a:latin typeface="Segoe UI"/>
-              </a:rPr>
-              <a:t>🎛</a:t>
+                <a:latin typeface="Arial"/>
+              </a:rPr>
+              <a:t>◆</a:t>
             </a:r>
           </a:p>
         </p:txBody>
@@ -10638,13 +10638,13 @@
               </a:lnSpc>
             </a:pPr>
             <a:r>
-              <a:rPr sz="1800" b="1" i="0">
+              <a:rPr sz="1600" b="1" i="0">
                 <a:solidFill>
                   <a:srgbClr val="0B1E33"/>
                 </a:solidFill>
-                <a:latin typeface="Segoe UI"/>
-              </a:rPr>
-              <a:t>⚙️</a:t>
+                <a:latin typeface="Arial"/>
+              </a:rPr>
+              <a:t>●</a:t>
             </a:r>
           </a:p>
         </p:txBody>
@@ -10977,13 +10977,13 @@
               </a:lnSpc>
             </a:pPr>
             <a:r>
-              <a:rPr sz="1800" b="1" i="0">
+              <a:rPr sz="1600" b="1" i="0">
                 <a:solidFill>
                   <a:srgbClr val="0B1E33"/>
                 </a:solidFill>
-                <a:latin typeface="Segoe UI"/>
-              </a:rPr>
-              <a:t>✅</a:t>
+                <a:latin typeface="Arial"/>
+              </a:rPr>
+              <a:t>✓</a:t>
             </a:r>
           </a:p>
         </p:txBody>
@@ -11316,13 +11316,13 @@
               </a:lnSpc>
             </a:pPr>
             <a:r>
-              <a:rPr sz="1800" b="1" i="0">
+              <a:rPr sz="1600" b="1" i="0">
                 <a:solidFill>
                   <a:srgbClr val="0B1E33"/>
                 </a:solidFill>
-                <a:latin typeface="Segoe UI"/>
-              </a:rPr>
-              <a:t>📈</a:t>
+                <a:latin typeface="Arial"/>
+              </a:rPr>
+              <a:t>▲</a:t>
             </a:r>
           </a:p>
         </p:txBody>
@@ -12070,13 +12070,13 @@
               </a:lnSpc>
             </a:pPr>
             <a:r>
-              <a:rPr sz="2000" b="1" i="0">
+              <a:rPr sz="1800" b="1" i="0">
                 <a:solidFill>
                   <a:srgbClr val="F8FAFC"/>
                 </a:solidFill>
-                <a:latin typeface="Segoe UI"/>
-              </a:rPr>
-              <a:t>🧠</a:t>
+                <a:latin typeface="Arial"/>
+              </a:rPr>
+              <a:t>★</a:t>
             </a:r>
           </a:p>
         </p:txBody>
@@ -12326,13 +12326,13 @@
               </a:lnSpc>
             </a:pPr>
             <a:r>
-              <a:rPr sz="2000" b="1" i="0">
+              <a:rPr sz="1800" b="1" i="0">
                 <a:solidFill>
                   <a:srgbClr val="F8FAFC"/>
                 </a:solidFill>
-                <a:latin typeface="Segoe UI"/>
-              </a:rPr>
-              <a:t>🔎</a:t>
+                <a:latin typeface="Arial"/>
+              </a:rPr>
+              <a:t>◆</a:t>
             </a:r>
           </a:p>
         </p:txBody>
@@ -12582,13 +12582,13 @@
               </a:lnSpc>
             </a:pPr>
             <a:r>
-              <a:rPr sz="2000" b="1" i="0">
+              <a:rPr sz="1800" b="1" i="0">
                 <a:solidFill>
                   <a:srgbClr val="F8FAFC"/>
                 </a:solidFill>
-                <a:latin typeface="Segoe UI"/>
-              </a:rPr>
-              <a:t>📄</a:t>
+                <a:latin typeface="Arial"/>
+              </a:rPr>
+              <a:t>■</a:t>
             </a:r>
           </a:p>
         </p:txBody>
@@ -12838,13 +12838,13 @@
               </a:lnSpc>
             </a:pPr>
             <a:r>
-              <a:rPr sz="2000" b="1" i="0">
+              <a:rPr sz="1800" b="1" i="0">
                 <a:solidFill>
                   <a:srgbClr val="F8FAFC"/>
                 </a:solidFill>
-                <a:latin typeface="Segoe UI"/>
-              </a:rPr>
-              <a:t>🎯</a:t>
+                <a:latin typeface="Arial"/>
+              </a:rPr>
+              <a:t>▲</a:t>
             </a:r>
           </a:p>
         </p:txBody>
@@ -13094,13 +13094,13 @@
               </a:lnSpc>
             </a:pPr>
             <a:r>
-              <a:rPr sz="2000" b="1" i="0">
+              <a:rPr sz="1800" b="1" i="0">
                 <a:solidFill>
                   <a:srgbClr val="F8FAFC"/>
                 </a:solidFill>
-                <a:latin typeface="Segoe UI"/>
-              </a:rPr>
-              <a:t>🛡</a:t>
+                <a:latin typeface="Arial"/>
+              </a:rPr>
+              <a:t>●</a:t>
             </a:r>
           </a:p>
         </p:txBody>
@@ -13350,13 +13350,13 @@
               </a:lnSpc>
             </a:pPr>
             <a:r>
-              <a:rPr sz="2000" b="1" i="0">
+              <a:rPr sz="1800" b="1" i="0">
                 <a:solidFill>
                   <a:srgbClr val="F8FAFC"/>
                 </a:solidFill>
-                <a:latin typeface="Segoe UI"/>
-              </a:rPr>
-              <a:t>⚖️</a:t>
+                <a:latin typeface="Arial"/>
+              </a:rPr>
+              <a:t>=</a:t>
             </a:r>
           </a:p>
         </p:txBody>
@@ -14095,13 +14095,13 @@
               </a:lnSpc>
             </a:pPr>
             <a:r>
-              <a:rPr sz="2000" b="1" i="0">
+              <a:rPr sz="1800" b="1" i="0">
                 <a:solidFill>
                   <a:srgbClr val="F8FAFC"/>
                 </a:solidFill>
-                <a:latin typeface="Segoe UI"/>
-              </a:rPr>
-              <a:t>▹</a:t>
+                <a:latin typeface="Arial"/>
+              </a:rPr>
+              <a:t>▪</a:t>
             </a:r>
           </a:p>
         </p:txBody>
@@ -14217,13 +14217,13 @@
               </a:lnSpc>
             </a:pPr>
             <a:r>
-              <a:rPr sz="2000" b="1" i="0">
+              <a:rPr sz="1800" b="1" i="0">
                 <a:solidFill>
                   <a:srgbClr val="F8FAFC"/>
                 </a:solidFill>
-                <a:latin typeface="Segoe UI"/>
-              </a:rPr>
-              <a:t>▹</a:t>
+                <a:latin typeface="Arial"/>
+              </a:rPr>
+              <a:t>▪</a:t>
             </a:r>
           </a:p>
         </p:txBody>
@@ -14339,13 +14339,13 @@
               </a:lnSpc>
             </a:pPr>
             <a:r>
-              <a:rPr sz="2000" b="1" i="0">
+              <a:rPr sz="1800" b="1" i="0">
                 <a:solidFill>
                   <a:srgbClr val="F8FAFC"/>
                 </a:solidFill>
-                <a:latin typeface="Segoe UI"/>
-              </a:rPr>
-              <a:t>▹</a:t>
+                <a:latin typeface="Arial"/>
+              </a:rPr>
+              <a:t>▪</a:t>
             </a:r>
           </a:p>
         </p:txBody>
@@ -14461,13 +14461,13 @@
               </a:lnSpc>
             </a:pPr>
             <a:r>
-              <a:rPr sz="2000" b="1" i="0">
+              <a:rPr sz="1800" b="1" i="0">
                 <a:solidFill>
                   <a:srgbClr val="F8FAFC"/>
                 </a:solidFill>
-                <a:latin typeface="Segoe UI"/>
-              </a:rPr>
-              <a:t>▹</a:t>
+                <a:latin typeface="Arial"/>
+              </a:rPr>
+              <a:t>▪</a:t>
             </a:r>
           </a:p>
         </p:txBody>
@@ -14761,13 +14761,13 @@
               </a:lnSpc>
             </a:pPr>
             <a:r>
-              <a:rPr sz="2000" b="1" i="0">
+              <a:rPr sz="1800" b="1" i="0">
                 <a:solidFill>
                   <a:srgbClr val="F8FAFC"/>
                 </a:solidFill>
-                <a:latin typeface="Segoe UI"/>
-              </a:rPr>
-              <a:t>▹</a:t>
+                <a:latin typeface="Arial"/>
+              </a:rPr>
+              <a:t>▪</a:t>
             </a:r>
           </a:p>
         </p:txBody>
@@ -14883,13 +14883,13 @@
               </a:lnSpc>
             </a:pPr>
             <a:r>
-              <a:rPr sz="2000" b="1" i="0">
+              <a:rPr sz="1800" b="1" i="0">
                 <a:solidFill>
                   <a:srgbClr val="F8FAFC"/>
                 </a:solidFill>
-                <a:latin typeface="Segoe UI"/>
-              </a:rPr>
-              <a:t>▹</a:t>
+                <a:latin typeface="Arial"/>
+              </a:rPr>
+              <a:t>▪</a:t>
             </a:r>
           </a:p>
         </p:txBody>
@@ -15005,13 +15005,13 @@
               </a:lnSpc>
             </a:pPr>
             <a:r>
-              <a:rPr sz="2000" b="1" i="0">
+              <a:rPr sz="1800" b="1" i="0">
                 <a:solidFill>
                   <a:srgbClr val="F8FAFC"/>
                 </a:solidFill>
-                <a:latin typeface="Segoe UI"/>
-              </a:rPr>
-              <a:t>▹</a:t>
+                <a:latin typeface="Arial"/>
+              </a:rPr>
+              <a:t>▪</a:t>
             </a:r>
           </a:p>
         </p:txBody>
@@ -15127,13 +15127,13 @@
               </a:lnSpc>
             </a:pPr>
             <a:r>
-              <a:rPr sz="2000" b="1" i="0">
+              <a:rPr sz="1800" b="1" i="0">
                 <a:solidFill>
                   <a:srgbClr val="F8FAFC"/>
                 </a:solidFill>
-                <a:latin typeface="Segoe UI"/>
-              </a:rPr>
-              <a:t>▹</a:t>
+                <a:latin typeface="Arial"/>
+              </a:rPr>
+              <a:t>▪</a:t>
             </a:r>
           </a:p>
         </p:txBody>
@@ -15427,13 +15427,13 @@
               </a:lnSpc>
             </a:pPr>
             <a:r>
-              <a:rPr sz="2000" b="1" i="0">
+              <a:rPr sz="1800" b="1" i="0">
                 <a:solidFill>
                   <a:srgbClr val="F8FAFC"/>
                 </a:solidFill>
-                <a:latin typeface="Segoe UI"/>
-              </a:rPr>
-              <a:t>▹</a:t>
+                <a:latin typeface="Arial"/>
+              </a:rPr>
+              <a:t>▪</a:t>
             </a:r>
           </a:p>
         </p:txBody>
@@ -15549,13 +15549,13 @@
               </a:lnSpc>
             </a:pPr>
             <a:r>
-              <a:rPr sz="2000" b="1" i="0">
+              <a:rPr sz="1800" b="1" i="0">
                 <a:solidFill>
                   <a:srgbClr val="F8FAFC"/>
                 </a:solidFill>
-                <a:latin typeface="Segoe UI"/>
-              </a:rPr>
-              <a:t>▹</a:t>
+                <a:latin typeface="Arial"/>
+              </a:rPr>
+              <a:t>▪</a:t>
             </a:r>
           </a:p>
         </p:txBody>
@@ -15671,13 +15671,13 @@
               </a:lnSpc>
             </a:pPr>
             <a:r>
-              <a:rPr sz="2000" b="1" i="0">
+              <a:rPr sz="1800" b="1" i="0">
                 <a:solidFill>
                   <a:srgbClr val="F8FAFC"/>
                 </a:solidFill>
-                <a:latin typeface="Segoe UI"/>
-              </a:rPr>
-              <a:t>▹</a:t>
+                <a:latin typeface="Arial"/>
+              </a:rPr>
+              <a:t>▪</a:t>
             </a:r>
           </a:p>
         </p:txBody>
@@ -15793,13 +15793,13 @@
               </a:lnSpc>
             </a:pPr>
             <a:r>
-              <a:rPr sz="2000" b="1" i="0">
+              <a:rPr sz="1800" b="1" i="0">
                 <a:solidFill>
                   <a:srgbClr val="F8FAFC"/>
                 </a:solidFill>
-                <a:latin typeface="Segoe UI"/>
-              </a:rPr>
-              <a:t>▹</a:t>
+                <a:latin typeface="Arial"/>
+              </a:rPr>
+              <a:t>▪</a:t>
             </a:r>
           </a:p>
         </p:txBody>
@@ -16093,13 +16093,13 @@
               </a:lnSpc>
             </a:pPr>
             <a:r>
-              <a:rPr sz="2000" b="1" i="0">
+              <a:rPr sz="1800" b="1" i="0">
                 <a:solidFill>
                   <a:srgbClr val="F8FAFC"/>
                 </a:solidFill>
-                <a:latin typeface="Segoe UI"/>
-              </a:rPr>
-              <a:t>▹</a:t>
+                <a:latin typeface="Arial"/>
+              </a:rPr>
+              <a:t>▪</a:t>
             </a:r>
           </a:p>
         </p:txBody>
@@ -16215,13 +16215,13 @@
               </a:lnSpc>
             </a:pPr>
             <a:r>
-              <a:rPr sz="2000" b="1" i="0">
+              <a:rPr sz="1800" b="1" i="0">
                 <a:solidFill>
                   <a:srgbClr val="F8FAFC"/>
                 </a:solidFill>
-                <a:latin typeface="Segoe UI"/>
-              </a:rPr>
-              <a:t>▹</a:t>
+                <a:latin typeface="Arial"/>
+              </a:rPr>
+              <a:t>▪</a:t>
             </a:r>
           </a:p>
         </p:txBody>
@@ -16337,13 +16337,13 @@
               </a:lnSpc>
             </a:pPr>
             <a:r>
-              <a:rPr sz="2000" b="1" i="0">
+              <a:rPr sz="1800" b="1" i="0">
                 <a:solidFill>
                   <a:srgbClr val="F8FAFC"/>
                 </a:solidFill>
-                <a:latin typeface="Segoe UI"/>
-              </a:rPr>
-              <a:t>▹</a:t>
+                <a:latin typeface="Arial"/>
+              </a:rPr>
+              <a:t>▪</a:t>
             </a:r>
           </a:p>
         </p:txBody>
@@ -16459,13 +16459,13 @@
               </a:lnSpc>
             </a:pPr>
             <a:r>
-              <a:rPr sz="2000" b="1" i="0">
+              <a:rPr sz="1800" b="1" i="0">
                 <a:solidFill>
                   <a:srgbClr val="F8FAFC"/>
                 </a:solidFill>
-                <a:latin typeface="Segoe UI"/>
-              </a:rPr>
-              <a:t>▹</a:t>
+                <a:latin typeface="Arial"/>
+              </a:rPr>
+              <a:t>▪</a:t>
             </a:r>
           </a:p>
         </p:txBody>
@@ -17038,13 +17038,13 @@
               </a:lnSpc>
             </a:pPr>
             <a:r>
-              <a:rPr sz="2000" b="1" i="0">
+              <a:rPr sz="1800" b="1" i="0">
                 <a:solidFill>
                   <a:srgbClr val="F8FAFC"/>
                 </a:solidFill>
-                <a:latin typeface="Segoe UI"/>
-              </a:rPr>
-              <a:t>⏱</a:t>
+                <a:latin typeface="Arial"/>
+              </a:rPr>
+              <a:t>●</a:t>
             </a:r>
           </a:p>
         </p:txBody>
@@ -17289,13 +17289,13 @@
               </a:lnSpc>
             </a:pPr>
             <a:r>
-              <a:rPr sz="2000" b="1" i="0">
+              <a:rPr sz="1800" b="1" i="0">
                 <a:solidFill>
                   <a:srgbClr val="F8FAFC"/>
                 </a:solidFill>
-                <a:latin typeface="Segoe UI"/>
-              </a:rPr>
-              <a:t>🎯</a:t>
+                <a:latin typeface="Arial"/>
+              </a:rPr>
+              <a:t>✓</a:t>
             </a:r>
           </a:p>
         </p:txBody>
@@ -17540,13 +17540,13 @@
               </a:lnSpc>
             </a:pPr>
             <a:r>
-              <a:rPr sz="2000" b="1" i="0">
+              <a:rPr sz="1800" b="1" i="0">
                 <a:solidFill>
                   <a:srgbClr val="F8FAFC"/>
                 </a:solidFill>
-                <a:latin typeface="Segoe UI"/>
-              </a:rPr>
-              <a:t>🌍</a:t>
+                <a:latin typeface="Arial"/>
+              </a:rPr>
+              <a:t>■</a:t>
             </a:r>
           </a:p>
         </p:txBody>
@@ -17791,13 +17791,13 @@
               </a:lnSpc>
             </a:pPr>
             <a:r>
-              <a:rPr sz="2000" b="1" i="0">
+              <a:rPr sz="1800" b="1" i="0">
                 <a:solidFill>
                   <a:srgbClr val="F8FAFC"/>
                 </a:solidFill>
-                <a:latin typeface="Segoe UI"/>
-              </a:rPr>
-              <a:t>📚</a:t>
+                <a:latin typeface="Arial"/>
+              </a:rPr>
+              <a:t>★</a:t>
             </a:r>
           </a:p>
         </p:txBody>
@@ -18314,11 +18314,11 @@
               </a:lnSpc>
             </a:pPr>
             <a:r>
-              <a:rPr sz="2000" b="1" i="0">
+              <a:rPr sz="1800" b="1" i="0">
                 <a:solidFill>
                   <a:srgbClr val="F8FAFC"/>
                 </a:solidFill>
-                <a:latin typeface="Segoe UI"/>
+                <a:latin typeface="Arial"/>
               </a:rPr>
               <a:t>1</a:t>
             </a:r>
@@ -18436,11 +18436,11 @@
               </a:lnSpc>
             </a:pPr>
             <a:r>
-              <a:rPr sz="2000" b="1" i="0">
+              <a:rPr sz="1800" b="1" i="0">
                 <a:solidFill>
                   <a:srgbClr val="F8FAFC"/>
                 </a:solidFill>
-                <a:latin typeface="Segoe UI"/>
+                <a:latin typeface="Arial"/>
               </a:rPr>
               <a:t>2</a:t>
             </a:r>
@@ -18558,11 +18558,11 @@
               </a:lnSpc>
             </a:pPr>
             <a:r>
-              <a:rPr sz="2000" b="1" i="0">
+              <a:rPr sz="1800" b="1" i="0">
                 <a:solidFill>
                   <a:srgbClr val="F8FAFC"/>
                 </a:solidFill>
-                <a:latin typeface="Segoe UI"/>
+                <a:latin typeface="Arial"/>
               </a:rPr>
               <a:t>3</a:t>
             </a:r>
@@ -18680,11 +18680,11 @@
               </a:lnSpc>
             </a:pPr>
             <a:r>
-              <a:rPr sz="2000" b="1" i="0">
+              <a:rPr sz="1800" b="1" i="0">
                 <a:solidFill>
                   <a:srgbClr val="F8FAFC"/>
                 </a:solidFill>
-                <a:latin typeface="Segoe UI"/>
+                <a:latin typeface="Arial"/>
               </a:rPr>
               <a:t>4</a:t>
             </a:r>
@@ -19425,13 +19425,13 @@
               </a:lnSpc>
             </a:pPr>
             <a:r>
-              <a:rPr sz="2000" b="1" i="0">
+              <a:rPr sz="1800" b="1" i="0">
                 <a:solidFill>
                   <a:srgbClr val="F8FAFC"/>
                 </a:solidFill>
-                <a:latin typeface="Segoe UI"/>
-              </a:rPr>
-              <a:t>▹</a:t>
+                <a:latin typeface="Arial"/>
+              </a:rPr>
+              <a:t>▪</a:t>
             </a:r>
           </a:p>
         </p:txBody>
@@ -19547,13 +19547,13 @@
               </a:lnSpc>
             </a:pPr>
             <a:r>
-              <a:rPr sz="2000" b="1" i="0">
+              <a:rPr sz="1800" b="1" i="0">
                 <a:solidFill>
                   <a:srgbClr val="F8FAFC"/>
                 </a:solidFill>
-                <a:latin typeface="Segoe UI"/>
-              </a:rPr>
-              <a:t>▹</a:t>
+                <a:latin typeface="Arial"/>
+              </a:rPr>
+              <a:t>▪</a:t>
             </a:r>
           </a:p>
         </p:txBody>
@@ -19669,13 +19669,13 @@
               </a:lnSpc>
             </a:pPr>
             <a:r>
-              <a:rPr sz="2000" b="1" i="0">
+              <a:rPr sz="1800" b="1" i="0">
                 <a:solidFill>
                   <a:srgbClr val="F8FAFC"/>
                 </a:solidFill>
-                <a:latin typeface="Segoe UI"/>
-              </a:rPr>
-              <a:t>▹</a:t>
+                <a:latin typeface="Arial"/>
+              </a:rPr>
+              <a:t>▪</a:t>
             </a:r>
           </a:p>
         </p:txBody>
@@ -19791,13 +19791,13 @@
               </a:lnSpc>
             </a:pPr>
             <a:r>
-              <a:rPr sz="2000" b="1" i="0">
+              <a:rPr sz="1800" b="1" i="0">
                 <a:solidFill>
                   <a:srgbClr val="F8FAFC"/>
                 </a:solidFill>
-                <a:latin typeface="Segoe UI"/>
-              </a:rPr>
-              <a:t>▹</a:t>
+                <a:latin typeface="Arial"/>
+              </a:rPr>
+              <a:t>▪</a:t>
             </a:r>
           </a:p>
         </p:txBody>
@@ -19913,13 +19913,13 @@
               </a:lnSpc>
             </a:pPr>
             <a:r>
-              <a:rPr sz="2000" b="1" i="0">
+              <a:rPr sz="1800" b="1" i="0">
                 <a:solidFill>
                   <a:srgbClr val="F8FAFC"/>
                 </a:solidFill>
-                <a:latin typeface="Segoe UI"/>
-              </a:rPr>
-              <a:t>▹</a:t>
+                <a:latin typeface="Arial"/>
+              </a:rPr>
+              <a:t>▪</a:t>
             </a:r>
           </a:p>
         </p:txBody>
@@ -20252,13 +20252,13 @@
               </a:lnSpc>
             </a:pPr>
             <a:r>
-              <a:rPr sz="2000" b="1" i="0">
+              <a:rPr sz="1800" b="1" i="0">
                 <a:solidFill>
                   <a:srgbClr val="F8FAFC"/>
                 </a:solidFill>
-                <a:latin typeface="Segoe UI"/>
-              </a:rPr>
-              <a:t>▹</a:t>
+                <a:latin typeface="Arial"/>
+              </a:rPr>
+              <a:t>▪</a:t>
             </a:r>
           </a:p>
         </p:txBody>
@@ -20374,13 +20374,13 @@
               </a:lnSpc>
             </a:pPr>
             <a:r>
-              <a:rPr sz="2000" b="1" i="0">
+              <a:rPr sz="1800" b="1" i="0">
                 <a:solidFill>
                   <a:srgbClr val="F8FAFC"/>
                 </a:solidFill>
-                <a:latin typeface="Segoe UI"/>
-              </a:rPr>
-              <a:t>▹</a:t>
+                <a:latin typeface="Arial"/>
+              </a:rPr>
+              <a:t>▪</a:t>
             </a:r>
           </a:p>
         </p:txBody>
@@ -20496,13 +20496,13 @@
               </a:lnSpc>
             </a:pPr>
             <a:r>
-              <a:rPr sz="2000" b="1" i="0">
+              <a:rPr sz="1800" b="1" i="0">
                 <a:solidFill>
                   <a:srgbClr val="F8FAFC"/>
                 </a:solidFill>
-                <a:latin typeface="Segoe UI"/>
-              </a:rPr>
-              <a:t>▹</a:t>
+                <a:latin typeface="Arial"/>
+              </a:rPr>
+              <a:t>▪</a:t>
             </a:r>
           </a:p>
         </p:txBody>
@@ -20618,13 +20618,13 @@
               </a:lnSpc>
             </a:pPr>
             <a:r>
-              <a:rPr sz="2000" b="1" i="0">
+              <a:rPr sz="1800" b="1" i="0">
                 <a:solidFill>
                   <a:srgbClr val="F8FAFC"/>
                 </a:solidFill>
-                <a:latin typeface="Segoe UI"/>
-              </a:rPr>
-              <a:t>▹</a:t>
+                <a:latin typeface="Arial"/>
+              </a:rPr>
+              <a:t>▪</a:t>
             </a:r>
           </a:p>
         </p:txBody>
@@ -20957,13 +20957,13 @@
               </a:lnSpc>
             </a:pPr>
             <a:r>
-              <a:rPr sz="2000" b="1" i="0">
+              <a:rPr sz="1800" b="1" i="0">
                 <a:solidFill>
                   <a:srgbClr val="F8FAFC"/>
                 </a:solidFill>
-                <a:latin typeface="Segoe UI"/>
-              </a:rPr>
-              <a:t>▹</a:t>
+                <a:latin typeface="Arial"/>
+              </a:rPr>
+              <a:t>▪</a:t>
             </a:r>
           </a:p>
         </p:txBody>
@@ -21079,13 +21079,13 @@
               </a:lnSpc>
             </a:pPr>
             <a:r>
-              <a:rPr sz="2000" b="1" i="0">
+              <a:rPr sz="1800" b="1" i="0">
                 <a:solidFill>
                   <a:srgbClr val="F8FAFC"/>
                 </a:solidFill>
-                <a:latin typeface="Segoe UI"/>
-              </a:rPr>
-              <a:t>▹</a:t>
+                <a:latin typeface="Arial"/>
+              </a:rPr>
+              <a:t>▪</a:t>
             </a:r>
           </a:p>
         </p:txBody>
@@ -21201,13 +21201,13 @@
               </a:lnSpc>
             </a:pPr>
             <a:r>
-              <a:rPr sz="2000" b="1" i="0">
+              <a:rPr sz="1800" b="1" i="0">
                 <a:solidFill>
                   <a:srgbClr val="F8FAFC"/>
                 </a:solidFill>
-                <a:latin typeface="Segoe UI"/>
-              </a:rPr>
-              <a:t>▹</a:t>
+                <a:latin typeface="Arial"/>
+              </a:rPr>
+              <a:t>▪</a:t>
             </a:r>
           </a:p>
         </p:txBody>
@@ -21323,13 +21323,13 @@
               </a:lnSpc>
             </a:pPr>
             <a:r>
-              <a:rPr sz="2000" b="1" i="0">
+              <a:rPr sz="1800" b="1" i="0">
                 <a:solidFill>
                   <a:srgbClr val="F8FAFC"/>
                 </a:solidFill>
-                <a:latin typeface="Segoe UI"/>
-              </a:rPr>
-              <a:t>▹</a:t>
+                <a:latin typeface="Arial"/>
+              </a:rPr>
+              <a:t>▪</a:t>
             </a:r>
           </a:p>
         </p:txBody>
@@ -21681,13 +21681,13 @@
               </a:lnSpc>
             </a:pPr>
             <a:r>
-              <a:rPr sz="2000" b="1" i="0">
+              <a:rPr sz="1800" b="1" i="0">
                 <a:solidFill>
                   <a:srgbClr val="F8FAFC"/>
                 </a:solidFill>
-                <a:latin typeface="Segoe UI"/>
-              </a:rPr>
-              <a:t>🚀</a:t>
+                <a:latin typeface="Arial"/>
+              </a:rPr>
+              <a:t>▲</a:t>
             </a:r>
           </a:p>
         </p:txBody>
@@ -21842,13 +21842,13 @@
               </a:lnSpc>
             </a:pPr>
             <a:r>
-              <a:rPr sz="2000" b="1" i="0">
+              <a:rPr sz="1800" b="1" i="0">
                 <a:solidFill>
                   <a:srgbClr val="F8FAFC"/>
                 </a:solidFill>
-                <a:latin typeface="Segoe UI"/>
-              </a:rPr>
-              <a:t>📏</a:t>
+                <a:latin typeface="Arial"/>
+              </a:rPr>
+              <a:t>■</a:t>
             </a:r>
           </a:p>
         </p:txBody>
@@ -22003,13 +22003,13 @@
               </a:lnSpc>
             </a:pPr>
             <a:r>
-              <a:rPr sz="2000" b="1" i="0">
+              <a:rPr sz="1800" b="1" i="0">
                 <a:solidFill>
                   <a:srgbClr val="F8FAFC"/>
                 </a:solidFill>
-                <a:latin typeface="Segoe UI"/>
-              </a:rPr>
-              <a:t>🤝</a:t>
+                <a:latin typeface="Arial"/>
+              </a:rPr>
+              <a:t>◆</a:t>
             </a:r>
           </a:p>
         </p:txBody>
@@ -22766,13 +22766,13 @@
               </a:lnSpc>
             </a:pPr>
             <a:r>
-              <a:rPr sz="2000" b="1" i="0">
+              <a:rPr sz="1800" b="1" i="0">
                 <a:solidFill>
                   <a:srgbClr val="F8FAFC"/>
                 </a:solidFill>
-                <a:latin typeface="Segoe UI"/>
-              </a:rPr>
-              <a:t>⏱</a:t>
+                <a:latin typeface="Arial"/>
+              </a:rPr>
+              <a:t>●</a:t>
             </a:r>
           </a:p>
         </p:txBody>
@@ -23022,13 +23022,13 @@
               </a:lnSpc>
             </a:pPr>
             <a:r>
-              <a:rPr sz="2000" b="1" i="0">
+              <a:rPr sz="1800" b="1" i="0">
                 <a:solidFill>
                   <a:srgbClr val="F8FAFC"/>
                 </a:solidFill>
-                <a:latin typeface="Segoe UI"/>
-              </a:rPr>
-              <a:t>🎯</a:t>
+                <a:latin typeface="Arial"/>
+              </a:rPr>
+              <a:t>◆</a:t>
             </a:r>
           </a:p>
         </p:txBody>
@@ -23278,13 +23278,13 @@
               </a:lnSpc>
             </a:pPr>
             <a:r>
-              <a:rPr sz="2000" b="1" i="0">
+              <a:rPr sz="1800" b="1" i="0">
                 <a:solidFill>
                   <a:srgbClr val="F8FAFC"/>
                 </a:solidFill>
-                <a:latin typeface="Segoe UI"/>
-              </a:rPr>
-              <a:t>🧩</a:t>
+                <a:latin typeface="Arial"/>
+              </a:rPr>
+              <a:t>■</a:t>
             </a:r>
           </a:p>
         </p:txBody>
@@ -23534,13 +23534,13 @@
               </a:lnSpc>
             </a:pPr>
             <a:r>
-              <a:rPr sz="2000" b="1" i="0">
+              <a:rPr sz="1800" b="1" i="0">
                 <a:solidFill>
                   <a:srgbClr val="F8FAFC"/>
                 </a:solidFill>
-                <a:latin typeface="Segoe UI"/>
-              </a:rPr>
-              <a:t>🌍</a:t>
+                <a:latin typeface="Arial"/>
+              </a:rPr>
+              <a:t>▲</a:t>
             </a:r>
           </a:p>
         </p:txBody>
@@ -24407,13 +24407,13 @@
               </a:lnSpc>
             </a:pPr>
             <a:r>
-              <a:rPr sz="2000" b="1" i="0">
+              <a:rPr sz="1800" b="1" i="0">
                 <a:solidFill>
                   <a:srgbClr val="F8FAFC"/>
                 </a:solidFill>
-                <a:latin typeface="Segoe UI"/>
-              </a:rPr>
-              <a:t>💡</a:t>
+                <a:latin typeface="Arial"/>
+              </a:rPr>
+              <a:t>★</a:t>
             </a:r>
           </a:p>
         </p:txBody>
@@ -24663,13 +24663,13 @@
               </a:lnSpc>
             </a:pPr>
             <a:r>
-              <a:rPr sz="2000" b="1" i="0">
+              <a:rPr sz="1800" b="1" i="0">
                 <a:solidFill>
                   <a:srgbClr val="F8FAFC"/>
                 </a:solidFill>
-                <a:latin typeface="Segoe UI"/>
-              </a:rPr>
-              <a:t>⚙️</a:t>
+                <a:latin typeface="Arial"/>
+              </a:rPr>
+              <a:t>●</a:t>
             </a:r>
           </a:p>
         </p:txBody>
@@ -24919,13 +24919,13 @@
               </a:lnSpc>
             </a:pPr>
             <a:r>
-              <a:rPr sz="2000" b="1" i="0">
+              <a:rPr sz="1800" b="1" i="0">
                 <a:solidFill>
                   <a:srgbClr val="F8FAFC"/>
                 </a:solidFill>
-                <a:latin typeface="Segoe UI"/>
-              </a:rPr>
-              <a:t>📐</a:t>
+                <a:latin typeface="Arial"/>
+              </a:rPr>
+              <a:t>3D</a:t>
             </a:r>
           </a:p>
         </p:txBody>
@@ -25175,13 +25175,13 @@
               </a:lnSpc>
             </a:pPr>
             <a:r>
-              <a:rPr sz="2000" b="1" i="0">
+              <a:rPr sz="1800" b="1" i="0">
                 <a:solidFill>
                   <a:srgbClr val="F8FAFC"/>
                 </a:solidFill>
-                <a:latin typeface="Segoe UI"/>
-              </a:rPr>
-              <a:t>🧠</a:t>
+                <a:latin typeface="Arial"/>
+              </a:rPr>
+              <a:t>◆</a:t>
             </a:r>
           </a:p>
         </p:txBody>
@@ -25431,13 +25431,13 @@
               </a:lnSpc>
             </a:pPr>
             <a:r>
-              <a:rPr sz="2000" b="1" i="0">
+              <a:rPr sz="1800" b="1" i="0">
                 <a:solidFill>
                   <a:srgbClr val="F8FAFC"/>
                 </a:solidFill>
-                <a:latin typeface="Segoe UI"/>
-              </a:rPr>
-              <a:t>🛒</a:t>
+                <a:latin typeface="Arial"/>
+              </a:rPr>
+              <a:t>■</a:t>
             </a:r>
           </a:p>
         </p:txBody>
@@ -25687,13 +25687,13 @@
               </a:lnSpc>
             </a:pPr>
             <a:r>
-              <a:rPr sz="2000" b="1" i="0">
+              <a:rPr sz="1800" b="1" i="0">
                 <a:solidFill>
                   <a:srgbClr val="F8FAFC"/>
                 </a:solidFill>
-                <a:latin typeface="Segoe UI"/>
-              </a:rPr>
-              <a:t>📊</a:t>
+                <a:latin typeface="Arial"/>
+              </a:rPr>
+              <a:t>▲</a:t>
             </a:r>
           </a:p>
         </p:txBody>
@@ -26344,13 +26344,13 @@
               </a:lnSpc>
             </a:pPr>
             <a:r>
-              <a:rPr sz="2000" b="1" i="0">
+              <a:rPr sz="1800" b="1" i="0">
                 <a:solidFill>
                   <a:srgbClr val="F8FAFC"/>
                 </a:solidFill>
-                <a:latin typeface="Segoe UI"/>
-              </a:rPr>
-              <a:t>🤖</a:t>
+                <a:latin typeface="Arial"/>
+              </a:rPr>
+              <a:t>AI</a:t>
             </a:r>
           </a:p>
         </p:txBody>
@@ -26600,13 +26600,13 @@
               </a:lnSpc>
             </a:pPr>
             <a:r>
-              <a:rPr sz="2000" b="1" i="0">
+              <a:rPr sz="1800" b="1" i="0">
                 <a:solidFill>
                   <a:srgbClr val="F8FAFC"/>
                 </a:solidFill>
-                <a:latin typeface="Segoe UI"/>
-              </a:rPr>
-              <a:t>⚙️</a:t>
+                <a:latin typeface="Arial"/>
+              </a:rPr>
+              <a:t>£</a:t>
             </a:r>
           </a:p>
         </p:txBody>
@@ -26856,13 +26856,13 @@
               </a:lnSpc>
             </a:pPr>
             <a:r>
-              <a:rPr sz="2000" b="1" i="0">
+              <a:rPr sz="1800" b="1" i="0">
                 <a:solidFill>
                   <a:srgbClr val="F8FAFC"/>
                 </a:solidFill>
-                <a:latin typeface="Segoe UI"/>
-              </a:rPr>
-              <a:t>✅</a:t>
+                <a:latin typeface="Arial"/>
+              </a:rPr>
+              <a:t>✓</a:t>
             </a:r>
           </a:p>
         </p:txBody>
@@ -29699,13 +29699,13 @@
               </a:lnSpc>
             </a:pPr>
             <a:r>
-              <a:rPr sz="2000" b="1" i="0">
+              <a:rPr sz="1800" b="1" i="0">
                 <a:solidFill>
                   <a:srgbClr val="F8FAFC"/>
                 </a:solidFill>
-                <a:latin typeface="Segoe UI"/>
-              </a:rPr>
-              <a:t>▹</a:t>
+                <a:latin typeface="Arial"/>
+              </a:rPr>
+              <a:t>▪</a:t>
             </a:r>
           </a:p>
         </p:txBody>
@@ -29860,13 +29860,13 @@
               </a:lnSpc>
             </a:pPr>
             <a:r>
-              <a:rPr sz="2000" b="1" i="0">
+              <a:rPr sz="1800" b="1" i="0">
                 <a:solidFill>
                   <a:srgbClr val="F8FAFC"/>
                 </a:solidFill>
-                <a:latin typeface="Segoe UI"/>
-              </a:rPr>
-              <a:t>▹</a:t>
+                <a:latin typeface="Arial"/>
+              </a:rPr>
+              <a:t>▪</a:t>
             </a:r>
           </a:p>
         </p:txBody>
@@ -30021,13 +30021,13 @@
               </a:lnSpc>
             </a:pPr>
             <a:r>
-              <a:rPr sz="2000" b="1" i="0">
+              <a:rPr sz="1800" b="1" i="0">
                 <a:solidFill>
                   <a:srgbClr val="F8FAFC"/>
                 </a:solidFill>
-                <a:latin typeface="Segoe UI"/>
-              </a:rPr>
-              <a:t>▹</a:t>
+                <a:latin typeface="Arial"/>
+              </a:rPr>
+              <a:t>▪</a:t>
             </a:r>
           </a:p>
         </p:txBody>
@@ -30182,13 +30182,13 @@
               </a:lnSpc>
             </a:pPr>
             <a:r>
-              <a:rPr sz="2000" b="1" i="0">
+              <a:rPr sz="1800" b="1" i="0">
                 <a:solidFill>
                   <a:srgbClr val="F8FAFC"/>
                 </a:solidFill>
-                <a:latin typeface="Segoe UI"/>
-              </a:rPr>
-              <a:t>▹</a:t>
+                <a:latin typeface="Arial"/>
+              </a:rPr>
+              <a:t>▪</a:t>
             </a:r>
           </a:p>
         </p:txBody>
@@ -31512,13 +31512,13 @@
               </a:lnSpc>
             </a:pPr>
             <a:r>
-              <a:rPr sz="2000" b="1" i="0">
+              <a:rPr sz="1800" b="1" i="0">
                 <a:solidFill>
                   <a:srgbClr val="F8FAFC"/>
                 </a:solidFill>
-                <a:latin typeface="Segoe UI"/>
-              </a:rPr>
-              <a:t>🧱</a:t>
+                <a:latin typeface="Arial"/>
+              </a:rPr>
+              <a:t>■</a:t>
             </a:r>
           </a:p>
         </p:txBody>
@@ -31768,13 +31768,13 @@
               </a:lnSpc>
             </a:pPr>
             <a:r>
-              <a:rPr sz="2000" b="1" i="0">
+              <a:rPr sz="1800" b="1" i="0">
                 <a:solidFill>
                   <a:srgbClr val="F8FAFC"/>
                 </a:solidFill>
-                <a:latin typeface="Segoe UI"/>
-              </a:rPr>
-              <a:t>⚙️</a:t>
+                <a:latin typeface="Arial"/>
+              </a:rPr>
+              <a:t>●</a:t>
             </a:r>
           </a:p>
         </p:txBody>
@@ -32024,13 +32024,13 @@
               </a:lnSpc>
             </a:pPr>
             <a:r>
-              <a:rPr sz="2000" b="1" i="0">
+              <a:rPr sz="1800" b="1" i="0">
                 <a:solidFill>
                   <a:srgbClr val="F8FAFC"/>
                 </a:solidFill>
-                <a:latin typeface="Segoe UI"/>
-              </a:rPr>
-              <a:t>🛠</a:t>
+                <a:latin typeface="Arial"/>
+              </a:rPr>
+              <a:t>▲</a:t>
             </a:r>
           </a:p>
         </p:txBody>
@@ -32280,13 +32280,13 @@
               </a:lnSpc>
             </a:pPr>
             <a:r>
-              <a:rPr sz="2000" b="1" i="0">
+              <a:rPr sz="1800" b="1" i="0">
                 <a:solidFill>
                   <a:srgbClr val="F8FAFC"/>
                 </a:solidFill>
-                <a:latin typeface="Segoe UI"/>
-              </a:rPr>
-              <a:t>🏭</a:t>
+                <a:latin typeface="Arial"/>
+              </a:rPr>
+              <a:t>◆</a:t>
             </a:r>
           </a:p>
         </p:txBody>
@@ -33425,13 +33425,13 @@
               </a:lnSpc>
             </a:pPr>
             <a:r>
-              <a:rPr sz="2000" b="1" i="0">
+              <a:rPr sz="1800" b="1" i="0">
                 <a:solidFill>
                   <a:srgbClr val="F8FAFC"/>
                 </a:solidFill>
-                <a:latin typeface="Segoe UI"/>
-              </a:rPr>
-              <a:t>📤</a:t>
+                <a:latin typeface="Arial"/>
+              </a:rPr>
+              <a:t>↑</a:t>
             </a:r>
           </a:p>
         </p:txBody>
@@ -33682,13 +33682,13 @@
               </a:lnSpc>
             </a:pPr>
             <a:r>
-              <a:rPr sz="2000" b="1" i="0">
+              <a:rPr sz="1800" b="1" i="0">
                 <a:solidFill>
                   <a:srgbClr val="F8FAFC"/>
                 </a:solidFill>
-                <a:latin typeface="Segoe UI"/>
-              </a:rPr>
-              <a:t>🔍</a:t>
+                <a:latin typeface="Arial"/>
+              </a:rPr>
+              <a:t>◆</a:t>
             </a:r>
           </a:p>
         </p:txBody>
@@ -33939,13 +33939,13 @@
               </a:lnSpc>
             </a:pPr>
             <a:r>
-              <a:rPr sz="2000" b="1" i="0">
+              <a:rPr sz="1800" b="1" i="0">
                 <a:solidFill>
                   <a:srgbClr val="F8FAFC"/>
                 </a:solidFill>
-                <a:latin typeface="Segoe UI"/>
-              </a:rPr>
-              <a:t>⚙️</a:t>
+                <a:latin typeface="Arial"/>
+              </a:rPr>
+              <a:t>●</a:t>
             </a:r>
           </a:p>
         </p:txBody>
@@ -34196,13 +34196,13 @@
               </a:lnSpc>
             </a:pPr>
             <a:r>
-              <a:rPr sz="2000" b="1" i="0">
+              <a:rPr sz="1800" b="1" i="0">
                 <a:solidFill>
                   <a:srgbClr val="F8FAFC"/>
                 </a:solidFill>
-                <a:latin typeface="Segoe UI"/>
-              </a:rPr>
-              <a:t>🧊</a:t>
+                <a:latin typeface="Arial"/>
+              </a:rPr>
+              <a:t>3D</a:t>
             </a:r>
           </a:p>
         </p:txBody>
@@ -34453,13 +34453,13 @@
               </a:lnSpc>
             </a:pPr>
             <a:r>
-              <a:rPr sz="2000" b="1" i="0">
+              <a:rPr sz="1800" b="1" i="0">
                 <a:solidFill>
                   <a:srgbClr val="F8FAFC"/>
                 </a:solidFill>
-                <a:latin typeface="Segoe UI"/>
-              </a:rPr>
-              <a:t>📈</a:t>
+                <a:latin typeface="Arial"/>
+              </a:rPr>
+              <a:t>▲</a:t>
             </a:r>
           </a:p>
         </p:txBody>
@@ -35345,11 +35345,11 @@
               </a:lnSpc>
             </a:pPr>
             <a:r>
-              <a:rPr sz="2000" b="1" i="0">
+              <a:rPr sz="1800" b="1" i="0">
                 <a:solidFill>
                   <a:srgbClr val="F8FAFC"/>
                 </a:solidFill>
-                <a:latin typeface="Segoe UI"/>
+                <a:latin typeface="Arial"/>
               </a:rPr>
               <a:t>✓</a:t>
             </a:r>
@@ -35467,11 +35467,11 @@
               </a:lnSpc>
             </a:pPr>
             <a:r>
-              <a:rPr sz="2000" b="1" i="0">
+              <a:rPr sz="1800" b="1" i="0">
                 <a:solidFill>
                   <a:srgbClr val="F8FAFC"/>
                 </a:solidFill>
-                <a:latin typeface="Segoe UI"/>
+                <a:latin typeface="Arial"/>
               </a:rPr>
               <a:t>✓</a:t>
             </a:r>
@@ -35589,11 +35589,11 @@
               </a:lnSpc>
             </a:pPr>
             <a:r>
-              <a:rPr sz="2000" b="1" i="0">
+              <a:rPr sz="1800" b="1" i="0">
                 <a:solidFill>
                   <a:srgbClr val="F8FAFC"/>
                 </a:solidFill>
-                <a:latin typeface="Segoe UI"/>
+                <a:latin typeface="Arial"/>
               </a:rPr>
               <a:t>✓</a:t>
             </a:r>
@@ -35711,11 +35711,11 @@
               </a:lnSpc>
             </a:pPr>
             <a:r>
-              <a:rPr sz="2000" b="1" i="0">
+              <a:rPr sz="1800" b="1" i="0">
                 <a:solidFill>
                   <a:srgbClr val="F8FAFC"/>
                 </a:solidFill>
-                <a:latin typeface="Segoe UI"/>
+                <a:latin typeface="Arial"/>
               </a:rPr>
               <a:t>✓</a:t>
             </a:r>

--- a/BrainSpark_Director_Presentation.pptx
+++ b/BrainSpark_Director_Presentation.pptx
@@ -122,260 +122,6 @@
     </a:lvl9pPr>
   </p:defaultTextStyle>
 </p:presentation>
-</file>
-
-<file path=ppt/charts/chart1.xml><?xml version="1.0" encoding="utf-8"?>
-<c:chartSpace xmlns:c="http://schemas.openxmlformats.org/drawingml/2006/chart" xmlns:a="http://schemas.openxmlformats.org/drawingml/2006/main" xmlns:r="http://schemas.openxmlformats.org/officeDocument/2006/relationships">
-  <c:date1904 val="0"/>
-  <c:chart>
-    <c:title>
-      <c:tx>
-        <c:rich>
-          <a:bodyPr/>
-          <a:lstStyle/>
-          <a:p>
-            <a:r>
-              <a:rPr sz="1300">
-                <a:solidFill>
-                  <a:srgbClr val="94A3B8"/>
-                </a:solidFill>
-              </a:rPr>
-              <a:t>Mean Absolute % Error</a:t>
-            </a:r>
-          </a:p>
-        </c:rich>
-      </c:tx>
-      <c:layout/>
-      <c:overlay val="0"/>
-    </c:title>
-    <c:autoTitleDeleted val="0"/>
-    <c:plotArea>
-      <c:barChart>
-        <c:barDir val="col"/>
-        <c:grouping val="clustered"/>
-        <c:ser>
-          <c:idx val="0"/>
-          <c:order val="0"/>
-          <c:tx>
-            <c:strRef>
-              <c:f>Sheet1!$B$1</c:f>
-              <c:strCache>
-                <c:ptCount val="1"/>
-                <c:pt idx="0">
-                  <c:v>Mass estimate (old)</c:v>
-                </c:pt>
-              </c:strCache>
-            </c:strRef>
-          </c:tx>
-          <c:spPr>
-            <a:solidFill>
-              <a:srgbClr val="64748B"/>
-            </a:solidFill>
-          </c:spPr>
-          <c:cat>
-            <c:strRef>
-              <c:f>Sheet1!$A$2:$A$3</c:f>
-              <c:strCache>
-                <c:ptCount val="2"/>
-                <c:pt idx="0">
-                  <c:v>Machining parts</c:v>
-                </c:pt>
-                <c:pt idx="1">
-                  <c:v>Stamping parts</c:v>
-                </c:pt>
-              </c:strCache>
-            </c:strRef>
-          </c:cat>
-          <c:val>
-            <c:numRef>
-              <c:f>Sheet1!$B$2:$B$3</c:f>
-              <c:numCache>
-                <c:formatCode>General</c:formatCode>
-                <c:ptCount val="2"/>
-                <c:pt idx="0">
-                  <c:v>34.5</c:v>
-                </c:pt>
-                <c:pt idx="1">
-                  <c:v>74.8</c:v>
-                </c:pt>
-              </c:numCache>
-            </c:numRef>
-          </c:val>
-        </c:ser>
-        <c:ser>
-          <c:idx val="1"/>
-          <c:order val="1"/>
-          <c:tx>
-            <c:strRef>
-              <c:f>Sheet1!$C$1</c:f>
-              <c:strCache>
-                <c:ptCount val="1"/>
-                <c:pt idx="0">
-                  <c:v>Feature-based (BrainSpark)</c:v>
-                </c:pt>
-              </c:strCache>
-            </c:strRef>
-          </c:tx>
-          <c:spPr>
-            <a:solidFill>
-              <a:srgbClr val="14B8A6"/>
-            </a:solidFill>
-          </c:spPr>
-          <c:cat>
-            <c:strRef>
-              <c:f>Sheet1!$A$2:$A$3</c:f>
-              <c:strCache>
-                <c:ptCount val="2"/>
-                <c:pt idx="0">
-                  <c:v>Machining parts</c:v>
-                </c:pt>
-                <c:pt idx="1">
-                  <c:v>Stamping parts</c:v>
-                </c:pt>
-              </c:strCache>
-            </c:strRef>
-          </c:cat>
-          <c:val>
-            <c:numRef>
-              <c:f>Sheet1!$C$2:$C$3</c:f>
-              <c:numCache>
-                <c:formatCode>General</c:formatCode>
-                <c:ptCount val="2"/>
-                <c:pt idx="0">
-                  <c:v>16.0</c:v>
-                </c:pt>
-                <c:pt idx="1">
-                  <c:v>38.9</c:v>
-                </c:pt>
-              </c:numCache>
-            </c:numRef>
-          </c:val>
-        </c:ser>
-        <c:dLbls>
-          <c:numFmt formatCode="0.0&quot;%&quot;" sourceLinked="0"/>
-          <c:txPr>
-            <a:bodyPr/>
-            <a:lstStyle/>
-            <a:p>
-              <a:pPr>
-                <a:defRPr sz="1100" b="1">
-                  <a:solidFill>
-                    <a:srgbClr val="F8FAFC"/>
-                  </a:solidFill>
-                </a:defRPr>
-              </a:pPr>
-            </a:p>
-          </c:txPr>
-          <c:dLblPos val="outEnd"/>
-          <c:showLegendKey val="0"/>
-          <c:showVal val="1"/>
-          <c:showCatName val="0"/>
-          <c:showSerName val="0"/>
-          <c:showPercent val="0"/>
-          <c:showBubbleSize val="0"/>
-          <c:showLeaderLines val="1"/>
-        </c:dLbls>
-        <c:gapWidth val="90"/>
-        <c:axId val="-2068027336"/>
-        <c:axId val="-2113994440"/>
-      </c:barChart>
-      <c:catAx>
-        <c:axId val="-2068027336"/>
-        <c:scaling>
-          <c:orientation val="minMax"/>
-        </c:scaling>
-        <c:delete val="0"/>
-        <c:axPos val="b"/>
-        <c:majorTickMark val="out"/>
-        <c:minorTickMark val="none"/>
-        <c:tickLblPos val="nextTo"/>
-        <c:txPr>
-          <a:bodyPr/>
-          <a:lstStyle/>
-          <a:p>
-            <a:pPr>
-              <a:defRPr sz="1200">
-                <a:solidFill>
-                  <a:srgbClr val="E2E8F0"/>
-                </a:solidFill>
-              </a:defRPr>
-            </a:pPr>
-          </a:p>
-        </c:txPr>
-        <c:crossAx val="-2113994440"/>
-        <c:crosses val="autoZero"/>
-        <c:auto val="1"/>
-        <c:lblAlgn val="ctr"/>
-        <c:lblOffset val="100"/>
-        <c:noMultiLvlLbl val="0"/>
-      </c:catAx>
-      <c:valAx>
-        <c:axId val="-2113994440"/>
-        <c:scaling/>
-        <c:delete val="0"/>
-        <c:axPos val="l"/>
-        <c:majorGridlines>
-          <c:spPr>
-            <a:ln>
-              <a:solidFill>
-                <a:srgbClr val="1E3A5F"/>
-              </a:solidFill>
-            </a:ln>
-          </c:spPr>
-        </c:majorGridlines>
-        <c:majorTickMark val="out"/>
-        <c:minorTickMark val="none"/>
-        <c:tickLblPos val="nextTo"/>
-        <c:txPr>
-          <a:bodyPr/>
-          <a:lstStyle/>
-          <a:p>
-            <a:pPr>
-              <a:defRPr>
-                <a:solidFill>
-                  <a:srgbClr val="94A3B8"/>
-                </a:solidFill>
-              </a:defRPr>
-            </a:pPr>
-          </a:p>
-        </c:txPr>
-        <c:crossAx val="-2068027336"/>
-        <c:crosses val="autoZero"/>
-      </c:valAx>
-    </c:plotArea>
-    <c:legend>
-      <c:legendPos val="b"/>
-      <c:overlay val="0"/>
-      <c:txPr>
-        <a:bodyPr/>
-        <a:lstStyle/>
-        <a:p>
-          <a:pPr>
-            <a:defRPr sz="1100">
-              <a:solidFill>
-                <a:srgbClr val="E2E8F0"/>
-              </a:solidFill>
-            </a:defRPr>
-          </a:pPr>
-        </a:p>
-      </c:txPr>
-    </c:legend>
-    <c:dispBlanksAs val="gap"/>
-  </c:chart>
-  <c:txPr>
-    <a:bodyPr/>
-    <a:lstStyle/>
-    <a:p>
-      <a:pPr>
-        <a:defRPr sz="1800"/>
-      </a:pPr>
-      <a:endParaRPr lang="en-US"/>
-    </a:p>
-  </c:txPr>
-  <c:externalData r:id="rId1">
-    <c:autoUpdate val="0"/>
-  </c:externalData>
-</c:chartSpace>
 </file>
 
 <file path=ppt/notesMasters/notesMaster1.xml><?xml version="1.0" encoding="utf-8"?>
@@ -6300,13 +6046,6 @@
             <a:noFill/>
           </a:ln>
           <a:effectLst/>
-          <a:effectLst>
-            <a:outerShdw blurRad="90000" dist="38000" dir="5400000" rotWithShape="0">
-              <a:srgbClr val="000000">
-                <a:alpha val="42000"/>
-              </a:srgbClr>
-            </a:outerShdw>
-          </a:effectLst>
         </p:spPr>
         <p:style>
           <a:lnRef idx="1">
@@ -6517,13 +6256,6 @@
             <a:noFill/>
           </a:ln>
           <a:effectLst/>
-          <a:effectLst>
-            <a:outerShdw blurRad="90000" dist="38000" dir="5400000" rotWithShape="0">
-              <a:srgbClr val="000000">
-                <a:alpha val="42000"/>
-              </a:srgbClr>
-            </a:outerShdw>
-          </a:effectLst>
         </p:spPr>
         <p:style>
           <a:lnRef idx="1">
@@ -6734,13 +6466,6 @@
             <a:noFill/>
           </a:ln>
           <a:effectLst/>
-          <a:effectLst>
-            <a:outerShdw blurRad="90000" dist="38000" dir="5400000" rotWithShape="0">
-              <a:srgbClr val="000000">
-                <a:alpha val="42000"/>
-              </a:srgbClr>
-            </a:outerShdw>
-          </a:effectLst>
         </p:spPr>
         <p:style>
           <a:lnRef idx="1">
@@ -6951,13 +6676,6 @@
             <a:noFill/>
           </a:ln>
           <a:effectLst/>
-          <a:effectLst>
-            <a:outerShdw blurRad="90000" dist="38000" dir="5400000" rotWithShape="0">
-              <a:srgbClr val="000000">
-                <a:alpha val="42000"/>
-              </a:srgbClr>
-            </a:outerShdw>
-          </a:effectLst>
         </p:spPr>
         <p:style>
           <a:lnRef idx="1">
@@ -7168,13 +6886,6 @@
             <a:noFill/>
           </a:ln>
           <a:effectLst/>
-          <a:effectLst>
-            <a:outerShdw blurRad="90000" dist="38000" dir="5400000" rotWithShape="0">
-              <a:srgbClr val="000000">
-                <a:alpha val="42000"/>
-              </a:srgbClr>
-            </a:outerShdw>
-          </a:effectLst>
         </p:spPr>
         <p:style>
           <a:lnRef idx="1">
@@ -7385,13 +7096,6 @@
             <a:noFill/>
           </a:ln>
           <a:effectLst/>
-          <a:effectLst>
-            <a:outerShdw blurRad="90000" dist="38000" dir="5400000" rotWithShape="0">
-              <a:srgbClr val="000000">
-                <a:alpha val="42000"/>
-              </a:srgbClr>
-            </a:outerShdw>
-          </a:effectLst>
         </p:spPr>
         <p:style>
           <a:lnRef idx="1">
@@ -8008,13 +7712,6 @@
             <a:noFill/>
           </a:ln>
           <a:effectLst/>
-          <a:effectLst>
-            <a:outerShdw blurRad="90000" dist="38000" dir="5400000" rotWithShape="0">
-              <a:srgbClr val="000000">
-                <a:alpha val="42000"/>
-              </a:srgbClr>
-            </a:outerShdw>
-          </a:effectLst>
         </p:spPr>
         <p:style>
           <a:lnRef idx="1">
@@ -8669,13 +8366,6 @@
             <a:noFill/>
           </a:ln>
           <a:effectLst/>
-          <a:effectLst>
-            <a:outerShdw blurRad="90000" dist="38000" dir="5400000" rotWithShape="0">
-              <a:srgbClr val="000000">
-                <a:alpha val="42000"/>
-              </a:srgbClr>
-            </a:outerShdw>
-          </a:effectLst>
         </p:spPr>
         <p:style>
           <a:lnRef idx="1">
@@ -9775,13 +9465,6 @@
             <a:noFill/>
           </a:ln>
           <a:effectLst/>
-          <a:effectLst>
-            <a:outerShdw blurRad="90000" dist="38000" dir="5400000" rotWithShape="0">
-              <a:srgbClr val="000000">
-                <a:alpha val="42000"/>
-              </a:srgbClr>
-            </a:outerShdw>
-          </a:effectLst>
         </p:spPr>
         <p:style>
           <a:lnRef idx="1">
@@ -10114,13 +9797,6 @@
             <a:noFill/>
           </a:ln>
           <a:effectLst/>
-          <a:effectLst>
-            <a:outerShdw blurRad="90000" dist="38000" dir="5400000" rotWithShape="0">
-              <a:srgbClr val="000000">
-                <a:alpha val="42000"/>
-              </a:srgbClr>
-            </a:outerShdw>
-          </a:effectLst>
         </p:spPr>
         <p:style>
           <a:lnRef idx="1">
@@ -10453,13 +10129,6 @@
             <a:noFill/>
           </a:ln>
           <a:effectLst/>
-          <a:effectLst>
-            <a:outerShdw blurRad="90000" dist="38000" dir="5400000" rotWithShape="0">
-              <a:srgbClr val="000000">
-                <a:alpha val="42000"/>
-              </a:srgbClr>
-            </a:outerShdw>
-          </a:effectLst>
         </p:spPr>
         <p:style>
           <a:lnRef idx="1">
@@ -10792,13 +10461,6 @@
             <a:noFill/>
           </a:ln>
           <a:effectLst/>
-          <a:effectLst>
-            <a:outerShdw blurRad="90000" dist="38000" dir="5400000" rotWithShape="0">
-              <a:srgbClr val="000000">
-                <a:alpha val="42000"/>
-              </a:srgbClr>
-            </a:outerShdw>
-          </a:effectLst>
         </p:spPr>
         <p:style>
           <a:lnRef idx="1">
@@ -11131,13 +10793,6 @@
             <a:noFill/>
           </a:ln>
           <a:effectLst/>
-          <a:effectLst>
-            <a:outerShdw blurRad="90000" dist="38000" dir="5400000" rotWithShape="0">
-              <a:srgbClr val="000000">
-                <a:alpha val="42000"/>
-              </a:srgbClr>
-            </a:outerShdw>
-          </a:effectLst>
         </p:spPr>
         <p:style>
           <a:lnRef idx="1">
@@ -11924,13 +11579,6 @@
             <a:noFill/>
           </a:ln>
           <a:effectLst/>
-          <a:effectLst>
-            <a:outerShdw blurRad="90000" dist="38000" dir="5400000" rotWithShape="0">
-              <a:srgbClr val="000000">
-                <a:alpha val="42000"/>
-              </a:srgbClr>
-            </a:outerShdw>
-          </a:effectLst>
         </p:spPr>
         <p:style>
           <a:lnRef idx="1">
@@ -12180,13 +11828,6 @@
             <a:noFill/>
           </a:ln>
           <a:effectLst/>
-          <a:effectLst>
-            <a:outerShdw blurRad="90000" dist="38000" dir="5400000" rotWithShape="0">
-              <a:srgbClr val="000000">
-                <a:alpha val="42000"/>
-              </a:srgbClr>
-            </a:outerShdw>
-          </a:effectLst>
         </p:spPr>
         <p:style>
           <a:lnRef idx="1">
@@ -12436,13 +12077,6 @@
             <a:noFill/>
           </a:ln>
           <a:effectLst/>
-          <a:effectLst>
-            <a:outerShdw blurRad="90000" dist="38000" dir="5400000" rotWithShape="0">
-              <a:srgbClr val="000000">
-                <a:alpha val="42000"/>
-              </a:srgbClr>
-            </a:outerShdw>
-          </a:effectLst>
         </p:spPr>
         <p:style>
           <a:lnRef idx="1">
@@ -12692,13 +12326,6 @@
             <a:noFill/>
           </a:ln>
           <a:effectLst/>
-          <a:effectLst>
-            <a:outerShdw blurRad="90000" dist="38000" dir="5400000" rotWithShape="0">
-              <a:srgbClr val="000000">
-                <a:alpha val="42000"/>
-              </a:srgbClr>
-            </a:outerShdw>
-          </a:effectLst>
         </p:spPr>
         <p:style>
           <a:lnRef idx="1">
@@ -12948,13 +12575,6 @@
             <a:noFill/>
           </a:ln>
           <a:effectLst/>
-          <a:effectLst>
-            <a:outerShdw blurRad="90000" dist="38000" dir="5400000" rotWithShape="0">
-              <a:srgbClr val="000000">
-                <a:alpha val="42000"/>
-              </a:srgbClr>
-            </a:outerShdw>
-          </a:effectLst>
         </p:spPr>
         <p:style>
           <a:lnRef idx="1">
@@ -13204,13 +12824,6 @@
             <a:noFill/>
           </a:ln>
           <a:effectLst/>
-          <a:effectLst>
-            <a:outerShdw blurRad="90000" dist="38000" dir="5400000" rotWithShape="0">
-              <a:srgbClr val="000000">
-                <a:alpha val="42000"/>
-              </a:srgbClr>
-            </a:outerShdw>
-          </a:effectLst>
         </p:spPr>
         <p:style>
           <a:lnRef idx="1">
@@ -13866,13 +13479,6 @@
             <a:noFill/>
           </a:ln>
           <a:effectLst/>
-          <a:effectLst>
-            <a:outerShdw blurRad="90000" dist="38000" dir="5400000" rotWithShape="0">
-              <a:srgbClr val="000000">
-                <a:alpha val="42000"/>
-              </a:srgbClr>
-            </a:outerShdw>
-          </a:effectLst>
         </p:spPr>
         <p:style>
           <a:lnRef idx="1">
@@ -14532,13 +14138,6 @@
             <a:noFill/>
           </a:ln>
           <a:effectLst/>
-          <a:effectLst>
-            <a:outerShdw blurRad="90000" dist="38000" dir="5400000" rotWithShape="0">
-              <a:srgbClr val="000000">
-                <a:alpha val="42000"/>
-              </a:srgbClr>
-            </a:outerShdw>
-          </a:effectLst>
         </p:spPr>
         <p:style>
           <a:lnRef idx="1">
@@ -15198,13 +14797,6 @@
             <a:noFill/>
           </a:ln>
           <a:effectLst/>
-          <a:effectLst>
-            <a:outerShdw blurRad="90000" dist="38000" dir="5400000" rotWithShape="0">
-              <a:srgbClr val="000000">
-                <a:alpha val="42000"/>
-              </a:srgbClr>
-            </a:outerShdw>
-          </a:effectLst>
         </p:spPr>
         <p:style>
           <a:lnRef idx="1">
@@ -15864,13 +15456,6 @@
             <a:noFill/>
           </a:ln>
           <a:effectLst/>
-          <a:effectLst>
-            <a:outerShdw blurRad="90000" dist="38000" dir="5400000" rotWithShape="0">
-              <a:srgbClr val="000000">
-                <a:alpha val="42000"/>
-              </a:srgbClr>
-            </a:outerShdw>
-          </a:effectLst>
         </p:spPr>
         <p:style>
           <a:lnRef idx="1">
@@ -16936,13 +16521,6 @@
             <a:noFill/>
           </a:ln>
           <a:effectLst/>
-          <a:effectLst>
-            <a:outerShdw blurRad="90000" dist="38000" dir="5400000" rotWithShape="0">
-              <a:srgbClr val="000000">
-                <a:alpha val="42000"/>
-              </a:srgbClr>
-            </a:outerShdw>
-          </a:effectLst>
         </p:spPr>
         <p:style>
           <a:lnRef idx="1">
@@ -17187,13 +16765,6 @@
             <a:noFill/>
           </a:ln>
           <a:effectLst/>
-          <a:effectLst>
-            <a:outerShdw blurRad="90000" dist="38000" dir="5400000" rotWithShape="0">
-              <a:srgbClr val="000000">
-                <a:alpha val="42000"/>
-              </a:srgbClr>
-            </a:outerShdw>
-          </a:effectLst>
         </p:spPr>
         <p:style>
           <a:lnRef idx="1">
@@ -17438,13 +17009,6 @@
             <a:noFill/>
           </a:ln>
           <a:effectLst/>
-          <a:effectLst>
-            <a:outerShdw blurRad="90000" dist="38000" dir="5400000" rotWithShape="0">
-              <a:srgbClr val="000000">
-                <a:alpha val="42000"/>
-              </a:srgbClr>
-            </a:outerShdw>
-          </a:effectLst>
         </p:spPr>
         <p:style>
           <a:lnRef idx="1">
@@ -17689,13 +17253,6 @@
             <a:noFill/>
           </a:ln>
           <a:effectLst/>
-          <a:effectLst>
-            <a:outerShdw blurRad="90000" dist="38000" dir="5400000" rotWithShape="0">
-              <a:srgbClr val="000000">
-                <a:alpha val="42000"/>
-              </a:srgbClr>
-            </a:outerShdw>
-          </a:effectLst>
         </p:spPr>
         <p:style>
           <a:lnRef idx="1">
@@ -19157,13 +18714,6 @@
             <a:noFill/>
           </a:ln>
           <a:effectLst/>
-          <a:effectLst>
-            <a:outerShdw blurRad="90000" dist="38000" dir="5400000" rotWithShape="0">
-              <a:srgbClr val="000000">
-                <a:alpha val="42000"/>
-              </a:srgbClr>
-            </a:outerShdw>
-          </a:effectLst>
         </p:spPr>
         <p:style>
           <a:lnRef idx="1">
@@ -19984,13 +19534,6 @@
             <a:noFill/>
           </a:ln>
           <a:effectLst/>
-          <a:effectLst>
-            <a:outerShdw blurRad="90000" dist="38000" dir="5400000" rotWithShape="0">
-              <a:srgbClr val="000000">
-                <a:alpha val="42000"/>
-              </a:srgbClr>
-            </a:outerShdw>
-          </a:effectLst>
         </p:spPr>
         <p:style>
           <a:lnRef idx="1">
@@ -20689,13 +20232,6 @@
             <a:noFill/>
           </a:ln>
           <a:effectLst/>
-          <a:effectLst>
-            <a:outerShdw blurRad="90000" dist="38000" dir="5400000" rotWithShape="0">
-              <a:srgbClr val="000000">
-                <a:alpha val="42000"/>
-              </a:srgbClr>
-            </a:outerShdw>
-          </a:effectLst>
         </p:spPr>
         <p:style>
           <a:lnRef idx="1">
@@ -22620,13 +22156,6 @@
             <a:noFill/>
           </a:ln>
           <a:effectLst/>
-          <a:effectLst>
-            <a:outerShdw blurRad="90000" dist="38000" dir="5400000" rotWithShape="0">
-              <a:srgbClr val="000000">
-                <a:alpha val="42000"/>
-              </a:srgbClr>
-            </a:outerShdw>
-          </a:effectLst>
         </p:spPr>
         <p:style>
           <a:lnRef idx="1">
@@ -22876,13 +22405,6 @@
             <a:noFill/>
           </a:ln>
           <a:effectLst/>
-          <a:effectLst>
-            <a:outerShdw blurRad="90000" dist="38000" dir="5400000" rotWithShape="0">
-              <a:srgbClr val="000000">
-                <a:alpha val="42000"/>
-              </a:srgbClr>
-            </a:outerShdw>
-          </a:effectLst>
         </p:spPr>
         <p:style>
           <a:lnRef idx="1">
@@ -23132,13 +22654,6 @@
             <a:noFill/>
           </a:ln>
           <a:effectLst/>
-          <a:effectLst>
-            <a:outerShdw blurRad="90000" dist="38000" dir="5400000" rotWithShape="0">
-              <a:srgbClr val="000000">
-                <a:alpha val="42000"/>
-              </a:srgbClr>
-            </a:outerShdw>
-          </a:effectLst>
         </p:spPr>
         <p:style>
           <a:lnRef idx="1">
@@ -23388,13 +22903,6 @@
             <a:noFill/>
           </a:ln>
           <a:effectLst/>
-          <a:effectLst>
-            <a:outerShdw blurRad="90000" dist="38000" dir="5400000" rotWithShape="0">
-              <a:srgbClr val="000000">
-                <a:alpha val="42000"/>
-              </a:srgbClr>
-            </a:outerShdw>
-          </a:effectLst>
         </p:spPr>
         <p:style>
           <a:lnRef idx="1">
@@ -24261,13 +23769,6 @@
             <a:noFill/>
           </a:ln>
           <a:effectLst/>
-          <a:effectLst>
-            <a:outerShdw blurRad="90000" dist="38000" dir="5400000" rotWithShape="0">
-              <a:srgbClr val="000000">
-                <a:alpha val="42000"/>
-              </a:srgbClr>
-            </a:outerShdw>
-          </a:effectLst>
         </p:spPr>
         <p:style>
           <a:lnRef idx="1">
@@ -24517,13 +24018,6 @@
             <a:noFill/>
           </a:ln>
           <a:effectLst/>
-          <a:effectLst>
-            <a:outerShdw blurRad="90000" dist="38000" dir="5400000" rotWithShape="0">
-              <a:srgbClr val="000000">
-                <a:alpha val="42000"/>
-              </a:srgbClr>
-            </a:outerShdw>
-          </a:effectLst>
         </p:spPr>
         <p:style>
           <a:lnRef idx="1">
@@ -24773,13 +24267,6 @@
             <a:noFill/>
           </a:ln>
           <a:effectLst/>
-          <a:effectLst>
-            <a:outerShdw blurRad="90000" dist="38000" dir="5400000" rotWithShape="0">
-              <a:srgbClr val="000000">
-                <a:alpha val="42000"/>
-              </a:srgbClr>
-            </a:outerShdw>
-          </a:effectLst>
         </p:spPr>
         <p:style>
           <a:lnRef idx="1">
@@ -25029,13 +24516,6 @@
             <a:noFill/>
           </a:ln>
           <a:effectLst/>
-          <a:effectLst>
-            <a:outerShdw blurRad="90000" dist="38000" dir="5400000" rotWithShape="0">
-              <a:srgbClr val="000000">
-                <a:alpha val="42000"/>
-              </a:srgbClr>
-            </a:outerShdw>
-          </a:effectLst>
         </p:spPr>
         <p:style>
           <a:lnRef idx="1">
@@ -25285,13 +24765,6 @@
             <a:noFill/>
           </a:ln>
           <a:effectLst/>
-          <a:effectLst>
-            <a:outerShdw blurRad="90000" dist="38000" dir="5400000" rotWithShape="0">
-              <a:srgbClr val="000000">
-                <a:alpha val="42000"/>
-              </a:srgbClr>
-            </a:outerShdw>
-          </a:effectLst>
         </p:spPr>
         <p:style>
           <a:lnRef idx="1">
@@ -25541,13 +25014,6 @@
             <a:noFill/>
           </a:ln>
           <a:effectLst/>
-          <a:effectLst>
-            <a:outerShdw blurRad="90000" dist="38000" dir="5400000" rotWithShape="0">
-              <a:srgbClr val="000000">
-                <a:alpha val="42000"/>
-              </a:srgbClr>
-            </a:outerShdw>
-          </a:effectLst>
         </p:spPr>
         <p:style>
           <a:lnRef idx="1">
@@ -26242,13 +25708,6 @@
             <a:noFill/>
           </a:ln>
           <a:effectLst/>
-          <a:effectLst>
-            <a:outerShdw blurRad="90000" dist="38000" dir="5400000" rotWithShape="0">
-              <a:srgbClr val="000000">
-                <a:alpha val="42000"/>
-              </a:srgbClr>
-            </a:outerShdw>
-          </a:effectLst>
         </p:spPr>
         <p:style>
           <a:lnRef idx="1">
@@ -26498,13 +25957,6 @@
             <a:noFill/>
           </a:ln>
           <a:effectLst/>
-          <a:effectLst>
-            <a:outerShdw blurRad="90000" dist="38000" dir="5400000" rotWithShape="0">
-              <a:srgbClr val="000000">
-                <a:alpha val="42000"/>
-              </a:srgbClr>
-            </a:outerShdw>
-          </a:effectLst>
         </p:spPr>
         <p:style>
           <a:lnRef idx="1">
@@ -26754,13 +26206,6 @@
             <a:noFill/>
           </a:ln>
           <a:effectLst/>
-          <a:effectLst>
-            <a:outerShdw blurRad="90000" dist="38000" dir="5400000" rotWithShape="0">
-              <a:srgbClr val="000000">
-                <a:alpha val="42000"/>
-              </a:srgbClr>
-            </a:outerShdw>
-          </a:effectLst>
         </p:spPr>
         <p:style>
           <a:lnRef idx="1">
@@ -27547,13 +26992,6 @@
             <a:noFill/>
           </a:ln>
           <a:effectLst/>
-          <a:effectLst>
-            <a:outerShdw blurRad="90000" dist="38000" dir="5400000" rotWithShape="0">
-              <a:srgbClr val="000000">
-                <a:alpha val="42000"/>
-              </a:srgbClr>
-            </a:outerShdw>
-          </a:effectLst>
         </p:spPr>
         <p:style>
           <a:lnRef idx="1">
@@ -27681,13 +27119,6 @@
             <a:noFill/>
           </a:ln>
           <a:effectLst/>
-          <a:effectLst>
-            <a:outerShdw blurRad="90000" dist="38000" dir="5400000" rotWithShape="0">
-              <a:srgbClr val="000000">
-                <a:alpha val="42000"/>
-              </a:srgbClr>
-            </a:outerShdw>
-          </a:effectLst>
         </p:spPr>
         <p:style>
           <a:lnRef idx="1">
@@ -27815,13 +27246,6 @@
             <a:noFill/>
           </a:ln>
           <a:effectLst/>
-          <a:effectLst>
-            <a:outerShdw blurRad="90000" dist="38000" dir="5400000" rotWithShape="0">
-              <a:srgbClr val="000000">
-                <a:alpha val="42000"/>
-              </a:srgbClr>
-            </a:outerShdw>
-          </a:effectLst>
         </p:spPr>
         <p:style>
           <a:lnRef idx="1">
@@ -27949,13 +27373,6 @@
             <a:noFill/>
           </a:ln>
           <a:effectLst/>
-          <a:effectLst>
-            <a:outerShdw blurRad="90000" dist="38000" dir="5400000" rotWithShape="0">
-              <a:srgbClr val="000000">
-                <a:alpha val="42000"/>
-              </a:srgbClr>
-            </a:outerShdw>
-          </a:effectLst>
         </p:spPr>
         <p:style>
           <a:lnRef idx="1">
@@ -28083,13 +27500,6 @@
             <a:noFill/>
           </a:ln>
           <a:effectLst/>
-          <a:effectLst>
-            <a:outerShdw blurRad="90000" dist="38000" dir="5400000" rotWithShape="0">
-              <a:srgbClr val="000000">
-                <a:alpha val="42000"/>
-              </a:srgbClr>
-            </a:outerShdw>
-          </a:effectLst>
         </p:spPr>
         <p:style>
           <a:lnRef idx="1">
@@ -28217,13 +27627,6 @@
             <a:noFill/>
           </a:ln>
           <a:effectLst/>
-          <a:effectLst>
-            <a:outerShdw blurRad="90000" dist="38000" dir="5400000" rotWithShape="0">
-              <a:srgbClr val="000000">
-                <a:alpha val="42000"/>
-              </a:srgbClr>
-            </a:outerShdw>
-          </a:effectLst>
         </p:spPr>
         <p:style>
           <a:lnRef idx="1">
@@ -28351,13 +27754,6 @@
             <a:noFill/>
           </a:ln>
           <a:effectLst/>
-          <a:effectLst>
-            <a:outerShdw blurRad="90000" dist="38000" dir="5400000" rotWithShape="0">
-              <a:srgbClr val="000000">
-                <a:alpha val="42000"/>
-              </a:srgbClr>
-            </a:outerShdw>
-          </a:effectLst>
         </p:spPr>
         <p:style>
           <a:lnRef idx="1">
@@ -28485,13 +27881,6 @@
             <a:noFill/>
           </a:ln>
           <a:effectLst/>
-          <a:effectLst>
-            <a:outerShdw blurRad="90000" dist="38000" dir="5400000" rotWithShape="0">
-              <a:srgbClr val="000000">
-                <a:alpha val="42000"/>
-              </a:srgbClr>
-            </a:outerShdw>
-          </a:effectLst>
         </p:spPr>
         <p:style>
           <a:lnRef idx="1">
@@ -28619,13 +28008,6 @@
             <a:noFill/>
           </a:ln>
           <a:effectLst/>
-          <a:effectLst>
-            <a:outerShdw blurRad="90000" dist="38000" dir="5400000" rotWithShape="0">
-              <a:srgbClr val="000000">
-                <a:alpha val="42000"/>
-              </a:srgbClr>
-            </a:outerShdw>
-          </a:effectLst>
         </p:spPr>
         <p:style>
           <a:lnRef idx="1">
@@ -28753,13 +28135,6 @@
             <a:noFill/>
           </a:ln>
           <a:effectLst/>
-          <a:effectLst>
-            <a:outerShdw blurRad="90000" dist="38000" dir="5400000" rotWithShape="0">
-              <a:srgbClr val="000000">
-                <a:alpha val="42000"/>
-              </a:srgbClr>
-            </a:outerShdw>
-          </a:effectLst>
         </p:spPr>
         <p:style>
           <a:lnRef idx="1">
@@ -28887,13 +28262,6 @@
             <a:noFill/>
           </a:ln>
           <a:effectLst/>
-          <a:effectLst>
-            <a:outerShdw blurRad="90000" dist="38000" dir="5400000" rotWithShape="0">
-              <a:srgbClr val="000000">
-                <a:alpha val="42000"/>
-              </a:srgbClr>
-            </a:outerShdw>
-          </a:effectLst>
         </p:spPr>
         <p:style>
           <a:lnRef idx="1">
@@ -29021,13 +28389,6 @@
             <a:noFill/>
           </a:ln>
           <a:effectLst/>
-          <a:effectLst>
-            <a:outerShdw blurRad="90000" dist="38000" dir="5400000" rotWithShape="0">
-              <a:srgbClr val="000000">
-                <a:alpha val="42000"/>
-              </a:srgbClr>
-            </a:outerShdw>
-          </a:effectLst>
         </p:spPr>
         <p:style>
           <a:lnRef idx="1">
@@ -30292,13 +29653,6 @@
             <a:noFill/>
           </a:ln>
           <a:effectLst/>
-          <a:effectLst>
-            <a:outerShdw blurRad="90000" dist="38000" dir="5400000" rotWithShape="0">
-              <a:srgbClr val="000000">
-                <a:alpha val="42000"/>
-              </a:srgbClr>
-            </a:outerShdw>
-          </a:effectLst>
         </p:spPr>
         <p:style>
           <a:lnRef idx="1">
@@ -31366,13 +30720,6 @@
             <a:noFill/>
           </a:ln>
           <a:effectLst/>
-          <a:effectLst>
-            <a:outerShdw blurRad="90000" dist="38000" dir="5400000" rotWithShape="0">
-              <a:srgbClr val="000000">
-                <a:alpha val="42000"/>
-              </a:srgbClr>
-            </a:outerShdw>
-          </a:effectLst>
         </p:spPr>
         <p:style>
           <a:lnRef idx="1">
@@ -31622,13 +30969,6 @@
             <a:noFill/>
           </a:ln>
           <a:effectLst/>
-          <a:effectLst>
-            <a:outerShdw blurRad="90000" dist="38000" dir="5400000" rotWithShape="0">
-              <a:srgbClr val="000000">
-                <a:alpha val="42000"/>
-              </a:srgbClr>
-            </a:outerShdw>
-          </a:effectLst>
         </p:spPr>
         <p:style>
           <a:lnRef idx="1">
@@ -31878,13 +31218,6 @@
             <a:noFill/>
           </a:ln>
           <a:effectLst/>
-          <a:effectLst>
-            <a:outerShdw blurRad="90000" dist="38000" dir="5400000" rotWithShape="0">
-              <a:srgbClr val="000000">
-                <a:alpha val="42000"/>
-              </a:srgbClr>
-            </a:outerShdw>
-          </a:effectLst>
         </p:spPr>
         <p:style>
           <a:lnRef idx="1">
@@ -32134,13 +31467,6 @@
             <a:noFill/>
           </a:ln>
           <a:effectLst/>
-          <a:effectLst>
-            <a:outerShdw blurRad="90000" dist="38000" dir="5400000" rotWithShape="0">
-              <a:srgbClr val="000000">
-                <a:alpha val="42000"/>
-              </a:srgbClr>
-            </a:outerShdw>
-          </a:effectLst>
         </p:spPr>
         <p:style>
           <a:lnRef idx="1">
@@ -33323,13 +32649,6 @@
             <a:noFill/>
           </a:ln>
           <a:effectLst/>
-          <a:effectLst>
-            <a:outerShdw blurRad="90000" dist="38000" dir="5400000" rotWithShape="0">
-              <a:srgbClr val="000000">
-                <a:alpha val="42000"/>
-              </a:srgbClr>
-            </a:outerShdw>
-          </a:effectLst>
         </p:spPr>
         <p:style>
           <a:lnRef idx="1">
@@ -33580,13 +32899,6 @@
             <a:noFill/>
           </a:ln>
           <a:effectLst/>
-          <a:effectLst>
-            <a:outerShdw blurRad="90000" dist="38000" dir="5400000" rotWithShape="0">
-              <a:srgbClr val="000000">
-                <a:alpha val="42000"/>
-              </a:srgbClr>
-            </a:outerShdw>
-          </a:effectLst>
         </p:spPr>
         <p:style>
           <a:lnRef idx="1">
@@ -33837,13 +33149,6 @@
             <a:noFill/>
           </a:ln>
           <a:effectLst/>
-          <a:effectLst>
-            <a:outerShdw blurRad="90000" dist="38000" dir="5400000" rotWithShape="0">
-              <a:srgbClr val="000000">
-                <a:alpha val="42000"/>
-              </a:srgbClr>
-            </a:outerShdw>
-          </a:effectLst>
         </p:spPr>
         <p:style>
           <a:lnRef idx="1">
@@ -34094,13 +33399,6 @@
             <a:noFill/>
           </a:ln>
           <a:effectLst/>
-          <a:effectLst>
-            <a:outerShdw blurRad="90000" dist="38000" dir="5400000" rotWithShape="0">
-              <a:srgbClr val="000000">
-                <a:alpha val="42000"/>
-              </a:srgbClr>
-            </a:outerShdw>
-          </a:effectLst>
         </p:spPr>
         <p:style>
           <a:lnRef idx="1">
@@ -34351,13 +33649,6 @@
             <a:noFill/>
           </a:ln>
           <a:effectLst/>
-          <a:effectLst>
-            <a:outerShdw blurRad="90000" dist="38000" dir="5400000" rotWithShape="0">
-              <a:srgbClr val="000000">
-                <a:alpha val="42000"/>
-              </a:srgbClr>
-            </a:outerShdw>
-          </a:effectLst>
         </p:spPr>
         <p:style>
           <a:lnRef idx="1">
@@ -35172,27 +34463,1039 @@
           </a:p>
         </p:txBody>
       </p:sp>
-      <p:graphicFrame>
-        <p:nvGraphicFramePr>
-          <p:cNvPr id="12" name="Chart 11"/>
-          <p:cNvGraphicFramePr>
-            <a:graphicFrameLocks noGrp="1"/>
-          </p:cNvGraphicFramePr>
-          <p:nvPr/>
-        </p:nvGraphicFramePr>
-        <p:xfrm>
-          <a:off x="640080" y="2057400"/>
-          <a:ext cx="6675120" cy="4023360"/>
-        </p:xfrm>
-        <a:graphic>
-          <a:graphicData uri="http://schemas.openxmlformats.org/drawingml/2006/chart">
-            <c:chart xmlns:c="http://schemas.openxmlformats.org/drawingml/2006/chart" r:id="rId2"/>
-          </a:graphicData>
-        </a:graphic>
-      </p:graphicFrame>
-      <p:sp>
-        <p:nvSpPr>
-          <p:cNvPr id="13" name="Rounded Rectangle 12"/>
+      <p:sp>
+        <p:nvSpPr>
+          <p:cNvPr id="12" name="Rectangle 11"/>
+          <p:cNvSpPr/>
+          <p:nvPr/>
+        </p:nvSpPr>
+        <p:spPr>
+          <a:xfrm>
+            <a:off x="1417320" y="5532120"/>
+            <a:ext cx="5806440" cy="9525"/>
+          </a:xfrm>
+          <a:prstGeom prst="rect">
+            <a:avLst/>
+          </a:prstGeom>
+          <a:solidFill>
+            <a:srgbClr val="1E3A5F"/>
+          </a:solidFill>
+          <a:ln>
+            <a:noFill/>
+          </a:ln>
+          <a:effectLst/>
+        </p:spPr>
+        <p:style>
+          <a:lnRef idx="1">
+            <a:schemeClr val="accent1"/>
+          </a:lnRef>
+          <a:fillRef idx="3">
+            <a:schemeClr val="accent1"/>
+          </a:fillRef>
+          <a:effectRef idx="2">
+            <a:schemeClr val="accent1"/>
+          </a:effectRef>
+          <a:fontRef idx="minor">
+            <a:schemeClr val="lt1"/>
+          </a:fontRef>
+        </p:style>
+        <p:txBody>
+          <a:bodyPr rtlCol="0" anchor="ctr"/>
+          <a:lstStyle/>
+          <a:p>
+            <a:pPr algn="ctr"/>
+          </a:p>
+        </p:txBody>
+      </p:sp>
+      <p:sp>
+        <p:nvSpPr>
+          <p:cNvPr id="13" name="TextBox 12"/>
+          <p:cNvSpPr txBox="1"/>
+          <p:nvPr/>
+        </p:nvSpPr>
+        <p:spPr>
+          <a:xfrm>
+            <a:off x="850392" y="5422392"/>
+            <a:ext cx="457200" cy="228600"/>
+          </a:xfrm>
+          <a:prstGeom prst="rect">
+            <a:avLst/>
+          </a:prstGeom>
+          <a:noFill/>
+        </p:spPr>
+        <p:txBody>
+          <a:bodyPr wrap="square" anchor="t" lIns="0" rIns="0" tIns="0" bIns="0">
+            <a:spAutoFit/>
+          </a:bodyPr>
+          <a:lstStyle/>
+          <a:p>
+            <a:pPr algn="r">
+              <a:lnSpc>
+                <a:spcPct val="100000"/>
+              </a:lnSpc>
+            </a:pPr>
+            <a:r>
+              <a:rPr sz="1000" b="0" i="0">
+                <a:solidFill>
+                  <a:srgbClr val="94A3B8"/>
+                </a:solidFill>
+                <a:latin typeface="Segoe UI"/>
+              </a:rPr>
+              <a:t>0</a:t>
+            </a:r>
+          </a:p>
+        </p:txBody>
+      </p:sp>
+      <p:sp>
+        <p:nvSpPr>
+          <p:cNvPr id="14" name="Rectangle 13"/>
+          <p:cNvSpPr/>
+          <p:nvPr/>
+        </p:nvSpPr>
+        <p:spPr>
+          <a:xfrm>
+            <a:off x="1417320" y="4754880"/>
+            <a:ext cx="5806440" cy="9525"/>
+          </a:xfrm>
+          <a:prstGeom prst="rect">
+            <a:avLst/>
+          </a:prstGeom>
+          <a:solidFill>
+            <a:srgbClr val="1E3A5F"/>
+          </a:solidFill>
+          <a:ln>
+            <a:noFill/>
+          </a:ln>
+          <a:effectLst/>
+        </p:spPr>
+        <p:style>
+          <a:lnRef idx="1">
+            <a:schemeClr val="accent1"/>
+          </a:lnRef>
+          <a:fillRef idx="3">
+            <a:schemeClr val="accent1"/>
+          </a:fillRef>
+          <a:effectRef idx="2">
+            <a:schemeClr val="accent1"/>
+          </a:effectRef>
+          <a:fontRef idx="minor">
+            <a:schemeClr val="lt1"/>
+          </a:fontRef>
+        </p:style>
+        <p:txBody>
+          <a:bodyPr rtlCol="0" anchor="ctr"/>
+          <a:lstStyle/>
+          <a:p>
+            <a:pPr algn="ctr"/>
+          </a:p>
+        </p:txBody>
+      </p:sp>
+      <p:sp>
+        <p:nvSpPr>
+          <p:cNvPr id="15" name="TextBox 14"/>
+          <p:cNvSpPr txBox="1"/>
+          <p:nvPr/>
+        </p:nvSpPr>
+        <p:spPr>
+          <a:xfrm>
+            <a:off x="850392" y="4645152"/>
+            <a:ext cx="457200" cy="228600"/>
+          </a:xfrm>
+          <a:prstGeom prst="rect">
+            <a:avLst/>
+          </a:prstGeom>
+          <a:noFill/>
+        </p:spPr>
+        <p:txBody>
+          <a:bodyPr wrap="square" anchor="t" lIns="0" rIns="0" tIns="0" bIns="0">
+            <a:spAutoFit/>
+          </a:bodyPr>
+          <a:lstStyle/>
+          <a:p>
+            <a:pPr algn="r">
+              <a:lnSpc>
+                <a:spcPct val="100000"/>
+              </a:lnSpc>
+            </a:pPr>
+            <a:r>
+              <a:rPr sz="1000" b="0" i="0">
+                <a:solidFill>
+                  <a:srgbClr val="94A3B8"/>
+                </a:solidFill>
+                <a:latin typeface="Segoe UI"/>
+              </a:rPr>
+              <a:t>20</a:t>
+            </a:r>
+          </a:p>
+        </p:txBody>
+      </p:sp>
+      <p:sp>
+        <p:nvSpPr>
+          <p:cNvPr id="16" name="Rectangle 15"/>
+          <p:cNvSpPr/>
+          <p:nvPr/>
+        </p:nvSpPr>
+        <p:spPr>
+          <a:xfrm>
+            <a:off x="1417320" y="3977640"/>
+            <a:ext cx="5806440" cy="9525"/>
+          </a:xfrm>
+          <a:prstGeom prst="rect">
+            <a:avLst/>
+          </a:prstGeom>
+          <a:solidFill>
+            <a:srgbClr val="1E3A5F"/>
+          </a:solidFill>
+          <a:ln>
+            <a:noFill/>
+          </a:ln>
+          <a:effectLst/>
+        </p:spPr>
+        <p:style>
+          <a:lnRef idx="1">
+            <a:schemeClr val="accent1"/>
+          </a:lnRef>
+          <a:fillRef idx="3">
+            <a:schemeClr val="accent1"/>
+          </a:fillRef>
+          <a:effectRef idx="2">
+            <a:schemeClr val="accent1"/>
+          </a:effectRef>
+          <a:fontRef idx="minor">
+            <a:schemeClr val="lt1"/>
+          </a:fontRef>
+        </p:style>
+        <p:txBody>
+          <a:bodyPr rtlCol="0" anchor="ctr"/>
+          <a:lstStyle/>
+          <a:p>
+            <a:pPr algn="ctr"/>
+          </a:p>
+        </p:txBody>
+      </p:sp>
+      <p:sp>
+        <p:nvSpPr>
+          <p:cNvPr id="17" name="TextBox 16"/>
+          <p:cNvSpPr txBox="1"/>
+          <p:nvPr/>
+        </p:nvSpPr>
+        <p:spPr>
+          <a:xfrm>
+            <a:off x="850392" y="3867912"/>
+            <a:ext cx="457200" cy="228600"/>
+          </a:xfrm>
+          <a:prstGeom prst="rect">
+            <a:avLst/>
+          </a:prstGeom>
+          <a:noFill/>
+        </p:spPr>
+        <p:txBody>
+          <a:bodyPr wrap="square" anchor="t" lIns="0" rIns="0" tIns="0" bIns="0">
+            <a:spAutoFit/>
+          </a:bodyPr>
+          <a:lstStyle/>
+          <a:p>
+            <a:pPr algn="r">
+              <a:lnSpc>
+                <a:spcPct val="100000"/>
+              </a:lnSpc>
+            </a:pPr>
+            <a:r>
+              <a:rPr sz="1000" b="0" i="0">
+                <a:solidFill>
+                  <a:srgbClr val="94A3B8"/>
+                </a:solidFill>
+                <a:latin typeface="Segoe UI"/>
+              </a:rPr>
+              <a:t>40</a:t>
+            </a:r>
+          </a:p>
+        </p:txBody>
+      </p:sp>
+      <p:sp>
+        <p:nvSpPr>
+          <p:cNvPr id="18" name="Rectangle 17"/>
+          <p:cNvSpPr/>
+          <p:nvPr/>
+        </p:nvSpPr>
+        <p:spPr>
+          <a:xfrm>
+            <a:off x="1417320" y="3200400"/>
+            <a:ext cx="5806440" cy="9525"/>
+          </a:xfrm>
+          <a:prstGeom prst="rect">
+            <a:avLst/>
+          </a:prstGeom>
+          <a:solidFill>
+            <a:srgbClr val="1E3A5F"/>
+          </a:solidFill>
+          <a:ln>
+            <a:noFill/>
+          </a:ln>
+          <a:effectLst/>
+        </p:spPr>
+        <p:style>
+          <a:lnRef idx="1">
+            <a:schemeClr val="accent1"/>
+          </a:lnRef>
+          <a:fillRef idx="3">
+            <a:schemeClr val="accent1"/>
+          </a:fillRef>
+          <a:effectRef idx="2">
+            <a:schemeClr val="accent1"/>
+          </a:effectRef>
+          <a:fontRef idx="minor">
+            <a:schemeClr val="lt1"/>
+          </a:fontRef>
+        </p:style>
+        <p:txBody>
+          <a:bodyPr rtlCol="0" anchor="ctr"/>
+          <a:lstStyle/>
+          <a:p>
+            <a:pPr algn="ctr"/>
+          </a:p>
+        </p:txBody>
+      </p:sp>
+      <p:sp>
+        <p:nvSpPr>
+          <p:cNvPr id="19" name="TextBox 18"/>
+          <p:cNvSpPr txBox="1"/>
+          <p:nvPr/>
+        </p:nvSpPr>
+        <p:spPr>
+          <a:xfrm>
+            <a:off x="850392" y="3090672"/>
+            <a:ext cx="457200" cy="228600"/>
+          </a:xfrm>
+          <a:prstGeom prst="rect">
+            <a:avLst/>
+          </a:prstGeom>
+          <a:noFill/>
+        </p:spPr>
+        <p:txBody>
+          <a:bodyPr wrap="square" anchor="t" lIns="0" rIns="0" tIns="0" bIns="0">
+            <a:spAutoFit/>
+          </a:bodyPr>
+          <a:lstStyle/>
+          <a:p>
+            <a:pPr algn="r">
+              <a:lnSpc>
+                <a:spcPct val="100000"/>
+              </a:lnSpc>
+            </a:pPr>
+            <a:r>
+              <a:rPr sz="1000" b="0" i="0">
+                <a:solidFill>
+                  <a:srgbClr val="94A3B8"/>
+                </a:solidFill>
+                <a:latin typeface="Segoe UI"/>
+              </a:rPr>
+              <a:t>60</a:t>
+            </a:r>
+          </a:p>
+        </p:txBody>
+      </p:sp>
+      <p:sp>
+        <p:nvSpPr>
+          <p:cNvPr id="20" name="Rectangle 19"/>
+          <p:cNvSpPr/>
+          <p:nvPr/>
+        </p:nvSpPr>
+        <p:spPr>
+          <a:xfrm>
+            <a:off x="1417320" y="2423160"/>
+            <a:ext cx="5806440" cy="9525"/>
+          </a:xfrm>
+          <a:prstGeom prst="rect">
+            <a:avLst/>
+          </a:prstGeom>
+          <a:solidFill>
+            <a:srgbClr val="1E3A5F"/>
+          </a:solidFill>
+          <a:ln>
+            <a:noFill/>
+          </a:ln>
+          <a:effectLst/>
+        </p:spPr>
+        <p:style>
+          <a:lnRef idx="1">
+            <a:schemeClr val="accent1"/>
+          </a:lnRef>
+          <a:fillRef idx="3">
+            <a:schemeClr val="accent1"/>
+          </a:fillRef>
+          <a:effectRef idx="2">
+            <a:schemeClr val="accent1"/>
+          </a:effectRef>
+          <a:fontRef idx="minor">
+            <a:schemeClr val="lt1"/>
+          </a:fontRef>
+        </p:style>
+        <p:txBody>
+          <a:bodyPr rtlCol="0" anchor="ctr"/>
+          <a:lstStyle/>
+          <a:p>
+            <a:pPr algn="ctr"/>
+          </a:p>
+        </p:txBody>
+      </p:sp>
+      <p:sp>
+        <p:nvSpPr>
+          <p:cNvPr id="21" name="TextBox 20"/>
+          <p:cNvSpPr txBox="1"/>
+          <p:nvPr/>
+        </p:nvSpPr>
+        <p:spPr>
+          <a:xfrm>
+            <a:off x="850392" y="2313432"/>
+            <a:ext cx="457200" cy="228600"/>
+          </a:xfrm>
+          <a:prstGeom prst="rect">
+            <a:avLst/>
+          </a:prstGeom>
+          <a:noFill/>
+        </p:spPr>
+        <p:txBody>
+          <a:bodyPr wrap="square" anchor="t" lIns="0" rIns="0" tIns="0" bIns="0">
+            <a:spAutoFit/>
+          </a:bodyPr>
+          <a:lstStyle/>
+          <a:p>
+            <a:pPr algn="r">
+              <a:lnSpc>
+                <a:spcPct val="100000"/>
+              </a:lnSpc>
+            </a:pPr>
+            <a:r>
+              <a:rPr sz="1000" b="0" i="0">
+                <a:solidFill>
+                  <a:srgbClr val="94A3B8"/>
+                </a:solidFill>
+                <a:latin typeface="Segoe UI"/>
+              </a:rPr>
+              <a:t>80</a:t>
+            </a:r>
+          </a:p>
+        </p:txBody>
+      </p:sp>
+      <p:sp>
+        <p:nvSpPr>
+          <p:cNvPr id="22" name="Rounded Rectangle 21"/>
+          <p:cNvSpPr/>
+          <p:nvPr/>
+        </p:nvSpPr>
+        <p:spPr>
+          <a:xfrm>
+            <a:off x="1965960" y="4191381"/>
+            <a:ext cx="822960" cy="1340739"/>
+          </a:xfrm>
+          <a:prstGeom prst="roundRect">
+            <a:avLst/>
+          </a:prstGeom>
+          <a:solidFill>
+            <a:srgbClr val="64748B"/>
+          </a:solidFill>
+          <a:ln>
+            <a:noFill/>
+          </a:ln>
+          <a:effectLst/>
+        </p:spPr>
+        <p:style>
+          <a:lnRef idx="1">
+            <a:schemeClr val="accent1"/>
+          </a:lnRef>
+          <a:fillRef idx="3">
+            <a:schemeClr val="accent1"/>
+          </a:fillRef>
+          <a:effectRef idx="2">
+            <a:schemeClr val="accent1"/>
+          </a:effectRef>
+          <a:fontRef idx="minor">
+            <a:schemeClr val="lt1"/>
+          </a:fontRef>
+        </p:style>
+        <p:txBody>
+          <a:bodyPr rtlCol="0" anchor="ctr"/>
+          <a:lstStyle/>
+          <a:p>
+            <a:pPr algn="ctr"/>
+          </a:p>
+        </p:txBody>
+      </p:sp>
+      <p:sp>
+        <p:nvSpPr>
+          <p:cNvPr id="23" name="TextBox 22"/>
+          <p:cNvSpPr txBox="1"/>
+          <p:nvPr/>
+        </p:nvSpPr>
+        <p:spPr>
+          <a:xfrm>
+            <a:off x="1828800" y="3862197"/>
+            <a:ext cx="1097280" cy="274320"/>
+          </a:xfrm>
+          <a:prstGeom prst="rect">
+            <a:avLst/>
+          </a:prstGeom>
+          <a:noFill/>
+        </p:spPr>
+        <p:txBody>
+          <a:bodyPr wrap="square" anchor="t" lIns="0" rIns="0" tIns="0" bIns="0">
+            <a:spAutoFit/>
+          </a:bodyPr>
+          <a:lstStyle/>
+          <a:p>
+            <a:pPr algn="ctr">
+              <a:lnSpc>
+                <a:spcPct val="100000"/>
+              </a:lnSpc>
+            </a:pPr>
+            <a:r>
+              <a:rPr sz="1200" b="1" i="0">
+                <a:solidFill>
+                  <a:srgbClr val="F8FAFC"/>
+                </a:solidFill>
+                <a:latin typeface="Segoe UI Semibold"/>
+              </a:rPr>
+              <a:t>34.5%</a:t>
+            </a:r>
+          </a:p>
+        </p:txBody>
+      </p:sp>
+      <p:sp>
+        <p:nvSpPr>
+          <p:cNvPr id="24" name="Rounded Rectangle 23"/>
+          <p:cNvSpPr/>
+          <p:nvPr/>
+        </p:nvSpPr>
+        <p:spPr>
+          <a:xfrm>
+            <a:off x="2926080" y="4910328"/>
+            <a:ext cx="822960" cy="621792"/>
+          </a:xfrm>
+          <a:prstGeom prst="roundRect">
+            <a:avLst/>
+          </a:prstGeom>
+          <a:solidFill>
+            <a:srgbClr val="14B8A6"/>
+          </a:solidFill>
+          <a:ln>
+            <a:noFill/>
+          </a:ln>
+          <a:effectLst/>
+        </p:spPr>
+        <p:style>
+          <a:lnRef idx="1">
+            <a:schemeClr val="accent1"/>
+          </a:lnRef>
+          <a:fillRef idx="3">
+            <a:schemeClr val="accent1"/>
+          </a:fillRef>
+          <a:effectRef idx="2">
+            <a:schemeClr val="accent1"/>
+          </a:effectRef>
+          <a:fontRef idx="minor">
+            <a:schemeClr val="lt1"/>
+          </a:fontRef>
+        </p:style>
+        <p:txBody>
+          <a:bodyPr rtlCol="0" anchor="ctr"/>
+          <a:lstStyle/>
+          <a:p>
+            <a:pPr algn="ctr"/>
+          </a:p>
+        </p:txBody>
+      </p:sp>
+      <p:sp>
+        <p:nvSpPr>
+          <p:cNvPr id="25" name="TextBox 24"/>
+          <p:cNvSpPr txBox="1"/>
+          <p:nvPr/>
+        </p:nvSpPr>
+        <p:spPr>
+          <a:xfrm>
+            <a:off x="2788920" y="4581144"/>
+            <a:ext cx="1097280" cy="274320"/>
+          </a:xfrm>
+          <a:prstGeom prst="rect">
+            <a:avLst/>
+          </a:prstGeom>
+          <a:noFill/>
+        </p:spPr>
+        <p:txBody>
+          <a:bodyPr wrap="square" anchor="t" lIns="0" rIns="0" tIns="0" bIns="0">
+            <a:spAutoFit/>
+          </a:bodyPr>
+          <a:lstStyle/>
+          <a:p>
+            <a:pPr algn="ctr">
+              <a:lnSpc>
+                <a:spcPct val="100000"/>
+              </a:lnSpc>
+            </a:pPr>
+            <a:r>
+              <a:rPr sz="1200" b="1" i="0">
+                <a:solidFill>
+                  <a:srgbClr val="F8FAFC"/>
+                </a:solidFill>
+                <a:latin typeface="Segoe UI Semibold"/>
+              </a:rPr>
+              <a:t>16.0%</a:t>
+            </a:r>
+          </a:p>
+        </p:txBody>
+      </p:sp>
+      <p:sp>
+        <p:nvSpPr>
+          <p:cNvPr id="26" name="Rounded Rectangle 25"/>
+          <p:cNvSpPr/>
+          <p:nvPr/>
+        </p:nvSpPr>
+        <p:spPr>
+          <a:xfrm>
+            <a:off x="4572000" y="2625243"/>
+            <a:ext cx="822960" cy="2906877"/>
+          </a:xfrm>
+          <a:prstGeom prst="roundRect">
+            <a:avLst/>
+          </a:prstGeom>
+          <a:solidFill>
+            <a:srgbClr val="64748B"/>
+          </a:solidFill>
+          <a:ln>
+            <a:noFill/>
+          </a:ln>
+          <a:effectLst/>
+        </p:spPr>
+        <p:style>
+          <a:lnRef idx="1">
+            <a:schemeClr val="accent1"/>
+          </a:lnRef>
+          <a:fillRef idx="3">
+            <a:schemeClr val="accent1"/>
+          </a:fillRef>
+          <a:effectRef idx="2">
+            <a:schemeClr val="accent1"/>
+          </a:effectRef>
+          <a:fontRef idx="minor">
+            <a:schemeClr val="lt1"/>
+          </a:fontRef>
+        </p:style>
+        <p:txBody>
+          <a:bodyPr rtlCol="0" anchor="ctr"/>
+          <a:lstStyle/>
+          <a:p>
+            <a:pPr algn="ctr"/>
+          </a:p>
+        </p:txBody>
+      </p:sp>
+      <p:sp>
+        <p:nvSpPr>
+          <p:cNvPr id="27" name="TextBox 26"/>
+          <p:cNvSpPr txBox="1"/>
+          <p:nvPr/>
+        </p:nvSpPr>
+        <p:spPr>
+          <a:xfrm>
+            <a:off x="4434840" y="2296059"/>
+            <a:ext cx="1097280" cy="274320"/>
+          </a:xfrm>
+          <a:prstGeom prst="rect">
+            <a:avLst/>
+          </a:prstGeom>
+          <a:noFill/>
+        </p:spPr>
+        <p:txBody>
+          <a:bodyPr wrap="square" anchor="t" lIns="0" rIns="0" tIns="0" bIns="0">
+            <a:spAutoFit/>
+          </a:bodyPr>
+          <a:lstStyle/>
+          <a:p>
+            <a:pPr algn="ctr">
+              <a:lnSpc>
+                <a:spcPct val="100000"/>
+              </a:lnSpc>
+            </a:pPr>
+            <a:r>
+              <a:rPr sz="1200" b="1" i="0">
+                <a:solidFill>
+                  <a:srgbClr val="F8FAFC"/>
+                </a:solidFill>
+                <a:latin typeface="Segoe UI Semibold"/>
+              </a:rPr>
+              <a:t>74.8%</a:t>
+            </a:r>
+          </a:p>
+        </p:txBody>
+      </p:sp>
+      <p:sp>
+        <p:nvSpPr>
+          <p:cNvPr id="28" name="Rounded Rectangle 27"/>
+          <p:cNvSpPr/>
+          <p:nvPr/>
+        </p:nvSpPr>
+        <p:spPr>
+          <a:xfrm>
+            <a:off x="5532120" y="4020389"/>
+            <a:ext cx="822960" cy="1511731"/>
+          </a:xfrm>
+          <a:prstGeom prst="roundRect">
+            <a:avLst/>
+          </a:prstGeom>
+          <a:solidFill>
+            <a:srgbClr val="14B8A6"/>
+          </a:solidFill>
+          <a:ln>
+            <a:noFill/>
+          </a:ln>
+          <a:effectLst/>
+        </p:spPr>
+        <p:style>
+          <a:lnRef idx="1">
+            <a:schemeClr val="accent1"/>
+          </a:lnRef>
+          <a:fillRef idx="3">
+            <a:schemeClr val="accent1"/>
+          </a:fillRef>
+          <a:effectRef idx="2">
+            <a:schemeClr val="accent1"/>
+          </a:effectRef>
+          <a:fontRef idx="minor">
+            <a:schemeClr val="lt1"/>
+          </a:fontRef>
+        </p:style>
+        <p:txBody>
+          <a:bodyPr rtlCol="0" anchor="ctr"/>
+          <a:lstStyle/>
+          <a:p>
+            <a:pPr algn="ctr"/>
+          </a:p>
+        </p:txBody>
+      </p:sp>
+      <p:sp>
+        <p:nvSpPr>
+          <p:cNvPr id="29" name="TextBox 28"/>
+          <p:cNvSpPr txBox="1"/>
+          <p:nvPr/>
+        </p:nvSpPr>
+        <p:spPr>
+          <a:xfrm>
+            <a:off x="5394960" y="3691205"/>
+            <a:ext cx="1097280" cy="274320"/>
+          </a:xfrm>
+          <a:prstGeom prst="rect">
+            <a:avLst/>
+          </a:prstGeom>
+          <a:noFill/>
+        </p:spPr>
+        <p:txBody>
+          <a:bodyPr wrap="square" anchor="t" lIns="0" rIns="0" tIns="0" bIns="0">
+            <a:spAutoFit/>
+          </a:bodyPr>
+          <a:lstStyle/>
+          <a:p>
+            <a:pPr algn="ctr">
+              <a:lnSpc>
+                <a:spcPct val="100000"/>
+              </a:lnSpc>
+            </a:pPr>
+            <a:r>
+              <a:rPr sz="1200" b="1" i="0">
+                <a:solidFill>
+                  <a:srgbClr val="F8FAFC"/>
+                </a:solidFill>
+                <a:latin typeface="Segoe UI Semibold"/>
+              </a:rPr>
+              <a:t>38.9%</a:t>
+            </a:r>
+          </a:p>
+        </p:txBody>
+      </p:sp>
+      <p:sp>
+        <p:nvSpPr>
+          <p:cNvPr id="30" name="TextBox 29"/>
+          <p:cNvSpPr txBox="1"/>
+          <p:nvPr/>
+        </p:nvSpPr>
+        <p:spPr>
+          <a:xfrm>
+            <a:off x="1737360" y="5641848"/>
+            <a:ext cx="2148840" cy="320040"/>
+          </a:xfrm>
+          <a:prstGeom prst="rect">
+            <a:avLst/>
+          </a:prstGeom>
+          <a:noFill/>
+        </p:spPr>
+        <p:txBody>
+          <a:bodyPr wrap="square" anchor="t" lIns="0" rIns="0" tIns="0" bIns="0">
+            <a:spAutoFit/>
+          </a:bodyPr>
+          <a:lstStyle/>
+          <a:p>
+            <a:pPr algn="ctr">
+              <a:lnSpc>
+                <a:spcPct val="100000"/>
+              </a:lnSpc>
+            </a:pPr>
+            <a:r>
+              <a:rPr sz="1250" b="1" i="0">
+                <a:solidFill>
+                  <a:srgbClr val="E2E8F0"/>
+                </a:solidFill>
+                <a:latin typeface="Segoe UI Semibold"/>
+              </a:rPr>
+              <a:t>Machining parts</a:t>
+            </a:r>
+          </a:p>
+        </p:txBody>
+      </p:sp>
+      <p:sp>
+        <p:nvSpPr>
+          <p:cNvPr id="31" name="TextBox 30"/>
+          <p:cNvSpPr txBox="1"/>
+          <p:nvPr/>
+        </p:nvSpPr>
+        <p:spPr>
+          <a:xfrm>
+            <a:off x="4343400" y="5641848"/>
+            <a:ext cx="2148840" cy="320040"/>
+          </a:xfrm>
+          <a:prstGeom prst="rect">
+            <a:avLst/>
+          </a:prstGeom>
+          <a:noFill/>
+        </p:spPr>
+        <p:txBody>
+          <a:bodyPr wrap="square" anchor="t" lIns="0" rIns="0" tIns="0" bIns="0">
+            <a:spAutoFit/>
+          </a:bodyPr>
+          <a:lstStyle/>
+          <a:p>
+            <a:pPr algn="ctr">
+              <a:lnSpc>
+                <a:spcPct val="100000"/>
+              </a:lnSpc>
+            </a:pPr>
+            <a:r>
+              <a:rPr sz="1250" b="1" i="0">
+                <a:solidFill>
+                  <a:srgbClr val="E2E8F0"/>
+                </a:solidFill>
+                <a:latin typeface="Segoe UI Semibold"/>
+              </a:rPr>
+              <a:t>Stamping parts</a:t>
+            </a:r>
+          </a:p>
+        </p:txBody>
+      </p:sp>
+      <p:sp>
+        <p:nvSpPr>
+          <p:cNvPr id="32" name="TextBox 31"/>
+          <p:cNvSpPr txBox="1"/>
+          <p:nvPr/>
+        </p:nvSpPr>
+        <p:spPr>
+          <a:xfrm>
+            <a:off x="850392" y="2039112"/>
+            <a:ext cx="5943600" cy="274320"/>
+          </a:xfrm>
+          <a:prstGeom prst="rect">
+            <a:avLst/>
+          </a:prstGeom>
+          <a:noFill/>
+        </p:spPr>
+        <p:txBody>
+          <a:bodyPr wrap="square" anchor="t" lIns="0" rIns="0" tIns="0" bIns="0">
+            <a:spAutoFit/>
+          </a:bodyPr>
+          <a:lstStyle/>
+          <a:p>
+            <a:pPr algn="l">
+              <a:lnSpc>
+                <a:spcPct val="100000"/>
+              </a:lnSpc>
+            </a:pPr>
+            <a:r>
+              <a:rPr sz="1200" b="0" i="0">
+                <a:solidFill>
+                  <a:srgbClr val="94A3B8"/>
+                </a:solidFill>
+                <a:latin typeface="Segoe UI"/>
+              </a:rPr>
+              <a:t>Mean Absolute % Error</a:t>
+            </a:r>
+          </a:p>
+        </p:txBody>
+      </p:sp>
+      <p:sp>
+        <p:nvSpPr>
+          <p:cNvPr id="33" name="Rectangle 32"/>
+          <p:cNvSpPr/>
+          <p:nvPr/>
+        </p:nvSpPr>
+        <p:spPr>
+          <a:xfrm>
+            <a:off x="1783080" y="6053328"/>
+            <a:ext cx="256032" cy="182880"/>
+          </a:xfrm>
+          <a:prstGeom prst="rect">
+            <a:avLst/>
+          </a:prstGeom>
+          <a:solidFill>
+            <a:srgbClr val="64748B"/>
+          </a:solidFill>
+          <a:ln>
+            <a:noFill/>
+          </a:ln>
+          <a:effectLst/>
+        </p:spPr>
+        <p:style>
+          <a:lnRef idx="1">
+            <a:schemeClr val="accent1"/>
+          </a:lnRef>
+          <a:fillRef idx="3">
+            <a:schemeClr val="accent1"/>
+          </a:fillRef>
+          <a:effectRef idx="2">
+            <a:schemeClr val="accent1"/>
+          </a:effectRef>
+          <a:fontRef idx="minor">
+            <a:schemeClr val="lt1"/>
+          </a:fontRef>
+        </p:style>
+        <p:txBody>
+          <a:bodyPr rtlCol="0" anchor="ctr"/>
+          <a:lstStyle/>
+          <a:p>
+            <a:pPr algn="ctr"/>
+          </a:p>
+        </p:txBody>
+      </p:sp>
+      <p:sp>
+        <p:nvSpPr>
+          <p:cNvPr id="34" name="TextBox 33"/>
+          <p:cNvSpPr txBox="1"/>
+          <p:nvPr/>
+        </p:nvSpPr>
+        <p:spPr>
+          <a:xfrm>
+            <a:off x="2121408" y="6007608"/>
+            <a:ext cx="1920240" cy="274320"/>
+          </a:xfrm>
+          <a:prstGeom prst="rect">
+            <a:avLst/>
+          </a:prstGeom>
+          <a:noFill/>
+        </p:spPr>
+        <p:txBody>
+          <a:bodyPr wrap="square" anchor="t" lIns="0" rIns="0" tIns="0" bIns="0">
+            <a:spAutoFit/>
+          </a:bodyPr>
+          <a:lstStyle/>
+          <a:p>
+            <a:pPr algn="l">
+              <a:lnSpc>
+                <a:spcPct val="100000"/>
+              </a:lnSpc>
+            </a:pPr>
+            <a:r>
+              <a:rPr sz="1100" b="0" i="0">
+                <a:solidFill>
+                  <a:srgbClr val="94A3B8"/>
+                </a:solidFill>
+                <a:latin typeface="Segoe UI"/>
+              </a:rPr>
+              <a:t>Mass estimate (old)</a:t>
+            </a:r>
+          </a:p>
+        </p:txBody>
+      </p:sp>
+      <p:sp>
+        <p:nvSpPr>
+          <p:cNvPr id="35" name="Rectangle 34"/>
+          <p:cNvSpPr/>
+          <p:nvPr/>
+        </p:nvSpPr>
+        <p:spPr>
+          <a:xfrm>
+            <a:off x="4160520" y="6053328"/>
+            <a:ext cx="256032" cy="182880"/>
+          </a:xfrm>
+          <a:prstGeom prst="rect">
+            <a:avLst/>
+          </a:prstGeom>
+          <a:solidFill>
+            <a:srgbClr val="14B8A6"/>
+          </a:solidFill>
+          <a:ln>
+            <a:noFill/>
+          </a:ln>
+          <a:effectLst/>
+        </p:spPr>
+        <p:style>
+          <a:lnRef idx="1">
+            <a:schemeClr val="accent1"/>
+          </a:lnRef>
+          <a:fillRef idx="3">
+            <a:schemeClr val="accent1"/>
+          </a:fillRef>
+          <a:effectRef idx="2">
+            <a:schemeClr val="accent1"/>
+          </a:effectRef>
+          <a:fontRef idx="minor">
+            <a:schemeClr val="lt1"/>
+          </a:fontRef>
+        </p:style>
+        <p:txBody>
+          <a:bodyPr rtlCol="0" anchor="ctr"/>
+          <a:lstStyle/>
+          <a:p>
+            <a:pPr algn="ctr"/>
+          </a:p>
+        </p:txBody>
+      </p:sp>
+      <p:sp>
+        <p:nvSpPr>
+          <p:cNvPr id="36" name="TextBox 35"/>
+          <p:cNvSpPr txBox="1"/>
+          <p:nvPr/>
+        </p:nvSpPr>
+        <p:spPr>
+          <a:xfrm>
+            <a:off x="4498848" y="6007608"/>
+            <a:ext cx="2743200" cy="274320"/>
+          </a:xfrm>
+          <a:prstGeom prst="rect">
+            <a:avLst/>
+          </a:prstGeom>
+          <a:noFill/>
+        </p:spPr>
+        <p:txBody>
+          <a:bodyPr wrap="square" anchor="t" lIns="0" rIns="0" tIns="0" bIns="0">
+            <a:spAutoFit/>
+          </a:bodyPr>
+          <a:lstStyle/>
+          <a:p>
+            <a:pPr algn="l">
+              <a:lnSpc>
+                <a:spcPct val="100000"/>
+              </a:lnSpc>
+            </a:pPr>
+            <a:r>
+              <a:rPr sz="1100" b="0" i="0">
+                <a:solidFill>
+                  <a:srgbClr val="E2E8F0"/>
+                </a:solidFill>
+                <a:latin typeface="Segoe UI"/>
+              </a:rPr>
+              <a:t>Feature-based (BrainSpark)</a:t>
+            </a:r>
+          </a:p>
+        </p:txBody>
+      </p:sp>
+      <p:sp>
+        <p:nvSpPr>
+          <p:cNvPr id="37" name="Rounded Rectangle 36"/>
           <p:cNvSpPr/>
           <p:nvPr/>
         </p:nvSpPr>
@@ -35236,7 +35539,7 @@
       </p:sp>
       <p:sp>
         <p:nvSpPr>
-          <p:cNvPr id="14" name="TextBox 13"/>
+          <p:cNvPr id="38" name="TextBox 37"/>
           <p:cNvSpPr txBox="1"/>
           <p:nvPr/>
         </p:nvSpPr>
@@ -35275,7 +35578,7 @@
       </p:sp>
       <p:sp>
         <p:nvSpPr>
-          <p:cNvPr id="15" name="Rounded Rectangle 14"/>
+          <p:cNvPr id="39" name="Rounded Rectangle 38"/>
           <p:cNvSpPr/>
           <p:nvPr/>
         </p:nvSpPr>
@@ -35319,7 +35622,7 @@
       </p:sp>
       <p:sp>
         <p:nvSpPr>
-          <p:cNvPr id="16" name="TextBox 15"/>
+          <p:cNvPr id="40" name="TextBox 39"/>
           <p:cNvSpPr txBox="1"/>
           <p:nvPr/>
         </p:nvSpPr>
@@ -35358,7 +35661,7 @@
       </p:sp>
       <p:sp>
         <p:nvSpPr>
-          <p:cNvPr id="17" name="TextBox 16"/>
+          <p:cNvPr id="41" name="TextBox 40"/>
           <p:cNvSpPr txBox="1"/>
           <p:nvPr/>
         </p:nvSpPr>
@@ -35397,7 +35700,7 @@
       </p:sp>
       <p:sp>
         <p:nvSpPr>
-          <p:cNvPr id="18" name="Rounded Rectangle 17"/>
+          <p:cNvPr id="42" name="Rounded Rectangle 41"/>
           <p:cNvSpPr/>
           <p:nvPr/>
         </p:nvSpPr>
@@ -35441,7 +35744,7 @@
       </p:sp>
       <p:sp>
         <p:nvSpPr>
-          <p:cNvPr id="19" name="TextBox 18"/>
+          <p:cNvPr id="43" name="TextBox 42"/>
           <p:cNvSpPr txBox="1"/>
           <p:nvPr/>
         </p:nvSpPr>
@@ -35480,7 +35783,7 @@
       </p:sp>
       <p:sp>
         <p:nvSpPr>
-          <p:cNvPr id="20" name="TextBox 19"/>
+          <p:cNvPr id="44" name="TextBox 43"/>
           <p:cNvSpPr txBox="1"/>
           <p:nvPr/>
         </p:nvSpPr>
@@ -35519,7 +35822,7 @@
       </p:sp>
       <p:sp>
         <p:nvSpPr>
-          <p:cNvPr id="21" name="Rounded Rectangle 20"/>
+          <p:cNvPr id="45" name="Rounded Rectangle 44"/>
           <p:cNvSpPr/>
           <p:nvPr/>
         </p:nvSpPr>
@@ -35563,7 +35866,7 @@
       </p:sp>
       <p:sp>
         <p:nvSpPr>
-          <p:cNvPr id="22" name="TextBox 21"/>
+          <p:cNvPr id="46" name="TextBox 45"/>
           <p:cNvSpPr txBox="1"/>
           <p:nvPr/>
         </p:nvSpPr>
@@ -35602,7 +35905,7 @@
       </p:sp>
       <p:sp>
         <p:nvSpPr>
-          <p:cNvPr id="23" name="TextBox 22"/>
+          <p:cNvPr id="47" name="TextBox 46"/>
           <p:cNvSpPr txBox="1"/>
           <p:nvPr/>
         </p:nvSpPr>
@@ -35641,7 +35944,7 @@
       </p:sp>
       <p:sp>
         <p:nvSpPr>
-          <p:cNvPr id="24" name="Rounded Rectangle 23"/>
+          <p:cNvPr id="48" name="Rounded Rectangle 47"/>
           <p:cNvSpPr/>
           <p:nvPr/>
         </p:nvSpPr>
@@ -35685,7 +35988,7 @@
       </p:sp>
       <p:sp>
         <p:nvSpPr>
-          <p:cNvPr id="25" name="TextBox 24"/>
+          <p:cNvPr id="49" name="TextBox 48"/>
           <p:cNvSpPr txBox="1"/>
           <p:nvPr/>
         </p:nvSpPr>
@@ -35724,7 +36027,7 @@
       </p:sp>
       <p:sp>
         <p:nvSpPr>
-          <p:cNvPr id="26" name="TextBox 25"/>
+          <p:cNvPr id="50" name="TextBox 49"/>
           <p:cNvSpPr txBox="1"/>
           <p:nvPr/>
         </p:nvSpPr>

--- a/BrainSpark_Director_Presentation.pptx
+++ b/BrainSpark_Director_Presentation.pptx
@@ -25,6 +25,7 @@
     <p:sldId id="273" r:id="rId25"/>
     <p:sldId id="274" r:id="rId26"/>
     <p:sldId id="275" r:id="rId27"/>
+    <p:sldId id="276" r:id="rId28"/>
   </p:sldIdLst>
   <p:sldSz cx="12191695" cy="6858000" type="screen4x3"/>
   <p:notesSz cx="6858000" cy="9144000"/>
@@ -1081,7 +1082,7 @@
           <a:lstStyle/>
           <a:p>
             <a:r>
-              <a:t>Translate features into value the Director cares about. Speed: ideas arrive while the design is still open, so they can actually be actioned. Confidence: the numbers survive a sourcing review because they're reproducible. Breadth: no blind spots — we see the whole car. Leverage: the know-how that usually walks out the door at 5pm becomes a searchable team asset. The one-line net effect at the bottom is your summary sentence — say it out loud.</a:t>
+              <a:t>This slide is about the effort and the standard, not bragging about line counts. The headline: this is real software — over forty-two thousand lines of hand-written code across roughly one hundred and fifty files, built to production discipline on my own time, evenings and weekends. Walk the bars left to right: the biggest share is the app itself, then the cost engines and the AI pipeline, then something unusual — five and a half thousand lines of curated engineering knowledge, the levers and benchmarks that make the ideas automotive-grade rather than generic. And point at the ratio: roughly one line of test for every six and a half lines of product. That's why the numbers can be trusted — every engine is unit-tested, accuracy is proven on parts the model never saw, and even changes to the AI itself get A/B-measured before they ship. The quiet message for the Director: this wasn't a weekend hack, it's a sustained engineering effort — and it's already at the standard we'd hold a supplier to.</a:t>
             </a:r>
           </a:p>
         </p:txBody>
@@ -1151,7 +1152,7 @@
           <a:lstStyle/>
           <a:p>
             <a:r>
-              <a:t>Transition to the live tool. Keep the demo tight — five beats, mirroring the workflow slide: generate ideas for a system, upload a CAD part to show feature-based cost and the 3D viewer, then the crowd-pleaser — photograph a circuit board and watch it read the components and cost it across twelve countries. Fourth beat: run a should-cost with a supplier quote and show the gap-closure ideas, so they see the engine verify in real time. Finish on the pipeline with its scorecards and ROI so it lands as a business tool, not a toy. If anything is slow or offline, narrate what it would show and move on — don't fight the tech in the room. Have a backup screen-recording ready just in case.</a:t>
+              <a:t>Translate features into value the Director cares about. Speed: ideas arrive while the design is still open, so they can actually be actioned. Confidence: the numbers survive a sourcing review because they're reproducible. Breadth: no blind spots — we see the whole car. Leverage: the know-how that usually walks out the door at 5pm becomes a searchable team asset. The one-line net effect at the bottom is your summary sentence — say it out loud.</a:t>
             </a:r>
           </a:p>
         </p:txBody>
@@ -1221,7 +1222,7 @@
           <a:lstStyle/>
           <a:p>
             <a:r>
-              <a:t>Show momentum and a credible path — and note how much moved from 'next' into 'now' since the last version of this deck: the PCB suite, Deep Mode, the learning loop, the new methods, scorecards and the patent check all shipped in the past fortnight. 'Next' is the near-term engineering: more commodity models and tighter empirical confidence bands. 'Later' is the vision — collaboration, PLM/ERP integration and portfolio-level cost intelligence. The subtext for the Director: this isn't finished-and-frozen, it's a living platform with visible velocity — and with a little support it accelerates.</a:t>
+              <a:t>Transition to the live tool. Keep the demo tight — five beats, mirroring the workflow slide: generate ideas for a system, upload a CAD part to show feature-based cost and the 3D viewer, then the crowd-pleaser — photograph a circuit board and watch it read the components and cost it across twelve countries. Fourth beat: run a should-cost with a supplier quote and show the gap-closure ideas, so they see the engine verify in real time. Finish on the pipeline with its scorecards and ROI so it lands as a business tool, not a toy. If anything is slow or offline, narrate what it would show and move on — don't fight the tech in the room. Have a backup screen-recording ready just in case.</a:t>
             </a:r>
           </a:p>
         </p:txBody>
@@ -1317,6 +1318,76 @@
 </file>
 
 <file path=ppt/notesSlides/notesSlide20.xml><?xml version="1.0" encoding="utf-8"?>
+<p:notes xmlns:a="http://schemas.openxmlformats.org/drawingml/2006/main" xmlns:p="http://schemas.openxmlformats.org/presentationml/2006/main" xmlns:r="http://schemas.openxmlformats.org/officeDocument/2006/relationships">
+  <p:cSld>
+    <p:spTree>
+      <p:nvGrpSpPr>
+        <p:cNvPr id="1" name=""/>
+        <p:cNvGrpSpPr/>
+        <p:nvPr/>
+      </p:nvGrpSpPr>
+      <p:grpSpPr>
+        <a:xfrm>
+          <a:off x="0" y="0"/>
+          <a:ext cx="0" cy="0"/>
+          <a:chOff x="0" y="0"/>
+          <a:chExt cx="0" cy="0"/>
+        </a:xfrm>
+      </p:grpSpPr>
+      <p:sp>
+        <p:nvSpPr>
+          <p:cNvPr id="2" name="Slide Image Placeholder 1"/>
+          <p:cNvSpPr>
+            <a:spLocks noGrp="1"/>
+          </p:cNvSpPr>
+          <p:nvPr>
+            <p:ph type="sldImg" idx="2"/>
+          </p:nvPr>
+        </p:nvSpPr>
+        <p:spPr/>
+      </p:sp>
+      <p:sp>
+        <p:nvSpPr>
+          <p:cNvPr id="3" name="Notes Placeholder 2"/>
+          <p:cNvSpPr>
+            <a:spLocks noGrp="1"/>
+          </p:cNvSpPr>
+          <p:nvPr>
+            <p:ph type="body" idx="3" sz="quarter"/>
+          </p:nvPr>
+        </p:nvSpPr>
+        <p:spPr/>
+        <p:txBody>
+          <a:bodyPr/>
+          <a:lstStyle/>
+          <a:p>
+            <a:r>
+              <a:t>Show momentum and a credible path — and note how much moved from 'next' into 'now' since the last version of this deck: the PCB suite, Deep Mode, the learning loop, the new methods, scorecards and the patent check all shipped in the past fortnight. 'Next' is the near-term engineering: more commodity models and tighter empirical confidence bands. 'Later' is the vision — collaboration, PLM/ERP integration and portfolio-level cost intelligence. The subtext for the Director: this isn't finished-and-frozen, it's a living platform with visible velocity — and with a little support it accelerates.</a:t>
+            </a:r>
+          </a:p>
+        </p:txBody>
+      </p:sp>
+      <p:sp>
+        <p:nvSpPr>
+          <p:cNvPr id="4" name="Slide Number Placeholder 3"/>
+          <p:cNvSpPr>
+            <a:spLocks noGrp="1"/>
+          </p:cNvSpPr>
+          <p:nvPr>
+            <p:ph type="sldNum" idx="5" sz="quarter"/>
+          </p:nvPr>
+        </p:nvSpPr>
+        <p:spPr/>
+      </p:sp>
+    </p:spTree>
+  </p:cSld>
+  <p:clrMapOvr>
+    <a:masterClrMapping/>
+  </p:clrMapOvr>
+</p:notes>
+</file>
+
+<file path=ppt/notesSlides/notesSlide21.xml><?xml version="1.0" encoding="utf-8"?>
 <p:notes xmlns:a="http://schemas.openxmlformats.org/drawingml/2006/main" xmlns:p="http://schemas.openxmlformats.org/presentationml/2006/main" xmlns:r="http://schemas.openxmlformats.org/officeDocument/2006/relationships">
   <p:cSld>
     <p:spTree>
@@ -20910,7 +20981,7 @@
                 </a:solidFill>
                 <a:latin typeface="Segoe UI Semibold"/>
               </a:rPr>
-              <a:t>THE VALUE</a:t>
+              <a:t>BEHIND THE SCENES</a:t>
             </a:r>
           </a:p>
         </p:txBody>
@@ -20949,7 +21020,7 @@
                 </a:solidFill>
                 <a:latin typeface="Segoe UI Semibold"/>
               </a:rPr>
-              <a:t>Benefits &amp; Business Impact</a:t>
+              <a:t>The Engineering Effort Behind the Tool</a:t>
             </a:r>
           </a:p>
         </p:txBody>
@@ -21126,14 +21197,53 @@
       </p:sp>
       <p:sp>
         <p:nvSpPr>
-          <p:cNvPr id="11" name="Rounded Rectangle 10"/>
+          <p:cNvPr id="11" name="TextBox 10"/>
+          <p:cNvSpPr txBox="1"/>
+          <p:nvPr/>
+        </p:nvSpPr>
+        <p:spPr>
+          <a:xfrm>
+            <a:off x="548640" y="1417320"/>
+            <a:ext cx="11064240" cy="457200"/>
+          </a:xfrm>
+          <a:prstGeom prst="rect">
+            <a:avLst/>
+          </a:prstGeom>
+          <a:noFill/>
+        </p:spPr>
+        <p:txBody>
+          <a:bodyPr wrap="square" anchor="t" lIns="0" rIns="0" tIns="0" bIns="0">
+            <a:spAutoFit/>
+          </a:bodyPr>
+          <a:lstStyle/>
+          <a:p>
+            <a:pPr algn="l">
+              <a:lnSpc>
+                <a:spcPct val="100000"/>
+              </a:lnSpc>
+            </a:pPr>
+            <a:r>
+              <a:rPr sz="1450" b="1" i="0">
+                <a:solidFill>
+                  <a:srgbClr val="0D9488"/>
+                </a:solidFill>
+                <a:latin typeface="Segoe UI Semibold"/>
+              </a:rPr>
+              <a:t>Built as real software, to production discipline — on personal time, evenings and weekends.</a:t>
+            </a:r>
+          </a:p>
+        </p:txBody>
+      </p:sp>
+      <p:sp>
+        <p:nvSpPr>
+          <p:cNvPr id="12" name="Rounded Rectangle 11"/>
           <p:cNvSpPr/>
           <p:nvPr/>
         </p:nvSpPr>
         <p:spPr>
           <a:xfrm>
-            <a:off x="548640" y="1600200"/>
-            <a:ext cx="2697480" cy="3977639"/>
+            <a:off x="548640" y="1965960"/>
+            <a:ext cx="2697480" cy="960120"/>
           </a:xfrm>
           <a:prstGeom prst="roundRect">
             <a:avLst/>
@@ -21172,214 +21282,92 @@
       </p:sp>
       <p:sp>
         <p:nvSpPr>
-          <p:cNvPr id="12" name="Rounded Rectangle 11"/>
+          <p:cNvPr id="13" name="TextBox 12"/>
+          <p:cNvSpPr txBox="1"/>
+          <p:nvPr/>
+        </p:nvSpPr>
+        <p:spPr>
+          <a:xfrm>
+            <a:off x="548640" y="2075688"/>
+            <a:ext cx="2697480" cy="457200"/>
+          </a:xfrm>
+          <a:prstGeom prst="rect">
+            <a:avLst/>
+          </a:prstGeom>
+          <a:noFill/>
+        </p:spPr>
+        <p:txBody>
+          <a:bodyPr wrap="square" anchor="t" lIns="0" rIns="0" tIns="0" bIns="0">
+            <a:spAutoFit/>
+          </a:bodyPr>
+          <a:lstStyle/>
+          <a:p>
+            <a:pPr algn="ctr">
+              <a:lnSpc>
+                <a:spcPct val="100000"/>
+              </a:lnSpc>
+            </a:pPr>
+            <a:r>
+              <a:rPr sz="2400" b="1" i="0">
+                <a:solidFill>
+                  <a:srgbClr val="B47609"/>
+                </a:solidFill>
+                <a:latin typeface="Segoe UI Semibold"/>
+              </a:rPr>
+              <a:t>42,600+</a:t>
+            </a:r>
+          </a:p>
+        </p:txBody>
+      </p:sp>
+      <p:sp>
+        <p:nvSpPr>
+          <p:cNvPr id="14" name="TextBox 13"/>
+          <p:cNvSpPr txBox="1"/>
+          <p:nvPr/>
+        </p:nvSpPr>
+        <p:spPr>
+          <a:xfrm>
+            <a:off x="548640" y="2578608"/>
+            <a:ext cx="2697480" cy="320040"/>
+          </a:xfrm>
+          <a:prstGeom prst="rect">
+            <a:avLst/>
+          </a:prstGeom>
+          <a:noFill/>
+        </p:spPr>
+        <p:txBody>
+          <a:bodyPr wrap="square" anchor="t" lIns="0" rIns="0" tIns="0" bIns="0">
+            <a:spAutoFit/>
+          </a:bodyPr>
+          <a:lstStyle/>
+          <a:p>
+            <a:pPr algn="ctr">
+              <a:lnSpc>
+                <a:spcPct val="100000"/>
+              </a:lnSpc>
+            </a:pPr>
+            <a:r>
+              <a:rPr sz="1050" b="0" i="0">
+                <a:solidFill>
+                  <a:srgbClr val="556477"/>
+                </a:solidFill>
+                <a:latin typeface="Segoe UI"/>
+              </a:rPr>
+              <a:t>lines of hand-written code</a:t>
+            </a:r>
+          </a:p>
+        </p:txBody>
+      </p:sp>
+      <p:sp>
+        <p:nvSpPr>
+          <p:cNvPr id="15" name="Rounded Rectangle 14"/>
           <p:cNvSpPr/>
           <p:nvPr/>
         </p:nvSpPr>
         <p:spPr>
           <a:xfrm>
-            <a:off x="1618488" y="1874519"/>
-            <a:ext cx="640080" cy="640080"/>
-          </a:xfrm>
-          <a:prstGeom prst="roundRect">
-            <a:avLst/>
-          </a:prstGeom>
-          <a:solidFill>
-            <a:srgbClr val="0D9488"/>
-          </a:solidFill>
-          <a:ln>
-            <a:noFill/>
-          </a:ln>
-          <a:effectLst/>
-        </p:spPr>
-        <p:style>
-          <a:lnRef idx="1">
-            <a:schemeClr val="accent1"/>
-          </a:lnRef>
-          <a:fillRef idx="3">
-            <a:schemeClr val="accent1"/>
-          </a:fillRef>
-          <a:effectRef idx="2">
-            <a:schemeClr val="accent1"/>
-          </a:effectRef>
-          <a:fontRef idx="minor">
-            <a:schemeClr val="lt1"/>
-          </a:fontRef>
-        </p:style>
-        <p:txBody>
-          <a:bodyPr rtlCol="0" anchor="ctr"/>
-          <a:lstStyle/>
-          <a:p>
-            <a:pPr algn="ctr"/>
-          </a:p>
-        </p:txBody>
-      </p:sp>
-      <p:sp>
-        <p:nvSpPr>
-          <p:cNvPr id="13" name="TextBox 12"/>
-          <p:cNvSpPr txBox="1"/>
-          <p:nvPr/>
-        </p:nvSpPr>
-        <p:spPr>
-          <a:xfrm>
-            <a:off x="1618488" y="1874519"/>
-            <a:ext cx="640080" cy="640080"/>
-          </a:xfrm>
-          <a:prstGeom prst="rect">
-            <a:avLst/>
-          </a:prstGeom>
-          <a:noFill/>
-        </p:spPr>
-        <p:txBody>
-          <a:bodyPr wrap="square" anchor="ctr" lIns="0" rIns="0" tIns="0" bIns="0">
-            <a:spAutoFit/>
-          </a:bodyPr>
-          <a:lstStyle/>
-          <a:p>
-            <a:pPr algn="ctr">
-              <a:lnSpc>
-                <a:spcPct val="100000"/>
-              </a:lnSpc>
-            </a:pPr>
-            <a:r>
-              <a:rPr sz="1800" b="1" i="0">
-                <a:solidFill>
-                  <a:srgbClr val="FFFFFF"/>
-                </a:solidFill>
-                <a:latin typeface="Arial"/>
-              </a:rPr>
-              <a:t>●</a:t>
-            </a:r>
-          </a:p>
-        </p:txBody>
-      </p:sp>
-      <p:sp>
-        <p:nvSpPr>
-          <p:cNvPr id="14" name="TextBox 13"/>
-          <p:cNvSpPr txBox="1"/>
-          <p:nvPr/>
-        </p:nvSpPr>
-        <p:spPr>
-          <a:xfrm>
-            <a:off x="548640" y="2651760"/>
-            <a:ext cx="2697480" cy="365760"/>
-          </a:xfrm>
-          <a:prstGeom prst="rect">
-            <a:avLst/>
-          </a:prstGeom>
-          <a:noFill/>
-        </p:spPr>
-        <p:txBody>
-          <a:bodyPr wrap="square" anchor="t" lIns="0" rIns="0" tIns="0" bIns="0">
-            <a:spAutoFit/>
-          </a:bodyPr>
-          <a:lstStyle/>
-          <a:p>
-            <a:pPr algn="ctr">
-              <a:lnSpc>
-                <a:spcPct val="100000"/>
-              </a:lnSpc>
-            </a:pPr>
-            <a:r>
-              <a:rPr sz="1700" b="1" i="0">
-                <a:solidFill>
-                  <a:srgbClr val="16273C"/>
-                </a:solidFill>
-                <a:latin typeface="Segoe UI Semibold"/>
-              </a:rPr>
-              <a:t>Speed</a:t>
-            </a:r>
-          </a:p>
-        </p:txBody>
-      </p:sp>
-      <p:sp>
-        <p:nvSpPr>
-          <p:cNvPr id="15" name="TextBox 14"/>
-          <p:cNvSpPr txBox="1"/>
-          <p:nvPr/>
-        </p:nvSpPr>
-        <p:spPr>
-          <a:xfrm>
-            <a:off x="731520" y="3063240"/>
-            <a:ext cx="2331720" cy="457200"/>
-          </a:xfrm>
-          <a:prstGeom prst="rect">
-            <a:avLst/>
-          </a:prstGeom>
-          <a:noFill/>
-        </p:spPr>
-        <p:txBody>
-          <a:bodyPr wrap="square" anchor="t" lIns="0" rIns="0" tIns="0" bIns="0">
-            <a:spAutoFit/>
-          </a:bodyPr>
-          <a:lstStyle/>
-          <a:p>
-            <a:pPr algn="ctr">
-              <a:lnSpc>
-                <a:spcPct val="100000"/>
-              </a:lnSpc>
-            </a:pPr>
-            <a:r>
-              <a:rPr sz="1200" b="1" i="0">
-                <a:solidFill>
-                  <a:srgbClr val="0D9488"/>
-                </a:solidFill>
-                <a:latin typeface="Segoe UI Semibold"/>
-              </a:rPr>
-              <a:t>Costed ideas in minutes</a:t>
-            </a:r>
-          </a:p>
-        </p:txBody>
-      </p:sp>
-      <p:sp>
-        <p:nvSpPr>
-          <p:cNvPr id="16" name="TextBox 15"/>
-          <p:cNvSpPr txBox="1"/>
-          <p:nvPr/>
-        </p:nvSpPr>
-        <p:spPr>
-          <a:xfrm>
-            <a:off x="804672" y="3657600"/>
-            <a:ext cx="2194560" cy="1828800"/>
-          </a:xfrm>
-          <a:prstGeom prst="rect">
-            <a:avLst/>
-          </a:prstGeom>
-          <a:noFill/>
-        </p:spPr>
-        <p:txBody>
-          <a:bodyPr wrap="square" anchor="t" lIns="0" rIns="0" tIns="0" bIns="0">
-            <a:spAutoFit/>
-          </a:bodyPr>
-          <a:lstStyle/>
-          <a:p>
-            <a:pPr algn="ctr">
-              <a:lnSpc>
-                <a:spcPct val="106000"/>
-              </a:lnSpc>
-            </a:pPr>
-            <a:r>
-              <a:rPr sz="1150" b="0" i="0">
-                <a:solidFill>
-                  <a:srgbClr val="556477"/>
-                </a:solidFill>
-                <a:latin typeface="Segoe UI"/>
-              </a:rPr>
-              <a:t>From part or CAD to a defensible number in minutes, not the days a manual should-cost takes.</a:t>
-            </a:r>
-          </a:p>
-        </p:txBody>
-      </p:sp>
-      <p:sp>
-        <p:nvSpPr>
-          <p:cNvPr id="17" name="Rounded Rectangle 16"/>
-          <p:cNvSpPr/>
-          <p:nvPr/>
-        </p:nvSpPr>
-        <p:spPr>
-          <a:xfrm>
-            <a:off x="3364992" y="1600200"/>
-            <a:ext cx="2697480" cy="3977639"/>
+            <a:off x="3364992" y="1965960"/>
+            <a:ext cx="2697480" cy="960120"/>
           </a:xfrm>
           <a:prstGeom prst="roundRect">
             <a:avLst/>
@@ -21418,214 +21406,92 @@
       </p:sp>
       <p:sp>
         <p:nvSpPr>
+          <p:cNvPr id="16" name="TextBox 15"/>
+          <p:cNvSpPr txBox="1"/>
+          <p:nvPr/>
+        </p:nvSpPr>
+        <p:spPr>
+          <a:xfrm>
+            <a:off x="3364992" y="2075688"/>
+            <a:ext cx="2697480" cy="457200"/>
+          </a:xfrm>
+          <a:prstGeom prst="rect">
+            <a:avLst/>
+          </a:prstGeom>
+          <a:noFill/>
+        </p:spPr>
+        <p:txBody>
+          <a:bodyPr wrap="square" anchor="t" lIns="0" rIns="0" tIns="0" bIns="0">
+            <a:spAutoFit/>
+          </a:bodyPr>
+          <a:lstStyle/>
+          <a:p>
+            <a:pPr algn="ctr">
+              <a:lnSpc>
+                <a:spcPct val="100000"/>
+              </a:lnSpc>
+            </a:pPr>
+            <a:r>
+              <a:rPr sz="2400" b="1" i="0">
+                <a:solidFill>
+                  <a:srgbClr val="B47609"/>
+                </a:solidFill>
+                <a:latin typeface="Segoe UI Semibold"/>
+              </a:rPr>
+              <a:t>150+</a:t>
+            </a:r>
+          </a:p>
+        </p:txBody>
+      </p:sp>
+      <p:sp>
+        <p:nvSpPr>
+          <p:cNvPr id="17" name="TextBox 16"/>
+          <p:cNvSpPr txBox="1"/>
+          <p:nvPr/>
+        </p:nvSpPr>
+        <p:spPr>
+          <a:xfrm>
+            <a:off x="3364992" y="2578608"/>
+            <a:ext cx="2697480" cy="320040"/>
+          </a:xfrm>
+          <a:prstGeom prst="rect">
+            <a:avLst/>
+          </a:prstGeom>
+          <a:noFill/>
+        </p:spPr>
+        <p:txBody>
+          <a:bodyPr wrap="square" anchor="t" lIns="0" rIns="0" tIns="0" bIns="0">
+            <a:spAutoFit/>
+          </a:bodyPr>
+          <a:lstStyle/>
+          <a:p>
+            <a:pPr algn="ctr">
+              <a:lnSpc>
+                <a:spcPct val="100000"/>
+              </a:lnSpc>
+            </a:pPr>
+            <a:r>
+              <a:rPr sz="1050" b="0" i="0">
+                <a:solidFill>
+                  <a:srgbClr val="556477"/>
+                </a:solidFill>
+                <a:latin typeface="Segoe UI"/>
+              </a:rPr>
+              <a:t>source files</a:t>
+            </a:r>
+          </a:p>
+        </p:txBody>
+      </p:sp>
+      <p:sp>
+        <p:nvSpPr>
           <p:cNvPr id="18" name="Rounded Rectangle 17"/>
           <p:cNvSpPr/>
           <p:nvPr/>
         </p:nvSpPr>
         <p:spPr>
           <a:xfrm>
-            <a:off x="4434840" y="1874519"/>
-            <a:ext cx="640080" cy="640080"/>
-          </a:xfrm>
-          <a:prstGeom prst="roundRect">
-            <a:avLst/>
-          </a:prstGeom>
-          <a:solidFill>
-            <a:srgbClr val="059669"/>
-          </a:solidFill>
-          <a:ln>
-            <a:noFill/>
-          </a:ln>
-          <a:effectLst/>
-        </p:spPr>
-        <p:style>
-          <a:lnRef idx="1">
-            <a:schemeClr val="accent1"/>
-          </a:lnRef>
-          <a:fillRef idx="3">
-            <a:schemeClr val="accent1"/>
-          </a:fillRef>
-          <a:effectRef idx="2">
-            <a:schemeClr val="accent1"/>
-          </a:effectRef>
-          <a:fontRef idx="minor">
-            <a:schemeClr val="lt1"/>
-          </a:fontRef>
-        </p:style>
-        <p:txBody>
-          <a:bodyPr rtlCol="0" anchor="ctr"/>
-          <a:lstStyle/>
-          <a:p>
-            <a:pPr algn="ctr"/>
-          </a:p>
-        </p:txBody>
-      </p:sp>
-      <p:sp>
-        <p:nvSpPr>
-          <p:cNvPr id="19" name="TextBox 18"/>
-          <p:cNvSpPr txBox="1"/>
-          <p:nvPr/>
-        </p:nvSpPr>
-        <p:spPr>
-          <a:xfrm>
-            <a:off x="4434840" y="1874519"/>
-            <a:ext cx="640080" cy="640080"/>
-          </a:xfrm>
-          <a:prstGeom prst="rect">
-            <a:avLst/>
-          </a:prstGeom>
-          <a:noFill/>
-        </p:spPr>
-        <p:txBody>
-          <a:bodyPr wrap="square" anchor="ctr" lIns="0" rIns="0" tIns="0" bIns="0">
-            <a:spAutoFit/>
-          </a:bodyPr>
-          <a:lstStyle/>
-          <a:p>
-            <a:pPr algn="ctr">
-              <a:lnSpc>
-                <a:spcPct val="100000"/>
-              </a:lnSpc>
-            </a:pPr>
-            <a:r>
-              <a:rPr sz="1800" b="1" i="0">
-                <a:solidFill>
-                  <a:srgbClr val="FFFFFF"/>
-                </a:solidFill>
-                <a:latin typeface="Arial"/>
-              </a:rPr>
-              <a:t>✓</a:t>
-            </a:r>
-          </a:p>
-        </p:txBody>
-      </p:sp>
-      <p:sp>
-        <p:nvSpPr>
-          <p:cNvPr id="20" name="TextBox 19"/>
-          <p:cNvSpPr txBox="1"/>
-          <p:nvPr/>
-        </p:nvSpPr>
-        <p:spPr>
-          <a:xfrm>
-            <a:off x="3364992" y="2651760"/>
-            <a:ext cx="2697480" cy="365760"/>
-          </a:xfrm>
-          <a:prstGeom prst="rect">
-            <a:avLst/>
-          </a:prstGeom>
-          <a:noFill/>
-        </p:spPr>
-        <p:txBody>
-          <a:bodyPr wrap="square" anchor="t" lIns="0" rIns="0" tIns="0" bIns="0">
-            <a:spAutoFit/>
-          </a:bodyPr>
-          <a:lstStyle/>
-          <a:p>
-            <a:pPr algn="ctr">
-              <a:lnSpc>
-                <a:spcPct val="100000"/>
-              </a:lnSpc>
-            </a:pPr>
-            <a:r>
-              <a:rPr sz="1700" b="1" i="0">
-                <a:solidFill>
-                  <a:srgbClr val="16273C"/>
-                </a:solidFill>
-                <a:latin typeface="Segoe UI Semibold"/>
-              </a:rPr>
-              <a:t>Confidence</a:t>
-            </a:r>
-          </a:p>
-        </p:txBody>
-      </p:sp>
-      <p:sp>
-        <p:nvSpPr>
-          <p:cNvPr id="21" name="TextBox 20"/>
-          <p:cNvSpPr txBox="1"/>
-          <p:nvPr/>
-        </p:nvSpPr>
-        <p:spPr>
-          <a:xfrm>
-            <a:off x="3547872" y="3063240"/>
-            <a:ext cx="2331720" cy="457200"/>
-          </a:xfrm>
-          <a:prstGeom prst="rect">
-            <a:avLst/>
-          </a:prstGeom>
-          <a:noFill/>
-        </p:spPr>
-        <p:txBody>
-          <a:bodyPr wrap="square" anchor="t" lIns="0" rIns="0" tIns="0" bIns="0">
-            <a:spAutoFit/>
-          </a:bodyPr>
-          <a:lstStyle/>
-          <a:p>
-            <a:pPr algn="ctr">
-              <a:lnSpc>
-                <a:spcPct val="100000"/>
-              </a:lnSpc>
-            </a:pPr>
-            <a:r>
-              <a:rPr sz="1200" b="1" i="0">
-                <a:solidFill>
-                  <a:srgbClr val="059669"/>
-                </a:solidFill>
-                <a:latin typeface="Segoe UI Semibold"/>
-              </a:rPr>
-              <a:t>Numbers that survive review</a:t>
-            </a:r>
-          </a:p>
-        </p:txBody>
-      </p:sp>
-      <p:sp>
-        <p:nvSpPr>
-          <p:cNvPr id="22" name="TextBox 21"/>
-          <p:cNvSpPr txBox="1"/>
-          <p:nvPr/>
-        </p:nvSpPr>
-        <p:spPr>
-          <a:xfrm>
-            <a:off x="3621024" y="3657600"/>
-            <a:ext cx="2194560" cy="1828800"/>
-          </a:xfrm>
-          <a:prstGeom prst="rect">
-            <a:avLst/>
-          </a:prstGeom>
-          <a:noFill/>
-        </p:spPr>
-        <p:txBody>
-          <a:bodyPr wrap="square" anchor="t" lIns="0" rIns="0" tIns="0" bIns="0">
-            <a:spAutoFit/>
-          </a:bodyPr>
-          <a:lstStyle/>
-          <a:p>
-            <a:pPr algn="ctr">
-              <a:lnSpc>
-                <a:spcPct val="106000"/>
-              </a:lnSpc>
-            </a:pPr>
-            <a:r>
-              <a:rPr sz="1150" b="0" i="0">
-                <a:solidFill>
-                  <a:srgbClr val="556477"/>
-                </a:solidFill>
-                <a:latin typeface="Segoe UI"/>
-              </a:rPr>
-              <a:t>Every figure is engine-verified and reproducible — defensible in sourcing and programme gates.</a:t>
-            </a:r>
-          </a:p>
-        </p:txBody>
-      </p:sp>
-      <p:sp>
-        <p:nvSpPr>
-          <p:cNvPr id="23" name="Rounded Rectangle 22"/>
-          <p:cNvSpPr/>
-          <p:nvPr/>
-        </p:nvSpPr>
-        <p:spPr>
-          <a:xfrm>
-            <a:off x="6181344" y="1600200"/>
-            <a:ext cx="2697480" cy="3977639"/>
+            <a:off x="6181344" y="1965960"/>
+            <a:ext cx="2697480" cy="960120"/>
           </a:xfrm>
           <a:prstGeom prst="roundRect">
             <a:avLst/>
@@ -21664,214 +21530,92 @@
       </p:sp>
       <p:sp>
         <p:nvSpPr>
-          <p:cNvPr id="24" name="Rounded Rectangle 23"/>
+          <p:cNvPr id="19" name="TextBox 18"/>
+          <p:cNvSpPr txBox="1"/>
+          <p:nvPr/>
+        </p:nvSpPr>
+        <p:spPr>
+          <a:xfrm>
+            <a:off x="6181344" y="2075688"/>
+            <a:ext cx="2697480" cy="457200"/>
+          </a:xfrm>
+          <a:prstGeom prst="rect">
+            <a:avLst/>
+          </a:prstGeom>
+          <a:noFill/>
+        </p:spPr>
+        <p:txBody>
+          <a:bodyPr wrap="square" anchor="t" lIns="0" rIns="0" tIns="0" bIns="0">
+            <a:spAutoFit/>
+          </a:bodyPr>
+          <a:lstStyle/>
+          <a:p>
+            <a:pPr algn="ctr">
+              <a:lnSpc>
+                <a:spcPct val="100000"/>
+              </a:lnSpc>
+            </a:pPr>
+            <a:r>
+              <a:rPr sz="2400" b="1" i="0">
+                <a:solidFill>
+                  <a:srgbClr val="B47609"/>
+                </a:solidFill>
+                <a:latin typeface="Segoe UI Semibold"/>
+              </a:rPr>
+              <a:t>283</a:t>
+            </a:r>
+          </a:p>
+        </p:txBody>
+      </p:sp>
+      <p:sp>
+        <p:nvSpPr>
+          <p:cNvPr id="20" name="TextBox 19"/>
+          <p:cNvSpPr txBox="1"/>
+          <p:nvPr/>
+        </p:nvSpPr>
+        <p:spPr>
+          <a:xfrm>
+            <a:off x="6181344" y="2578608"/>
+            <a:ext cx="2697480" cy="320040"/>
+          </a:xfrm>
+          <a:prstGeom prst="rect">
+            <a:avLst/>
+          </a:prstGeom>
+          <a:noFill/>
+        </p:spPr>
+        <p:txBody>
+          <a:bodyPr wrap="square" anchor="t" lIns="0" rIns="0" tIns="0" bIns="0">
+            <a:spAutoFit/>
+          </a:bodyPr>
+          <a:lstStyle/>
+          <a:p>
+            <a:pPr algn="ctr">
+              <a:lnSpc>
+                <a:spcPct val="100000"/>
+              </a:lnSpc>
+            </a:pPr>
+            <a:r>
+              <a:rPr sz="1050" b="0" i="0">
+                <a:solidFill>
+                  <a:srgbClr val="556477"/>
+                </a:solidFill>
+                <a:latin typeface="Segoe UI"/>
+              </a:rPr>
+              <a:t>automated tests</a:t>
+            </a:r>
+          </a:p>
+        </p:txBody>
+      </p:sp>
+      <p:sp>
+        <p:nvSpPr>
+          <p:cNvPr id="21" name="Rounded Rectangle 20"/>
           <p:cNvSpPr/>
           <p:nvPr/>
         </p:nvSpPr>
         <p:spPr>
           <a:xfrm>
-            <a:off x="7251192" y="1874519"/>
-            <a:ext cx="640080" cy="640080"/>
-          </a:xfrm>
-          <a:prstGeom prst="roundRect">
-            <a:avLst/>
-          </a:prstGeom>
-          <a:solidFill>
-            <a:srgbClr val="2563EB"/>
-          </a:solidFill>
-          <a:ln>
-            <a:noFill/>
-          </a:ln>
-          <a:effectLst/>
-        </p:spPr>
-        <p:style>
-          <a:lnRef idx="1">
-            <a:schemeClr val="accent1"/>
-          </a:lnRef>
-          <a:fillRef idx="3">
-            <a:schemeClr val="accent1"/>
-          </a:fillRef>
-          <a:effectRef idx="2">
-            <a:schemeClr val="accent1"/>
-          </a:effectRef>
-          <a:fontRef idx="minor">
-            <a:schemeClr val="lt1"/>
-          </a:fontRef>
-        </p:style>
-        <p:txBody>
-          <a:bodyPr rtlCol="0" anchor="ctr"/>
-          <a:lstStyle/>
-          <a:p>
-            <a:pPr algn="ctr"/>
-          </a:p>
-        </p:txBody>
-      </p:sp>
-      <p:sp>
-        <p:nvSpPr>
-          <p:cNvPr id="25" name="TextBox 24"/>
-          <p:cNvSpPr txBox="1"/>
-          <p:nvPr/>
-        </p:nvSpPr>
-        <p:spPr>
-          <a:xfrm>
-            <a:off x="7251192" y="1874519"/>
-            <a:ext cx="640080" cy="640080"/>
-          </a:xfrm>
-          <a:prstGeom prst="rect">
-            <a:avLst/>
-          </a:prstGeom>
-          <a:noFill/>
-        </p:spPr>
-        <p:txBody>
-          <a:bodyPr wrap="square" anchor="ctr" lIns="0" rIns="0" tIns="0" bIns="0">
-            <a:spAutoFit/>
-          </a:bodyPr>
-          <a:lstStyle/>
-          <a:p>
-            <a:pPr algn="ctr">
-              <a:lnSpc>
-                <a:spcPct val="100000"/>
-              </a:lnSpc>
-            </a:pPr>
-            <a:r>
-              <a:rPr sz="1800" b="1" i="0">
-                <a:solidFill>
-                  <a:srgbClr val="FFFFFF"/>
-                </a:solidFill>
-                <a:latin typeface="Arial"/>
-              </a:rPr>
-              <a:t>■</a:t>
-            </a:r>
-          </a:p>
-        </p:txBody>
-      </p:sp>
-      <p:sp>
-        <p:nvSpPr>
-          <p:cNvPr id="26" name="TextBox 25"/>
-          <p:cNvSpPr txBox="1"/>
-          <p:nvPr/>
-        </p:nvSpPr>
-        <p:spPr>
-          <a:xfrm>
-            <a:off x="6181344" y="2651760"/>
-            <a:ext cx="2697480" cy="365760"/>
-          </a:xfrm>
-          <a:prstGeom prst="rect">
-            <a:avLst/>
-          </a:prstGeom>
-          <a:noFill/>
-        </p:spPr>
-        <p:txBody>
-          <a:bodyPr wrap="square" anchor="t" lIns="0" rIns="0" tIns="0" bIns="0">
-            <a:spAutoFit/>
-          </a:bodyPr>
-          <a:lstStyle/>
-          <a:p>
-            <a:pPr algn="ctr">
-              <a:lnSpc>
-                <a:spcPct val="100000"/>
-              </a:lnSpc>
-            </a:pPr>
-            <a:r>
-              <a:rPr sz="1700" b="1" i="0">
-                <a:solidFill>
-                  <a:srgbClr val="16273C"/>
-                </a:solidFill>
-                <a:latin typeface="Segoe UI Semibold"/>
-              </a:rPr>
-              <a:t>Breadth</a:t>
-            </a:r>
-          </a:p>
-        </p:txBody>
-      </p:sp>
-      <p:sp>
-        <p:nvSpPr>
-          <p:cNvPr id="27" name="TextBox 26"/>
-          <p:cNvSpPr txBox="1"/>
-          <p:nvPr/>
-        </p:nvSpPr>
-        <p:spPr>
-          <a:xfrm>
-            <a:off x="6364224" y="3063240"/>
-            <a:ext cx="2331720" cy="457200"/>
-          </a:xfrm>
-          <a:prstGeom prst="rect">
-            <a:avLst/>
-          </a:prstGeom>
-          <a:noFill/>
-        </p:spPr>
-        <p:txBody>
-          <a:bodyPr wrap="square" anchor="t" lIns="0" rIns="0" tIns="0" bIns="0">
-            <a:spAutoFit/>
-          </a:bodyPr>
-          <a:lstStyle/>
-          <a:p>
-            <a:pPr algn="ctr">
-              <a:lnSpc>
-                <a:spcPct val="100000"/>
-              </a:lnSpc>
-            </a:pPr>
-            <a:r>
-              <a:rPr sz="1200" b="1" i="0">
-                <a:solidFill>
-                  <a:srgbClr val="2563EB"/>
-                </a:solidFill>
-                <a:latin typeface="Segoe UI Semibold"/>
-              </a:rPr>
-              <a:t>See the whole vehicle</a:t>
-            </a:r>
-          </a:p>
-        </p:txBody>
-      </p:sp>
-      <p:sp>
-        <p:nvSpPr>
-          <p:cNvPr id="28" name="TextBox 27"/>
-          <p:cNvSpPr txBox="1"/>
-          <p:nvPr/>
-        </p:nvSpPr>
-        <p:spPr>
-          <a:xfrm>
-            <a:off x="6437376" y="3657600"/>
-            <a:ext cx="2194560" cy="1828800"/>
-          </a:xfrm>
-          <a:prstGeom prst="rect">
-            <a:avLst/>
-          </a:prstGeom>
-          <a:noFill/>
-        </p:spPr>
-        <p:txBody>
-          <a:bodyPr wrap="square" anchor="t" lIns="0" rIns="0" tIns="0" bIns="0">
-            <a:spAutoFit/>
-          </a:bodyPr>
-          <a:lstStyle/>
-          <a:p>
-            <a:pPr algn="ctr">
-              <a:lnSpc>
-                <a:spcPct val="106000"/>
-              </a:lnSpc>
-            </a:pPr>
-            <a:r>
-              <a:rPr sz="1150" b="0" i="0">
-                <a:solidFill>
-                  <a:srgbClr val="556477"/>
-                </a:solidFill>
-                <a:latin typeface="Segoe UI"/>
-              </a:rPr>
-              <a:t>One platform across all systems and commodities — no more single-tool blind spots.</a:t>
-            </a:r>
-          </a:p>
-        </p:txBody>
-      </p:sp>
-      <p:sp>
-        <p:nvSpPr>
-          <p:cNvPr id="29" name="Rounded Rectangle 28"/>
-          <p:cNvSpPr/>
-          <p:nvPr/>
-        </p:nvSpPr>
-        <p:spPr>
-          <a:xfrm>
-            <a:off x="8997696" y="1600200"/>
-            <a:ext cx="2697480" cy="3977639"/>
+            <a:off x="8997696" y="1965960"/>
+            <a:ext cx="2697480" cy="960120"/>
           </a:xfrm>
           <a:prstGeom prst="roundRect">
             <a:avLst/>
@@ -21910,14 +21654,460 @@
       </p:sp>
       <p:sp>
         <p:nvSpPr>
+          <p:cNvPr id="22" name="TextBox 21"/>
+          <p:cNvSpPr txBox="1"/>
+          <p:nvPr/>
+        </p:nvSpPr>
+        <p:spPr>
+          <a:xfrm>
+            <a:off x="8997696" y="2075688"/>
+            <a:ext cx="2697480" cy="457200"/>
+          </a:xfrm>
+          <a:prstGeom prst="rect">
+            <a:avLst/>
+          </a:prstGeom>
+          <a:noFill/>
+        </p:spPr>
+        <p:txBody>
+          <a:bodyPr wrap="square" anchor="t" lIns="0" rIns="0" tIns="0" bIns="0">
+            <a:spAutoFit/>
+          </a:bodyPr>
+          <a:lstStyle/>
+          <a:p>
+            <a:pPr algn="ctr">
+              <a:lnSpc>
+                <a:spcPct val="100000"/>
+              </a:lnSpc>
+            </a:pPr>
+            <a:r>
+              <a:rPr sz="2400" b="1" i="0">
+                <a:solidFill>
+                  <a:srgbClr val="B47609"/>
+                </a:solidFill>
+                <a:latin typeface="Segoe UI Semibold"/>
+              </a:rPr>
+              <a:t>1 : 6.5</a:t>
+            </a:r>
+          </a:p>
+        </p:txBody>
+      </p:sp>
+      <p:sp>
+        <p:nvSpPr>
+          <p:cNvPr id="23" name="TextBox 22"/>
+          <p:cNvSpPr txBox="1"/>
+          <p:nvPr/>
+        </p:nvSpPr>
+        <p:spPr>
+          <a:xfrm>
+            <a:off x="8997696" y="2578608"/>
+            <a:ext cx="2697480" cy="320040"/>
+          </a:xfrm>
+          <a:prstGeom prst="rect">
+            <a:avLst/>
+          </a:prstGeom>
+          <a:noFill/>
+        </p:spPr>
+        <p:txBody>
+          <a:bodyPr wrap="square" anchor="t" lIns="0" rIns="0" tIns="0" bIns="0">
+            <a:spAutoFit/>
+          </a:bodyPr>
+          <a:lstStyle/>
+          <a:p>
+            <a:pPr algn="ctr">
+              <a:lnSpc>
+                <a:spcPct val="100000"/>
+              </a:lnSpc>
+            </a:pPr>
+            <a:r>
+              <a:rPr sz="1050" b="0" i="0">
+                <a:solidFill>
+                  <a:srgbClr val="556477"/>
+                </a:solidFill>
+                <a:latin typeface="Segoe UI"/>
+              </a:rPr>
+              <a:t>test lines per product lines</a:t>
+            </a:r>
+          </a:p>
+        </p:txBody>
+      </p:sp>
+      <p:sp>
+        <p:nvSpPr>
+          <p:cNvPr id="24" name="Rounded Rectangle 23"/>
+          <p:cNvSpPr/>
+          <p:nvPr/>
+        </p:nvSpPr>
+        <p:spPr>
+          <a:xfrm>
+            <a:off x="548640" y="3200400"/>
+            <a:ext cx="6217920" cy="2834640"/>
+          </a:xfrm>
+          <a:prstGeom prst="roundRect">
+            <a:avLst/>
+          </a:prstGeom>
+          <a:solidFill>
+            <a:srgbClr val="FFFFFF"/>
+          </a:solidFill>
+          <a:ln w="12700">
+            <a:solidFill>
+              <a:srgbClr val="D8E0EA"/>
+            </a:solidFill>
+          </a:ln>
+          <a:effectLst/>
+        </p:spPr>
+        <p:style>
+          <a:lnRef idx="1">
+            <a:schemeClr val="accent1"/>
+          </a:lnRef>
+          <a:fillRef idx="3">
+            <a:schemeClr val="accent1"/>
+          </a:fillRef>
+          <a:effectRef idx="2">
+            <a:schemeClr val="accent1"/>
+          </a:effectRef>
+          <a:fontRef idx="minor">
+            <a:schemeClr val="lt1"/>
+          </a:fontRef>
+        </p:style>
+        <p:txBody>
+          <a:bodyPr rtlCol="0" anchor="ctr"/>
+          <a:lstStyle/>
+          <a:p>
+            <a:pPr algn="ctr"/>
+          </a:p>
+        </p:txBody>
+      </p:sp>
+      <p:sp>
+        <p:nvSpPr>
+          <p:cNvPr id="25" name="TextBox 24"/>
+          <p:cNvSpPr txBox="1"/>
+          <p:nvPr/>
+        </p:nvSpPr>
+        <p:spPr>
+          <a:xfrm>
+            <a:off x="822960" y="3337560"/>
+            <a:ext cx="5669280" cy="320040"/>
+          </a:xfrm>
+          <a:prstGeom prst="rect">
+            <a:avLst/>
+          </a:prstGeom>
+          <a:noFill/>
+        </p:spPr>
+        <p:txBody>
+          <a:bodyPr wrap="square" anchor="t" lIns="0" rIns="0" tIns="0" bIns="0">
+            <a:spAutoFit/>
+          </a:bodyPr>
+          <a:lstStyle/>
+          <a:p>
+            <a:pPr algn="l">
+              <a:lnSpc>
+                <a:spcPct val="100000"/>
+              </a:lnSpc>
+            </a:pPr>
+            <a:r>
+              <a:rPr sz="1100" b="1" i="0">
+                <a:solidFill>
+                  <a:srgbClr val="8390A1"/>
+                </a:solidFill>
+                <a:latin typeface="Segoe UI Semibold"/>
+              </a:rPr>
+              <a:t>WHERE THE CODE LIVES</a:t>
+            </a:r>
+          </a:p>
+        </p:txBody>
+      </p:sp>
+      <p:sp>
+        <p:nvSpPr>
+          <p:cNvPr id="26" name="TextBox 25"/>
+          <p:cNvSpPr txBox="1"/>
+          <p:nvPr/>
+        </p:nvSpPr>
+        <p:spPr>
+          <a:xfrm>
+            <a:off x="822960" y="3730751"/>
+            <a:ext cx="5577840" cy="274320"/>
+          </a:xfrm>
+          <a:prstGeom prst="rect">
+            <a:avLst/>
+          </a:prstGeom>
+          <a:noFill/>
+        </p:spPr>
+        <p:txBody>
+          <a:bodyPr wrap="square" anchor="t" lIns="0" rIns="0" tIns="0" bIns="0">
+            <a:spAutoFit/>
+          </a:bodyPr>
+          <a:lstStyle/>
+          <a:p>
+            <a:pPr algn="l">
+              <a:lnSpc>
+                <a:spcPct val="100000"/>
+              </a:lnSpc>
+            </a:pPr>
+            <a:r>
+              <a:rPr sz="1050" b="0" i="0">
+                <a:solidFill>
+                  <a:srgbClr val="374558"/>
+                </a:solidFill>
+                <a:latin typeface="Segoe UI"/>
+              </a:rPr>
+              <a:t>Frontend app (React / TypeScript)</a:t>
+            </a:r>
+          </a:p>
+        </p:txBody>
+      </p:sp>
+      <p:sp>
+        <p:nvSpPr>
+          <p:cNvPr id="27" name="Rounded Rectangle 26"/>
+          <p:cNvSpPr/>
+          <p:nvPr/>
+        </p:nvSpPr>
+        <p:spPr>
+          <a:xfrm>
+            <a:off x="822960" y="3950207"/>
+            <a:ext cx="3703320" cy="146304"/>
+          </a:xfrm>
+          <a:prstGeom prst="roundRect">
+            <a:avLst/>
+          </a:prstGeom>
+          <a:solidFill>
+            <a:srgbClr val="2563EB"/>
+          </a:solidFill>
+          <a:ln>
+            <a:noFill/>
+          </a:ln>
+          <a:effectLst/>
+        </p:spPr>
+        <p:style>
+          <a:lnRef idx="1">
+            <a:schemeClr val="accent1"/>
+          </a:lnRef>
+          <a:fillRef idx="3">
+            <a:schemeClr val="accent1"/>
+          </a:fillRef>
+          <a:effectRef idx="2">
+            <a:schemeClr val="accent1"/>
+          </a:effectRef>
+          <a:fontRef idx="minor">
+            <a:schemeClr val="lt1"/>
+          </a:fontRef>
+        </p:style>
+        <p:txBody>
+          <a:bodyPr rtlCol="0" anchor="ctr"/>
+          <a:lstStyle/>
+          <a:p>
+            <a:pPr algn="ctr"/>
+          </a:p>
+        </p:txBody>
+      </p:sp>
+      <p:sp>
+        <p:nvSpPr>
+          <p:cNvPr id="28" name="TextBox 27"/>
+          <p:cNvSpPr txBox="1"/>
+          <p:nvPr/>
+        </p:nvSpPr>
+        <p:spPr>
+          <a:xfrm>
+            <a:off x="4617720" y="3867911"/>
+            <a:ext cx="1097280" cy="274320"/>
+          </a:xfrm>
+          <a:prstGeom prst="rect">
+            <a:avLst/>
+          </a:prstGeom>
+          <a:noFill/>
+        </p:spPr>
+        <p:txBody>
+          <a:bodyPr wrap="square" anchor="t" lIns="0" rIns="0" tIns="0" bIns="0">
+            <a:spAutoFit/>
+          </a:bodyPr>
+          <a:lstStyle/>
+          <a:p>
+            <a:pPr algn="l">
+              <a:lnSpc>
+                <a:spcPct val="100000"/>
+              </a:lnSpc>
+            </a:pPr>
+            <a:r>
+              <a:rPr sz="1050" b="1" i="0">
+                <a:solidFill>
+                  <a:srgbClr val="16273C"/>
+                </a:solidFill>
+                <a:latin typeface="Segoe UI Semibold"/>
+              </a:rPr>
+              <a:t>20.4k</a:t>
+            </a:r>
+          </a:p>
+        </p:txBody>
+      </p:sp>
+      <p:sp>
+        <p:nvSpPr>
+          <p:cNvPr id="29" name="TextBox 28"/>
+          <p:cNvSpPr txBox="1"/>
+          <p:nvPr/>
+        </p:nvSpPr>
+        <p:spPr>
+          <a:xfrm>
+            <a:off x="822960" y="4160519"/>
+            <a:ext cx="5577840" cy="274320"/>
+          </a:xfrm>
+          <a:prstGeom prst="rect">
+            <a:avLst/>
+          </a:prstGeom>
+          <a:noFill/>
+        </p:spPr>
+        <p:txBody>
+          <a:bodyPr wrap="square" anchor="t" lIns="0" rIns="0" tIns="0" bIns="0">
+            <a:spAutoFit/>
+          </a:bodyPr>
+          <a:lstStyle/>
+          <a:p>
+            <a:pPr algn="l">
+              <a:lnSpc>
+                <a:spcPct val="100000"/>
+              </a:lnSpc>
+            </a:pPr>
+            <a:r>
+              <a:rPr sz="1050" b="0" i="0">
+                <a:solidFill>
+                  <a:srgbClr val="374558"/>
+                </a:solidFill>
+                <a:latin typeface="Segoe UI"/>
+              </a:rPr>
+              <a:t>Cost engines + AI pipeline (backend)</a:t>
+            </a:r>
+          </a:p>
+        </p:txBody>
+      </p:sp>
+      <p:sp>
+        <p:nvSpPr>
           <p:cNvPr id="30" name="Rounded Rectangle 29"/>
           <p:cNvSpPr/>
           <p:nvPr/>
         </p:nvSpPr>
         <p:spPr>
           <a:xfrm>
-            <a:off x="10067544" y="1874519"/>
-            <a:ext cx="640080" cy="640080"/>
+            <a:off x="822960" y="4379975"/>
+            <a:ext cx="2051348" cy="146304"/>
+          </a:xfrm>
+          <a:prstGeom prst="roundRect">
+            <a:avLst/>
+          </a:prstGeom>
+          <a:solidFill>
+            <a:srgbClr val="0D9488"/>
+          </a:solidFill>
+          <a:ln>
+            <a:noFill/>
+          </a:ln>
+          <a:effectLst/>
+        </p:spPr>
+        <p:style>
+          <a:lnRef idx="1">
+            <a:schemeClr val="accent1"/>
+          </a:lnRef>
+          <a:fillRef idx="3">
+            <a:schemeClr val="accent1"/>
+          </a:fillRef>
+          <a:effectRef idx="2">
+            <a:schemeClr val="accent1"/>
+          </a:effectRef>
+          <a:fontRef idx="minor">
+            <a:schemeClr val="lt1"/>
+          </a:fontRef>
+        </p:style>
+        <p:txBody>
+          <a:bodyPr rtlCol="0" anchor="ctr"/>
+          <a:lstStyle/>
+          <a:p>
+            <a:pPr algn="ctr"/>
+          </a:p>
+        </p:txBody>
+      </p:sp>
+      <p:sp>
+        <p:nvSpPr>
+          <p:cNvPr id="31" name="TextBox 30"/>
+          <p:cNvSpPr txBox="1"/>
+          <p:nvPr/>
+        </p:nvSpPr>
+        <p:spPr>
+          <a:xfrm>
+            <a:off x="2965748" y="4297679"/>
+            <a:ext cx="1097280" cy="274320"/>
+          </a:xfrm>
+          <a:prstGeom prst="rect">
+            <a:avLst/>
+          </a:prstGeom>
+          <a:noFill/>
+        </p:spPr>
+        <p:txBody>
+          <a:bodyPr wrap="square" anchor="t" lIns="0" rIns="0" tIns="0" bIns="0">
+            <a:spAutoFit/>
+          </a:bodyPr>
+          <a:lstStyle/>
+          <a:p>
+            <a:pPr algn="l">
+              <a:lnSpc>
+                <a:spcPct val="100000"/>
+              </a:lnSpc>
+            </a:pPr>
+            <a:r>
+              <a:rPr sz="1050" b="1" i="0">
+                <a:solidFill>
+                  <a:srgbClr val="16273C"/>
+                </a:solidFill>
+                <a:latin typeface="Segoe UI Semibold"/>
+              </a:rPr>
+              <a:t>11.3k</a:t>
+            </a:r>
+          </a:p>
+        </p:txBody>
+      </p:sp>
+      <p:sp>
+        <p:nvSpPr>
+          <p:cNvPr id="32" name="TextBox 31"/>
+          <p:cNvSpPr txBox="1"/>
+          <p:nvPr/>
+        </p:nvSpPr>
+        <p:spPr>
+          <a:xfrm>
+            <a:off x="822960" y="4590287"/>
+            <a:ext cx="5577840" cy="274320"/>
+          </a:xfrm>
+          <a:prstGeom prst="rect">
+            <a:avLst/>
+          </a:prstGeom>
+          <a:noFill/>
+        </p:spPr>
+        <p:txBody>
+          <a:bodyPr wrap="square" anchor="t" lIns="0" rIns="0" tIns="0" bIns="0">
+            <a:spAutoFit/>
+          </a:bodyPr>
+          <a:lstStyle/>
+          <a:p>
+            <a:pPr algn="l">
+              <a:lnSpc>
+                <a:spcPct val="100000"/>
+              </a:lnSpc>
+            </a:pPr>
+            <a:r>
+              <a:rPr sz="1050" b="0" i="0">
+                <a:solidFill>
+                  <a:srgbClr val="374558"/>
+                </a:solidFill>
+                <a:latin typeface="Segoe UI"/>
+              </a:rPr>
+              <a:t>Curated knowledge bases (13 domains)</a:t>
+            </a:r>
+          </a:p>
+        </p:txBody>
+      </p:sp>
+      <p:sp>
+        <p:nvSpPr>
+          <p:cNvPr id="33" name="Rounded Rectangle 32"/>
+          <p:cNvSpPr/>
+          <p:nvPr/>
+        </p:nvSpPr>
+        <p:spPr>
+          <a:xfrm>
+            <a:off x="822960" y="4809743"/>
+            <a:ext cx="998444" cy="146304"/>
           </a:xfrm>
           <a:prstGeom prst="roundRect">
             <a:avLst/>
@@ -21954,14 +22144,426 @@
       </p:sp>
       <p:sp>
         <p:nvSpPr>
-          <p:cNvPr id="31" name="TextBox 30"/>
-          <p:cNvSpPr txBox="1"/>
-          <p:nvPr/>
-        </p:nvSpPr>
-        <p:spPr>
-          <a:xfrm>
-            <a:off x="10067544" y="1874519"/>
-            <a:ext cx="640080" cy="640080"/>
+          <p:cNvPr id="34" name="TextBox 33"/>
+          <p:cNvSpPr txBox="1"/>
+          <p:nvPr/>
+        </p:nvSpPr>
+        <p:spPr>
+          <a:xfrm>
+            <a:off x="1912844" y="4727447"/>
+            <a:ext cx="1097280" cy="274320"/>
+          </a:xfrm>
+          <a:prstGeom prst="rect">
+            <a:avLst/>
+          </a:prstGeom>
+          <a:noFill/>
+        </p:spPr>
+        <p:txBody>
+          <a:bodyPr wrap="square" anchor="t" lIns="0" rIns="0" tIns="0" bIns="0">
+            <a:spAutoFit/>
+          </a:bodyPr>
+          <a:lstStyle/>
+          <a:p>
+            <a:pPr algn="l">
+              <a:lnSpc>
+                <a:spcPct val="100000"/>
+              </a:lnSpc>
+            </a:pPr>
+            <a:r>
+              <a:rPr sz="1050" b="1" i="0">
+                <a:solidFill>
+                  <a:srgbClr val="16273C"/>
+                </a:solidFill>
+                <a:latin typeface="Segoe UI Semibold"/>
+              </a:rPr>
+              <a:t>5.5k</a:t>
+            </a:r>
+          </a:p>
+        </p:txBody>
+      </p:sp>
+      <p:sp>
+        <p:nvSpPr>
+          <p:cNvPr id="35" name="TextBox 34"/>
+          <p:cNvSpPr txBox="1"/>
+          <p:nvPr/>
+        </p:nvSpPr>
+        <p:spPr>
+          <a:xfrm>
+            <a:off x="822960" y="5020055"/>
+            <a:ext cx="5577840" cy="274320"/>
+          </a:xfrm>
+          <a:prstGeom prst="rect">
+            <a:avLst/>
+          </a:prstGeom>
+          <a:noFill/>
+        </p:spPr>
+        <p:txBody>
+          <a:bodyPr wrap="square" anchor="t" lIns="0" rIns="0" tIns="0" bIns="0">
+            <a:spAutoFit/>
+          </a:bodyPr>
+          <a:lstStyle/>
+          <a:p>
+            <a:pPr algn="l">
+              <a:lnSpc>
+                <a:spcPct val="100000"/>
+              </a:lnSpc>
+            </a:pPr>
+            <a:r>
+              <a:rPr sz="1050" b="0" i="0">
+                <a:solidFill>
+                  <a:srgbClr val="374558"/>
+                </a:solidFill>
+                <a:latin typeface="Segoe UI"/>
+              </a:rPr>
+              <a:t>Automated tests</a:t>
+            </a:r>
+          </a:p>
+        </p:txBody>
+      </p:sp>
+      <p:sp>
+        <p:nvSpPr>
+          <p:cNvPr id="36" name="Rounded Rectangle 35"/>
+          <p:cNvSpPr/>
+          <p:nvPr/>
+        </p:nvSpPr>
+        <p:spPr>
+          <a:xfrm>
+            <a:off x="822960" y="5239511"/>
+            <a:ext cx="544605" cy="146304"/>
+          </a:xfrm>
+          <a:prstGeom prst="roundRect">
+            <a:avLst/>
+          </a:prstGeom>
+          <a:solidFill>
+            <a:srgbClr val="059669"/>
+          </a:solidFill>
+          <a:ln>
+            <a:noFill/>
+          </a:ln>
+          <a:effectLst/>
+        </p:spPr>
+        <p:style>
+          <a:lnRef idx="1">
+            <a:schemeClr val="accent1"/>
+          </a:lnRef>
+          <a:fillRef idx="3">
+            <a:schemeClr val="accent1"/>
+          </a:fillRef>
+          <a:effectRef idx="2">
+            <a:schemeClr val="accent1"/>
+          </a:effectRef>
+          <a:fontRef idx="minor">
+            <a:schemeClr val="lt1"/>
+          </a:fontRef>
+        </p:style>
+        <p:txBody>
+          <a:bodyPr rtlCol="0" anchor="ctr"/>
+          <a:lstStyle/>
+          <a:p>
+            <a:pPr algn="ctr"/>
+          </a:p>
+        </p:txBody>
+      </p:sp>
+      <p:sp>
+        <p:nvSpPr>
+          <p:cNvPr id="37" name="TextBox 36"/>
+          <p:cNvSpPr txBox="1"/>
+          <p:nvPr/>
+        </p:nvSpPr>
+        <p:spPr>
+          <a:xfrm>
+            <a:off x="1459005" y="5157215"/>
+            <a:ext cx="1097280" cy="274320"/>
+          </a:xfrm>
+          <a:prstGeom prst="rect">
+            <a:avLst/>
+          </a:prstGeom>
+          <a:noFill/>
+        </p:spPr>
+        <p:txBody>
+          <a:bodyPr wrap="square" anchor="t" lIns="0" rIns="0" tIns="0" bIns="0">
+            <a:spAutoFit/>
+          </a:bodyPr>
+          <a:lstStyle/>
+          <a:p>
+            <a:pPr algn="l">
+              <a:lnSpc>
+                <a:spcPct val="100000"/>
+              </a:lnSpc>
+            </a:pPr>
+            <a:r>
+              <a:rPr sz="1050" b="1" i="0">
+                <a:solidFill>
+                  <a:srgbClr val="16273C"/>
+                </a:solidFill>
+                <a:latin typeface="Segoe UI Semibold"/>
+              </a:rPr>
+              <a:t>3.0k</a:t>
+            </a:r>
+          </a:p>
+        </p:txBody>
+      </p:sp>
+      <p:sp>
+        <p:nvSpPr>
+          <p:cNvPr id="38" name="TextBox 37"/>
+          <p:cNvSpPr txBox="1"/>
+          <p:nvPr/>
+        </p:nvSpPr>
+        <p:spPr>
+          <a:xfrm>
+            <a:off x="822960" y="5449823"/>
+            <a:ext cx="5577840" cy="274320"/>
+          </a:xfrm>
+          <a:prstGeom prst="rect">
+            <a:avLst/>
+          </a:prstGeom>
+          <a:noFill/>
+        </p:spPr>
+        <p:txBody>
+          <a:bodyPr wrap="square" anchor="t" lIns="0" rIns="0" tIns="0" bIns="0">
+            <a:spAutoFit/>
+          </a:bodyPr>
+          <a:lstStyle/>
+          <a:p>
+            <a:pPr algn="l">
+              <a:lnSpc>
+                <a:spcPct val="100000"/>
+              </a:lnSpc>
+            </a:pPr>
+            <a:r>
+              <a:rPr sz="1050" b="0" i="0">
+                <a:solidFill>
+                  <a:srgbClr val="374558"/>
+                </a:solidFill>
+                <a:latin typeface="Segoe UI"/>
+              </a:rPr>
+              <a:t>Benchmarks &amp; eval harnesses</a:t>
+            </a:r>
+          </a:p>
+        </p:txBody>
+      </p:sp>
+      <p:sp>
+        <p:nvSpPr>
+          <p:cNvPr id="39" name="Rounded Rectangle 38"/>
+          <p:cNvSpPr/>
+          <p:nvPr/>
+        </p:nvSpPr>
+        <p:spPr>
+          <a:xfrm>
+            <a:off x="822960" y="5669279"/>
+            <a:ext cx="326763" cy="146304"/>
+          </a:xfrm>
+          <a:prstGeom prst="roundRect">
+            <a:avLst/>
+          </a:prstGeom>
+          <a:solidFill>
+            <a:srgbClr val="7C3AED"/>
+          </a:solidFill>
+          <a:ln>
+            <a:noFill/>
+          </a:ln>
+          <a:effectLst/>
+        </p:spPr>
+        <p:style>
+          <a:lnRef idx="1">
+            <a:schemeClr val="accent1"/>
+          </a:lnRef>
+          <a:fillRef idx="3">
+            <a:schemeClr val="accent1"/>
+          </a:fillRef>
+          <a:effectRef idx="2">
+            <a:schemeClr val="accent1"/>
+          </a:effectRef>
+          <a:fontRef idx="minor">
+            <a:schemeClr val="lt1"/>
+          </a:fontRef>
+        </p:style>
+        <p:txBody>
+          <a:bodyPr rtlCol="0" anchor="ctr"/>
+          <a:lstStyle/>
+          <a:p>
+            <a:pPr algn="ctr"/>
+          </a:p>
+        </p:txBody>
+      </p:sp>
+      <p:sp>
+        <p:nvSpPr>
+          <p:cNvPr id="40" name="TextBox 39"/>
+          <p:cNvSpPr txBox="1"/>
+          <p:nvPr/>
+        </p:nvSpPr>
+        <p:spPr>
+          <a:xfrm>
+            <a:off x="1241163" y="5586983"/>
+            <a:ext cx="1097280" cy="274320"/>
+          </a:xfrm>
+          <a:prstGeom prst="rect">
+            <a:avLst/>
+          </a:prstGeom>
+          <a:noFill/>
+        </p:spPr>
+        <p:txBody>
+          <a:bodyPr wrap="square" anchor="t" lIns="0" rIns="0" tIns="0" bIns="0">
+            <a:spAutoFit/>
+          </a:bodyPr>
+          <a:lstStyle/>
+          <a:p>
+            <a:pPr algn="l">
+              <a:lnSpc>
+                <a:spcPct val="100000"/>
+              </a:lnSpc>
+            </a:pPr>
+            <a:r>
+              <a:rPr sz="1050" b="1" i="0">
+                <a:solidFill>
+                  <a:srgbClr val="16273C"/>
+                </a:solidFill>
+                <a:latin typeface="Segoe UI Semibold"/>
+              </a:rPr>
+              <a:t>1.8k</a:t>
+            </a:r>
+          </a:p>
+        </p:txBody>
+      </p:sp>
+      <p:sp>
+        <p:nvSpPr>
+          <p:cNvPr id="41" name="Rounded Rectangle 40"/>
+          <p:cNvSpPr/>
+          <p:nvPr/>
+        </p:nvSpPr>
+        <p:spPr>
+          <a:xfrm>
+            <a:off x="6995160" y="3200400"/>
+            <a:ext cx="4645152" cy="2834640"/>
+          </a:xfrm>
+          <a:prstGeom prst="roundRect">
+            <a:avLst/>
+          </a:prstGeom>
+          <a:solidFill>
+            <a:srgbClr val="FFFFFF"/>
+          </a:solidFill>
+          <a:ln w="12700">
+            <a:solidFill>
+              <a:srgbClr val="D8E0EA"/>
+            </a:solidFill>
+          </a:ln>
+          <a:effectLst/>
+        </p:spPr>
+        <p:style>
+          <a:lnRef idx="1">
+            <a:schemeClr val="accent1"/>
+          </a:lnRef>
+          <a:fillRef idx="3">
+            <a:schemeClr val="accent1"/>
+          </a:fillRef>
+          <a:effectRef idx="2">
+            <a:schemeClr val="accent1"/>
+          </a:effectRef>
+          <a:fontRef idx="minor">
+            <a:schemeClr val="lt1"/>
+          </a:fontRef>
+        </p:style>
+        <p:txBody>
+          <a:bodyPr rtlCol="0" anchor="ctr"/>
+          <a:lstStyle/>
+          <a:p>
+            <a:pPr algn="ctr"/>
+          </a:p>
+        </p:txBody>
+      </p:sp>
+      <p:sp>
+        <p:nvSpPr>
+          <p:cNvPr id="42" name="TextBox 41"/>
+          <p:cNvSpPr txBox="1"/>
+          <p:nvPr/>
+        </p:nvSpPr>
+        <p:spPr>
+          <a:xfrm>
+            <a:off x="7269480" y="3337560"/>
+            <a:ext cx="4114800" cy="320040"/>
+          </a:xfrm>
+          <a:prstGeom prst="rect">
+            <a:avLst/>
+          </a:prstGeom>
+          <a:noFill/>
+        </p:spPr>
+        <p:txBody>
+          <a:bodyPr wrap="square" anchor="t" lIns="0" rIns="0" tIns="0" bIns="0">
+            <a:spAutoFit/>
+          </a:bodyPr>
+          <a:lstStyle/>
+          <a:p>
+            <a:pPr algn="l">
+              <a:lnSpc>
+                <a:spcPct val="100000"/>
+              </a:lnSpc>
+            </a:pPr>
+            <a:r>
+              <a:rPr sz="1100" b="1" i="0">
+                <a:solidFill>
+                  <a:srgbClr val="8390A1"/>
+                </a:solidFill>
+                <a:latin typeface="Segoe UI Semibold"/>
+              </a:rPr>
+              <a:t>WHAT THAT DISCIPLINE BUYS</a:t>
+            </a:r>
+          </a:p>
+        </p:txBody>
+      </p:sp>
+      <p:sp>
+        <p:nvSpPr>
+          <p:cNvPr id="43" name="Rounded Rectangle 42"/>
+          <p:cNvSpPr/>
+          <p:nvPr/>
+        </p:nvSpPr>
+        <p:spPr>
+          <a:xfrm>
+            <a:off x="7269480" y="3730752"/>
+            <a:ext cx="310896" cy="310896"/>
+          </a:xfrm>
+          <a:prstGeom prst="roundRect">
+            <a:avLst/>
+          </a:prstGeom>
+          <a:solidFill>
+            <a:srgbClr val="059669"/>
+          </a:solidFill>
+          <a:ln>
+            <a:noFill/>
+          </a:ln>
+          <a:effectLst/>
+        </p:spPr>
+        <p:style>
+          <a:lnRef idx="1">
+            <a:schemeClr val="accent1"/>
+          </a:lnRef>
+          <a:fillRef idx="3">
+            <a:schemeClr val="accent1"/>
+          </a:fillRef>
+          <a:effectRef idx="2">
+            <a:schemeClr val="accent1"/>
+          </a:effectRef>
+          <a:fontRef idx="minor">
+            <a:schemeClr val="lt1"/>
+          </a:fontRef>
+        </p:style>
+        <p:txBody>
+          <a:bodyPr rtlCol="0" anchor="ctr"/>
+          <a:lstStyle/>
+          <a:p>
+            <a:pPr algn="ctr"/>
+          </a:p>
+        </p:txBody>
+      </p:sp>
+      <p:sp>
+        <p:nvSpPr>
+          <p:cNvPr id="44" name="TextBox 43"/>
+          <p:cNvSpPr txBox="1"/>
+          <p:nvPr/>
+        </p:nvSpPr>
+        <p:spPr>
+          <a:xfrm>
+            <a:off x="7269480" y="3730752"/>
+            <a:ext cx="310896" cy="310896"/>
           </a:xfrm>
           <a:prstGeom prst="rect">
             <a:avLst/>
@@ -21986,21 +22588,21 @@
                 </a:solidFill>
                 <a:latin typeface="Arial"/>
               </a:rPr>
-              <a:t>★</a:t>
-            </a:r>
-          </a:p>
-        </p:txBody>
-      </p:sp>
-      <p:sp>
-        <p:nvSpPr>
-          <p:cNvPr id="32" name="TextBox 31"/>
-          <p:cNvSpPr txBox="1"/>
-          <p:nvPr/>
-        </p:nvSpPr>
-        <p:spPr>
-          <a:xfrm>
-            <a:off x="8997696" y="2651760"/>
-            <a:ext cx="2697480" cy="365760"/>
+              <a:t>✓</a:t>
+            </a:r>
+          </a:p>
+        </p:txBody>
+      </p:sp>
+      <p:sp>
+        <p:nvSpPr>
+          <p:cNvPr id="45" name="TextBox 44"/>
+          <p:cNvSpPr txBox="1"/>
+          <p:nvPr/>
+        </p:nvSpPr>
+        <p:spPr>
+          <a:xfrm>
+            <a:off x="7726679" y="3712464"/>
+            <a:ext cx="3749039" cy="548640"/>
           </a:xfrm>
           <a:prstGeom prst="rect">
             <a:avLst/>
@@ -22013,33 +22615,116 @@
           </a:bodyPr>
           <a:lstStyle/>
           <a:p>
+            <a:pPr algn="l">
+              <a:lnSpc>
+                <a:spcPct val="103000"/>
+              </a:lnSpc>
+            </a:pPr>
+            <a:r>
+              <a:rPr sz="1050" b="0" i="0">
+                <a:solidFill>
+                  <a:srgbClr val="374558"/>
+                </a:solidFill>
+                <a:latin typeface="Segoe UI"/>
+              </a:rPr>
+              <a:t>Every cost engine ships with unit tests — 283 run on every change</a:t>
+            </a:r>
+          </a:p>
+        </p:txBody>
+      </p:sp>
+      <p:sp>
+        <p:nvSpPr>
+          <p:cNvPr id="46" name="Rounded Rectangle 45"/>
+          <p:cNvSpPr/>
+          <p:nvPr/>
+        </p:nvSpPr>
+        <p:spPr>
+          <a:xfrm>
+            <a:off x="7269480" y="4297680"/>
+            <a:ext cx="310896" cy="310896"/>
+          </a:xfrm>
+          <a:prstGeom prst="roundRect">
+            <a:avLst/>
+          </a:prstGeom>
+          <a:solidFill>
+            <a:srgbClr val="059669"/>
+          </a:solidFill>
+          <a:ln>
+            <a:noFill/>
+          </a:ln>
+          <a:effectLst/>
+        </p:spPr>
+        <p:style>
+          <a:lnRef idx="1">
+            <a:schemeClr val="accent1"/>
+          </a:lnRef>
+          <a:fillRef idx="3">
+            <a:schemeClr val="accent1"/>
+          </a:fillRef>
+          <a:effectRef idx="2">
+            <a:schemeClr val="accent1"/>
+          </a:effectRef>
+          <a:fontRef idx="minor">
+            <a:schemeClr val="lt1"/>
+          </a:fontRef>
+        </p:style>
+        <p:txBody>
+          <a:bodyPr rtlCol="0" anchor="ctr"/>
+          <a:lstStyle/>
+          <a:p>
+            <a:pPr algn="ctr"/>
+          </a:p>
+        </p:txBody>
+      </p:sp>
+      <p:sp>
+        <p:nvSpPr>
+          <p:cNvPr id="47" name="TextBox 46"/>
+          <p:cNvSpPr txBox="1"/>
+          <p:nvPr/>
+        </p:nvSpPr>
+        <p:spPr>
+          <a:xfrm>
+            <a:off x="7269480" y="4297680"/>
+            <a:ext cx="310896" cy="310896"/>
+          </a:xfrm>
+          <a:prstGeom prst="rect">
+            <a:avLst/>
+          </a:prstGeom>
+          <a:noFill/>
+        </p:spPr>
+        <p:txBody>
+          <a:bodyPr wrap="square" anchor="ctr" lIns="0" rIns="0" tIns="0" bIns="0">
+            <a:spAutoFit/>
+          </a:bodyPr>
+          <a:lstStyle/>
+          <a:p>
             <a:pPr algn="ctr">
               <a:lnSpc>
                 <a:spcPct val="100000"/>
               </a:lnSpc>
             </a:pPr>
             <a:r>
-              <a:rPr sz="1700" b="1" i="0">
-                <a:solidFill>
-                  <a:srgbClr val="16273C"/>
-                </a:solidFill>
-                <a:latin typeface="Segoe UI Semibold"/>
-              </a:rPr>
-              <a:t>Leverage</a:t>
-            </a:r>
-          </a:p>
-        </p:txBody>
-      </p:sp>
-      <p:sp>
-        <p:nvSpPr>
-          <p:cNvPr id="33" name="TextBox 32"/>
-          <p:cNvSpPr txBox="1"/>
-          <p:nvPr/>
-        </p:nvSpPr>
-        <p:spPr>
-          <a:xfrm>
-            <a:off x="9180576" y="3063240"/>
-            <a:ext cx="2331720" cy="457200"/>
+              <a:rPr sz="1800" b="1" i="0">
+                <a:solidFill>
+                  <a:srgbClr val="FFFFFF"/>
+                </a:solidFill>
+                <a:latin typeface="Arial"/>
+              </a:rPr>
+              <a:t>✓</a:t>
+            </a:r>
+          </a:p>
+        </p:txBody>
+      </p:sp>
+      <p:sp>
+        <p:nvSpPr>
+          <p:cNvPr id="48" name="TextBox 47"/>
+          <p:cNvSpPr txBox="1"/>
+          <p:nvPr/>
+        </p:nvSpPr>
+        <p:spPr>
+          <a:xfrm>
+            <a:off x="7726679" y="4279392"/>
+            <a:ext cx="3749039" cy="548640"/>
           </a:xfrm>
           <a:prstGeom prst="rect">
             <a:avLst/>
@@ -22052,33 +22737,116 @@
           </a:bodyPr>
           <a:lstStyle/>
           <a:p>
+            <a:pPr algn="l">
+              <a:lnSpc>
+                <a:spcPct val="103000"/>
+              </a:lnSpc>
+            </a:pPr>
+            <a:r>
+              <a:rPr sz="1050" b="0" i="0">
+                <a:solidFill>
+                  <a:srgbClr val="374558"/>
+                </a:solidFill>
+                <a:latin typeface="Segoe UI"/>
+              </a:rPr>
+              <a:t>Accuracy proven on held-out parts, not tuned to look good</a:t>
+            </a:r>
+          </a:p>
+        </p:txBody>
+      </p:sp>
+      <p:sp>
+        <p:nvSpPr>
+          <p:cNvPr id="49" name="Rounded Rectangle 48"/>
+          <p:cNvSpPr/>
+          <p:nvPr/>
+        </p:nvSpPr>
+        <p:spPr>
+          <a:xfrm>
+            <a:off x="7269480" y="4864608"/>
+            <a:ext cx="310896" cy="310896"/>
+          </a:xfrm>
+          <a:prstGeom prst="roundRect">
+            <a:avLst/>
+          </a:prstGeom>
+          <a:solidFill>
+            <a:srgbClr val="059669"/>
+          </a:solidFill>
+          <a:ln>
+            <a:noFill/>
+          </a:ln>
+          <a:effectLst/>
+        </p:spPr>
+        <p:style>
+          <a:lnRef idx="1">
+            <a:schemeClr val="accent1"/>
+          </a:lnRef>
+          <a:fillRef idx="3">
+            <a:schemeClr val="accent1"/>
+          </a:fillRef>
+          <a:effectRef idx="2">
+            <a:schemeClr val="accent1"/>
+          </a:effectRef>
+          <a:fontRef idx="minor">
+            <a:schemeClr val="lt1"/>
+          </a:fontRef>
+        </p:style>
+        <p:txBody>
+          <a:bodyPr rtlCol="0" anchor="ctr"/>
+          <a:lstStyle/>
+          <a:p>
+            <a:pPr algn="ctr"/>
+          </a:p>
+        </p:txBody>
+      </p:sp>
+      <p:sp>
+        <p:nvSpPr>
+          <p:cNvPr id="50" name="TextBox 49"/>
+          <p:cNvSpPr txBox="1"/>
+          <p:nvPr/>
+        </p:nvSpPr>
+        <p:spPr>
+          <a:xfrm>
+            <a:off x="7269480" y="4864608"/>
+            <a:ext cx="310896" cy="310896"/>
+          </a:xfrm>
+          <a:prstGeom prst="rect">
+            <a:avLst/>
+          </a:prstGeom>
+          <a:noFill/>
+        </p:spPr>
+        <p:txBody>
+          <a:bodyPr wrap="square" anchor="ctr" lIns="0" rIns="0" tIns="0" bIns="0">
+            <a:spAutoFit/>
+          </a:bodyPr>
+          <a:lstStyle/>
+          <a:p>
             <a:pPr algn="ctr">
               <a:lnSpc>
                 <a:spcPct val="100000"/>
               </a:lnSpc>
             </a:pPr>
             <a:r>
-              <a:rPr sz="1200" b="1" i="0">
-                <a:solidFill>
-                  <a:srgbClr val="B47609"/>
-                </a:solidFill>
-                <a:latin typeface="Segoe UI Semibold"/>
-              </a:rPr>
-              <a:t>Capture know-how</a:t>
-            </a:r>
-          </a:p>
-        </p:txBody>
-      </p:sp>
-      <p:sp>
-        <p:nvSpPr>
-          <p:cNvPr id="34" name="TextBox 33"/>
-          <p:cNvSpPr txBox="1"/>
-          <p:nvPr/>
-        </p:nvSpPr>
-        <p:spPr>
-          <a:xfrm>
-            <a:off x="9253728" y="3657600"/>
-            <a:ext cx="2194560" cy="1828800"/>
+              <a:rPr sz="1800" b="1" i="0">
+                <a:solidFill>
+                  <a:srgbClr val="FFFFFF"/>
+                </a:solidFill>
+                <a:latin typeface="Arial"/>
+              </a:rPr>
+              <a:t>✓</a:t>
+            </a:r>
+          </a:p>
+        </p:txBody>
+      </p:sp>
+      <p:sp>
+        <p:nvSpPr>
+          <p:cNvPr id="51" name="TextBox 50"/>
+          <p:cNvSpPr txBox="1"/>
+          <p:nvPr/>
+        </p:nvSpPr>
+        <p:spPr>
+          <a:xfrm>
+            <a:off x="7726679" y="4846320"/>
+            <a:ext cx="3749039" cy="548640"/>
           </a:xfrm>
           <a:prstGeom prst="rect">
             <a:avLst/>
@@ -22091,67 +22859,141 @@
           </a:bodyPr>
           <a:lstStyle/>
           <a:p>
+            <a:pPr algn="l">
+              <a:lnSpc>
+                <a:spcPct val="103000"/>
+              </a:lnSpc>
+            </a:pPr>
+            <a:r>
+              <a:rPr sz="1050" b="0" i="0">
+                <a:solidFill>
+                  <a:srgbClr val="374558"/>
+                </a:solidFill>
+                <a:latin typeface="Segoe UI"/>
+              </a:rPr>
+              <a:t>Even AI changes are A/B-measured by a benchmark harness</a:t>
+            </a:r>
+          </a:p>
+        </p:txBody>
+      </p:sp>
+      <p:sp>
+        <p:nvSpPr>
+          <p:cNvPr id="52" name="Rounded Rectangle 51"/>
+          <p:cNvSpPr/>
+          <p:nvPr/>
+        </p:nvSpPr>
+        <p:spPr>
+          <a:xfrm>
+            <a:off x="7269480" y="5431536"/>
+            <a:ext cx="310896" cy="310896"/>
+          </a:xfrm>
+          <a:prstGeom prst="roundRect">
+            <a:avLst/>
+          </a:prstGeom>
+          <a:solidFill>
+            <a:srgbClr val="059669"/>
+          </a:solidFill>
+          <a:ln>
+            <a:noFill/>
+          </a:ln>
+          <a:effectLst/>
+        </p:spPr>
+        <p:style>
+          <a:lnRef idx="1">
+            <a:schemeClr val="accent1"/>
+          </a:lnRef>
+          <a:fillRef idx="3">
+            <a:schemeClr val="accent1"/>
+          </a:fillRef>
+          <a:effectRef idx="2">
+            <a:schemeClr val="accent1"/>
+          </a:effectRef>
+          <a:fontRef idx="minor">
+            <a:schemeClr val="lt1"/>
+          </a:fontRef>
+        </p:style>
+        <p:txBody>
+          <a:bodyPr rtlCol="0" anchor="ctr"/>
+          <a:lstStyle/>
+          <a:p>
+            <a:pPr algn="ctr"/>
+          </a:p>
+        </p:txBody>
+      </p:sp>
+      <p:sp>
+        <p:nvSpPr>
+          <p:cNvPr id="53" name="TextBox 52"/>
+          <p:cNvSpPr txBox="1"/>
+          <p:nvPr/>
+        </p:nvSpPr>
+        <p:spPr>
+          <a:xfrm>
+            <a:off x="7269480" y="5431536"/>
+            <a:ext cx="310896" cy="310896"/>
+          </a:xfrm>
+          <a:prstGeom prst="rect">
+            <a:avLst/>
+          </a:prstGeom>
+          <a:noFill/>
+        </p:spPr>
+        <p:txBody>
+          <a:bodyPr wrap="square" anchor="ctr" lIns="0" rIns="0" tIns="0" bIns="0">
+            <a:spAutoFit/>
+          </a:bodyPr>
+          <a:lstStyle/>
+          <a:p>
             <a:pPr algn="ctr">
               <a:lnSpc>
-                <a:spcPct val="106000"/>
-              </a:lnSpc>
-            </a:pPr>
-            <a:r>
-              <a:rPr sz="1150" b="0" i="0">
-                <a:solidFill>
-                  <a:srgbClr val="556477"/>
+                <a:spcPct val="100000"/>
+              </a:lnSpc>
+            </a:pPr>
+            <a:r>
+              <a:rPr sz="1800" b="1" i="0">
+                <a:solidFill>
+                  <a:srgbClr val="FFFFFF"/>
+                </a:solidFill>
+                <a:latin typeface="Arial"/>
+              </a:rPr>
+              <a:t>✓</a:t>
+            </a:r>
+          </a:p>
+        </p:txBody>
+      </p:sp>
+      <p:sp>
+        <p:nvSpPr>
+          <p:cNvPr id="54" name="TextBox 53"/>
+          <p:cNvSpPr txBox="1"/>
+          <p:nvPr/>
+        </p:nvSpPr>
+        <p:spPr>
+          <a:xfrm>
+            <a:off x="7726679" y="5413248"/>
+            <a:ext cx="3749039" cy="548640"/>
+          </a:xfrm>
+          <a:prstGeom prst="rect">
+            <a:avLst/>
+          </a:prstGeom>
+          <a:noFill/>
+        </p:spPr>
+        <p:txBody>
+          <a:bodyPr wrap="square" anchor="t" lIns="0" rIns="0" tIns="0" bIns="0">
+            <a:spAutoFit/>
+          </a:bodyPr>
+          <a:lstStyle/>
+          <a:p>
+            <a:pPr algn="l">
+              <a:lnSpc>
+                <a:spcPct val="103000"/>
+              </a:lnSpc>
+            </a:pPr>
+            <a:r>
+              <a:rPr sz="1050" b="0" i="0">
+                <a:solidFill>
+                  <a:srgbClr val="374558"/>
                 </a:solidFill>
                 <a:latin typeface="Segoe UI"/>
               </a:rPr>
-              <a:t>Turns scattered OEM best-practice into a reusable, searchable asset for the whole team.</a:t>
-            </a:r>
-          </a:p>
-        </p:txBody>
-      </p:sp>
-      <p:sp>
-        <p:nvSpPr>
-          <p:cNvPr id="35" name="TextBox 34"/>
-          <p:cNvSpPr txBox="1"/>
-          <p:nvPr/>
-        </p:nvSpPr>
-        <p:spPr>
-          <a:xfrm>
-            <a:off x="548640" y="5760720"/>
-            <a:ext cx="10972800" cy="457200"/>
-          </a:xfrm>
-          <a:prstGeom prst="rect">
-            <a:avLst/>
-          </a:prstGeom>
-          <a:noFill/>
-        </p:spPr>
-        <p:txBody>
-          <a:bodyPr wrap="square" anchor="t" lIns="0" rIns="0" tIns="0" bIns="0">
-            <a:spAutoFit/>
-          </a:bodyPr>
-          <a:lstStyle/>
-          <a:p>
-            <a:pPr algn="ctr">
-              <a:lnSpc>
-                <a:spcPct val="100000"/>
-              </a:lnSpc>
-            </a:pPr>
-            <a:r>
-              <a:rPr sz="1400" b="1" i="0">
-                <a:solidFill>
-                  <a:srgbClr val="B47609"/>
-                </a:solidFill>
-                <a:latin typeface="Segoe UI Semibold"/>
-              </a:rPr>
-              <a:t>Net effect:  </a:t>
-            </a:r>
-            <a:r>
-              <a:rPr sz="1400" b="1" i="0">
-                <a:solidFill>
-                  <a:srgbClr val="374558"/>
-                </a:solidFill>
-                <a:latin typeface="Segoe UI"/>
-              </a:rPr>
-              <a:t>more cost-down ideas, found earlier, defended better — and captured as reusable team knowledge.</a:t>
+              <a:t>One person, nights &amp; weekends — from idea to working platform</a:t>
             </a:r>
           </a:p>
         </p:txBody>
@@ -22191,7 +23033,51 @@
         <p:spPr>
           <a:xfrm>
             <a:off x="0" y="0"/>
-            <a:ext cx="320040" cy="6858000"/>
+            <a:ext cx="12191695" cy="1234440"/>
+          </a:xfrm>
+          <a:prstGeom prst="rect">
+            <a:avLst/>
+          </a:prstGeom>
+          <a:solidFill>
+            <a:srgbClr val="FFFFFF"/>
+          </a:solidFill>
+          <a:ln>
+            <a:noFill/>
+          </a:ln>
+          <a:effectLst/>
+        </p:spPr>
+        <p:style>
+          <a:lnRef idx="1">
+            <a:schemeClr val="accent1"/>
+          </a:lnRef>
+          <a:fillRef idx="3">
+            <a:schemeClr val="accent1"/>
+          </a:fillRef>
+          <a:effectRef idx="2">
+            <a:schemeClr val="accent1"/>
+          </a:effectRef>
+          <a:fontRef idx="minor">
+            <a:schemeClr val="lt1"/>
+          </a:fontRef>
+        </p:style>
+        <p:txBody>
+          <a:bodyPr rtlCol="0" anchor="ctr"/>
+          <a:lstStyle/>
+          <a:p>
+            <a:pPr algn="ctr"/>
+          </a:p>
+        </p:txBody>
+      </p:sp>
+      <p:sp>
+        <p:nvSpPr>
+          <p:cNvPr id="3" name="Rectangle 2"/>
+          <p:cNvSpPr/>
+          <p:nvPr/>
+        </p:nvSpPr>
+        <p:spPr>
+          <a:xfrm>
+            <a:off x="0" y="1234440"/>
+            <a:ext cx="12191695" cy="38100"/>
           </a:xfrm>
           <a:prstGeom prst="rect">
             <a:avLst/>
@@ -22228,14 +23114,14 @@
       </p:sp>
       <p:sp>
         <p:nvSpPr>
-          <p:cNvPr id="3" name="Rectangle 2"/>
+          <p:cNvPr id="4" name="Rectangle 3"/>
           <p:cNvSpPr/>
           <p:nvPr/>
         </p:nvSpPr>
         <p:spPr>
           <a:xfrm>
-            <a:off x="320040" y="0"/>
-            <a:ext cx="109728" cy="6858000"/>
+            <a:off x="502920" y="384048"/>
+            <a:ext cx="100584" cy="502920"/>
           </a:xfrm>
           <a:prstGeom prst="rect">
             <a:avLst/>
@@ -22272,20 +23158,98 @@
       </p:sp>
       <p:sp>
         <p:nvSpPr>
-          <p:cNvPr id="4" name="Oval 3"/>
+          <p:cNvPr id="5" name="TextBox 4"/>
+          <p:cNvSpPr txBox="1"/>
+          <p:nvPr/>
+        </p:nvSpPr>
+        <p:spPr>
+          <a:xfrm>
+            <a:off x="777240" y="256032"/>
+            <a:ext cx="9601200" cy="320040"/>
+          </a:xfrm>
+          <a:prstGeom prst="rect">
+            <a:avLst/>
+          </a:prstGeom>
+          <a:noFill/>
+        </p:spPr>
+        <p:txBody>
+          <a:bodyPr wrap="square" anchor="t" lIns="0" rIns="0" tIns="0" bIns="0">
+            <a:spAutoFit/>
+          </a:bodyPr>
+          <a:lstStyle/>
+          <a:p>
+            <a:pPr algn="l">
+              <a:lnSpc>
+                <a:spcPct val="100000"/>
+              </a:lnSpc>
+            </a:pPr>
+            <a:r>
+              <a:rPr sz="1200" b="1" i="0">
+                <a:solidFill>
+                  <a:srgbClr val="0D9488"/>
+                </a:solidFill>
+                <a:latin typeface="Segoe UI Semibold"/>
+              </a:rPr>
+              <a:t>THE VALUE</a:t>
+            </a:r>
+          </a:p>
+        </p:txBody>
+      </p:sp>
+      <p:sp>
+        <p:nvSpPr>
+          <p:cNvPr id="6" name="TextBox 5"/>
+          <p:cNvSpPr txBox="1"/>
+          <p:nvPr/>
+        </p:nvSpPr>
+        <p:spPr>
+          <a:xfrm>
+            <a:off x="777240" y="548640"/>
+            <a:ext cx="10332720" cy="548640"/>
+          </a:xfrm>
+          <a:prstGeom prst="rect">
+            <a:avLst/>
+          </a:prstGeom>
+          <a:noFill/>
+        </p:spPr>
+        <p:txBody>
+          <a:bodyPr wrap="square" anchor="t" lIns="0" rIns="0" tIns="0" bIns="0">
+            <a:spAutoFit/>
+          </a:bodyPr>
+          <a:lstStyle/>
+          <a:p>
+            <a:pPr algn="l">
+              <a:lnSpc>
+                <a:spcPct val="100000"/>
+              </a:lnSpc>
+            </a:pPr>
+            <a:r>
+              <a:rPr sz="2700" b="1" i="0">
+                <a:solidFill>
+                  <a:srgbClr val="16273C"/>
+                </a:solidFill>
+                <a:latin typeface="Segoe UI Semibold"/>
+              </a:rPr>
+              <a:t>Benefits &amp; Business Impact</a:t>
+            </a:r>
+          </a:p>
+        </p:txBody>
+      </p:sp>
+      <p:sp>
+        <p:nvSpPr>
+          <p:cNvPr id="7" name="Rounded Rectangle 6"/>
           <p:cNvSpPr/>
           <p:nvPr/>
         </p:nvSpPr>
         <p:spPr>
           <a:xfrm>
-            <a:off x="8686800" y="-914400"/>
-            <a:ext cx="5029200" cy="5029200"/>
-          </a:xfrm>
-          <a:prstGeom prst="ellipse">
+            <a:off x="11292840" y="457200"/>
+            <a:ext cx="502920" cy="365760"/>
+          </a:xfrm>
+          <a:prstGeom prst="roundRect">
             <a:avLst/>
           </a:prstGeom>
           <a:solidFill>
-            <a:srgbClr val="FFFFFF"/>
+            <a:srgbClr val="E4EAF1"/>
           </a:solidFill>
           <a:ln>
             <a:noFill/>
@@ -22316,14 +23280,14 @@
       </p:sp>
       <p:sp>
         <p:nvSpPr>
-          <p:cNvPr id="5" name="TextBox 4"/>
-          <p:cNvSpPr txBox="1"/>
-          <p:nvPr/>
-        </p:nvSpPr>
-        <p:spPr>
-          <a:xfrm>
-            <a:off x="1005840" y="1371600"/>
-            <a:ext cx="7315200" cy="457200"/>
+          <p:cNvPr id="8" name="TextBox 7"/>
+          <p:cNvSpPr txBox="1"/>
+          <p:nvPr/>
+        </p:nvSpPr>
+        <p:spPr>
+          <a:xfrm>
+            <a:off x="11292840" y="484632"/>
+            <a:ext cx="502920" cy="320040"/>
           </a:xfrm>
           <a:prstGeom prst="rect">
             <a:avLst/>
@@ -22336,33 +23300,288 @@
           </a:bodyPr>
           <a:lstStyle/>
           <a:p>
+            <a:pPr algn="ctr">
+              <a:lnSpc>
+                <a:spcPct val="100000"/>
+              </a:lnSpc>
+            </a:pPr>
+            <a:r>
+              <a:rPr sz="1300" b="1" i="0">
+                <a:solidFill>
+                  <a:srgbClr val="556477"/>
+                </a:solidFill>
+                <a:latin typeface="Segoe UI"/>
+              </a:rPr>
+              <a:t>18</a:t>
+            </a:r>
+          </a:p>
+        </p:txBody>
+      </p:sp>
+      <p:sp>
+        <p:nvSpPr>
+          <p:cNvPr id="9" name="TextBox 8"/>
+          <p:cNvSpPr txBox="1"/>
+          <p:nvPr/>
+        </p:nvSpPr>
+        <p:spPr>
+          <a:xfrm>
+            <a:off x="777240" y="6455664"/>
+            <a:ext cx="7315200" cy="274320"/>
+          </a:xfrm>
+          <a:prstGeom prst="rect">
+            <a:avLst/>
+          </a:prstGeom>
+          <a:noFill/>
+        </p:spPr>
+        <p:txBody>
+          <a:bodyPr wrap="square" anchor="t" lIns="0" rIns="0" tIns="0" bIns="0">
+            <a:spAutoFit/>
+          </a:bodyPr>
+          <a:lstStyle/>
+          <a:p>
             <a:pPr algn="l">
               <a:lnSpc>
                 <a:spcPct val="100000"/>
               </a:lnSpc>
             </a:pPr>
             <a:r>
-              <a:rPr sz="1500" b="1" i="0">
+              <a:rPr sz="900" b="1" i="0">
                 <a:solidFill>
                   <a:srgbClr val="0D9488"/>
                 </a:solidFill>
+                <a:latin typeface="Segoe UI"/>
+              </a:rPr>
+              <a:t>BrainSpark</a:t>
+            </a:r>
+            <a:r>
+              <a:rPr sz="900" b="0" i="0">
+                <a:solidFill>
+                  <a:srgbClr val="8390A1"/>
+                </a:solidFill>
+                <a:latin typeface="Segoe UI"/>
+              </a:rPr>
+              <a:t>  ·  AI-Powered Cost Engineering Platform</a:t>
+            </a:r>
+          </a:p>
+        </p:txBody>
+      </p:sp>
+      <p:sp>
+        <p:nvSpPr>
+          <p:cNvPr id="10" name="TextBox 9"/>
+          <p:cNvSpPr txBox="1"/>
+          <p:nvPr/>
+        </p:nvSpPr>
+        <p:spPr>
+          <a:xfrm>
+            <a:off x="8686800" y="6455664"/>
+            <a:ext cx="2743200" cy="274320"/>
+          </a:xfrm>
+          <a:prstGeom prst="rect">
+            <a:avLst/>
+          </a:prstGeom>
+          <a:noFill/>
+        </p:spPr>
+        <p:txBody>
+          <a:bodyPr wrap="square" anchor="t" lIns="0" rIns="0" tIns="0" bIns="0">
+            <a:spAutoFit/>
+          </a:bodyPr>
+          <a:lstStyle/>
+          <a:p>
+            <a:pPr algn="r">
+              <a:lnSpc>
+                <a:spcPct val="100000"/>
+              </a:lnSpc>
+            </a:pPr>
+            <a:r>
+              <a:rPr sz="900" b="0" i="0">
+                <a:solidFill>
+                  <a:srgbClr val="8390A1"/>
+                </a:solidFill>
+                <a:latin typeface="Segoe UI"/>
+              </a:rPr>
+              <a:t>Confidential — Internal</a:t>
+            </a:r>
+          </a:p>
+        </p:txBody>
+      </p:sp>
+      <p:sp>
+        <p:nvSpPr>
+          <p:cNvPr id="11" name="Rounded Rectangle 10"/>
+          <p:cNvSpPr/>
+          <p:nvPr/>
+        </p:nvSpPr>
+        <p:spPr>
+          <a:xfrm>
+            <a:off x="548640" y="1600200"/>
+            <a:ext cx="2697480" cy="3977639"/>
+          </a:xfrm>
+          <a:prstGeom prst="roundRect">
+            <a:avLst/>
+          </a:prstGeom>
+          <a:solidFill>
+            <a:srgbClr val="FFFFFF"/>
+          </a:solidFill>
+          <a:ln w="12700">
+            <a:solidFill>
+              <a:srgbClr val="D8E0EA"/>
+            </a:solidFill>
+          </a:ln>
+          <a:effectLst/>
+        </p:spPr>
+        <p:style>
+          <a:lnRef idx="1">
+            <a:schemeClr val="accent1"/>
+          </a:lnRef>
+          <a:fillRef idx="3">
+            <a:schemeClr val="accent1"/>
+          </a:fillRef>
+          <a:effectRef idx="2">
+            <a:schemeClr val="accent1"/>
+          </a:effectRef>
+          <a:fontRef idx="minor">
+            <a:schemeClr val="lt1"/>
+          </a:fontRef>
+        </p:style>
+        <p:txBody>
+          <a:bodyPr rtlCol="0" anchor="ctr"/>
+          <a:lstStyle/>
+          <a:p>
+            <a:pPr algn="ctr"/>
+          </a:p>
+        </p:txBody>
+      </p:sp>
+      <p:sp>
+        <p:nvSpPr>
+          <p:cNvPr id="12" name="Rounded Rectangle 11"/>
+          <p:cNvSpPr/>
+          <p:nvPr/>
+        </p:nvSpPr>
+        <p:spPr>
+          <a:xfrm>
+            <a:off x="1618488" y="1874519"/>
+            <a:ext cx="640080" cy="640080"/>
+          </a:xfrm>
+          <a:prstGeom prst="roundRect">
+            <a:avLst/>
+          </a:prstGeom>
+          <a:solidFill>
+            <a:srgbClr val="0D9488"/>
+          </a:solidFill>
+          <a:ln>
+            <a:noFill/>
+          </a:ln>
+          <a:effectLst/>
+        </p:spPr>
+        <p:style>
+          <a:lnRef idx="1">
+            <a:schemeClr val="accent1"/>
+          </a:lnRef>
+          <a:fillRef idx="3">
+            <a:schemeClr val="accent1"/>
+          </a:fillRef>
+          <a:effectRef idx="2">
+            <a:schemeClr val="accent1"/>
+          </a:effectRef>
+          <a:fontRef idx="minor">
+            <a:schemeClr val="lt1"/>
+          </a:fontRef>
+        </p:style>
+        <p:txBody>
+          <a:bodyPr rtlCol="0" anchor="ctr"/>
+          <a:lstStyle/>
+          <a:p>
+            <a:pPr algn="ctr"/>
+          </a:p>
+        </p:txBody>
+      </p:sp>
+      <p:sp>
+        <p:nvSpPr>
+          <p:cNvPr id="13" name="TextBox 12"/>
+          <p:cNvSpPr txBox="1"/>
+          <p:nvPr/>
+        </p:nvSpPr>
+        <p:spPr>
+          <a:xfrm>
+            <a:off x="1618488" y="1874519"/>
+            <a:ext cx="640080" cy="640080"/>
+          </a:xfrm>
+          <a:prstGeom prst="rect">
+            <a:avLst/>
+          </a:prstGeom>
+          <a:noFill/>
+        </p:spPr>
+        <p:txBody>
+          <a:bodyPr wrap="square" anchor="ctr" lIns="0" rIns="0" tIns="0" bIns="0">
+            <a:spAutoFit/>
+          </a:bodyPr>
+          <a:lstStyle/>
+          <a:p>
+            <a:pPr algn="ctr">
+              <a:lnSpc>
+                <a:spcPct val="100000"/>
+              </a:lnSpc>
+            </a:pPr>
+            <a:r>
+              <a:rPr sz="1800" b="1" i="0">
+                <a:solidFill>
+                  <a:srgbClr val="FFFFFF"/>
+                </a:solidFill>
+                <a:latin typeface="Arial"/>
+              </a:rPr>
+              <a:t>●</a:t>
+            </a:r>
+          </a:p>
+        </p:txBody>
+      </p:sp>
+      <p:sp>
+        <p:nvSpPr>
+          <p:cNvPr id="14" name="TextBox 13"/>
+          <p:cNvSpPr txBox="1"/>
+          <p:nvPr/>
+        </p:nvSpPr>
+        <p:spPr>
+          <a:xfrm>
+            <a:off x="548640" y="2651760"/>
+            <a:ext cx="2697480" cy="365760"/>
+          </a:xfrm>
+          <a:prstGeom prst="rect">
+            <a:avLst/>
+          </a:prstGeom>
+          <a:noFill/>
+        </p:spPr>
+        <p:txBody>
+          <a:bodyPr wrap="square" anchor="t" lIns="0" rIns="0" tIns="0" bIns="0">
+            <a:spAutoFit/>
+          </a:bodyPr>
+          <a:lstStyle/>
+          <a:p>
+            <a:pPr algn="ctr">
+              <a:lnSpc>
+                <a:spcPct val="100000"/>
+              </a:lnSpc>
+            </a:pPr>
+            <a:r>
+              <a:rPr sz="1700" b="1" i="0">
+                <a:solidFill>
+                  <a:srgbClr val="16273C"/>
+                </a:solidFill>
                 <a:latin typeface="Segoe UI Semibold"/>
               </a:rPr>
-              <a:t>SEE IT LIVE</a:t>
-            </a:r>
-          </a:p>
-        </p:txBody>
-      </p:sp>
-      <p:sp>
-        <p:nvSpPr>
-          <p:cNvPr id="6" name="TextBox 5"/>
-          <p:cNvSpPr txBox="1"/>
-          <p:nvPr/>
-        </p:nvSpPr>
-        <p:spPr>
-          <a:xfrm>
-            <a:off x="960120" y="1920240"/>
-            <a:ext cx="8229600" cy="914400"/>
+              <a:t>Speed</a:t>
+            </a:r>
+          </a:p>
+        </p:txBody>
+      </p:sp>
+      <p:sp>
+        <p:nvSpPr>
+          <p:cNvPr id="15" name="TextBox 14"/>
+          <p:cNvSpPr txBox="1"/>
+          <p:nvPr/>
+        </p:nvSpPr>
+        <p:spPr>
+          <a:xfrm>
+            <a:off x="731520" y="3063240"/>
+            <a:ext cx="2331720" cy="457200"/>
           </a:xfrm>
           <a:prstGeom prst="rect">
             <a:avLst/>
@@ -22375,33 +23594,240 @@
           </a:bodyPr>
           <a:lstStyle/>
           <a:p>
-            <a:pPr algn="l">
+            <a:pPr algn="ctr">
               <a:lnSpc>
                 <a:spcPct val="100000"/>
               </a:lnSpc>
             </a:pPr>
             <a:r>
-              <a:rPr sz="5200" b="1" i="0">
+              <a:rPr sz="1200" b="1" i="0">
+                <a:solidFill>
+                  <a:srgbClr val="0D9488"/>
+                </a:solidFill>
+                <a:latin typeface="Segoe UI Semibold"/>
+              </a:rPr>
+              <a:t>Costed ideas in minutes</a:t>
+            </a:r>
+          </a:p>
+        </p:txBody>
+      </p:sp>
+      <p:sp>
+        <p:nvSpPr>
+          <p:cNvPr id="16" name="TextBox 15"/>
+          <p:cNvSpPr txBox="1"/>
+          <p:nvPr/>
+        </p:nvSpPr>
+        <p:spPr>
+          <a:xfrm>
+            <a:off x="804672" y="3657600"/>
+            <a:ext cx="2194560" cy="1828800"/>
+          </a:xfrm>
+          <a:prstGeom prst="rect">
+            <a:avLst/>
+          </a:prstGeom>
+          <a:noFill/>
+        </p:spPr>
+        <p:txBody>
+          <a:bodyPr wrap="square" anchor="t" lIns="0" rIns="0" tIns="0" bIns="0">
+            <a:spAutoFit/>
+          </a:bodyPr>
+          <a:lstStyle/>
+          <a:p>
+            <a:pPr algn="ctr">
+              <a:lnSpc>
+                <a:spcPct val="106000"/>
+              </a:lnSpc>
+            </a:pPr>
+            <a:r>
+              <a:rPr sz="1150" b="0" i="0">
+                <a:solidFill>
+                  <a:srgbClr val="556477"/>
+                </a:solidFill>
+                <a:latin typeface="Segoe UI"/>
+              </a:rPr>
+              <a:t>From part or CAD to a defensible number in minutes, not the days a manual should-cost takes.</a:t>
+            </a:r>
+          </a:p>
+        </p:txBody>
+      </p:sp>
+      <p:sp>
+        <p:nvSpPr>
+          <p:cNvPr id="17" name="Rounded Rectangle 16"/>
+          <p:cNvSpPr/>
+          <p:nvPr/>
+        </p:nvSpPr>
+        <p:spPr>
+          <a:xfrm>
+            <a:off x="3364992" y="1600200"/>
+            <a:ext cx="2697480" cy="3977639"/>
+          </a:xfrm>
+          <a:prstGeom prst="roundRect">
+            <a:avLst/>
+          </a:prstGeom>
+          <a:solidFill>
+            <a:srgbClr val="FFFFFF"/>
+          </a:solidFill>
+          <a:ln w="12700">
+            <a:solidFill>
+              <a:srgbClr val="D8E0EA"/>
+            </a:solidFill>
+          </a:ln>
+          <a:effectLst/>
+        </p:spPr>
+        <p:style>
+          <a:lnRef idx="1">
+            <a:schemeClr val="accent1"/>
+          </a:lnRef>
+          <a:fillRef idx="3">
+            <a:schemeClr val="accent1"/>
+          </a:fillRef>
+          <a:effectRef idx="2">
+            <a:schemeClr val="accent1"/>
+          </a:effectRef>
+          <a:fontRef idx="minor">
+            <a:schemeClr val="lt1"/>
+          </a:fontRef>
+        </p:style>
+        <p:txBody>
+          <a:bodyPr rtlCol="0" anchor="ctr"/>
+          <a:lstStyle/>
+          <a:p>
+            <a:pPr algn="ctr"/>
+          </a:p>
+        </p:txBody>
+      </p:sp>
+      <p:sp>
+        <p:nvSpPr>
+          <p:cNvPr id="18" name="Rounded Rectangle 17"/>
+          <p:cNvSpPr/>
+          <p:nvPr/>
+        </p:nvSpPr>
+        <p:spPr>
+          <a:xfrm>
+            <a:off x="4434840" y="1874519"/>
+            <a:ext cx="640080" cy="640080"/>
+          </a:xfrm>
+          <a:prstGeom prst="roundRect">
+            <a:avLst/>
+          </a:prstGeom>
+          <a:solidFill>
+            <a:srgbClr val="059669"/>
+          </a:solidFill>
+          <a:ln>
+            <a:noFill/>
+          </a:ln>
+          <a:effectLst/>
+        </p:spPr>
+        <p:style>
+          <a:lnRef idx="1">
+            <a:schemeClr val="accent1"/>
+          </a:lnRef>
+          <a:fillRef idx="3">
+            <a:schemeClr val="accent1"/>
+          </a:fillRef>
+          <a:effectRef idx="2">
+            <a:schemeClr val="accent1"/>
+          </a:effectRef>
+          <a:fontRef idx="minor">
+            <a:schemeClr val="lt1"/>
+          </a:fontRef>
+        </p:style>
+        <p:txBody>
+          <a:bodyPr rtlCol="0" anchor="ctr"/>
+          <a:lstStyle/>
+          <a:p>
+            <a:pPr algn="ctr"/>
+          </a:p>
+        </p:txBody>
+      </p:sp>
+      <p:sp>
+        <p:nvSpPr>
+          <p:cNvPr id="19" name="TextBox 18"/>
+          <p:cNvSpPr txBox="1"/>
+          <p:nvPr/>
+        </p:nvSpPr>
+        <p:spPr>
+          <a:xfrm>
+            <a:off x="4434840" y="1874519"/>
+            <a:ext cx="640080" cy="640080"/>
+          </a:xfrm>
+          <a:prstGeom prst="rect">
+            <a:avLst/>
+          </a:prstGeom>
+          <a:noFill/>
+        </p:spPr>
+        <p:txBody>
+          <a:bodyPr wrap="square" anchor="ctr" lIns="0" rIns="0" tIns="0" bIns="0">
+            <a:spAutoFit/>
+          </a:bodyPr>
+          <a:lstStyle/>
+          <a:p>
+            <a:pPr algn="ctr">
+              <a:lnSpc>
+                <a:spcPct val="100000"/>
+              </a:lnSpc>
+            </a:pPr>
+            <a:r>
+              <a:rPr sz="1800" b="1" i="0">
+                <a:solidFill>
+                  <a:srgbClr val="FFFFFF"/>
+                </a:solidFill>
+                <a:latin typeface="Arial"/>
+              </a:rPr>
+              <a:t>✓</a:t>
+            </a:r>
+          </a:p>
+        </p:txBody>
+      </p:sp>
+      <p:sp>
+        <p:nvSpPr>
+          <p:cNvPr id="20" name="TextBox 19"/>
+          <p:cNvSpPr txBox="1"/>
+          <p:nvPr/>
+        </p:nvSpPr>
+        <p:spPr>
+          <a:xfrm>
+            <a:off x="3364992" y="2651760"/>
+            <a:ext cx="2697480" cy="365760"/>
+          </a:xfrm>
+          <a:prstGeom prst="rect">
+            <a:avLst/>
+          </a:prstGeom>
+          <a:noFill/>
+        </p:spPr>
+        <p:txBody>
+          <a:bodyPr wrap="square" anchor="t" lIns="0" rIns="0" tIns="0" bIns="0">
+            <a:spAutoFit/>
+          </a:bodyPr>
+          <a:lstStyle/>
+          <a:p>
+            <a:pPr algn="ctr">
+              <a:lnSpc>
+                <a:spcPct val="100000"/>
+              </a:lnSpc>
+            </a:pPr>
+            <a:r>
+              <a:rPr sz="1700" b="1" i="0">
                 <a:solidFill>
                   <a:srgbClr val="16273C"/>
                 </a:solidFill>
                 <a:latin typeface="Segoe UI Semibold"/>
               </a:rPr>
-              <a:t>Live Demo</a:t>
-            </a:r>
-          </a:p>
-        </p:txBody>
-      </p:sp>
-      <p:sp>
-        <p:nvSpPr>
-          <p:cNvPr id="7" name="TextBox 6"/>
-          <p:cNvSpPr txBox="1"/>
-          <p:nvPr/>
-        </p:nvSpPr>
-        <p:spPr>
-          <a:xfrm>
-            <a:off x="1005840" y="3017520"/>
-            <a:ext cx="9601200" cy="457200"/>
+              <a:t>Confidence</a:t>
+            </a:r>
+          </a:p>
+        </p:txBody>
+      </p:sp>
+      <p:sp>
+        <p:nvSpPr>
+          <p:cNvPr id="21" name="TextBox 20"/>
+          <p:cNvSpPr txBox="1"/>
+          <p:nvPr/>
+        </p:nvSpPr>
+        <p:spPr>
+          <a:xfrm>
+            <a:off x="3547872" y="3063240"/>
+            <a:ext cx="2331720" cy="457200"/>
           </a:xfrm>
           <a:prstGeom prst="rect">
             <a:avLst/>
@@ -22414,33 +23840,364 @@
           </a:bodyPr>
           <a:lstStyle/>
           <a:p>
-            <a:pPr algn="l">
+            <a:pPr algn="ctr">
               <a:lnSpc>
                 <a:spcPct val="100000"/>
               </a:lnSpc>
             </a:pPr>
             <a:r>
-              <a:rPr sz="1700" b="0" i="0">
-                <a:solidFill>
-                  <a:srgbClr val="374558"/>
-                </a:solidFill>
-                <a:latin typeface="Segoe UI Light"/>
-              </a:rPr>
-              <a:t>A 5-minute walk through the real workflow:</a:t>
-            </a:r>
-          </a:p>
-        </p:txBody>
-      </p:sp>
-      <p:sp>
-        <p:nvSpPr>
-          <p:cNvPr id="8" name="Rounded Rectangle 7"/>
+              <a:rPr sz="1200" b="1" i="0">
+                <a:solidFill>
+                  <a:srgbClr val="059669"/>
+                </a:solidFill>
+                <a:latin typeface="Segoe UI Semibold"/>
+              </a:rPr>
+              <a:t>Numbers that survive review</a:t>
+            </a:r>
+          </a:p>
+        </p:txBody>
+      </p:sp>
+      <p:sp>
+        <p:nvSpPr>
+          <p:cNvPr id="22" name="TextBox 21"/>
+          <p:cNvSpPr txBox="1"/>
+          <p:nvPr/>
+        </p:nvSpPr>
+        <p:spPr>
+          <a:xfrm>
+            <a:off x="3621024" y="3657600"/>
+            <a:ext cx="2194560" cy="1828800"/>
+          </a:xfrm>
+          <a:prstGeom prst="rect">
+            <a:avLst/>
+          </a:prstGeom>
+          <a:noFill/>
+        </p:spPr>
+        <p:txBody>
+          <a:bodyPr wrap="square" anchor="t" lIns="0" rIns="0" tIns="0" bIns="0">
+            <a:spAutoFit/>
+          </a:bodyPr>
+          <a:lstStyle/>
+          <a:p>
+            <a:pPr algn="ctr">
+              <a:lnSpc>
+                <a:spcPct val="106000"/>
+              </a:lnSpc>
+            </a:pPr>
+            <a:r>
+              <a:rPr sz="1150" b="0" i="0">
+                <a:solidFill>
+                  <a:srgbClr val="556477"/>
+                </a:solidFill>
+                <a:latin typeface="Segoe UI"/>
+              </a:rPr>
+              <a:t>Every figure is engine-verified and reproducible — defensible in sourcing and programme gates.</a:t>
+            </a:r>
+          </a:p>
+        </p:txBody>
+      </p:sp>
+      <p:sp>
+        <p:nvSpPr>
+          <p:cNvPr id="23" name="Rounded Rectangle 22"/>
           <p:cNvSpPr/>
           <p:nvPr/>
         </p:nvSpPr>
         <p:spPr>
           <a:xfrm>
-            <a:off x="1005840" y="3611880"/>
-            <a:ext cx="457200" cy="457200"/>
+            <a:off x="6181344" y="1600200"/>
+            <a:ext cx="2697480" cy="3977639"/>
+          </a:xfrm>
+          <a:prstGeom prst="roundRect">
+            <a:avLst/>
+          </a:prstGeom>
+          <a:solidFill>
+            <a:srgbClr val="FFFFFF"/>
+          </a:solidFill>
+          <a:ln w="12700">
+            <a:solidFill>
+              <a:srgbClr val="D8E0EA"/>
+            </a:solidFill>
+          </a:ln>
+          <a:effectLst/>
+        </p:spPr>
+        <p:style>
+          <a:lnRef idx="1">
+            <a:schemeClr val="accent1"/>
+          </a:lnRef>
+          <a:fillRef idx="3">
+            <a:schemeClr val="accent1"/>
+          </a:fillRef>
+          <a:effectRef idx="2">
+            <a:schemeClr val="accent1"/>
+          </a:effectRef>
+          <a:fontRef idx="minor">
+            <a:schemeClr val="lt1"/>
+          </a:fontRef>
+        </p:style>
+        <p:txBody>
+          <a:bodyPr rtlCol="0" anchor="ctr"/>
+          <a:lstStyle/>
+          <a:p>
+            <a:pPr algn="ctr"/>
+          </a:p>
+        </p:txBody>
+      </p:sp>
+      <p:sp>
+        <p:nvSpPr>
+          <p:cNvPr id="24" name="Rounded Rectangle 23"/>
+          <p:cNvSpPr/>
+          <p:nvPr/>
+        </p:nvSpPr>
+        <p:spPr>
+          <a:xfrm>
+            <a:off x="7251192" y="1874519"/>
+            <a:ext cx="640080" cy="640080"/>
+          </a:xfrm>
+          <a:prstGeom prst="roundRect">
+            <a:avLst/>
+          </a:prstGeom>
+          <a:solidFill>
+            <a:srgbClr val="2563EB"/>
+          </a:solidFill>
+          <a:ln>
+            <a:noFill/>
+          </a:ln>
+          <a:effectLst/>
+        </p:spPr>
+        <p:style>
+          <a:lnRef idx="1">
+            <a:schemeClr val="accent1"/>
+          </a:lnRef>
+          <a:fillRef idx="3">
+            <a:schemeClr val="accent1"/>
+          </a:fillRef>
+          <a:effectRef idx="2">
+            <a:schemeClr val="accent1"/>
+          </a:effectRef>
+          <a:fontRef idx="minor">
+            <a:schemeClr val="lt1"/>
+          </a:fontRef>
+        </p:style>
+        <p:txBody>
+          <a:bodyPr rtlCol="0" anchor="ctr"/>
+          <a:lstStyle/>
+          <a:p>
+            <a:pPr algn="ctr"/>
+          </a:p>
+        </p:txBody>
+      </p:sp>
+      <p:sp>
+        <p:nvSpPr>
+          <p:cNvPr id="25" name="TextBox 24"/>
+          <p:cNvSpPr txBox="1"/>
+          <p:nvPr/>
+        </p:nvSpPr>
+        <p:spPr>
+          <a:xfrm>
+            <a:off x="7251192" y="1874519"/>
+            <a:ext cx="640080" cy="640080"/>
+          </a:xfrm>
+          <a:prstGeom prst="rect">
+            <a:avLst/>
+          </a:prstGeom>
+          <a:noFill/>
+        </p:spPr>
+        <p:txBody>
+          <a:bodyPr wrap="square" anchor="ctr" lIns="0" rIns="0" tIns="0" bIns="0">
+            <a:spAutoFit/>
+          </a:bodyPr>
+          <a:lstStyle/>
+          <a:p>
+            <a:pPr algn="ctr">
+              <a:lnSpc>
+                <a:spcPct val="100000"/>
+              </a:lnSpc>
+            </a:pPr>
+            <a:r>
+              <a:rPr sz="1800" b="1" i="0">
+                <a:solidFill>
+                  <a:srgbClr val="FFFFFF"/>
+                </a:solidFill>
+                <a:latin typeface="Arial"/>
+              </a:rPr>
+              <a:t>■</a:t>
+            </a:r>
+          </a:p>
+        </p:txBody>
+      </p:sp>
+      <p:sp>
+        <p:nvSpPr>
+          <p:cNvPr id="26" name="TextBox 25"/>
+          <p:cNvSpPr txBox="1"/>
+          <p:nvPr/>
+        </p:nvSpPr>
+        <p:spPr>
+          <a:xfrm>
+            <a:off x="6181344" y="2651760"/>
+            <a:ext cx="2697480" cy="365760"/>
+          </a:xfrm>
+          <a:prstGeom prst="rect">
+            <a:avLst/>
+          </a:prstGeom>
+          <a:noFill/>
+        </p:spPr>
+        <p:txBody>
+          <a:bodyPr wrap="square" anchor="t" lIns="0" rIns="0" tIns="0" bIns="0">
+            <a:spAutoFit/>
+          </a:bodyPr>
+          <a:lstStyle/>
+          <a:p>
+            <a:pPr algn="ctr">
+              <a:lnSpc>
+                <a:spcPct val="100000"/>
+              </a:lnSpc>
+            </a:pPr>
+            <a:r>
+              <a:rPr sz="1700" b="1" i="0">
+                <a:solidFill>
+                  <a:srgbClr val="16273C"/>
+                </a:solidFill>
+                <a:latin typeface="Segoe UI Semibold"/>
+              </a:rPr>
+              <a:t>Breadth</a:t>
+            </a:r>
+          </a:p>
+        </p:txBody>
+      </p:sp>
+      <p:sp>
+        <p:nvSpPr>
+          <p:cNvPr id="27" name="TextBox 26"/>
+          <p:cNvSpPr txBox="1"/>
+          <p:nvPr/>
+        </p:nvSpPr>
+        <p:spPr>
+          <a:xfrm>
+            <a:off x="6364224" y="3063240"/>
+            <a:ext cx="2331720" cy="457200"/>
+          </a:xfrm>
+          <a:prstGeom prst="rect">
+            <a:avLst/>
+          </a:prstGeom>
+          <a:noFill/>
+        </p:spPr>
+        <p:txBody>
+          <a:bodyPr wrap="square" anchor="t" lIns="0" rIns="0" tIns="0" bIns="0">
+            <a:spAutoFit/>
+          </a:bodyPr>
+          <a:lstStyle/>
+          <a:p>
+            <a:pPr algn="ctr">
+              <a:lnSpc>
+                <a:spcPct val="100000"/>
+              </a:lnSpc>
+            </a:pPr>
+            <a:r>
+              <a:rPr sz="1200" b="1" i="0">
+                <a:solidFill>
+                  <a:srgbClr val="2563EB"/>
+                </a:solidFill>
+                <a:latin typeface="Segoe UI Semibold"/>
+              </a:rPr>
+              <a:t>See the whole vehicle</a:t>
+            </a:r>
+          </a:p>
+        </p:txBody>
+      </p:sp>
+      <p:sp>
+        <p:nvSpPr>
+          <p:cNvPr id="28" name="TextBox 27"/>
+          <p:cNvSpPr txBox="1"/>
+          <p:nvPr/>
+        </p:nvSpPr>
+        <p:spPr>
+          <a:xfrm>
+            <a:off x="6437376" y="3657600"/>
+            <a:ext cx="2194560" cy="1828800"/>
+          </a:xfrm>
+          <a:prstGeom prst="rect">
+            <a:avLst/>
+          </a:prstGeom>
+          <a:noFill/>
+        </p:spPr>
+        <p:txBody>
+          <a:bodyPr wrap="square" anchor="t" lIns="0" rIns="0" tIns="0" bIns="0">
+            <a:spAutoFit/>
+          </a:bodyPr>
+          <a:lstStyle/>
+          <a:p>
+            <a:pPr algn="ctr">
+              <a:lnSpc>
+                <a:spcPct val="106000"/>
+              </a:lnSpc>
+            </a:pPr>
+            <a:r>
+              <a:rPr sz="1150" b="0" i="0">
+                <a:solidFill>
+                  <a:srgbClr val="556477"/>
+                </a:solidFill>
+                <a:latin typeface="Segoe UI"/>
+              </a:rPr>
+              <a:t>One platform across all systems and commodities — no more single-tool blind spots.</a:t>
+            </a:r>
+          </a:p>
+        </p:txBody>
+      </p:sp>
+      <p:sp>
+        <p:nvSpPr>
+          <p:cNvPr id="29" name="Rounded Rectangle 28"/>
+          <p:cNvSpPr/>
+          <p:nvPr/>
+        </p:nvSpPr>
+        <p:spPr>
+          <a:xfrm>
+            <a:off x="8997696" y="1600200"/>
+            <a:ext cx="2697480" cy="3977639"/>
+          </a:xfrm>
+          <a:prstGeom prst="roundRect">
+            <a:avLst/>
+          </a:prstGeom>
+          <a:solidFill>
+            <a:srgbClr val="FFFFFF"/>
+          </a:solidFill>
+          <a:ln w="12700">
+            <a:solidFill>
+              <a:srgbClr val="D8E0EA"/>
+            </a:solidFill>
+          </a:ln>
+          <a:effectLst/>
+        </p:spPr>
+        <p:style>
+          <a:lnRef idx="1">
+            <a:schemeClr val="accent1"/>
+          </a:lnRef>
+          <a:fillRef idx="3">
+            <a:schemeClr val="accent1"/>
+          </a:fillRef>
+          <a:effectRef idx="2">
+            <a:schemeClr val="accent1"/>
+          </a:effectRef>
+          <a:fontRef idx="minor">
+            <a:schemeClr val="lt1"/>
+          </a:fontRef>
+        </p:style>
+        <p:txBody>
+          <a:bodyPr rtlCol="0" anchor="ctr"/>
+          <a:lstStyle/>
+          <a:p>
+            <a:pPr algn="ctr"/>
+          </a:p>
+        </p:txBody>
+      </p:sp>
+      <p:sp>
+        <p:nvSpPr>
+          <p:cNvPr id="30" name="Rounded Rectangle 29"/>
+          <p:cNvSpPr/>
+          <p:nvPr/>
+        </p:nvSpPr>
+        <p:spPr>
+          <a:xfrm>
+            <a:off x="10067544" y="1874519"/>
+            <a:ext cx="640080" cy="640080"/>
           </a:xfrm>
           <a:prstGeom prst="roundRect">
             <a:avLst/>
@@ -22477,14 +24234,14 @@
       </p:sp>
       <p:sp>
         <p:nvSpPr>
-          <p:cNvPr id="9" name="TextBox 8"/>
-          <p:cNvSpPr txBox="1"/>
-          <p:nvPr/>
-        </p:nvSpPr>
-        <p:spPr>
-          <a:xfrm>
-            <a:off x="1005840" y="3611880"/>
-            <a:ext cx="457200" cy="457200"/>
+          <p:cNvPr id="31" name="TextBox 30"/>
+          <p:cNvSpPr txBox="1"/>
+          <p:nvPr/>
+        </p:nvSpPr>
+        <p:spPr>
+          <a:xfrm>
+            <a:off x="10067544" y="1874519"/>
+            <a:ext cx="640080" cy="640080"/>
           </a:xfrm>
           <a:prstGeom prst="rect">
             <a:avLst/>
@@ -22509,112 +24266,146 @@
                 </a:solidFill>
                 <a:latin typeface="Arial"/>
               </a:rPr>
-              <a:t>1</a:t>
-            </a:r>
-          </a:p>
-        </p:txBody>
-      </p:sp>
-      <p:sp>
-        <p:nvSpPr>
-          <p:cNvPr id="10" name="TextBox 9"/>
-          <p:cNvSpPr txBox="1"/>
-          <p:nvPr/>
-        </p:nvSpPr>
-        <p:spPr>
-          <a:xfrm>
-            <a:off x="1645920" y="3630168"/>
-            <a:ext cx="8686800" cy="457200"/>
-          </a:xfrm>
-          <a:prstGeom prst="rect">
-            <a:avLst/>
-          </a:prstGeom>
-          <a:noFill/>
-        </p:spPr>
-        <p:txBody>
-          <a:bodyPr wrap="square" anchor="ctr" lIns="0" rIns="0" tIns="0" bIns="0">
-            <a:spAutoFit/>
-          </a:bodyPr>
-          <a:lstStyle/>
-          <a:p>
-            <a:pPr algn="l">
+              <a:t>★</a:t>
+            </a:r>
+          </a:p>
+        </p:txBody>
+      </p:sp>
+      <p:sp>
+        <p:nvSpPr>
+          <p:cNvPr id="32" name="TextBox 31"/>
+          <p:cNvSpPr txBox="1"/>
+          <p:nvPr/>
+        </p:nvSpPr>
+        <p:spPr>
+          <a:xfrm>
+            <a:off x="8997696" y="2651760"/>
+            <a:ext cx="2697480" cy="365760"/>
+          </a:xfrm>
+          <a:prstGeom prst="rect">
+            <a:avLst/>
+          </a:prstGeom>
+          <a:noFill/>
+        </p:spPr>
+        <p:txBody>
+          <a:bodyPr wrap="square" anchor="t" lIns="0" rIns="0" tIns="0" bIns="0">
+            <a:spAutoFit/>
+          </a:bodyPr>
+          <a:lstStyle/>
+          <a:p>
+            <a:pPr algn="ctr">
               <a:lnSpc>
                 <a:spcPct val="100000"/>
               </a:lnSpc>
             </a:pPr>
             <a:r>
-              <a:rPr sz="1500" b="0" i="0">
+              <a:rPr sz="1700" b="1" i="0">
                 <a:solidFill>
                   <a:srgbClr val="16273C"/>
                 </a:solidFill>
+                <a:latin typeface="Segoe UI Semibold"/>
+              </a:rPr>
+              <a:t>Leverage</a:t>
+            </a:r>
+          </a:p>
+        </p:txBody>
+      </p:sp>
+      <p:sp>
+        <p:nvSpPr>
+          <p:cNvPr id="33" name="TextBox 32"/>
+          <p:cNvSpPr txBox="1"/>
+          <p:nvPr/>
+        </p:nvSpPr>
+        <p:spPr>
+          <a:xfrm>
+            <a:off x="9180576" y="3063240"/>
+            <a:ext cx="2331720" cy="457200"/>
+          </a:xfrm>
+          <a:prstGeom prst="rect">
+            <a:avLst/>
+          </a:prstGeom>
+          <a:noFill/>
+        </p:spPr>
+        <p:txBody>
+          <a:bodyPr wrap="square" anchor="t" lIns="0" rIns="0" tIns="0" bIns="0">
+            <a:spAutoFit/>
+          </a:bodyPr>
+          <a:lstStyle/>
+          <a:p>
+            <a:pPr algn="ctr">
+              <a:lnSpc>
+                <a:spcPct val="100000"/>
+              </a:lnSpc>
+            </a:pPr>
+            <a:r>
+              <a:rPr sz="1200" b="1" i="0">
+                <a:solidFill>
+                  <a:srgbClr val="B47609"/>
+                </a:solidFill>
+                <a:latin typeface="Segoe UI Semibold"/>
+              </a:rPr>
+              <a:t>Capture know-how</a:t>
+            </a:r>
+          </a:p>
+        </p:txBody>
+      </p:sp>
+      <p:sp>
+        <p:nvSpPr>
+          <p:cNvPr id="34" name="TextBox 33"/>
+          <p:cNvSpPr txBox="1"/>
+          <p:nvPr/>
+        </p:nvSpPr>
+        <p:spPr>
+          <a:xfrm>
+            <a:off x="9253728" y="3657600"/>
+            <a:ext cx="2194560" cy="1828800"/>
+          </a:xfrm>
+          <a:prstGeom prst="rect">
+            <a:avLst/>
+          </a:prstGeom>
+          <a:noFill/>
+        </p:spPr>
+        <p:txBody>
+          <a:bodyPr wrap="square" anchor="t" lIns="0" rIns="0" tIns="0" bIns="0">
+            <a:spAutoFit/>
+          </a:bodyPr>
+          <a:lstStyle/>
+          <a:p>
+            <a:pPr algn="ctr">
+              <a:lnSpc>
+                <a:spcPct val="106000"/>
+              </a:lnSpc>
+            </a:pPr>
+            <a:r>
+              <a:rPr sz="1150" b="0" i="0">
+                <a:solidFill>
+                  <a:srgbClr val="556477"/>
+                </a:solidFill>
                 <a:latin typeface="Segoe UI"/>
               </a:rPr>
-              <a:t>Generate cost-reduction ideas for a live vehicle system</a:t>
-            </a:r>
-          </a:p>
-        </p:txBody>
-      </p:sp>
-      <p:sp>
-        <p:nvSpPr>
-          <p:cNvPr id="11" name="Rounded Rectangle 10"/>
-          <p:cNvSpPr/>
-          <p:nvPr/>
-        </p:nvSpPr>
-        <p:spPr>
-          <a:xfrm>
-            <a:off x="1005840" y="4178808"/>
-            <a:ext cx="457200" cy="457200"/>
-          </a:xfrm>
-          <a:prstGeom prst="roundRect">
-            <a:avLst/>
-          </a:prstGeom>
-          <a:solidFill>
-            <a:srgbClr val="B47609"/>
-          </a:solidFill>
-          <a:ln>
-            <a:noFill/>
-          </a:ln>
-          <a:effectLst/>
-        </p:spPr>
-        <p:style>
-          <a:lnRef idx="1">
-            <a:schemeClr val="accent1"/>
-          </a:lnRef>
-          <a:fillRef idx="3">
-            <a:schemeClr val="accent1"/>
-          </a:fillRef>
-          <a:effectRef idx="2">
-            <a:schemeClr val="accent1"/>
-          </a:effectRef>
-          <a:fontRef idx="minor">
-            <a:schemeClr val="lt1"/>
-          </a:fontRef>
-        </p:style>
-        <p:txBody>
-          <a:bodyPr rtlCol="0" anchor="ctr"/>
-          <a:lstStyle/>
-          <a:p>
-            <a:pPr algn="ctr"/>
-          </a:p>
-        </p:txBody>
-      </p:sp>
-      <p:sp>
-        <p:nvSpPr>
-          <p:cNvPr id="12" name="TextBox 11"/>
-          <p:cNvSpPr txBox="1"/>
-          <p:nvPr/>
-        </p:nvSpPr>
-        <p:spPr>
-          <a:xfrm>
-            <a:off x="1005840" y="4178808"/>
-            <a:ext cx="457200" cy="457200"/>
-          </a:xfrm>
-          <a:prstGeom prst="rect">
-            <a:avLst/>
-          </a:prstGeom>
-          <a:noFill/>
-        </p:spPr>
-        <p:txBody>
-          <a:bodyPr wrap="square" anchor="ctr" lIns="0" rIns="0" tIns="0" bIns="0">
+              <a:t>Turns scattered OEM best-practice into a reusable, searchable asset for the whole team.</a:t>
+            </a:r>
+          </a:p>
+        </p:txBody>
+      </p:sp>
+      <p:sp>
+        <p:nvSpPr>
+          <p:cNvPr id="35" name="TextBox 34"/>
+          <p:cNvSpPr txBox="1"/>
+          <p:nvPr/>
+        </p:nvSpPr>
+        <p:spPr>
+          <a:xfrm>
+            <a:off x="548640" y="5760720"/>
+            <a:ext cx="10972800" cy="457200"/>
+          </a:xfrm>
+          <a:prstGeom prst="rect">
+            <a:avLst/>
+          </a:prstGeom>
+          <a:noFill/>
+        </p:spPr>
+        <p:txBody>
+          <a:bodyPr wrap="square" anchor="t" lIns="0" rIns="0" tIns="0" bIns="0">
             <a:spAutoFit/>
           </a:bodyPr>
           <a:lstStyle/>
@@ -22625,418 +24416,22 @@
               </a:lnSpc>
             </a:pPr>
             <a:r>
-              <a:rPr sz="1800" b="1" i="0">
-                <a:solidFill>
-                  <a:srgbClr val="FFFFFF"/>
-                </a:solidFill>
-                <a:latin typeface="Arial"/>
-              </a:rPr>
-              <a:t>2</a:t>
-            </a:r>
-          </a:p>
-        </p:txBody>
-      </p:sp>
-      <p:sp>
-        <p:nvSpPr>
-          <p:cNvPr id="13" name="TextBox 12"/>
-          <p:cNvSpPr txBox="1"/>
-          <p:nvPr/>
-        </p:nvSpPr>
-        <p:spPr>
-          <a:xfrm>
-            <a:off x="1645920" y="4197096"/>
-            <a:ext cx="8686800" cy="457200"/>
-          </a:xfrm>
-          <a:prstGeom prst="rect">
-            <a:avLst/>
-          </a:prstGeom>
-          <a:noFill/>
-        </p:spPr>
-        <p:txBody>
-          <a:bodyPr wrap="square" anchor="ctr" lIns="0" rIns="0" tIns="0" bIns="0">
-            <a:spAutoFit/>
-          </a:bodyPr>
-          <a:lstStyle/>
-          <a:p>
-            <a:pPr algn="l">
-              <a:lnSpc>
-                <a:spcPct val="100000"/>
-              </a:lnSpc>
-            </a:pPr>
-            <a:r>
-              <a:rPr sz="1500" b="0" i="0">
-                <a:solidFill>
-                  <a:srgbClr val="16273C"/>
+              <a:rPr sz="1400" b="1" i="0">
+                <a:solidFill>
+                  <a:srgbClr val="B47609"/>
+                </a:solidFill>
+                <a:latin typeface="Segoe UI Semibold"/>
+              </a:rPr>
+              <a:t>Net effect:  </a:t>
+            </a:r>
+            <a:r>
+              <a:rPr sz="1400" b="1" i="0">
+                <a:solidFill>
+                  <a:srgbClr val="374558"/>
                 </a:solidFill>
                 <a:latin typeface="Segoe UI"/>
               </a:rPr>
-              <a:t>Upload a CAD part → feature-based should-cost + 3D view</a:t>
-            </a:r>
-          </a:p>
-        </p:txBody>
-      </p:sp>
-      <p:sp>
-        <p:nvSpPr>
-          <p:cNvPr id="14" name="Rounded Rectangle 13"/>
-          <p:cNvSpPr/>
-          <p:nvPr/>
-        </p:nvSpPr>
-        <p:spPr>
-          <a:xfrm>
-            <a:off x="1005840" y="4745736"/>
-            <a:ext cx="457200" cy="457200"/>
-          </a:xfrm>
-          <a:prstGeom prst="roundRect">
-            <a:avLst/>
-          </a:prstGeom>
-          <a:solidFill>
-            <a:srgbClr val="B47609"/>
-          </a:solidFill>
-          <a:ln>
-            <a:noFill/>
-          </a:ln>
-          <a:effectLst/>
-        </p:spPr>
-        <p:style>
-          <a:lnRef idx="1">
-            <a:schemeClr val="accent1"/>
-          </a:lnRef>
-          <a:fillRef idx="3">
-            <a:schemeClr val="accent1"/>
-          </a:fillRef>
-          <a:effectRef idx="2">
-            <a:schemeClr val="accent1"/>
-          </a:effectRef>
-          <a:fontRef idx="minor">
-            <a:schemeClr val="lt1"/>
-          </a:fontRef>
-        </p:style>
-        <p:txBody>
-          <a:bodyPr rtlCol="0" anchor="ctr"/>
-          <a:lstStyle/>
-          <a:p>
-            <a:pPr algn="ctr"/>
-          </a:p>
-        </p:txBody>
-      </p:sp>
-      <p:sp>
-        <p:nvSpPr>
-          <p:cNvPr id="15" name="TextBox 14"/>
-          <p:cNvSpPr txBox="1"/>
-          <p:nvPr/>
-        </p:nvSpPr>
-        <p:spPr>
-          <a:xfrm>
-            <a:off x="1005840" y="4745736"/>
-            <a:ext cx="457200" cy="457200"/>
-          </a:xfrm>
-          <a:prstGeom prst="rect">
-            <a:avLst/>
-          </a:prstGeom>
-          <a:noFill/>
-        </p:spPr>
-        <p:txBody>
-          <a:bodyPr wrap="square" anchor="ctr" lIns="0" rIns="0" tIns="0" bIns="0">
-            <a:spAutoFit/>
-          </a:bodyPr>
-          <a:lstStyle/>
-          <a:p>
-            <a:pPr algn="ctr">
-              <a:lnSpc>
-                <a:spcPct val="100000"/>
-              </a:lnSpc>
-            </a:pPr>
-            <a:r>
-              <a:rPr sz="1800" b="1" i="0">
-                <a:solidFill>
-                  <a:srgbClr val="FFFFFF"/>
-                </a:solidFill>
-                <a:latin typeface="Arial"/>
-              </a:rPr>
-              <a:t>3</a:t>
-            </a:r>
-          </a:p>
-        </p:txBody>
-      </p:sp>
-      <p:sp>
-        <p:nvSpPr>
-          <p:cNvPr id="16" name="TextBox 15"/>
-          <p:cNvSpPr txBox="1"/>
-          <p:nvPr/>
-        </p:nvSpPr>
-        <p:spPr>
-          <a:xfrm>
-            <a:off x="1645920" y="4764024"/>
-            <a:ext cx="8686800" cy="457200"/>
-          </a:xfrm>
-          <a:prstGeom prst="rect">
-            <a:avLst/>
-          </a:prstGeom>
-          <a:noFill/>
-        </p:spPr>
-        <p:txBody>
-          <a:bodyPr wrap="square" anchor="ctr" lIns="0" rIns="0" tIns="0" bIns="0">
-            <a:spAutoFit/>
-          </a:bodyPr>
-          <a:lstStyle/>
-          <a:p>
-            <a:pPr algn="l">
-              <a:lnSpc>
-                <a:spcPct val="100000"/>
-              </a:lnSpc>
-            </a:pPr>
-            <a:r>
-              <a:rPr sz="1500" b="0" i="0">
-                <a:solidFill>
-                  <a:srgbClr val="16273C"/>
-                </a:solidFill>
-                <a:latin typeface="Segoe UI"/>
-              </a:rPr>
-              <a:t>Photograph a PCB → AI reads the BOM → 12-country cost</a:t>
-            </a:r>
-          </a:p>
-        </p:txBody>
-      </p:sp>
-      <p:sp>
-        <p:nvSpPr>
-          <p:cNvPr id="17" name="Rounded Rectangle 16"/>
-          <p:cNvSpPr/>
-          <p:nvPr/>
-        </p:nvSpPr>
-        <p:spPr>
-          <a:xfrm>
-            <a:off x="1005840" y="5312664"/>
-            <a:ext cx="457200" cy="457200"/>
-          </a:xfrm>
-          <a:prstGeom prst="roundRect">
-            <a:avLst/>
-          </a:prstGeom>
-          <a:solidFill>
-            <a:srgbClr val="B47609"/>
-          </a:solidFill>
-          <a:ln>
-            <a:noFill/>
-          </a:ln>
-          <a:effectLst/>
-        </p:spPr>
-        <p:style>
-          <a:lnRef idx="1">
-            <a:schemeClr val="accent1"/>
-          </a:lnRef>
-          <a:fillRef idx="3">
-            <a:schemeClr val="accent1"/>
-          </a:fillRef>
-          <a:effectRef idx="2">
-            <a:schemeClr val="accent1"/>
-          </a:effectRef>
-          <a:fontRef idx="minor">
-            <a:schemeClr val="lt1"/>
-          </a:fontRef>
-        </p:style>
-        <p:txBody>
-          <a:bodyPr rtlCol="0" anchor="ctr"/>
-          <a:lstStyle/>
-          <a:p>
-            <a:pPr algn="ctr"/>
-          </a:p>
-        </p:txBody>
-      </p:sp>
-      <p:sp>
-        <p:nvSpPr>
-          <p:cNvPr id="18" name="TextBox 17"/>
-          <p:cNvSpPr txBox="1"/>
-          <p:nvPr/>
-        </p:nvSpPr>
-        <p:spPr>
-          <a:xfrm>
-            <a:off x="1005840" y="5312664"/>
-            <a:ext cx="457200" cy="457200"/>
-          </a:xfrm>
-          <a:prstGeom prst="rect">
-            <a:avLst/>
-          </a:prstGeom>
-          <a:noFill/>
-        </p:spPr>
-        <p:txBody>
-          <a:bodyPr wrap="square" anchor="ctr" lIns="0" rIns="0" tIns="0" bIns="0">
-            <a:spAutoFit/>
-          </a:bodyPr>
-          <a:lstStyle/>
-          <a:p>
-            <a:pPr algn="ctr">
-              <a:lnSpc>
-                <a:spcPct val="100000"/>
-              </a:lnSpc>
-            </a:pPr>
-            <a:r>
-              <a:rPr sz="1800" b="1" i="0">
-                <a:solidFill>
-                  <a:srgbClr val="FFFFFF"/>
-                </a:solidFill>
-                <a:latin typeface="Arial"/>
-              </a:rPr>
-              <a:t>4</a:t>
-            </a:r>
-          </a:p>
-        </p:txBody>
-      </p:sp>
-      <p:sp>
-        <p:nvSpPr>
-          <p:cNvPr id="19" name="TextBox 18"/>
-          <p:cNvSpPr txBox="1"/>
-          <p:nvPr/>
-        </p:nvSpPr>
-        <p:spPr>
-          <a:xfrm>
-            <a:off x="1645920" y="5330952"/>
-            <a:ext cx="8686800" cy="457200"/>
-          </a:xfrm>
-          <a:prstGeom prst="rect">
-            <a:avLst/>
-          </a:prstGeom>
-          <a:noFill/>
-        </p:spPr>
-        <p:txBody>
-          <a:bodyPr wrap="square" anchor="ctr" lIns="0" rIns="0" tIns="0" bIns="0">
-            <a:spAutoFit/>
-          </a:bodyPr>
-          <a:lstStyle/>
-          <a:p>
-            <a:pPr algn="l">
-              <a:lnSpc>
-                <a:spcPct val="100000"/>
-              </a:lnSpc>
-            </a:pPr>
-            <a:r>
-              <a:rPr sz="1500" b="0" i="0">
-                <a:solidFill>
-                  <a:srgbClr val="16273C"/>
-                </a:solidFill>
-                <a:latin typeface="Segoe UI"/>
-              </a:rPr>
-              <a:t>Run a should-cost, close a quote gap with targeted ideas</a:t>
-            </a:r>
-          </a:p>
-        </p:txBody>
-      </p:sp>
-      <p:sp>
-        <p:nvSpPr>
-          <p:cNvPr id="20" name="Rounded Rectangle 19"/>
-          <p:cNvSpPr/>
-          <p:nvPr/>
-        </p:nvSpPr>
-        <p:spPr>
-          <a:xfrm>
-            <a:off x="1005840" y="5879592"/>
-            <a:ext cx="457200" cy="457200"/>
-          </a:xfrm>
-          <a:prstGeom prst="roundRect">
-            <a:avLst/>
-          </a:prstGeom>
-          <a:solidFill>
-            <a:srgbClr val="B47609"/>
-          </a:solidFill>
-          <a:ln>
-            <a:noFill/>
-          </a:ln>
-          <a:effectLst/>
-        </p:spPr>
-        <p:style>
-          <a:lnRef idx="1">
-            <a:schemeClr val="accent1"/>
-          </a:lnRef>
-          <a:fillRef idx="3">
-            <a:schemeClr val="accent1"/>
-          </a:fillRef>
-          <a:effectRef idx="2">
-            <a:schemeClr val="accent1"/>
-          </a:effectRef>
-          <a:fontRef idx="minor">
-            <a:schemeClr val="lt1"/>
-          </a:fontRef>
-        </p:style>
-        <p:txBody>
-          <a:bodyPr rtlCol="0" anchor="ctr"/>
-          <a:lstStyle/>
-          <a:p>
-            <a:pPr algn="ctr"/>
-          </a:p>
-        </p:txBody>
-      </p:sp>
-      <p:sp>
-        <p:nvSpPr>
-          <p:cNvPr id="21" name="TextBox 20"/>
-          <p:cNvSpPr txBox="1"/>
-          <p:nvPr/>
-        </p:nvSpPr>
-        <p:spPr>
-          <a:xfrm>
-            <a:off x="1005840" y="5879592"/>
-            <a:ext cx="457200" cy="457200"/>
-          </a:xfrm>
-          <a:prstGeom prst="rect">
-            <a:avLst/>
-          </a:prstGeom>
-          <a:noFill/>
-        </p:spPr>
-        <p:txBody>
-          <a:bodyPr wrap="square" anchor="ctr" lIns="0" rIns="0" tIns="0" bIns="0">
-            <a:spAutoFit/>
-          </a:bodyPr>
-          <a:lstStyle/>
-          <a:p>
-            <a:pPr algn="ctr">
-              <a:lnSpc>
-                <a:spcPct val="100000"/>
-              </a:lnSpc>
-            </a:pPr>
-            <a:r>
-              <a:rPr sz="1800" b="1" i="0">
-                <a:solidFill>
-                  <a:srgbClr val="FFFFFF"/>
-                </a:solidFill>
-                <a:latin typeface="Arial"/>
-              </a:rPr>
-              <a:t>5</a:t>
-            </a:r>
-          </a:p>
-        </p:txBody>
-      </p:sp>
-      <p:sp>
-        <p:nvSpPr>
-          <p:cNvPr id="22" name="TextBox 21"/>
-          <p:cNvSpPr txBox="1"/>
-          <p:nvPr/>
-        </p:nvSpPr>
-        <p:spPr>
-          <a:xfrm>
-            <a:off x="1645920" y="5897880"/>
-            <a:ext cx="8686800" cy="457200"/>
-          </a:xfrm>
-          <a:prstGeom prst="rect">
-            <a:avLst/>
-          </a:prstGeom>
-          <a:noFill/>
-        </p:spPr>
-        <p:txBody>
-          <a:bodyPr wrap="square" anchor="ctr" lIns="0" rIns="0" tIns="0" bIns="0">
-            <a:spAutoFit/>
-          </a:bodyPr>
-          <a:lstStyle/>
-          <a:p>
-            <a:pPr algn="l">
-              <a:lnSpc>
-                <a:spcPct val="100000"/>
-              </a:lnSpc>
-            </a:pPr>
-            <a:r>
-              <a:rPr sz="1500" b="0" i="0">
-                <a:solidFill>
-                  <a:srgbClr val="16273C"/>
-                </a:solidFill>
-                <a:latin typeface="Segoe UI"/>
-              </a:rPr>
-              <a:t>Show the savings pipeline, scorecards &amp; ROI business case</a:t>
+              <a:t>more cost-down ideas, found earlier, defended better — and captured as reusable team knowledge.</a:t>
             </a:r>
           </a:p>
         </p:txBody>
@@ -23076,9 +24471,97 @@
         <p:spPr>
           <a:xfrm>
             <a:off x="0" y="0"/>
-            <a:ext cx="12191695" cy="1234440"/>
-          </a:xfrm>
-          <a:prstGeom prst="rect">
+            <a:ext cx="320040" cy="6858000"/>
+          </a:xfrm>
+          <a:prstGeom prst="rect">
+            <a:avLst/>
+          </a:prstGeom>
+          <a:solidFill>
+            <a:srgbClr val="0D9488"/>
+          </a:solidFill>
+          <a:ln>
+            <a:noFill/>
+          </a:ln>
+          <a:effectLst/>
+        </p:spPr>
+        <p:style>
+          <a:lnRef idx="1">
+            <a:schemeClr val="accent1"/>
+          </a:lnRef>
+          <a:fillRef idx="3">
+            <a:schemeClr val="accent1"/>
+          </a:fillRef>
+          <a:effectRef idx="2">
+            <a:schemeClr val="accent1"/>
+          </a:effectRef>
+          <a:fontRef idx="minor">
+            <a:schemeClr val="lt1"/>
+          </a:fontRef>
+        </p:style>
+        <p:txBody>
+          <a:bodyPr rtlCol="0" anchor="ctr"/>
+          <a:lstStyle/>
+          <a:p>
+            <a:pPr algn="ctr"/>
+          </a:p>
+        </p:txBody>
+      </p:sp>
+      <p:sp>
+        <p:nvSpPr>
+          <p:cNvPr id="3" name="Rectangle 2"/>
+          <p:cNvSpPr/>
+          <p:nvPr/>
+        </p:nvSpPr>
+        <p:spPr>
+          <a:xfrm>
+            <a:off x="320040" y="0"/>
+            <a:ext cx="109728" cy="6858000"/>
+          </a:xfrm>
+          <a:prstGeom prst="rect">
+            <a:avLst/>
+          </a:prstGeom>
+          <a:solidFill>
+            <a:srgbClr val="B47609"/>
+          </a:solidFill>
+          <a:ln>
+            <a:noFill/>
+          </a:ln>
+          <a:effectLst/>
+        </p:spPr>
+        <p:style>
+          <a:lnRef idx="1">
+            <a:schemeClr val="accent1"/>
+          </a:lnRef>
+          <a:fillRef idx="3">
+            <a:schemeClr val="accent1"/>
+          </a:fillRef>
+          <a:effectRef idx="2">
+            <a:schemeClr val="accent1"/>
+          </a:effectRef>
+          <a:fontRef idx="minor">
+            <a:schemeClr val="lt1"/>
+          </a:fontRef>
+        </p:style>
+        <p:txBody>
+          <a:bodyPr rtlCol="0" anchor="ctr"/>
+          <a:lstStyle/>
+          <a:p>
+            <a:pPr algn="ctr"/>
+          </a:p>
+        </p:txBody>
+      </p:sp>
+      <p:sp>
+        <p:nvSpPr>
+          <p:cNvPr id="4" name="Oval 3"/>
+          <p:cNvSpPr/>
+          <p:nvPr/>
+        </p:nvSpPr>
+        <p:spPr>
+          <a:xfrm>
+            <a:off x="8686800" y="-914400"/>
+            <a:ext cx="5029200" cy="5029200"/>
+          </a:xfrm>
+          <a:prstGeom prst="ellipse">
             <a:avLst/>
           </a:prstGeom>
           <a:solidFill>
@@ -23113,60 +24596,133 @@
       </p:sp>
       <p:sp>
         <p:nvSpPr>
-          <p:cNvPr id="3" name="Rectangle 2"/>
+          <p:cNvPr id="5" name="TextBox 4"/>
+          <p:cNvSpPr txBox="1"/>
+          <p:nvPr/>
+        </p:nvSpPr>
+        <p:spPr>
+          <a:xfrm>
+            <a:off x="1005840" y="1371600"/>
+            <a:ext cx="7315200" cy="457200"/>
+          </a:xfrm>
+          <a:prstGeom prst="rect">
+            <a:avLst/>
+          </a:prstGeom>
+          <a:noFill/>
+        </p:spPr>
+        <p:txBody>
+          <a:bodyPr wrap="square" anchor="t" lIns="0" rIns="0" tIns="0" bIns="0">
+            <a:spAutoFit/>
+          </a:bodyPr>
+          <a:lstStyle/>
+          <a:p>
+            <a:pPr algn="l">
+              <a:lnSpc>
+                <a:spcPct val="100000"/>
+              </a:lnSpc>
+            </a:pPr>
+            <a:r>
+              <a:rPr sz="1500" b="1" i="0">
+                <a:solidFill>
+                  <a:srgbClr val="0D9488"/>
+                </a:solidFill>
+                <a:latin typeface="Segoe UI Semibold"/>
+              </a:rPr>
+              <a:t>SEE IT LIVE</a:t>
+            </a:r>
+          </a:p>
+        </p:txBody>
+      </p:sp>
+      <p:sp>
+        <p:nvSpPr>
+          <p:cNvPr id="6" name="TextBox 5"/>
+          <p:cNvSpPr txBox="1"/>
+          <p:nvPr/>
+        </p:nvSpPr>
+        <p:spPr>
+          <a:xfrm>
+            <a:off x="960120" y="1920240"/>
+            <a:ext cx="8229600" cy="914400"/>
+          </a:xfrm>
+          <a:prstGeom prst="rect">
+            <a:avLst/>
+          </a:prstGeom>
+          <a:noFill/>
+        </p:spPr>
+        <p:txBody>
+          <a:bodyPr wrap="square" anchor="t" lIns="0" rIns="0" tIns="0" bIns="0">
+            <a:spAutoFit/>
+          </a:bodyPr>
+          <a:lstStyle/>
+          <a:p>
+            <a:pPr algn="l">
+              <a:lnSpc>
+                <a:spcPct val="100000"/>
+              </a:lnSpc>
+            </a:pPr>
+            <a:r>
+              <a:rPr sz="5200" b="1" i="0">
+                <a:solidFill>
+                  <a:srgbClr val="16273C"/>
+                </a:solidFill>
+                <a:latin typeface="Segoe UI Semibold"/>
+              </a:rPr>
+              <a:t>Live Demo</a:t>
+            </a:r>
+          </a:p>
+        </p:txBody>
+      </p:sp>
+      <p:sp>
+        <p:nvSpPr>
+          <p:cNvPr id="7" name="TextBox 6"/>
+          <p:cNvSpPr txBox="1"/>
+          <p:nvPr/>
+        </p:nvSpPr>
+        <p:spPr>
+          <a:xfrm>
+            <a:off x="1005840" y="3017520"/>
+            <a:ext cx="9601200" cy="457200"/>
+          </a:xfrm>
+          <a:prstGeom prst="rect">
+            <a:avLst/>
+          </a:prstGeom>
+          <a:noFill/>
+        </p:spPr>
+        <p:txBody>
+          <a:bodyPr wrap="square" anchor="t" lIns="0" rIns="0" tIns="0" bIns="0">
+            <a:spAutoFit/>
+          </a:bodyPr>
+          <a:lstStyle/>
+          <a:p>
+            <a:pPr algn="l">
+              <a:lnSpc>
+                <a:spcPct val="100000"/>
+              </a:lnSpc>
+            </a:pPr>
+            <a:r>
+              <a:rPr sz="1700" b="0" i="0">
+                <a:solidFill>
+                  <a:srgbClr val="374558"/>
+                </a:solidFill>
+                <a:latin typeface="Segoe UI Light"/>
+              </a:rPr>
+              <a:t>A 5-minute walk through the real workflow:</a:t>
+            </a:r>
+          </a:p>
+        </p:txBody>
+      </p:sp>
+      <p:sp>
+        <p:nvSpPr>
+          <p:cNvPr id="8" name="Rounded Rectangle 7"/>
           <p:cNvSpPr/>
           <p:nvPr/>
         </p:nvSpPr>
         <p:spPr>
           <a:xfrm>
-            <a:off x="0" y="1234440"/>
-            <a:ext cx="12191695" cy="38100"/>
-          </a:xfrm>
-          <a:prstGeom prst="rect">
-            <a:avLst/>
-          </a:prstGeom>
-          <a:solidFill>
-            <a:srgbClr val="0D9488"/>
-          </a:solidFill>
-          <a:ln>
-            <a:noFill/>
-          </a:ln>
-          <a:effectLst/>
-        </p:spPr>
-        <p:style>
-          <a:lnRef idx="1">
-            <a:schemeClr val="accent1"/>
-          </a:lnRef>
-          <a:fillRef idx="3">
-            <a:schemeClr val="accent1"/>
-          </a:fillRef>
-          <a:effectRef idx="2">
-            <a:schemeClr val="accent1"/>
-          </a:effectRef>
-          <a:fontRef idx="minor">
-            <a:schemeClr val="lt1"/>
-          </a:fontRef>
-        </p:style>
-        <p:txBody>
-          <a:bodyPr rtlCol="0" anchor="ctr"/>
-          <a:lstStyle/>
-          <a:p>
-            <a:pPr algn="ctr"/>
-          </a:p>
-        </p:txBody>
-      </p:sp>
-      <p:sp>
-        <p:nvSpPr>
-          <p:cNvPr id="4" name="Rectangle 3"/>
-          <p:cNvSpPr/>
-          <p:nvPr/>
-        </p:nvSpPr>
-        <p:spPr>
-          <a:xfrm>
-            <a:off x="502920" y="384048"/>
-            <a:ext cx="100584" cy="502920"/>
-          </a:xfrm>
-          <a:prstGeom prst="rect">
+            <a:off x="1005840" y="3611880"/>
+            <a:ext cx="457200" cy="457200"/>
+          </a:xfrm>
+          <a:prstGeom prst="roundRect">
             <a:avLst/>
           </a:prstGeom>
           <a:solidFill>
@@ -23201,22 +24757,61 @@
       </p:sp>
       <p:sp>
         <p:nvSpPr>
-          <p:cNvPr id="5" name="TextBox 4"/>
-          <p:cNvSpPr txBox="1"/>
-          <p:nvPr/>
-        </p:nvSpPr>
-        <p:spPr>
-          <a:xfrm>
-            <a:off x="777240" y="256032"/>
-            <a:ext cx="9601200" cy="320040"/>
-          </a:xfrm>
-          <a:prstGeom prst="rect">
-            <a:avLst/>
-          </a:prstGeom>
-          <a:noFill/>
-        </p:spPr>
-        <p:txBody>
-          <a:bodyPr wrap="square" anchor="t" lIns="0" rIns="0" tIns="0" bIns="0">
+          <p:cNvPr id="9" name="TextBox 8"/>
+          <p:cNvSpPr txBox="1"/>
+          <p:nvPr/>
+        </p:nvSpPr>
+        <p:spPr>
+          <a:xfrm>
+            <a:off x="1005840" y="3611880"/>
+            <a:ext cx="457200" cy="457200"/>
+          </a:xfrm>
+          <a:prstGeom prst="rect">
+            <a:avLst/>
+          </a:prstGeom>
+          <a:noFill/>
+        </p:spPr>
+        <p:txBody>
+          <a:bodyPr wrap="square" anchor="ctr" lIns="0" rIns="0" tIns="0" bIns="0">
+            <a:spAutoFit/>
+          </a:bodyPr>
+          <a:lstStyle/>
+          <a:p>
+            <a:pPr algn="ctr">
+              <a:lnSpc>
+                <a:spcPct val="100000"/>
+              </a:lnSpc>
+            </a:pPr>
+            <a:r>
+              <a:rPr sz="1800" b="1" i="0">
+                <a:solidFill>
+                  <a:srgbClr val="FFFFFF"/>
+                </a:solidFill>
+                <a:latin typeface="Arial"/>
+              </a:rPr>
+              <a:t>1</a:t>
+            </a:r>
+          </a:p>
+        </p:txBody>
+      </p:sp>
+      <p:sp>
+        <p:nvSpPr>
+          <p:cNvPr id="10" name="TextBox 9"/>
+          <p:cNvSpPr txBox="1"/>
+          <p:nvPr/>
+        </p:nvSpPr>
+        <p:spPr>
+          <a:xfrm>
+            <a:off x="1645920" y="3630168"/>
+            <a:ext cx="8686800" cy="457200"/>
+          </a:xfrm>
+          <a:prstGeom prst="rect">
+            <a:avLst/>
+          </a:prstGeom>
+          <a:noFill/>
+        </p:spPr>
+        <p:txBody>
+          <a:bodyPr wrap="square" anchor="ctr" lIns="0" rIns="0" tIns="0" bIns="0">
             <a:spAutoFit/>
           </a:bodyPr>
           <a:lstStyle/>
@@ -23227,222 +24822,13 @@
               </a:lnSpc>
             </a:pPr>
             <a:r>
-              <a:rPr sz="1200" b="1" i="0">
-                <a:solidFill>
-                  <a:srgbClr val="0D9488"/>
-                </a:solidFill>
-                <a:latin typeface="Segoe UI Semibold"/>
-              </a:rPr>
-              <a:t>WHAT'S NEXT</a:t>
-            </a:r>
-          </a:p>
-        </p:txBody>
-      </p:sp>
-      <p:sp>
-        <p:nvSpPr>
-          <p:cNvPr id="6" name="TextBox 5"/>
-          <p:cNvSpPr txBox="1"/>
-          <p:nvPr/>
-        </p:nvSpPr>
-        <p:spPr>
-          <a:xfrm>
-            <a:off x="777240" y="548640"/>
-            <a:ext cx="10332720" cy="548640"/>
-          </a:xfrm>
-          <a:prstGeom prst="rect">
-            <a:avLst/>
-          </a:prstGeom>
-          <a:noFill/>
-        </p:spPr>
-        <p:txBody>
-          <a:bodyPr wrap="square" anchor="t" lIns="0" rIns="0" tIns="0" bIns="0">
-            <a:spAutoFit/>
-          </a:bodyPr>
-          <a:lstStyle/>
-          <a:p>
-            <a:pPr algn="l">
-              <a:lnSpc>
-                <a:spcPct val="100000"/>
-              </a:lnSpc>
-            </a:pPr>
-            <a:r>
-              <a:rPr sz="2700" b="1" i="0">
+              <a:rPr sz="1500" b="0" i="0">
                 <a:solidFill>
                   <a:srgbClr val="16273C"/>
                 </a:solidFill>
-                <a:latin typeface="Segoe UI Semibold"/>
-              </a:rPr>
-              <a:t>Roadmap</a:t>
-            </a:r>
-          </a:p>
-        </p:txBody>
-      </p:sp>
-      <p:sp>
-        <p:nvSpPr>
-          <p:cNvPr id="7" name="Rounded Rectangle 6"/>
-          <p:cNvSpPr/>
-          <p:nvPr/>
-        </p:nvSpPr>
-        <p:spPr>
-          <a:xfrm>
-            <a:off x="11292840" y="457200"/>
-            <a:ext cx="502920" cy="365760"/>
-          </a:xfrm>
-          <a:prstGeom prst="roundRect">
-            <a:avLst/>
-          </a:prstGeom>
-          <a:solidFill>
-            <a:srgbClr val="E4EAF1"/>
-          </a:solidFill>
-          <a:ln>
-            <a:noFill/>
-          </a:ln>
-          <a:effectLst/>
-        </p:spPr>
-        <p:style>
-          <a:lnRef idx="1">
-            <a:schemeClr val="accent1"/>
-          </a:lnRef>
-          <a:fillRef idx="3">
-            <a:schemeClr val="accent1"/>
-          </a:fillRef>
-          <a:effectRef idx="2">
-            <a:schemeClr val="accent1"/>
-          </a:effectRef>
-          <a:fontRef idx="minor">
-            <a:schemeClr val="lt1"/>
-          </a:fontRef>
-        </p:style>
-        <p:txBody>
-          <a:bodyPr rtlCol="0" anchor="ctr"/>
-          <a:lstStyle/>
-          <a:p>
-            <a:pPr algn="ctr"/>
-          </a:p>
-        </p:txBody>
-      </p:sp>
-      <p:sp>
-        <p:nvSpPr>
-          <p:cNvPr id="8" name="TextBox 7"/>
-          <p:cNvSpPr txBox="1"/>
-          <p:nvPr/>
-        </p:nvSpPr>
-        <p:spPr>
-          <a:xfrm>
-            <a:off x="11292840" y="484632"/>
-            <a:ext cx="502920" cy="320040"/>
-          </a:xfrm>
-          <a:prstGeom prst="rect">
-            <a:avLst/>
-          </a:prstGeom>
-          <a:noFill/>
-        </p:spPr>
-        <p:txBody>
-          <a:bodyPr wrap="square" anchor="t" lIns="0" rIns="0" tIns="0" bIns="0">
-            <a:spAutoFit/>
-          </a:bodyPr>
-          <a:lstStyle/>
-          <a:p>
-            <a:pPr algn="ctr">
-              <a:lnSpc>
-                <a:spcPct val="100000"/>
-              </a:lnSpc>
-            </a:pPr>
-            <a:r>
-              <a:rPr sz="1300" b="1" i="0">
-                <a:solidFill>
-                  <a:srgbClr val="556477"/>
-                </a:solidFill>
                 <a:latin typeface="Segoe UI"/>
               </a:rPr>
-              <a:t>19</a:t>
-            </a:r>
-          </a:p>
-        </p:txBody>
-      </p:sp>
-      <p:sp>
-        <p:nvSpPr>
-          <p:cNvPr id="9" name="TextBox 8"/>
-          <p:cNvSpPr txBox="1"/>
-          <p:nvPr/>
-        </p:nvSpPr>
-        <p:spPr>
-          <a:xfrm>
-            <a:off x="777240" y="6455664"/>
-            <a:ext cx="7315200" cy="274320"/>
-          </a:xfrm>
-          <a:prstGeom prst="rect">
-            <a:avLst/>
-          </a:prstGeom>
-          <a:noFill/>
-        </p:spPr>
-        <p:txBody>
-          <a:bodyPr wrap="square" anchor="t" lIns="0" rIns="0" tIns="0" bIns="0">
-            <a:spAutoFit/>
-          </a:bodyPr>
-          <a:lstStyle/>
-          <a:p>
-            <a:pPr algn="l">
-              <a:lnSpc>
-                <a:spcPct val="100000"/>
-              </a:lnSpc>
-            </a:pPr>
-            <a:r>
-              <a:rPr sz="900" b="1" i="0">
-                <a:solidFill>
-                  <a:srgbClr val="0D9488"/>
-                </a:solidFill>
-                <a:latin typeface="Segoe UI"/>
-              </a:rPr>
-              <a:t>BrainSpark</a:t>
-            </a:r>
-            <a:r>
-              <a:rPr sz="900" b="0" i="0">
-                <a:solidFill>
-                  <a:srgbClr val="8390A1"/>
-                </a:solidFill>
-                <a:latin typeface="Segoe UI"/>
-              </a:rPr>
-              <a:t>  ·  AI-Powered Cost Engineering Platform</a:t>
-            </a:r>
-          </a:p>
-        </p:txBody>
-      </p:sp>
-      <p:sp>
-        <p:nvSpPr>
-          <p:cNvPr id="10" name="TextBox 9"/>
-          <p:cNvSpPr txBox="1"/>
-          <p:nvPr/>
-        </p:nvSpPr>
-        <p:spPr>
-          <a:xfrm>
-            <a:off x="8686800" y="6455664"/>
-            <a:ext cx="2743200" cy="274320"/>
-          </a:xfrm>
-          <a:prstGeom prst="rect">
-            <a:avLst/>
-          </a:prstGeom>
-          <a:noFill/>
-        </p:spPr>
-        <p:txBody>
-          <a:bodyPr wrap="square" anchor="t" lIns="0" rIns="0" tIns="0" bIns="0">
-            <a:spAutoFit/>
-          </a:bodyPr>
-          <a:lstStyle/>
-          <a:p>
-            <a:pPr algn="r">
-              <a:lnSpc>
-                <a:spcPct val="100000"/>
-              </a:lnSpc>
-            </a:pPr>
-            <a:r>
-              <a:rPr sz="900" b="0" i="0">
-                <a:solidFill>
-                  <a:srgbClr val="8390A1"/>
-                </a:solidFill>
-                <a:latin typeface="Segoe UI"/>
-              </a:rPr>
-              <a:t>Confidential — Internal</a:t>
+              <a:t>Generate cost-reduction ideas for a live vehicle system</a:t>
             </a:r>
           </a:p>
         </p:txBody>
@@ -23455,876 +24841,8 @@
         </p:nvSpPr>
         <p:spPr>
           <a:xfrm>
-            <a:off x="548640" y="1645920"/>
-            <a:ext cx="3611880" cy="4297680"/>
-          </a:xfrm>
-          <a:prstGeom prst="roundRect">
-            <a:avLst/>
-          </a:prstGeom>
-          <a:solidFill>
-            <a:srgbClr val="FFFFFF"/>
-          </a:solidFill>
-          <a:ln w="12700">
-            <a:solidFill>
-              <a:srgbClr val="D8E0EA"/>
-            </a:solidFill>
-          </a:ln>
-          <a:effectLst/>
-        </p:spPr>
-        <p:style>
-          <a:lnRef idx="1">
-            <a:schemeClr val="accent1"/>
-          </a:lnRef>
-          <a:fillRef idx="3">
-            <a:schemeClr val="accent1"/>
-          </a:fillRef>
-          <a:effectRef idx="2">
-            <a:schemeClr val="accent1"/>
-          </a:effectRef>
-          <a:fontRef idx="minor">
-            <a:schemeClr val="lt1"/>
-          </a:fontRef>
-        </p:style>
-        <p:txBody>
-          <a:bodyPr rtlCol="0" anchor="ctr"/>
-          <a:lstStyle/>
-          <a:p>
-            <a:pPr algn="ctr"/>
-          </a:p>
-        </p:txBody>
-      </p:sp>
-      <p:sp>
-        <p:nvSpPr>
-          <p:cNvPr id="12" name="Rounded Rectangle 11"/>
-          <p:cNvSpPr/>
-          <p:nvPr/>
-        </p:nvSpPr>
-        <p:spPr>
-          <a:xfrm>
-            <a:off x="548640" y="1645920"/>
-            <a:ext cx="3611880" cy="868680"/>
-          </a:xfrm>
-          <a:prstGeom prst="roundRect">
-            <a:avLst/>
-          </a:prstGeom>
-          <a:solidFill>
-            <a:srgbClr val="059669"/>
-          </a:solidFill>
-          <a:ln>
-            <a:noFill/>
-          </a:ln>
-          <a:effectLst/>
-        </p:spPr>
-        <p:style>
-          <a:lnRef idx="1">
-            <a:schemeClr val="accent1"/>
-          </a:lnRef>
-          <a:fillRef idx="3">
-            <a:schemeClr val="accent1"/>
-          </a:fillRef>
-          <a:effectRef idx="2">
-            <a:schemeClr val="accent1"/>
-          </a:effectRef>
-          <a:fontRef idx="minor">
-            <a:schemeClr val="lt1"/>
-          </a:fontRef>
-        </p:style>
-        <p:txBody>
-          <a:bodyPr rtlCol="0" anchor="ctr"/>
-          <a:lstStyle/>
-          <a:p>
-            <a:pPr algn="ctr"/>
-          </a:p>
-        </p:txBody>
-      </p:sp>
-      <p:sp>
-        <p:nvSpPr>
-          <p:cNvPr id="13" name="Rectangle 12"/>
-          <p:cNvSpPr/>
-          <p:nvPr/>
-        </p:nvSpPr>
-        <p:spPr>
-          <a:xfrm>
-            <a:off x="548640" y="2194560"/>
-            <a:ext cx="3611880" cy="320040"/>
-          </a:xfrm>
-          <a:prstGeom prst="rect">
-            <a:avLst/>
-          </a:prstGeom>
-          <a:solidFill>
-            <a:srgbClr val="059669"/>
-          </a:solidFill>
-          <a:ln>
-            <a:noFill/>
-          </a:ln>
-          <a:effectLst/>
-        </p:spPr>
-        <p:style>
-          <a:lnRef idx="1">
-            <a:schemeClr val="accent1"/>
-          </a:lnRef>
-          <a:fillRef idx="3">
-            <a:schemeClr val="accent1"/>
-          </a:fillRef>
-          <a:effectRef idx="2">
-            <a:schemeClr val="accent1"/>
-          </a:effectRef>
-          <a:fontRef idx="minor">
-            <a:schemeClr val="lt1"/>
-          </a:fontRef>
-        </p:style>
-        <p:txBody>
-          <a:bodyPr rtlCol="0" anchor="ctr"/>
-          <a:lstStyle/>
-          <a:p>
-            <a:pPr algn="ctr"/>
-          </a:p>
-        </p:txBody>
-      </p:sp>
-      <p:sp>
-        <p:nvSpPr>
-          <p:cNvPr id="14" name="TextBox 13"/>
-          <p:cNvSpPr txBox="1"/>
-          <p:nvPr/>
-        </p:nvSpPr>
-        <p:spPr>
-          <a:xfrm>
-            <a:off x="868680" y="1737360"/>
-            <a:ext cx="3017520" cy="457200"/>
-          </a:xfrm>
-          <a:prstGeom prst="rect">
-            <a:avLst/>
-          </a:prstGeom>
-          <a:noFill/>
-        </p:spPr>
-        <p:txBody>
-          <a:bodyPr wrap="square" anchor="t" lIns="0" rIns="0" tIns="0" bIns="0">
-            <a:spAutoFit/>
-          </a:bodyPr>
-          <a:lstStyle/>
-          <a:p>
-            <a:pPr algn="l">
-              <a:lnSpc>
-                <a:spcPct val="100000"/>
-              </a:lnSpc>
-            </a:pPr>
-            <a:r>
-              <a:rPr sz="2200" b="1" i="0">
-                <a:solidFill>
-                  <a:srgbClr val="FFFFFF"/>
-                </a:solidFill>
-                <a:latin typeface="Segoe UI Semibold"/>
-              </a:rPr>
-              <a:t>NOW</a:t>
-            </a:r>
-          </a:p>
-        </p:txBody>
-      </p:sp>
-      <p:sp>
-        <p:nvSpPr>
-          <p:cNvPr id="15" name="TextBox 14"/>
-          <p:cNvSpPr txBox="1"/>
-          <p:nvPr/>
-        </p:nvSpPr>
-        <p:spPr>
-          <a:xfrm>
-            <a:off x="868680" y="2176272"/>
-            <a:ext cx="3017520" cy="320040"/>
-          </a:xfrm>
-          <a:prstGeom prst="rect">
-            <a:avLst/>
-          </a:prstGeom>
-          <a:noFill/>
-        </p:spPr>
-        <p:txBody>
-          <a:bodyPr wrap="square" anchor="t" lIns="0" rIns="0" tIns="0" bIns="0">
-            <a:spAutoFit/>
-          </a:bodyPr>
-          <a:lstStyle/>
-          <a:p>
-            <a:pPr algn="l">
-              <a:lnSpc>
-                <a:spcPct val="100000"/>
-              </a:lnSpc>
-            </a:pPr>
-            <a:r>
-              <a:rPr sz="1200" b="1" i="0">
-                <a:solidFill>
-                  <a:srgbClr val="FFFFFF"/>
-                </a:solidFill>
-                <a:latin typeface="Segoe UI Semibold"/>
-              </a:rPr>
-              <a:t>Live today</a:t>
-            </a:r>
-          </a:p>
-        </p:txBody>
-      </p:sp>
-      <p:sp>
-        <p:nvSpPr>
-          <p:cNvPr id="16" name="Rounded Rectangle 15"/>
-          <p:cNvSpPr/>
-          <p:nvPr/>
-        </p:nvSpPr>
-        <p:spPr>
-          <a:xfrm>
-            <a:off x="804672" y="2743200"/>
-            <a:ext cx="292608" cy="292608"/>
-          </a:xfrm>
-          <a:prstGeom prst="roundRect">
-            <a:avLst/>
-          </a:prstGeom>
-          <a:solidFill>
-            <a:srgbClr val="059669"/>
-          </a:solidFill>
-          <a:ln>
-            <a:noFill/>
-          </a:ln>
-          <a:effectLst/>
-        </p:spPr>
-        <p:style>
-          <a:lnRef idx="1">
-            <a:schemeClr val="accent1"/>
-          </a:lnRef>
-          <a:fillRef idx="3">
-            <a:schemeClr val="accent1"/>
-          </a:fillRef>
-          <a:effectRef idx="2">
-            <a:schemeClr val="accent1"/>
-          </a:effectRef>
-          <a:fontRef idx="minor">
-            <a:schemeClr val="lt1"/>
-          </a:fontRef>
-        </p:style>
-        <p:txBody>
-          <a:bodyPr rtlCol="0" anchor="ctr"/>
-          <a:lstStyle/>
-          <a:p>
-            <a:pPr algn="ctr"/>
-          </a:p>
-        </p:txBody>
-      </p:sp>
-      <p:sp>
-        <p:nvSpPr>
-          <p:cNvPr id="17" name="TextBox 16"/>
-          <p:cNvSpPr txBox="1"/>
-          <p:nvPr/>
-        </p:nvSpPr>
-        <p:spPr>
-          <a:xfrm>
-            <a:off x="804672" y="2743200"/>
-            <a:ext cx="292608" cy="292608"/>
-          </a:xfrm>
-          <a:prstGeom prst="rect">
-            <a:avLst/>
-          </a:prstGeom>
-          <a:noFill/>
-        </p:spPr>
-        <p:txBody>
-          <a:bodyPr wrap="square" anchor="ctr" lIns="0" rIns="0" tIns="0" bIns="0">
-            <a:spAutoFit/>
-          </a:bodyPr>
-          <a:lstStyle/>
-          <a:p>
-            <a:pPr algn="ctr">
-              <a:lnSpc>
-                <a:spcPct val="100000"/>
-              </a:lnSpc>
-            </a:pPr>
-            <a:r>
-              <a:rPr sz="1800" b="1" i="0">
-                <a:solidFill>
-                  <a:srgbClr val="FFFFFF"/>
-                </a:solidFill>
-                <a:latin typeface="Arial"/>
-              </a:rPr>
-              <a:t>▪</a:t>
-            </a:r>
-          </a:p>
-        </p:txBody>
-      </p:sp>
-      <p:sp>
-        <p:nvSpPr>
-          <p:cNvPr id="18" name="TextBox 17"/>
-          <p:cNvSpPr txBox="1"/>
-          <p:nvPr/>
-        </p:nvSpPr>
-        <p:spPr>
-          <a:xfrm>
-            <a:off x="1188720" y="2724912"/>
-            <a:ext cx="2834640" cy="548640"/>
-          </a:xfrm>
-          <a:prstGeom prst="rect">
-            <a:avLst/>
-          </a:prstGeom>
-          <a:noFill/>
-        </p:spPr>
-        <p:txBody>
-          <a:bodyPr wrap="square" anchor="t" lIns="0" rIns="0" tIns="0" bIns="0">
-            <a:spAutoFit/>
-          </a:bodyPr>
-          <a:lstStyle/>
-          <a:p>
-            <a:pPr algn="l">
-              <a:lnSpc>
-                <a:spcPct val="102000"/>
-              </a:lnSpc>
-            </a:pPr>
-            <a:r>
-              <a:rPr sz="1150" b="0" i="0">
-                <a:solidFill>
-                  <a:srgbClr val="374558"/>
-                </a:solidFill>
-                <a:latin typeface="Segoe UI"/>
-              </a:rPr>
-              <a:t>Self-improving AI ideation + Deep Mode</a:t>
-            </a:r>
-          </a:p>
-        </p:txBody>
-      </p:sp>
-      <p:sp>
-        <p:nvSpPr>
-          <p:cNvPr id="19" name="Rounded Rectangle 18"/>
-          <p:cNvSpPr/>
-          <p:nvPr/>
-        </p:nvSpPr>
-        <p:spPr>
-          <a:xfrm>
-            <a:off x="804672" y="3364992"/>
-            <a:ext cx="292608" cy="292608"/>
-          </a:xfrm>
-          <a:prstGeom prst="roundRect">
-            <a:avLst/>
-          </a:prstGeom>
-          <a:solidFill>
-            <a:srgbClr val="059669"/>
-          </a:solidFill>
-          <a:ln>
-            <a:noFill/>
-          </a:ln>
-          <a:effectLst/>
-        </p:spPr>
-        <p:style>
-          <a:lnRef idx="1">
-            <a:schemeClr val="accent1"/>
-          </a:lnRef>
-          <a:fillRef idx="3">
-            <a:schemeClr val="accent1"/>
-          </a:fillRef>
-          <a:effectRef idx="2">
-            <a:schemeClr val="accent1"/>
-          </a:effectRef>
-          <a:fontRef idx="minor">
-            <a:schemeClr val="lt1"/>
-          </a:fontRef>
-        </p:style>
-        <p:txBody>
-          <a:bodyPr rtlCol="0" anchor="ctr"/>
-          <a:lstStyle/>
-          <a:p>
-            <a:pPr algn="ctr"/>
-          </a:p>
-        </p:txBody>
-      </p:sp>
-      <p:sp>
-        <p:nvSpPr>
-          <p:cNvPr id="20" name="TextBox 19"/>
-          <p:cNvSpPr txBox="1"/>
-          <p:nvPr/>
-        </p:nvSpPr>
-        <p:spPr>
-          <a:xfrm>
-            <a:off x="804672" y="3364992"/>
-            <a:ext cx="292608" cy="292608"/>
-          </a:xfrm>
-          <a:prstGeom prst="rect">
-            <a:avLst/>
-          </a:prstGeom>
-          <a:noFill/>
-        </p:spPr>
-        <p:txBody>
-          <a:bodyPr wrap="square" anchor="ctr" lIns="0" rIns="0" tIns="0" bIns="0">
-            <a:spAutoFit/>
-          </a:bodyPr>
-          <a:lstStyle/>
-          <a:p>
-            <a:pPr algn="ctr">
-              <a:lnSpc>
-                <a:spcPct val="100000"/>
-              </a:lnSpc>
-            </a:pPr>
-            <a:r>
-              <a:rPr sz="1800" b="1" i="0">
-                <a:solidFill>
-                  <a:srgbClr val="FFFFFF"/>
-                </a:solidFill>
-                <a:latin typeface="Arial"/>
-              </a:rPr>
-              <a:t>▪</a:t>
-            </a:r>
-          </a:p>
-        </p:txBody>
-      </p:sp>
-      <p:sp>
-        <p:nvSpPr>
-          <p:cNvPr id="21" name="TextBox 20"/>
-          <p:cNvSpPr txBox="1"/>
-          <p:nvPr/>
-        </p:nvSpPr>
-        <p:spPr>
-          <a:xfrm>
-            <a:off x="1188720" y="3346704"/>
-            <a:ext cx="2834640" cy="548640"/>
-          </a:xfrm>
-          <a:prstGeom prst="rect">
-            <a:avLst/>
-          </a:prstGeom>
-          <a:noFill/>
-        </p:spPr>
-        <p:txBody>
-          <a:bodyPr wrap="square" anchor="t" lIns="0" rIns="0" tIns="0" bIns="0">
-            <a:spAutoFit/>
-          </a:bodyPr>
-          <a:lstStyle/>
-          <a:p>
-            <a:pPr algn="l">
-              <a:lnSpc>
-                <a:spcPct val="102000"/>
-              </a:lnSpc>
-            </a:pPr>
-            <a:r>
-              <a:rPr sz="1150" b="0" i="0">
-                <a:solidFill>
-                  <a:srgbClr val="374558"/>
-                </a:solidFill>
-                <a:latin typeface="Segoe UI"/>
-              </a:rPr>
-              <a:t>PCB suite: photo → BOM → 12-country cost</a:t>
-            </a:r>
-          </a:p>
-        </p:txBody>
-      </p:sp>
-      <p:sp>
-        <p:nvSpPr>
-          <p:cNvPr id="22" name="Rounded Rectangle 21"/>
-          <p:cNvSpPr/>
-          <p:nvPr/>
-        </p:nvSpPr>
-        <p:spPr>
-          <a:xfrm>
-            <a:off x="804672" y="3986784"/>
-            <a:ext cx="292608" cy="292608"/>
-          </a:xfrm>
-          <a:prstGeom prst="roundRect">
-            <a:avLst/>
-          </a:prstGeom>
-          <a:solidFill>
-            <a:srgbClr val="059669"/>
-          </a:solidFill>
-          <a:ln>
-            <a:noFill/>
-          </a:ln>
-          <a:effectLst/>
-        </p:spPr>
-        <p:style>
-          <a:lnRef idx="1">
-            <a:schemeClr val="accent1"/>
-          </a:lnRef>
-          <a:fillRef idx="3">
-            <a:schemeClr val="accent1"/>
-          </a:fillRef>
-          <a:effectRef idx="2">
-            <a:schemeClr val="accent1"/>
-          </a:effectRef>
-          <a:fontRef idx="minor">
-            <a:schemeClr val="lt1"/>
-          </a:fontRef>
-        </p:style>
-        <p:txBody>
-          <a:bodyPr rtlCol="0" anchor="ctr"/>
-          <a:lstStyle/>
-          <a:p>
-            <a:pPr algn="ctr"/>
-          </a:p>
-        </p:txBody>
-      </p:sp>
-      <p:sp>
-        <p:nvSpPr>
-          <p:cNvPr id="23" name="TextBox 22"/>
-          <p:cNvSpPr txBox="1"/>
-          <p:nvPr/>
-        </p:nvSpPr>
-        <p:spPr>
-          <a:xfrm>
-            <a:off x="804672" y="3986784"/>
-            <a:ext cx="292608" cy="292608"/>
-          </a:xfrm>
-          <a:prstGeom prst="rect">
-            <a:avLst/>
-          </a:prstGeom>
-          <a:noFill/>
-        </p:spPr>
-        <p:txBody>
-          <a:bodyPr wrap="square" anchor="ctr" lIns="0" rIns="0" tIns="0" bIns="0">
-            <a:spAutoFit/>
-          </a:bodyPr>
-          <a:lstStyle/>
-          <a:p>
-            <a:pPr algn="ctr">
-              <a:lnSpc>
-                <a:spcPct val="100000"/>
-              </a:lnSpc>
-            </a:pPr>
-            <a:r>
-              <a:rPr sz="1800" b="1" i="0">
-                <a:solidFill>
-                  <a:srgbClr val="FFFFFF"/>
-                </a:solidFill>
-                <a:latin typeface="Arial"/>
-              </a:rPr>
-              <a:t>▪</a:t>
-            </a:r>
-          </a:p>
-        </p:txBody>
-      </p:sp>
-      <p:sp>
-        <p:nvSpPr>
-          <p:cNvPr id="24" name="TextBox 23"/>
-          <p:cNvSpPr txBox="1"/>
-          <p:nvPr/>
-        </p:nvSpPr>
-        <p:spPr>
-          <a:xfrm>
-            <a:off x="1188720" y="3968496"/>
-            <a:ext cx="2834640" cy="548640"/>
-          </a:xfrm>
-          <a:prstGeom prst="rect">
-            <a:avLst/>
-          </a:prstGeom>
-          <a:noFill/>
-        </p:spPr>
-        <p:txBody>
-          <a:bodyPr wrap="square" anchor="t" lIns="0" rIns="0" tIns="0" bIns="0">
-            <a:spAutoFit/>
-          </a:bodyPr>
-          <a:lstStyle/>
-          <a:p>
-            <a:pPr algn="l">
-              <a:lnSpc>
-                <a:spcPct val="102000"/>
-              </a:lnSpc>
-            </a:pPr>
-            <a:r>
-              <a:rPr sz="1150" b="0" i="0">
-                <a:solidFill>
-                  <a:srgbClr val="374558"/>
-                </a:solidFill>
-                <a:latin typeface="Segoe UI"/>
-              </a:rPr>
-              <a:t>Should-cost + quote-gap closure</a:t>
-            </a:r>
-          </a:p>
-        </p:txBody>
-      </p:sp>
-      <p:sp>
-        <p:nvSpPr>
-          <p:cNvPr id="25" name="Rounded Rectangle 24"/>
-          <p:cNvSpPr/>
-          <p:nvPr/>
-        </p:nvSpPr>
-        <p:spPr>
-          <a:xfrm>
-            <a:off x="804672" y="4608576"/>
-            <a:ext cx="292608" cy="292608"/>
-          </a:xfrm>
-          <a:prstGeom prst="roundRect">
-            <a:avLst/>
-          </a:prstGeom>
-          <a:solidFill>
-            <a:srgbClr val="059669"/>
-          </a:solidFill>
-          <a:ln>
-            <a:noFill/>
-          </a:ln>
-          <a:effectLst/>
-        </p:spPr>
-        <p:style>
-          <a:lnRef idx="1">
-            <a:schemeClr val="accent1"/>
-          </a:lnRef>
-          <a:fillRef idx="3">
-            <a:schemeClr val="accent1"/>
-          </a:fillRef>
-          <a:effectRef idx="2">
-            <a:schemeClr val="accent1"/>
-          </a:effectRef>
-          <a:fontRef idx="minor">
-            <a:schemeClr val="lt1"/>
-          </a:fontRef>
-        </p:style>
-        <p:txBody>
-          <a:bodyPr rtlCol="0" anchor="ctr"/>
-          <a:lstStyle/>
-          <a:p>
-            <a:pPr algn="ctr"/>
-          </a:p>
-        </p:txBody>
-      </p:sp>
-      <p:sp>
-        <p:nvSpPr>
-          <p:cNvPr id="26" name="TextBox 25"/>
-          <p:cNvSpPr txBox="1"/>
-          <p:nvPr/>
-        </p:nvSpPr>
-        <p:spPr>
-          <a:xfrm>
-            <a:off x="804672" y="4608576"/>
-            <a:ext cx="292608" cy="292608"/>
-          </a:xfrm>
-          <a:prstGeom prst="rect">
-            <a:avLst/>
-          </a:prstGeom>
-          <a:noFill/>
-        </p:spPr>
-        <p:txBody>
-          <a:bodyPr wrap="square" anchor="ctr" lIns="0" rIns="0" tIns="0" bIns="0">
-            <a:spAutoFit/>
-          </a:bodyPr>
-          <a:lstStyle/>
-          <a:p>
-            <a:pPr algn="ctr">
-              <a:lnSpc>
-                <a:spcPct val="100000"/>
-              </a:lnSpc>
-            </a:pPr>
-            <a:r>
-              <a:rPr sz="1800" b="1" i="0">
-                <a:solidFill>
-                  <a:srgbClr val="FFFFFF"/>
-                </a:solidFill>
-                <a:latin typeface="Arial"/>
-              </a:rPr>
-              <a:t>▪</a:t>
-            </a:r>
-          </a:p>
-        </p:txBody>
-      </p:sp>
-      <p:sp>
-        <p:nvSpPr>
-          <p:cNvPr id="27" name="TextBox 26"/>
-          <p:cNvSpPr txBox="1"/>
-          <p:nvPr/>
-        </p:nvSpPr>
-        <p:spPr>
-          <a:xfrm>
-            <a:off x="1188720" y="4590288"/>
-            <a:ext cx="2834640" cy="548640"/>
-          </a:xfrm>
-          <a:prstGeom prst="rect">
-            <a:avLst/>
-          </a:prstGeom>
-          <a:noFill/>
-        </p:spPr>
-        <p:txBody>
-          <a:bodyPr wrap="square" anchor="t" lIns="0" rIns="0" tIns="0" bIns="0">
-            <a:spAutoFit/>
-          </a:bodyPr>
-          <a:lstStyle/>
-          <a:p>
-            <a:pPr algn="l">
-              <a:lnSpc>
-                <a:spcPct val="102000"/>
-              </a:lnSpc>
-            </a:pPr>
-            <a:r>
-              <a:rPr sz="1150" b="0" i="0">
-                <a:solidFill>
-                  <a:srgbClr val="374558"/>
-                </a:solidFill>
-                <a:latin typeface="Segoe UI"/>
-              </a:rPr>
-              <a:t>11 innovation methods, engine-checked</a:t>
-            </a:r>
-          </a:p>
-        </p:txBody>
-      </p:sp>
-      <p:sp>
-        <p:nvSpPr>
-          <p:cNvPr id="28" name="Rounded Rectangle 27"/>
-          <p:cNvSpPr/>
-          <p:nvPr/>
-        </p:nvSpPr>
-        <p:spPr>
-          <a:xfrm>
-            <a:off x="804672" y="5230368"/>
-            <a:ext cx="292608" cy="292608"/>
-          </a:xfrm>
-          <a:prstGeom prst="roundRect">
-            <a:avLst/>
-          </a:prstGeom>
-          <a:solidFill>
-            <a:srgbClr val="059669"/>
-          </a:solidFill>
-          <a:ln>
-            <a:noFill/>
-          </a:ln>
-          <a:effectLst/>
-        </p:spPr>
-        <p:style>
-          <a:lnRef idx="1">
-            <a:schemeClr val="accent1"/>
-          </a:lnRef>
-          <a:fillRef idx="3">
-            <a:schemeClr val="accent1"/>
-          </a:fillRef>
-          <a:effectRef idx="2">
-            <a:schemeClr val="accent1"/>
-          </a:effectRef>
-          <a:fontRef idx="minor">
-            <a:schemeClr val="lt1"/>
-          </a:fontRef>
-        </p:style>
-        <p:txBody>
-          <a:bodyPr rtlCol="0" anchor="ctr"/>
-          <a:lstStyle/>
-          <a:p>
-            <a:pPr algn="ctr"/>
-          </a:p>
-        </p:txBody>
-      </p:sp>
-      <p:sp>
-        <p:nvSpPr>
-          <p:cNvPr id="29" name="TextBox 28"/>
-          <p:cNvSpPr txBox="1"/>
-          <p:nvPr/>
-        </p:nvSpPr>
-        <p:spPr>
-          <a:xfrm>
-            <a:off x="804672" y="5230368"/>
-            <a:ext cx="292608" cy="292608"/>
-          </a:xfrm>
-          <a:prstGeom prst="rect">
-            <a:avLst/>
-          </a:prstGeom>
-          <a:noFill/>
-        </p:spPr>
-        <p:txBody>
-          <a:bodyPr wrap="square" anchor="ctr" lIns="0" rIns="0" tIns="0" bIns="0">
-            <a:spAutoFit/>
-          </a:bodyPr>
-          <a:lstStyle/>
-          <a:p>
-            <a:pPr algn="ctr">
-              <a:lnSpc>
-                <a:spcPct val="100000"/>
-              </a:lnSpc>
-            </a:pPr>
-            <a:r>
-              <a:rPr sz="1800" b="1" i="0">
-                <a:solidFill>
-                  <a:srgbClr val="FFFFFF"/>
-                </a:solidFill>
-                <a:latin typeface="Arial"/>
-              </a:rPr>
-              <a:t>▪</a:t>
-            </a:r>
-          </a:p>
-        </p:txBody>
-      </p:sp>
-      <p:sp>
-        <p:nvSpPr>
-          <p:cNvPr id="30" name="TextBox 29"/>
-          <p:cNvSpPr txBox="1"/>
-          <p:nvPr/>
-        </p:nvSpPr>
-        <p:spPr>
-          <a:xfrm>
-            <a:off x="1188720" y="5212080"/>
-            <a:ext cx="2834640" cy="548640"/>
-          </a:xfrm>
-          <a:prstGeom prst="rect">
-            <a:avLst/>
-          </a:prstGeom>
-          <a:noFill/>
-        </p:spPr>
-        <p:txBody>
-          <a:bodyPr wrap="square" anchor="t" lIns="0" rIns="0" tIns="0" bIns="0">
-            <a:spAutoFit/>
-          </a:bodyPr>
-          <a:lstStyle/>
-          <a:p>
-            <a:pPr algn="l">
-              <a:lnSpc>
-                <a:spcPct val="102000"/>
-              </a:lnSpc>
-            </a:pPr>
-            <a:r>
-              <a:rPr sz="1150" b="0" i="0">
-                <a:solidFill>
-                  <a:srgbClr val="374558"/>
-                </a:solidFill>
-                <a:latin typeface="Segoe UI"/>
-              </a:rPr>
-              <a:t>Marketplace, scorecards &amp; patent check</a:t>
-            </a:r>
-          </a:p>
-        </p:txBody>
-      </p:sp>
-      <p:sp>
-        <p:nvSpPr>
-          <p:cNvPr id="31" name="Rounded Rectangle 30"/>
-          <p:cNvSpPr/>
-          <p:nvPr/>
-        </p:nvSpPr>
-        <p:spPr>
-          <a:xfrm>
-            <a:off x="4279392" y="1645920"/>
-            <a:ext cx="3611880" cy="4297680"/>
-          </a:xfrm>
-          <a:prstGeom prst="roundRect">
-            <a:avLst/>
-          </a:prstGeom>
-          <a:solidFill>
-            <a:srgbClr val="FFFFFF"/>
-          </a:solidFill>
-          <a:ln w="12700">
-            <a:solidFill>
-              <a:srgbClr val="D8E0EA"/>
-            </a:solidFill>
-          </a:ln>
-          <a:effectLst/>
-        </p:spPr>
-        <p:style>
-          <a:lnRef idx="1">
-            <a:schemeClr val="accent1"/>
-          </a:lnRef>
-          <a:fillRef idx="3">
-            <a:schemeClr val="accent1"/>
-          </a:fillRef>
-          <a:effectRef idx="2">
-            <a:schemeClr val="accent1"/>
-          </a:effectRef>
-          <a:fontRef idx="minor">
-            <a:schemeClr val="lt1"/>
-          </a:fontRef>
-        </p:style>
-        <p:txBody>
-          <a:bodyPr rtlCol="0" anchor="ctr"/>
-          <a:lstStyle/>
-          <a:p>
-            <a:pPr algn="ctr"/>
-          </a:p>
-        </p:txBody>
-      </p:sp>
-      <p:sp>
-        <p:nvSpPr>
-          <p:cNvPr id="32" name="Rounded Rectangle 31"/>
-          <p:cNvSpPr/>
-          <p:nvPr/>
-        </p:nvSpPr>
-        <p:spPr>
-          <a:xfrm>
-            <a:off x="4279392" y="1645920"/>
-            <a:ext cx="3611880" cy="868680"/>
+            <a:off x="1005840" y="4178808"/>
+            <a:ext cx="457200" cy="457200"/>
           </a:xfrm>
           <a:prstGeom prst="roundRect">
             <a:avLst/>
@@ -24361,16 +24879,94 @@
       </p:sp>
       <p:sp>
         <p:nvSpPr>
-          <p:cNvPr id="33" name="Rectangle 32"/>
+          <p:cNvPr id="12" name="TextBox 11"/>
+          <p:cNvSpPr txBox="1"/>
+          <p:nvPr/>
+        </p:nvSpPr>
+        <p:spPr>
+          <a:xfrm>
+            <a:off x="1005840" y="4178808"/>
+            <a:ext cx="457200" cy="457200"/>
+          </a:xfrm>
+          <a:prstGeom prst="rect">
+            <a:avLst/>
+          </a:prstGeom>
+          <a:noFill/>
+        </p:spPr>
+        <p:txBody>
+          <a:bodyPr wrap="square" anchor="ctr" lIns="0" rIns="0" tIns="0" bIns="0">
+            <a:spAutoFit/>
+          </a:bodyPr>
+          <a:lstStyle/>
+          <a:p>
+            <a:pPr algn="ctr">
+              <a:lnSpc>
+                <a:spcPct val="100000"/>
+              </a:lnSpc>
+            </a:pPr>
+            <a:r>
+              <a:rPr sz="1800" b="1" i="0">
+                <a:solidFill>
+                  <a:srgbClr val="FFFFFF"/>
+                </a:solidFill>
+                <a:latin typeface="Arial"/>
+              </a:rPr>
+              <a:t>2</a:t>
+            </a:r>
+          </a:p>
+        </p:txBody>
+      </p:sp>
+      <p:sp>
+        <p:nvSpPr>
+          <p:cNvPr id="13" name="TextBox 12"/>
+          <p:cNvSpPr txBox="1"/>
+          <p:nvPr/>
+        </p:nvSpPr>
+        <p:spPr>
+          <a:xfrm>
+            <a:off x="1645920" y="4197096"/>
+            <a:ext cx="8686800" cy="457200"/>
+          </a:xfrm>
+          <a:prstGeom prst="rect">
+            <a:avLst/>
+          </a:prstGeom>
+          <a:noFill/>
+        </p:spPr>
+        <p:txBody>
+          <a:bodyPr wrap="square" anchor="ctr" lIns="0" rIns="0" tIns="0" bIns="0">
+            <a:spAutoFit/>
+          </a:bodyPr>
+          <a:lstStyle/>
+          <a:p>
+            <a:pPr algn="l">
+              <a:lnSpc>
+                <a:spcPct val="100000"/>
+              </a:lnSpc>
+            </a:pPr>
+            <a:r>
+              <a:rPr sz="1500" b="0" i="0">
+                <a:solidFill>
+                  <a:srgbClr val="16273C"/>
+                </a:solidFill>
+                <a:latin typeface="Segoe UI"/>
+              </a:rPr>
+              <a:t>Upload a CAD part → feature-based should-cost + 3D view</a:t>
+            </a:r>
+          </a:p>
+        </p:txBody>
+      </p:sp>
+      <p:sp>
+        <p:nvSpPr>
+          <p:cNvPr id="14" name="Rounded Rectangle 13"/>
           <p:cNvSpPr/>
           <p:nvPr/>
         </p:nvSpPr>
         <p:spPr>
           <a:xfrm>
-            <a:off x="4279392" y="2194560"/>
-            <a:ext cx="3611880" cy="320040"/>
-          </a:xfrm>
-          <a:prstGeom prst="rect">
+            <a:off x="1005840" y="4745736"/>
+            <a:ext cx="457200" cy="457200"/>
+          </a:xfrm>
+          <a:prstGeom prst="roundRect">
             <a:avLst/>
           </a:prstGeom>
           <a:solidFill>
@@ -24405,22 +25001,61 @@
       </p:sp>
       <p:sp>
         <p:nvSpPr>
-          <p:cNvPr id="34" name="TextBox 33"/>
-          <p:cNvSpPr txBox="1"/>
-          <p:nvPr/>
-        </p:nvSpPr>
-        <p:spPr>
-          <a:xfrm>
-            <a:off x="4599432" y="1737360"/>
-            <a:ext cx="3017520" cy="457200"/>
-          </a:xfrm>
-          <a:prstGeom prst="rect">
-            <a:avLst/>
-          </a:prstGeom>
-          <a:noFill/>
-        </p:spPr>
-        <p:txBody>
-          <a:bodyPr wrap="square" anchor="t" lIns="0" rIns="0" tIns="0" bIns="0">
+          <p:cNvPr id="15" name="TextBox 14"/>
+          <p:cNvSpPr txBox="1"/>
+          <p:nvPr/>
+        </p:nvSpPr>
+        <p:spPr>
+          <a:xfrm>
+            <a:off x="1005840" y="4745736"/>
+            <a:ext cx="457200" cy="457200"/>
+          </a:xfrm>
+          <a:prstGeom prst="rect">
+            <a:avLst/>
+          </a:prstGeom>
+          <a:noFill/>
+        </p:spPr>
+        <p:txBody>
+          <a:bodyPr wrap="square" anchor="ctr" lIns="0" rIns="0" tIns="0" bIns="0">
+            <a:spAutoFit/>
+          </a:bodyPr>
+          <a:lstStyle/>
+          <a:p>
+            <a:pPr algn="ctr">
+              <a:lnSpc>
+                <a:spcPct val="100000"/>
+              </a:lnSpc>
+            </a:pPr>
+            <a:r>
+              <a:rPr sz="1800" b="1" i="0">
+                <a:solidFill>
+                  <a:srgbClr val="FFFFFF"/>
+                </a:solidFill>
+                <a:latin typeface="Arial"/>
+              </a:rPr>
+              <a:t>3</a:t>
+            </a:r>
+          </a:p>
+        </p:txBody>
+      </p:sp>
+      <p:sp>
+        <p:nvSpPr>
+          <p:cNvPr id="16" name="TextBox 15"/>
+          <p:cNvSpPr txBox="1"/>
+          <p:nvPr/>
+        </p:nvSpPr>
+        <p:spPr>
+          <a:xfrm>
+            <a:off x="1645920" y="4764024"/>
+            <a:ext cx="8686800" cy="457200"/>
+          </a:xfrm>
+          <a:prstGeom prst="rect">
+            <a:avLst/>
+          </a:prstGeom>
+          <a:noFill/>
+        </p:spPr>
+        <p:txBody>
+          <a:bodyPr wrap="square" anchor="ctr" lIns="0" rIns="0" tIns="0" bIns="0">
             <a:spAutoFit/>
           </a:bodyPr>
           <a:lstStyle/>
@@ -24431,66 +25066,27 @@
               </a:lnSpc>
             </a:pPr>
             <a:r>
-              <a:rPr sz="2200" b="1" i="0">
-                <a:solidFill>
-                  <a:srgbClr val="FFFFFF"/>
-                </a:solidFill>
-                <a:latin typeface="Segoe UI Semibold"/>
-              </a:rPr>
-              <a:t>NEXT</a:t>
-            </a:r>
-          </a:p>
-        </p:txBody>
-      </p:sp>
-      <p:sp>
-        <p:nvSpPr>
-          <p:cNvPr id="35" name="TextBox 34"/>
-          <p:cNvSpPr txBox="1"/>
-          <p:nvPr/>
-        </p:nvSpPr>
-        <p:spPr>
-          <a:xfrm>
-            <a:off x="4599432" y="2176272"/>
-            <a:ext cx="3017520" cy="320040"/>
-          </a:xfrm>
-          <a:prstGeom prst="rect">
-            <a:avLst/>
-          </a:prstGeom>
-          <a:noFill/>
-        </p:spPr>
-        <p:txBody>
-          <a:bodyPr wrap="square" anchor="t" lIns="0" rIns="0" tIns="0" bIns="0">
-            <a:spAutoFit/>
-          </a:bodyPr>
-          <a:lstStyle/>
-          <a:p>
-            <a:pPr algn="l">
-              <a:lnSpc>
-                <a:spcPct val="100000"/>
-              </a:lnSpc>
-            </a:pPr>
-            <a:r>
-              <a:rPr sz="1200" b="1" i="0">
-                <a:solidFill>
-                  <a:srgbClr val="FFFFFF"/>
-                </a:solidFill>
-                <a:latin typeface="Segoe UI Semibold"/>
-              </a:rPr>
-              <a:t>3–6 months</a:t>
-            </a:r>
-          </a:p>
-        </p:txBody>
-      </p:sp>
-      <p:sp>
-        <p:nvSpPr>
-          <p:cNvPr id="36" name="Rounded Rectangle 35"/>
+              <a:rPr sz="1500" b="0" i="0">
+                <a:solidFill>
+                  <a:srgbClr val="16273C"/>
+                </a:solidFill>
+                <a:latin typeface="Segoe UI"/>
+              </a:rPr>
+              <a:t>Photograph a PCB → AI reads the BOM → 12-country cost</a:t>
+            </a:r>
+          </a:p>
+        </p:txBody>
+      </p:sp>
+      <p:sp>
+        <p:nvSpPr>
+          <p:cNvPr id="17" name="Rounded Rectangle 16"/>
           <p:cNvSpPr/>
           <p:nvPr/>
         </p:nvSpPr>
         <p:spPr>
           <a:xfrm>
-            <a:off x="4535424" y="2743200"/>
-            <a:ext cx="292608" cy="292608"/>
+            <a:off x="1005840" y="5312664"/>
+            <a:ext cx="457200" cy="457200"/>
           </a:xfrm>
           <a:prstGeom prst="roundRect">
             <a:avLst/>
@@ -24527,14 +25123,14 @@
       </p:sp>
       <p:sp>
         <p:nvSpPr>
-          <p:cNvPr id="37" name="TextBox 36"/>
-          <p:cNvSpPr txBox="1"/>
-          <p:nvPr/>
-        </p:nvSpPr>
-        <p:spPr>
-          <a:xfrm>
-            <a:off x="4535424" y="2743200"/>
-            <a:ext cx="292608" cy="292608"/>
+          <p:cNvPr id="18" name="TextBox 17"/>
+          <p:cNvSpPr txBox="1"/>
+          <p:nvPr/>
+        </p:nvSpPr>
+        <p:spPr>
+          <a:xfrm>
+            <a:off x="1005840" y="5312664"/>
+            <a:ext cx="457200" cy="457200"/>
           </a:xfrm>
           <a:prstGeom prst="rect">
             <a:avLst/>
@@ -24559,60 +25155,60 @@
                 </a:solidFill>
                 <a:latin typeface="Arial"/>
               </a:rPr>
-              <a:t>▪</a:t>
-            </a:r>
-          </a:p>
-        </p:txBody>
-      </p:sp>
-      <p:sp>
-        <p:nvSpPr>
-          <p:cNvPr id="38" name="TextBox 37"/>
-          <p:cNvSpPr txBox="1"/>
-          <p:nvPr/>
-        </p:nvSpPr>
-        <p:spPr>
-          <a:xfrm>
-            <a:off x="4919472" y="2724912"/>
-            <a:ext cx="2834640" cy="548640"/>
-          </a:xfrm>
-          <a:prstGeom prst="rect">
-            <a:avLst/>
-          </a:prstGeom>
-          <a:noFill/>
-        </p:spPr>
-        <p:txBody>
-          <a:bodyPr wrap="square" anchor="t" lIns="0" rIns="0" tIns="0" bIns="0">
+              <a:t>4</a:t>
+            </a:r>
+          </a:p>
+        </p:txBody>
+      </p:sp>
+      <p:sp>
+        <p:nvSpPr>
+          <p:cNvPr id="19" name="TextBox 18"/>
+          <p:cNvSpPr txBox="1"/>
+          <p:nvPr/>
+        </p:nvSpPr>
+        <p:spPr>
+          <a:xfrm>
+            <a:off x="1645920" y="5330952"/>
+            <a:ext cx="8686800" cy="457200"/>
+          </a:xfrm>
+          <a:prstGeom prst="rect">
+            <a:avLst/>
+          </a:prstGeom>
+          <a:noFill/>
+        </p:spPr>
+        <p:txBody>
+          <a:bodyPr wrap="square" anchor="ctr" lIns="0" rIns="0" tIns="0" bIns="0">
             <a:spAutoFit/>
           </a:bodyPr>
           <a:lstStyle/>
           <a:p>
             <a:pPr algn="l">
               <a:lnSpc>
-                <a:spcPct val="102000"/>
-              </a:lnSpc>
-            </a:pPr>
-            <a:r>
-              <a:rPr sz="1150" b="0" i="0">
-                <a:solidFill>
-                  <a:srgbClr val="374558"/>
+                <a:spcPct val="100000"/>
+              </a:lnSpc>
+            </a:pPr>
+            <a:r>
+              <a:rPr sz="1500" b="0" i="0">
+                <a:solidFill>
+                  <a:srgbClr val="16273C"/>
                 </a:solidFill>
                 <a:latin typeface="Segoe UI"/>
               </a:rPr>
-              <a:t>Feature-based casting &amp; moulding</a:t>
-            </a:r>
-          </a:p>
-        </p:txBody>
-      </p:sp>
-      <p:sp>
-        <p:nvSpPr>
-          <p:cNvPr id="39" name="Rounded Rectangle 38"/>
+              <a:t>Run a should-cost, close a quote gap with targeted ideas</a:t>
+            </a:r>
+          </a:p>
+        </p:txBody>
+      </p:sp>
+      <p:sp>
+        <p:nvSpPr>
+          <p:cNvPr id="20" name="Rounded Rectangle 19"/>
           <p:cNvSpPr/>
           <p:nvPr/>
         </p:nvSpPr>
         <p:spPr>
           <a:xfrm>
-            <a:off x="4535424" y="3364992"/>
-            <a:ext cx="292608" cy="292608"/>
+            <a:off x="1005840" y="5879592"/>
+            <a:ext cx="457200" cy="457200"/>
           </a:xfrm>
           <a:prstGeom prst="roundRect">
             <a:avLst/>
@@ -24649,14 +25245,14 @@
       </p:sp>
       <p:sp>
         <p:nvSpPr>
-          <p:cNvPr id="40" name="TextBox 39"/>
-          <p:cNvSpPr txBox="1"/>
-          <p:nvPr/>
-        </p:nvSpPr>
-        <p:spPr>
-          <a:xfrm>
-            <a:off x="4535424" y="3364992"/>
-            <a:ext cx="292608" cy="292608"/>
+          <p:cNvPr id="21" name="TextBox 20"/>
+          <p:cNvSpPr txBox="1"/>
+          <p:nvPr/>
+        </p:nvSpPr>
+        <p:spPr>
+          <a:xfrm>
+            <a:off x="1005840" y="5879592"/>
+            <a:ext cx="457200" cy="457200"/>
           </a:xfrm>
           <a:prstGeom prst="rect">
             <a:avLst/>
@@ -24681,990 +25277,46 @@
                 </a:solidFill>
                 <a:latin typeface="Arial"/>
               </a:rPr>
-              <a:t>▪</a:t>
-            </a:r>
-          </a:p>
-        </p:txBody>
-      </p:sp>
-      <p:sp>
-        <p:nvSpPr>
-          <p:cNvPr id="41" name="TextBox 40"/>
-          <p:cNvSpPr txBox="1"/>
-          <p:nvPr/>
-        </p:nvSpPr>
-        <p:spPr>
-          <a:xfrm>
-            <a:off x="4919472" y="3346704"/>
-            <a:ext cx="2834640" cy="548640"/>
-          </a:xfrm>
-          <a:prstGeom prst="rect">
-            <a:avLst/>
-          </a:prstGeom>
-          <a:noFill/>
-        </p:spPr>
-        <p:txBody>
-          <a:bodyPr wrap="square" anchor="t" lIns="0" rIns="0" tIns="0" bIns="0">
+              <a:t>5</a:t>
+            </a:r>
+          </a:p>
+        </p:txBody>
+      </p:sp>
+      <p:sp>
+        <p:nvSpPr>
+          <p:cNvPr id="22" name="TextBox 21"/>
+          <p:cNvSpPr txBox="1"/>
+          <p:nvPr/>
+        </p:nvSpPr>
+        <p:spPr>
+          <a:xfrm>
+            <a:off x="1645920" y="5897880"/>
+            <a:ext cx="8686800" cy="457200"/>
+          </a:xfrm>
+          <a:prstGeom prst="rect">
+            <a:avLst/>
+          </a:prstGeom>
+          <a:noFill/>
+        </p:spPr>
+        <p:txBody>
+          <a:bodyPr wrap="square" anchor="ctr" lIns="0" rIns="0" tIns="0" bIns="0">
             <a:spAutoFit/>
           </a:bodyPr>
           <a:lstStyle/>
           <a:p>
             <a:pPr algn="l">
               <a:lnSpc>
-                <a:spcPct val="102000"/>
-              </a:lnSpc>
-            </a:pPr>
-            <a:r>
-              <a:rPr sz="1150" b="0" i="0">
-                <a:solidFill>
-                  <a:srgbClr val="374558"/>
+                <a:spcPct val="100000"/>
+              </a:lnSpc>
+            </a:pPr>
+            <a:r>
+              <a:rPr sz="1500" b="0" i="0">
+                <a:solidFill>
+                  <a:srgbClr val="16273C"/>
                 </a:solidFill>
                 <a:latin typeface="Segoe UI"/>
               </a:rPr>
-              <a:t>Weld / assembly cost models</a:t>
-            </a:r>
-          </a:p>
-        </p:txBody>
-      </p:sp>
-      <p:sp>
-        <p:nvSpPr>
-          <p:cNvPr id="42" name="Rounded Rectangle 41"/>
-          <p:cNvSpPr/>
-          <p:nvPr/>
-        </p:nvSpPr>
-        <p:spPr>
-          <a:xfrm>
-            <a:off x="4535424" y="3986784"/>
-            <a:ext cx="292608" cy="292608"/>
-          </a:xfrm>
-          <a:prstGeom prst="roundRect">
-            <a:avLst/>
-          </a:prstGeom>
-          <a:solidFill>
-            <a:srgbClr val="B47609"/>
-          </a:solidFill>
-          <a:ln>
-            <a:noFill/>
-          </a:ln>
-          <a:effectLst/>
-        </p:spPr>
-        <p:style>
-          <a:lnRef idx="1">
-            <a:schemeClr val="accent1"/>
-          </a:lnRef>
-          <a:fillRef idx="3">
-            <a:schemeClr val="accent1"/>
-          </a:fillRef>
-          <a:effectRef idx="2">
-            <a:schemeClr val="accent1"/>
-          </a:effectRef>
-          <a:fontRef idx="minor">
-            <a:schemeClr val="lt1"/>
-          </a:fontRef>
-        </p:style>
-        <p:txBody>
-          <a:bodyPr rtlCol="0" anchor="ctr"/>
-          <a:lstStyle/>
-          <a:p>
-            <a:pPr algn="ctr"/>
-          </a:p>
-        </p:txBody>
-      </p:sp>
-      <p:sp>
-        <p:nvSpPr>
-          <p:cNvPr id="43" name="TextBox 42"/>
-          <p:cNvSpPr txBox="1"/>
-          <p:nvPr/>
-        </p:nvSpPr>
-        <p:spPr>
-          <a:xfrm>
-            <a:off x="4535424" y="3986784"/>
-            <a:ext cx="292608" cy="292608"/>
-          </a:xfrm>
-          <a:prstGeom prst="rect">
-            <a:avLst/>
-          </a:prstGeom>
-          <a:noFill/>
-        </p:spPr>
-        <p:txBody>
-          <a:bodyPr wrap="square" anchor="ctr" lIns="0" rIns="0" tIns="0" bIns="0">
-            <a:spAutoFit/>
-          </a:bodyPr>
-          <a:lstStyle/>
-          <a:p>
-            <a:pPr algn="ctr">
-              <a:lnSpc>
-                <a:spcPct val="100000"/>
-              </a:lnSpc>
-            </a:pPr>
-            <a:r>
-              <a:rPr sz="1800" b="1" i="0">
-                <a:solidFill>
-                  <a:srgbClr val="FFFFFF"/>
-                </a:solidFill>
-                <a:latin typeface="Arial"/>
-              </a:rPr>
-              <a:t>▪</a:t>
-            </a:r>
-          </a:p>
-        </p:txBody>
-      </p:sp>
-      <p:sp>
-        <p:nvSpPr>
-          <p:cNvPr id="44" name="TextBox 43"/>
-          <p:cNvSpPr txBox="1"/>
-          <p:nvPr/>
-        </p:nvSpPr>
-        <p:spPr>
-          <a:xfrm>
-            <a:off x="4919472" y="3968496"/>
-            <a:ext cx="2834640" cy="548640"/>
-          </a:xfrm>
-          <a:prstGeom prst="rect">
-            <a:avLst/>
-          </a:prstGeom>
-          <a:noFill/>
-        </p:spPr>
-        <p:txBody>
-          <a:bodyPr wrap="square" anchor="t" lIns="0" rIns="0" tIns="0" bIns="0">
-            <a:spAutoFit/>
-          </a:bodyPr>
-          <a:lstStyle/>
-          <a:p>
-            <a:pPr algn="l">
-              <a:lnSpc>
-                <a:spcPct val="102000"/>
-              </a:lnSpc>
-            </a:pPr>
-            <a:r>
-              <a:rPr sz="1150" b="0" i="0">
-                <a:solidFill>
-                  <a:srgbClr val="374558"/>
-                </a:solidFill>
-                <a:latin typeface="Segoe UI"/>
-              </a:rPr>
-              <a:t>Empirical confidence bands</a:t>
-            </a:r>
-          </a:p>
-        </p:txBody>
-      </p:sp>
-      <p:sp>
-        <p:nvSpPr>
-          <p:cNvPr id="45" name="Rounded Rectangle 44"/>
-          <p:cNvSpPr/>
-          <p:nvPr/>
-        </p:nvSpPr>
-        <p:spPr>
-          <a:xfrm>
-            <a:off x="4535424" y="4608576"/>
-            <a:ext cx="292608" cy="292608"/>
-          </a:xfrm>
-          <a:prstGeom prst="roundRect">
-            <a:avLst/>
-          </a:prstGeom>
-          <a:solidFill>
-            <a:srgbClr val="B47609"/>
-          </a:solidFill>
-          <a:ln>
-            <a:noFill/>
-          </a:ln>
-          <a:effectLst/>
-        </p:spPr>
-        <p:style>
-          <a:lnRef idx="1">
-            <a:schemeClr val="accent1"/>
-          </a:lnRef>
-          <a:fillRef idx="3">
-            <a:schemeClr val="accent1"/>
-          </a:fillRef>
-          <a:effectRef idx="2">
-            <a:schemeClr val="accent1"/>
-          </a:effectRef>
-          <a:fontRef idx="minor">
-            <a:schemeClr val="lt1"/>
-          </a:fontRef>
-        </p:style>
-        <p:txBody>
-          <a:bodyPr rtlCol="0" anchor="ctr"/>
-          <a:lstStyle/>
-          <a:p>
-            <a:pPr algn="ctr"/>
-          </a:p>
-        </p:txBody>
-      </p:sp>
-      <p:sp>
-        <p:nvSpPr>
-          <p:cNvPr id="46" name="TextBox 45"/>
-          <p:cNvSpPr txBox="1"/>
-          <p:nvPr/>
-        </p:nvSpPr>
-        <p:spPr>
-          <a:xfrm>
-            <a:off x="4535424" y="4608576"/>
-            <a:ext cx="292608" cy="292608"/>
-          </a:xfrm>
-          <a:prstGeom prst="rect">
-            <a:avLst/>
-          </a:prstGeom>
-          <a:noFill/>
-        </p:spPr>
-        <p:txBody>
-          <a:bodyPr wrap="square" anchor="ctr" lIns="0" rIns="0" tIns="0" bIns="0">
-            <a:spAutoFit/>
-          </a:bodyPr>
-          <a:lstStyle/>
-          <a:p>
-            <a:pPr algn="ctr">
-              <a:lnSpc>
-                <a:spcPct val="100000"/>
-              </a:lnSpc>
-            </a:pPr>
-            <a:r>
-              <a:rPr sz="1800" b="1" i="0">
-                <a:solidFill>
-                  <a:srgbClr val="FFFFFF"/>
-                </a:solidFill>
-                <a:latin typeface="Arial"/>
-              </a:rPr>
-              <a:t>▪</a:t>
-            </a:r>
-          </a:p>
-        </p:txBody>
-      </p:sp>
-      <p:sp>
-        <p:nvSpPr>
-          <p:cNvPr id="47" name="TextBox 46"/>
-          <p:cNvSpPr txBox="1"/>
-          <p:nvPr/>
-        </p:nvSpPr>
-        <p:spPr>
-          <a:xfrm>
-            <a:off x="4919472" y="4590288"/>
-            <a:ext cx="2834640" cy="548640"/>
-          </a:xfrm>
-          <a:prstGeom prst="rect">
-            <a:avLst/>
-          </a:prstGeom>
-          <a:noFill/>
-        </p:spPr>
-        <p:txBody>
-          <a:bodyPr wrap="square" anchor="t" lIns="0" rIns="0" tIns="0" bIns="0">
-            <a:spAutoFit/>
-          </a:bodyPr>
-          <a:lstStyle/>
-          <a:p>
-            <a:pPr algn="l">
-              <a:lnSpc>
-                <a:spcPct val="102000"/>
-              </a:lnSpc>
-            </a:pPr>
-            <a:r>
-              <a:rPr sz="1150" b="0" i="0">
-                <a:solidFill>
-                  <a:srgbClr val="374558"/>
-                </a:solidFill>
-                <a:latin typeface="Segoe UI"/>
-              </a:rPr>
-              <a:t>Commonality &amp; variant reduction</a:t>
-            </a:r>
-          </a:p>
-        </p:txBody>
-      </p:sp>
-      <p:sp>
-        <p:nvSpPr>
-          <p:cNvPr id="48" name="Rounded Rectangle 47"/>
-          <p:cNvSpPr/>
-          <p:nvPr/>
-        </p:nvSpPr>
-        <p:spPr>
-          <a:xfrm>
-            <a:off x="8010144" y="1645920"/>
-            <a:ext cx="3611880" cy="4297680"/>
-          </a:xfrm>
-          <a:prstGeom prst="roundRect">
-            <a:avLst/>
-          </a:prstGeom>
-          <a:solidFill>
-            <a:srgbClr val="FFFFFF"/>
-          </a:solidFill>
-          <a:ln w="12700">
-            <a:solidFill>
-              <a:srgbClr val="D8E0EA"/>
-            </a:solidFill>
-          </a:ln>
-          <a:effectLst/>
-        </p:spPr>
-        <p:style>
-          <a:lnRef idx="1">
-            <a:schemeClr val="accent1"/>
-          </a:lnRef>
-          <a:fillRef idx="3">
-            <a:schemeClr val="accent1"/>
-          </a:fillRef>
-          <a:effectRef idx="2">
-            <a:schemeClr val="accent1"/>
-          </a:effectRef>
-          <a:fontRef idx="minor">
-            <a:schemeClr val="lt1"/>
-          </a:fontRef>
-        </p:style>
-        <p:txBody>
-          <a:bodyPr rtlCol="0" anchor="ctr"/>
-          <a:lstStyle/>
-          <a:p>
-            <a:pPr algn="ctr"/>
-          </a:p>
-        </p:txBody>
-      </p:sp>
-      <p:sp>
-        <p:nvSpPr>
-          <p:cNvPr id="49" name="Rounded Rectangle 48"/>
-          <p:cNvSpPr/>
-          <p:nvPr/>
-        </p:nvSpPr>
-        <p:spPr>
-          <a:xfrm>
-            <a:off x="8010144" y="1645920"/>
-            <a:ext cx="3611880" cy="868680"/>
-          </a:xfrm>
-          <a:prstGeom prst="roundRect">
-            <a:avLst/>
-          </a:prstGeom>
-          <a:solidFill>
-            <a:srgbClr val="0D9488"/>
-          </a:solidFill>
-          <a:ln>
-            <a:noFill/>
-          </a:ln>
-          <a:effectLst/>
-        </p:spPr>
-        <p:style>
-          <a:lnRef idx="1">
-            <a:schemeClr val="accent1"/>
-          </a:lnRef>
-          <a:fillRef idx="3">
-            <a:schemeClr val="accent1"/>
-          </a:fillRef>
-          <a:effectRef idx="2">
-            <a:schemeClr val="accent1"/>
-          </a:effectRef>
-          <a:fontRef idx="minor">
-            <a:schemeClr val="lt1"/>
-          </a:fontRef>
-        </p:style>
-        <p:txBody>
-          <a:bodyPr rtlCol="0" anchor="ctr"/>
-          <a:lstStyle/>
-          <a:p>
-            <a:pPr algn="ctr"/>
-          </a:p>
-        </p:txBody>
-      </p:sp>
-      <p:sp>
-        <p:nvSpPr>
-          <p:cNvPr id="50" name="Rectangle 49"/>
-          <p:cNvSpPr/>
-          <p:nvPr/>
-        </p:nvSpPr>
-        <p:spPr>
-          <a:xfrm>
-            <a:off x="8010144" y="2194560"/>
-            <a:ext cx="3611880" cy="320040"/>
-          </a:xfrm>
-          <a:prstGeom prst="rect">
-            <a:avLst/>
-          </a:prstGeom>
-          <a:solidFill>
-            <a:srgbClr val="0D9488"/>
-          </a:solidFill>
-          <a:ln>
-            <a:noFill/>
-          </a:ln>
-          <a:effectLst/>
-        </p:spPr>
-        <p:style>
-          <a:lnRef idx="1">
-            <a:schemeClr val="accent1"/>
-          </a:lnRef>
-          <a:fillRef idx="3">
-            <a:schemeClr val="accent1"/>
-          </a:fillRef>
-          <a:effectRef idx="2">
-            <a:schemeClr val="accent1"/>
-          </a:effectRef>
-          <a:fontRef idx="minor">
-            <a:schemeClr val="lt1"/>
-          </a:fontRef>
-        </p:style>
-        <p:txBody>
-          <a:bodyPr rtlCol="0" anchor="ctr"/>
-          <a:lstStyle/>
-          <a:p>
-            <a:pPr algn="ctr"/>
-          </a:p>
-        </p:txBody>
-      </p:sp>
-      <p:sp>
-        <p:nvSpPr>
-          <p:cNvPr id="51" name="TextBox 50"/>
-          <p:cNvSpPr txBox="1"/>
-          <p:nvPr/>
-        </p:nvSpPr>
-        <p:spPr>
-          <a:xfrm>
-            <a:off x="8330184" y="1737360"/>
-            <a:ext cx="3017520" cy="457200"/>
-          </a:xfrm>
-          <a:prstGeom prst="rect">
-            <a:avLst/>
-          </a:prstGeom>
-          <a:noFill/>
-        </p:spPr>
-        <p:txBody>
-          <a:bodyPr wrap="square" anchor="t" lIns="0" rIns="0" tIns="0" bIns="0">
-            <a:spAutoFit/>
-          </a:bodyPr>
-          <a:lstStyle/>
-          <a:p>
-            <a:pPr algn="l">
-              <a:lnSpc>
-                <a:spcPct val="100000"/>
-              </a:lnSpc>
-            </a:pPr>
-            <a:r>
-              <a:rPr sz="2200" b="1" i="0">
-                <a:solidFill>
-                  <a:srgbClr val="FFFFFF"/>
-                </a:solidFill>
-                <a:latin typeface="Segoe UI Semibold"/>
-              </a:rPr>
-              <a:t>LATER</a:t>
-            </a:r>
-          </a:p>
-        </p:txBody>
-      </p:sp>
-      <p:sp>
-        <p:nvSpPr>
-          <p:cNvPr id="52" name="TextBox 51"/>
-          <p:cNvSpPr txBox="1"/>
-          <p:nvPr/>
-        </p:nvSpPr>
-        <p:spPr>
-          <a:xfrm>
-            <a:off x="8330184" y="2176272"/>
-            <a:ext cx="3017520" cy="320040"/>
-          </a:xfrm>
-          <a:prstGeom prst="rect">
-            <a:avLst/>
-          </a:prstGeom>
-          <a:noFill/>
-        </p:spPr>
-        <p:txBody>
-          <a:bodyPr wrap="square" anchor="t" lIns="0" rIns="0" tIns="0" bIns="0">
-            <a:spAutoFit/>
-          </a:bodyPr>
-          <a:lstStyle/>
-          <a:p>
-            <a:pPr algn="l">
-              <a:lnSpc>
-                <a:spcPct val="100000"/>
-              </a:lnSpc>
-            </a:pPr>
-            <a:r>
-              <a:rPr sz="1200" b="1" i="0">
-                <a:solidFill>
-                  <a:srgbClr val="FFFFFF"/>
-                </a:solidFill>
-                <a:latin typeface="Segoe UI Semibold"/>
-              </a:rPr>
-              <a:t>Vision</a:t>
-            </a:r>
-          </a:p>
-        </p:txBody>
-      </p:sp>
-      <p:sp>
-        <p:nvSpPr>
-          <p:cNvPr id="53" name="Rounded Rectangle 52"/>
-          <p:cNvSpPr/>
-          <p:nvPr/>
-        </p:nvSpPr>
-        <p:spPr>
-          <a:xfrm>
-            <a:off x="8266176" y="2743200"/>
-            <a:ext cx="292608" cy="292608"/>
-          </a:xfrm>
-          <a:prstGeom prst="roundRect">
-            <a:avLst/>
-          </a:prstGeom>
-          <a:solidFill>
-            <a:srgbClr val="0D9488"/>
-          </a:solidFill>
-          <a:ln>
-            <a:noFill/>
-          </a:ln>
-          <a:effectLst/>
-        </p:spPr>
-        <p:style>
-          <a:lnRef idx="1">
-            <a:schemeClr val="accent1"/>
-          </a:lnRef>
-          <a:fillRef idx="3">
-            <a:schemeClr val="accent1"/>
-          </a:fillRef>
-          <a:effectRef idx="2">
-            <a:schemeClr val="accent1"/>
-          </a:effectRef>
-          <a:fontRef idx="minor">
-            <a:schemeClr val="lt1"/>
-          </a:fontRef>
-        </p:style>
-        <p:txBody>
-          <a:bodyPr rtlCol="0" anchor="ctr"/>
-          <a:lstStyle/>
-          <a:p>
-            <a:pPr algn="ctr"/>
-          </a:p>
-        </p:txBody>
-      </p:sp>
-      <p:sp>
-        <p:nvSpPr>
-          <p:cNvPr id="54" name="TextBox 53"/>
-          <p:cNvSpPr txBox="1"/>
-          <p:nvPr/>
-        </p:nvSpPr>
-        <p:spPr>
-          <a:xfrm>
-            <a:off x="8266176" y="2743200"/>
-            <a:ext cx="292608" cy="292608"/>
-          </a:xfrm>
-          <a:prstGeom prst="rect">
-            <a:avLst/>
-          </a:prstGeom>
-          <a:noFill/>
-        </p:spPr>
-        <p:txBody>
-          <a:bodyPr wrap="square" anchor="ctr" lIns="0" rIns="0" tIns="0" bIns="0">
-            <a:spAutoFit/>
-          </a:bodyPr>
-          <a:lstStyle/>
-          <a:p>
-            <a:pPr algn="ctr">
-              <a:lnSpc>
-                <a:spcPct val="100000"/>
-              </a:lnSpc>
-            </a:pPr>
-            <a:r>
-              <a:rPr sz="1800" b="1" i="0">
-                <a:solidFill>
-                  <a:srgbClr val="FFFFFF"/>
-                </a:solidFill>
-                <a:latin typeface="Arial"/>
-              </a:rPr>
-              <a:t>▪</a:t>
-            </a:r>
-          </a:p>
-        </p:txBody>
-      </p:sp>
-      <p:sp>
-        <p:nvSpPr>
-          <p:cNvPr id="55" name="TextBox 54"/>
-          <p:cNvSpPr txBox="1"/>
-          <p:nvPr/>
-        </p:nvSpPr>
-        <p:spPr>
-          <a:xfrm>
-            <a:off x="8650224" y="2724912"/>
-            <a:ext cx="2834640" cy="548640"/>
-          </a:xfrm>
-          <a:prstGeom prst="rect">
-            <a:avLst/>
-          </a:prstGeom>
-          <a:noFill/>
-        </p:spPr>
-        <p:txBody>
-          <a:bodyPr wrap="square" anchor="t" lIns="0" rIns="0" tIns="0" bIns="0">
-            <a:spAutoFit/>
-          </a:bodyPr>
-          <a:lstStyle/>
-          <a:p>
-            <a:pPr algn="l">
-              <a:lnSpc>
-                <a:spcPct val="102000"/>
-              </a:lnSpc>
-            </a:pPr>
-            <a:r>
-              <a:rPr sz="1150" b="0" i="0">
-                <a:solidFill>
-                  <a:srgbClr val="374558"/>
-                </a:solidFill>
-                <a:latin typeface="Segoe UI"/>
-              </a:rPr>
-              <a:t>Composite &amp; paint models</a:t>
-            </a:r>
-          </a:p>
-        </p:txBody>
-      </p:sp>
-      <p:sp>
-        <p:nvSpPr>
-          <p:cNvPr id="56" name="Rounded Rectangle 55"/>
-          <p:cNvSpPr/>
-          <p:nvPr/>
-        </p:nvSpPr>
-        <p:spPr>
-          <a:xfrm>
-            <a:off x="8266176" y="3364992"/>
-            <a:ext cx="292608" cy="292608"/>
-          </a:xfrm>
-          <a:prstGeom prst="roundRect">
-            <a:avLst/>
-          </a:prstGeom>
-          <a:solidFill>
-            <a:srgbClr val="0D9488"/>
-          </a:solidFill>
-          <a:ln>
-            <a:noFill/>
-          </a:ln>
-          <a:effectLst/>
-        </p:spPr>
-        <p:style>
-          <a:lnRef idx="1">
-            <a:schemeClr val="accent1"/>
-          </a:lnRef>
-          <a:fillRef idx="3">
-            <a:schemeClr val="accent1"/>
-          </a:fillRef>
-          <a:effectRef idx="2">
-            <a:schemeClr val="accent1"/>
-          </a:effectRef>
-          <a:fontRef idx="minor">
-            <a:schemeClr val="lt1"/>
-          </a:fontRef>
-        </p:style>
-        <p:txBody>
-          <a:bodyPr rtlCol="0" anchor="ctr"/>
-          <a:lstStyle/>
-          <a:p>
-            <a:pPr algn="ctr"/>
-          </a:p>
-        </p:txBody>
-      </p:sp>
-      <p:sp>
-        <p:nvSpPr>
-          <p:cNvPr id="57" name="TextBox 56"/>
-          <p:cNvSpPr txBox="1"/>
-          <p:nvPr/>
-        </p:nvSpPr>
-        <p:spPr>
-          <a:xfrm>
-            <a:off x="8266176" y="3364992"/>
-            <a:ext cx="292608" cy="292608"/>
-          </a:xfrm>
-          <a:prstGeom prst="rect">
-            <a:avLst/>
-          </a:prstGeom>
-          <a:noFill/>
-        </p:spPr>
-        <p:txBody>
-          <a:bodyPr wrap="square" anchor="ctr" lIns="0" rIns="0" tIns="0" bIns="0">
-            <a:spAutoFit/>
-          </a:bodyPr>
-          <a:lstStyle/>
-          <a:p>
-            <a:pPr algn="ctr">
-              <a:lnSpc>
-                <a:spcPct val="100000"/>
-              </a:lnSpc>
-            </a:pPr>
-            <a:r>
-              <a:rPr sz="1800" b="1" i="0">
-                <a:solidFill>
-                  <a:srgbClr val="FFFFFF"/>
-                </a:solidFill>
-                <a:latin typeface="Arial"/>
-              </a:rPr>
-              <a:t>▪</a:t>
-            </a:r>
-          </a:p>
-        </p:txBody>
-      </p:sp>
-      <p:sp>
-        <p:nvSpPr>
-          <p:cNvPr id="58" name="TextBox 57"/>
-          <p:cNvSpPr txBox="1"/>
-          <p:nvPr/>
-        </p:nvSpPr>
-        <p:spPr>
-          <a:xfrm>
-            <a:off x="8650224" y="3346704"/>
-            <a:ext cx="2834640" cy="548640"/>
-          </a:xfrm>
-          <a:prstGeom prst="rect">
-            <a:avLst/>
-          </a:prstGeom>
-          <a:noFill/>
-        </p:spPr>
-        <p:txBody>
-          <a:bodyPr wrap="square" anchor="t" lIns="0" rIns="0" tIns="0" bIns="0">
-            <a:spAutoFit/>
-          </a:bodyPr>
-          <a:lstStyle/>
-          <a:p>
-            <a:pPr algn="l">
-              <a:lnSpc>
-                <a:spcPct val="102000"/>
-              </a:lnSpc>
-            </a:pPr>
-            <a:r>
-              <a:rPr sz="1150" b="0" i="0">
-                <a:solidFill>
-                  <a:srgbClr val="374558"/>
-                </a:solidFill>
-                <a:latin typeface="Segoe UI"/>
-              </a:rPr>
-              <a:t>Team collaboration &amp; approvals</a:t>
-            </a:r>
-          </a:p>
-        </p:txBody>
-      </p:sp>
-      <p:sp>
-        <p:nvSpPr>
-          <p:cNvPr id="59" name="Rounded Rectangle 58"/>
-          <p:cNvSpPr/>
-          <p:nvPr/>
-        </p:nvSpPr>
-        <p:spPr>
-          <a:xfrm>
-            <a:off x="8266176" y="3986784"/>
-            <a:ext cx="292608" cy="292608"/>
-          </a:xfrm>
-          <a:prstGeom prst="roundRect">
-            <a:avLst/>
-          </a:prstGeom>
-          <a:solidFill>
-            <a:srgbClr val="0D9488"/>
-          </a:solidFill>
-          <a:ln>
-            <a:noFill/>
-          </a:ln>
-          <a:effectLst/>
-        </p:spPr>
-        <p:style>
-          <a:lnRef idx="1">
-            <a:schemeClr val="accent1"/>
-          </a:lnRef>
-          <a:fillRef idx="3">
-            <a:schemeClr val="accent1"/>
-          </a:fillRef>
-          <a:effectRef idx="2">
-            <a:schemeClr val="accent1"/>
-          </a:effectRef>
-          <a:fontRef idx="minor">
-            <a:schemeClr val="lt1"/>
-          </a:fontRef>
-        </p:style>
-        <p:txBody>
-          <a:bodyPr rtlCol="0" anchor="ctr"/>
-          <a:lstStyle/>
-          <a:p>
-            <a:pPr algn="ctr"/>
-          </a:p>
-        </p:txBody>
-      </p:sp>
-      <p:sp>
-        <p:nvSpPr>
-          <p:cNvPr id="60" name="TextBox 59"/>
-          <p:cNvSpPr txBox="1"/>
-          <p:nvPr/>
-        </p:nvSpPr>
-        <p:spPr>
-          <a:xfrm>
-            <a:off x="8266176" y="3986784"/>
-            <a:ext cx="292608" cy="292608"/>
-          </a:xfrm>
-          <a:prstGeom prst="rect">
-            <a:avLst/>
-          </a:prstGeom>
-          <a:noFill/>
-        </p:spPr>
-        <p:txBody>
-          <a:bodyPr wrap="square" anchor="ctr" lIns="0" rIns="0" tIns="0" bIns="0">
-            <a:spAutoFit/>
-          </a:bodyPr>
-          <a:lstStyle/>
-          <a:p>
-            <a:pPr algn="ctr">
-              <a:lnSpc>
-                <a:spcPct val="100000"/>
-              </a:lnSpc>
-            </a:pPr>
-            <a:r>
-              <a:rPr sz="1800" b="1" i="0">
-                <a:solidFill>
-                  <a:srgbClr val="FFFFFF"/>
-                </a:solidFill>
-                <a:latin typeface="Arial"/>
-              </a:rPr>
-              <a:t>▪</a:t>
-            </a:r>
-          </a:p>
-        </p:txBody>
-      </p:sp>
-      <p:sp>
-        <p:nvSpPr>
-          <p:cNvPr id="61" name="TextBox 60"/>
-          <p:cNvSpPr txBox="1"/>
-          <p:nvPr/>
-        </p:nvSpPr>
-        <p:spPr>
-          <a:xfrm>
-            <a:off x="8650224" y="3968496"/>
-            <a:ext cx="2834640" cy="548640"/>
-          </a:xfrm>
-          <a:prstGeom prst="rect">
-            <a:avLst/>
-          </a:prstGeom>
-          <a:noFill/>
-        </p:spPr>
-        <p:txBody>
-          <a:bodyPr wrap="square" anchor="t" lIns="0" rIns="0" tIns="0" bIns="0">
-            <a:spAutoFit/>
-          </a:bodyPr>
-          <a:lstStyle/>
-          <a:p>
-            <a:pPr algn="l">
-              <a:lnSpc>
-                <a:spcPct val="102000"/>
-              </a:lnSpc>
-            </a:pPr>
-            <a:r>
-              <a:rPr sz="1150" b="0" i="0">
-                <a:solidFill>
-                  <a:srgbClr val="374558"/>
-                </a:solidFill>
-                <a:latin typeface="Segoe UI"/>
-              </a:rPr>
-              <a:t>ERP / PLM integration</a:t>
-            </a:r>
-          </a:p>
-        </p:txBody>
-      </p:sp>
-      <p:sp>
-        <p:nvSpPr>
-          <p:cNvPr id="62" name="Rounded Rectangle 61"/>
-          <p:cNvSpPr/>
-          <p:nvPr/>
-        </p:nvSpPr>
-        <p:spPr>
-          <a:xfrm>
-            <a:off x="8266176" y="4608576"/>
-            <a:ext cx="292608" cy="292608"/>
-          </a:xfrm>
-          <a:prstGeom prst="roundRect">
-            <a:avLst/>
-          </a:prstGeom>
-          <a:solidFill>
-            <a:srgbClr val="0D9488"/>
-          </a:solidFill>
-          <a:ln>
-            <a:noFill/>
-          </a:ln>
-          <a:effectLst/>
-        </p:spPr>
-        <p:style>
-          <a:lnRef idx="1">
-            <a:schemeClr val="accent1"/>
-          </a:lnRef>
-          <a:fillRef idx="3">
-            <a:schemeClr val="accent1"/>
-          </a:fillRef>
-          <a:effectRef idx="2">
-            <a:schemeClr val="accent1"/>
-          </a:effectRef>
-          <a:fontRef idx="minor">
-            <a:schemeClr val="lt1"/>
-          </a:fontRef>
-        </p:style>
-        <p:txBody>
-          <a:bodyPr rtlCol="0" anchor="ctr"/>
-          <a:lstStyle/>
-          <a:p>
-            <a:pPr algn="ctr"/>
-          </a:p>
-        </p:txBody>
-      </p:sp>
-      <p:sp>
-        <p:nvSpPr>
-          <p:cNvPr id="63" name="TextBox 62"/>
-          <p:cNvSpPr txBox="1"/>
-          <p:nvPr/>
-        </p:nvSpPr>
-        <p:spPr>
-          <a:xfrm>
-            <a:off x="8266176" y="4608576"/>
-            <a:ext cx="292608" cy="292608"/>
-          </a:xfrm>
-          <a:prstGeom prst="rect">
-            <a:avLst/>
-          </a:prstGeom>
-          <a:noFill/>
-        </p:spPr>
-        <p:txBody>
-          <a:bodyPr wrap="square" anchor="ctr" lIns="0" rIns="0" tIns="0" bIns="0">
-            <a:spAutoFit/>
-          </a:bodyPr>
-          <a:lstStyle/>
-          <a:p>
-            <a:pPr algn="ctr">
-              <a:lnSpc>
-                <a:spcPct val="100000"/>
-              </a:lnSpc>
-            </a:pPr>
-            <a:r>
-              <a:rPr sz="1800" b="1" i="0">
-                <a:solidFill>
-                  <a:srgbClr val="FFFFFF"/>
-                </a:solidFill>
-                <a:latin typeface="Arial"/>
-              </a:rPr>
-              <a:t>▪</a:t>
-            </a:r>
-          </a:p>
-        </p:txBody>
-      </p:sp>
-      <p:sp>
-        <p:nvSpPr>
-          <p:cNvPr id="64" name="TextBox 63"/>
-          <p:cNvSpPr txBox="1"/>
-          <p:nvPr/>
-        </p:nvSpPr>
-        <p:spPr>
-          <a:xfrm>
-            <a:off x="8650224" y="4590288"/>
-            <a:ext cx="2834640" cy="548640"/>
-          </a:xfrm>
-          <a:prstGeom prst="rect">
-            <a:avLst/>
-          </a:prstGeom>
-          <a:noFill/>
-        </p:spPr>
-        <p:txBody>
-          <a:bodyPr wrap="square" anchor="t" lIns="0" rIns="0" tIns="0" bIns="0">
-            <a:spAutoFit/>
-          </a:bodyPr>
-          <a:lstStyle/>
-          <a:p>
-            <a:pPr algn="l">
-              <a:lnSpc>
-                <a:spcPct val="102000"/>
-              </a:lnSpc>
-            </a:pPr>
-            <a:r>
-              <a:rPr sz="1150" b="0" i="0">
-                <a:solidFill>
-                  <a:srgbClr val="374558"/>
-                </a:solidFill>
-                <a:latin typeface="Segoe UI"/>
-              </a:rPr>
-              <a:t>Portfolio-level cost intelligence</a:t>
+              <a:t>Show the savings pipeline, scorecards &amp; ROI business case</a:t>
             </a:r>
           </a:p>
         </p:txBody>
@@ -27244,6 +26896,2634 @@
 </file>
 
 <file path=ppt/slides/slide20.xml><?xml version="1.0" encoding="utf-8"?>
+<p:sld xmlns:a="http://schemas.openxmlformats.org/drawingml/2006/main" xmlns:p="http://schemas.openxmlformats.org/presentationml/2006/main" xmlns:r="http://schemas.openxmlformats.org/officeDocument/2006/relationships">
+  <p:cSld>
+    <p:bg>
+      <p:bgPr>
+        <a:solidFill>
+          <a:srgbClr val="F3F5F9"/>
+        </a:solidFill>
+        <a:effectLst/>
+      </p:bgPr>
+    </p:bg>
+    <p:spTree>
+      <p:nvGrpSpPr>
+        <p:cNvPr id="1" name=""/>
+        <p:cNvGrpSpPr/>
+        <p:nvPr/>
+      </p:nvGrpSpPr>
+      <p:grpSpPr/>
+      <p:sp>
+        <p:nvSpPr>
+          <p:cNvPr id="2" name="Rectangle 1"/>
+          <p:cNvSpPr/>
+          <p:nvPr/>
+        </p:nvSpPr>
+        <p:spPr>
+          <a:xfrm>
+            <a:off x="0" y="0"/>
+            <a:ext cx="12191695" cy="1234440"/>
+          </a:xfrm>
+          <a:prstGeom prst="rect">
+            <a:avLst/>
+          </a:prstGeom>
+          <a:solidFill>
+            <a:srgbClr val="FFFFFF"/>
+          </a:solidFill>
+          <a:ln>
+            <a:noFill/>
+          </a:ln>
+          <a:effectLst/>
+        </p:spPr>
+        <p:style>
+          <a:lnRef idx="1">
+            <a:schemeClr val="accent1"/>
+          </a:lnRef>
+          <a:fillRef idx="3">
+            <a:schemeClr val="accent1"/>
+          </a:fillRef>
+          <a:effectRef idx="2">
+            <a:schemeClr val="accent1"/>
+          </a:effectRef>
+          <a:fontRef idx="minor">
+            <a:schemeClr val="lt1"/>
+          </a:fontRef>
+        </p:style>
+        <p:txBody>
+          <a:bodyPr rtlCol="0" anchor="ctr"/>
+          <a:lstStyle/>
+          <a:p>
+            <a:pPr algn="ctr"/>
+          </a:p>
+        </p:txBody>
+      </p:sp>
+      <p:sp>
+        <p:nvSpPr>
+          <p:cNvPr id="3" name="Rectangle 2"/>
+          <p:cNvSpPr/>
+          <p:nvPr/>
+        </p:nvSpPr>
+        <p:spPr>
+          <a:xfrm>
+            <a:off x="0" y="1234440"/>
+            <a:ext cx="12191695" cy="38100"/>
+          </a:xfrm>
+          <a:prstGeom prst="rect">
+            <a:avLst/>
+          </a:prstGeom>
+          <a:solidFill>
+            <a:srgbClr val="0D9488"/>
+          </a:solidFill>
+          <a:ln>
+            <a:noFill/>
+          </a:ln>
+          <a:effectLst/>
+        </p:spPr>
+        <p:style>
+          <a:lnRef idx="1">
+            <a:schemeClr val="accent1"/>
+          </a:lnRef>
+          <a:fillRef idx="3">
+            <a:schemeClr val="accent1"/>
+          </a:fillRef>
+          <a:effectRef idx="2">
+            <a:schemeClr val="accent1"/>
+          </a:effectRef>
+          <a:fontRef idx="minor">
+            <a:schemeClr val="lt1"/>
+          </a:fontRef>
+        </p:style>
+        <p:txBody>
+          <a:bodyPr rtlCol="0" anchor="ctr"/>
+          <a:lstStyle/>
+          <a:p>
+            <a:pPr algn="ctr"/>
+          </a:p>
+        </p:txBody>
+      </p:sp>
+      <p:sp>
+        <p:nvSpPr>
+          <p:cNvPr id="4" name="Rectangle 3"/>
+          <p:cNvSpPr/>
+          <p:nvPr/>
+        </p:nvSpPr>
+        <p:spPr>
+          <a:xfrm>
+            <a:off x="502920" y="384048"/>
+            <a:ext cx="100584" cy="502920"/>
+          </a:xfrm>
+          <a:prstGeom prst="rect">
+            <a:avLst/>
+          </a:prstGeom>
+          <a:solidFill>
+            <a:srgbClr val="B47609"/>
+          </a:solidFill>
+          <a:ln>
+            <a:noFill/>
+          </a:ln>
+          <a:effectLst/>
+        </p:spPr>
+        <p:style>
+          <a:lnRef idx="1">
+            <a:schemeClr val="accent1"/>
+          </a:lnRef>
+          <a:fillRef idx="3">
+            <a:schemeClr val="accent1"/>
+          </a:fillRef>
+          <a:effectRef idx="2">
+            <a:schemeClr val="accent1"/>
+          </a:effectRef>
+          <a:fontRef idx="minor">
+            <a:schemeClr val="lt1"/>
+          </a:fontRef>
+        </p:style>
+        <p:txBody>
+          <a:bodyPr rtlCol="0" anchor="ctr"/>
+          <a:lstStyle/>
+          <a:p>
+            <a:pPr algn="ctr"/>
+          </a:p>
+        </p:txBody>
+      </p:sp>
+      <p:sp>
+        <p:nvSpPr>
+          <p:cNvPr id="5" name="TextBox 4"/>
+          <p:cNvSpPr txBox="1"/>
+          <p:nvPr/>
+        </p:nvSpPr>
+        <p:spPr>
+          <a:xfrm>
+            <a:off x="777240" y="256032"/>
+            <a:ext cx="9601200" cy="320040"/>
+          </a:xfrm>
+          <a:prstGeom prst="rect">
+            <a:avLst/>
+          </a:prstGeom>
+          <a:noFill/>
+        </p:spPr>
+        <p:txBody>
+          <a:bodyPr wrap="square" anchor="t" lIns="0" rIns="0" tIns="0" bIns="0">
+            <a:spAutoFit/>
+          </a:bodyPr>
+          <a:lstStyle/>
+          <a:p>
+            <a:pPr algn="l">
+              <a:lnSpc>
+                <a:spcPct val="100000"/>
+              </a:lnSpc>
+            </a:pPr>
+            <a:r>
+              <a:rPr sz="1200" b="1" i="0">
+                <a:solidFill>
+                  <a:srgbClr val="0D9488"/>
+                </a:solidFill>
+                <a:latin typeface="Segoe UI Semibold"/>
+              </a:rPr>
+              <a:t>WHAT'S NEXT</a:t>
+            </a:r>
+          </a:p>
+        </p:txBody>
+      </p:sp>
+      <p:sp>
+        <p:nvSpPr>
+          <p:cNvPr id="6" name="TextBox 5"/>
+          <p:cNvSpPr txBox="1"/>
+          <p:nvPr/>
+        </p:nvSpPr>
+        <p:spPr>
+          <a:xfrm>
+            <a:off x="777240" y="548640"/>
+            <a:ext cx="10332720" cy="548640"/>
+          </a:xfrm>
+          <a:prstGeom prst="rect">
+            <a:avLst/>
+          </a:prstGeom>
+          <a:noFill/>
+        </p:spPr>
+        <p:txBody>
+          <a:bodyPr wrap="square" anchor="t" lIns="0" rIns="0" tIns="0" bIns="0">
+            <a:spAutoFit/>
+          </a:bodyPr>
+          <a:lstStyle/>
+          <a:p>
+            <a:pPr algn="l">
+              <a:lnSpc>
+                <a:spcPct val="100000"/>
+              </a:lnSpc>
+            </a:pPr>
+            <a:r>
+              <a:rPr sz="2700" b="1" i="0">
+                <a:solidFill>
+                  <a:srgbClr val="16273C"/>
+                </a:solidFill>
+                <a:latin typeface="Segoe UI Semibold"/>
+              </a:rPr>
+              <a:t>Roadmap</a:t>
+            </a:r>
+          </a:p>
+        </p:txBody>
+      </p:sp>
+      <p:sp>
+        <p:nvSpPr>
+          <p:cNvPr id="7" name="Rounded Rectangle 6"/>
+          <p:cNvSpPr/>
+          <p:nvPr/>
+        </p:nvSpPr>
+        <p:spPr>
+          <a:xfrm>
+            <a:off x="11292840" y="457200"/>
+            <a:ext cx="502920" cy="365760"/>
+          </a:xfrm>
+          <a:prstGeom prst="roundRect">
+            <a:avLst/>
+          </a:prstGeom>
+          <a:solidFill>
+            <a:srgbClr val="E4EAF1"/>
+          </a:solidFill>
+          <a:ln>
+            <a:noFill/>
+          </a:ln>
+          <a:effectLst/>
+        </p:spPr>
+        <p:style>
+          <a:lnRef idx="1">
+            <a:schemeClr val="accent1"/>
+          </a:lnRef>
+          <a:fillRef idx="3">
+            <a:schemeClr val="accent1"/>
+          </a:fillRef>
+          <a:effectRef idx="2">
+            <a:schemeClr val="accent1"/>
+          </a:effectRef>
+          <a:fontRef idx="minor">
+            <a:schemeClr val="lt1"/>
+          </a:fontRef>
+        </p:style>
+        <p:txBody>
+          <a:bodyPr rtlCol="0" anchor="ctr"/>
+          <a:lstStyle/>
+          <a:p>
+            <a:pPr algn="ctr"/>
+          </a:p>
+        </p:txBody>
+      </p:sp>
+      <p:sp>
+        <p:nvSpPr>
+          <p:cNvPr id="8" name="TextBox 7"/>
+          <p:cNvSpPr txBox="1"/>
+          <p:nvPr/>
+        </p:nvSpPr>
+        <p:spPr>
+          <a:xfrm>
+            <a:off x="11292840" y="484632"/>
+            <a:ext cx="502920" cy="320040"/>
+          </a:xfrm>
+          <a:prstGeom prst="rect">
+            <a:avLst/>
+          </a:prstGeom>
+          <a:noFill/>
+        </p:spPr>
+        <p:txBody>
+          <a:bodyPr wrap="square" anchor="t" lIns="0" rIns="0" tIns="0" bIns="0">
+            <a:spAutoFit/>
+          </a:bodyPr>
+          <a:lstStyle/>
+          <a:p>
+            <a:pPr algn="ctr">
+              <a:lnSpc>
+                <a:spcPct val="100000"/>
+              </a:lnSpc>
+            </a:pPr>
+            <a:r>
+              <a:rPr sz="1300" b="1" i="0">
+                <a:solidFill>
+                  <a:srgbClr val="556477"/>
+                </a:solidFill>
+                <a:latin typeface="Segoe UI"/>
+              </a:rPr>
+              <a:t>20</a:t>
+            </a:r>
+          </a:p>
+        </p:txBody>
+      </p:sp>
+      <p:sp>
+        <p:nvSpPr>
+          <p:cNvPr id="9" name="TextBox 8"/>
+          <p:cNvSpPr txBox="1"/>
+          <p:nvPr/>
+        </p:nvSpPr>
+        <p:spPr>
+          <a:xfrm>
+            <a:off x="777240" y="6455664"/>
+            <a:ext cx="7315200" cy="274320"/>
+          </a:xfrm>
+          <a:prstGeom prst="rect">
+            <a:avLst/>
+          </a:prstGeom>
+          <a:noFill/>
+        </p:spPr>
+        <p:txBody>
+          <a:bodyPr wrap="square" anchor="t" lIns="0" rIns="0" tIns="0" bIns="0">
+            <a:spAutoFit/>
+          </a:bodyPr>
+          <a:lstStyle/>
+          <a:p>
+            <a:pPr algn="l">
+              <a:lnSpc>
+                <a:spcPct val="100000"/>
+              </a:lnSpc>
+            </a:pPr>
+            <a:r>
+              <a:rPr sz="900" b="1" i="0">
+                <a:solidFill>
+                  <a:srgbClr val="0D9488"/>
+                </a:solidFill>
+                <a:latin typeface="Segoe UI"/>
+              </a:rPr>
+              <a:t>BrainSpark</a:t>
+            </a:r>
+            <a:r>
+              <a:rPr sz="900" b="0" i="0">
+                <a:solidFill>
+                  <a:srgbClr val="8390A1"/>
+                </a:solidFill>
+                <a:latin typeface="Segoe UI"/>
+              </a:rPr>
+              <a:t>  ·  AI-Powered Cost Engineering Platform</a:t>
+            </a:r>
+          </a:p>
+        </p:txBody>
+      </p:sp>
+      <p:sp>
+        <p:nvSpPr>
+          <p:cNvPr id="10" name="TextBox 9"/>
+          <p:cNvSpPr txBox="1"/>
+          <p:nvPr/>
+        </p:nvSpPr>
+        <p:spPr>
+          <a:xfrm>
+            <a:off x="8686800" y="6455664"/>
+            <a:ext cx="2743200" cy="274320"/>
+          </a:xfrm>
+          <a:prstGeom prst="rect">
+            <a:avLst/>
+          </a:prstGeom>
+          <a:noFill/>
+        </p:spPr>
+        <p:txBody>
+          <a:bodyPr wrap="square" anchor="t" lIns="0" rIns="0" tIns="0" bIns="0">
+            <a:spAutoFit/>
+          </a:bodyPr>
+          <a:lstStyle/>
+          <a:p>
+            <a:pPr algn="r">
+              <a:lnSpc>
+                <a:spcPct val="100000"/>
+              </a:lnSpc>
+            </a:pPr>
+            <a:r>
+              <a:rPr sz="900" b="0" i="0">
+                <a:solidFill>
+                  <a:srgbClr val="8390A1"/>
+                </a:solidFill>
+                <a:latin typeface="Segoe UI"/>
+              </a:rPr>
+              <a:t>Confidential — Internal</a:t>
+            </a:r>
+          </a:p>
+        </p:txBody>
+      </p:sp>
+      <p:sp>
+        <p:nvSpPr>
+          <p:cNvPr id="11" name="Rounded Rectangle 10"/>
+          <p:cNvSpPr/>
+          <p:nvPr/>
+        </p:nvSpPr>
+        <p:spPr>
+          <a:xfrm>
+            <a:off x="548640" y="1645920"/>
+            <a:ext cx="3611880" cy="4297680"/>
+          </a:xfrm>
+          <a:prstGeom prst="roundRect">
+            <a:avLst/>
+          </a:prstGeom>
+          <a:solidFill>
+            <a:srgbClr val="FFFFFF"/>
+          </a:solidFill>
+          <a:ln w="12700">
+            <a:solidFill>
+              <a:srgbClr val="D8E0EA"/>
+            </a:solidFill>
+          </a:ln>
+          <a:effectLst/>
+        </p:spPr>
+        <p:style>
+          <a:lnRef idx="1">
+            <a:schemeClr val="accent1"/>
+          </a:lnRef>
+          <a:fillRef idx="3">
+            <a:schemeClr val="accent1"/>
+          </a:fillRef>
+          <a:effectRef idx="2">
+            <a:schemeClr val="accent1"/>
+          </a:effectRef>
+          <a:fontRef idx="minor">
+            <a:schemeClr val="lt1"/>
+          </a:fontRef>
+        </p:style>
+        <p:txBody>
+          <a:bodyPr rtlCol="0" anchor="ctr"/>
+          <a:lstStyle/>
+          <a:p>
+            <a:pPr algn="ctr"/>
+          </a:p>
+        </p:txBody>
+      </p:sp>
+      <p:sp>
+        <p:nvSpPr>
+          <p:cNvPr id="12" name="Rounded Rectangle 11"/>
+          <p:cNvSpPr/>
+          <p:nvPr/>
+        </p:nvSpPr>
+        <p:spPr>
+          <a:xfrm>
+            <a:off x="548640" y="1645920"/>
+            <a:ext cx="3611880" cy="868680"/>
+          </a:xfrm>
+          <a:prstGeom prst="roundRect">
+            <a:avLst/>
+          </a:prstGeom>
+          <a:solidFill>
+            <a:srgbClr val="059669"/>
+          </a:solidFill>
+          <a:ln>
+            <a:noFill/>
+          </a:ln>
+          <a:effectLst/>
+        </p:spPr>
+        <p:style>
+          <a:lnRef idx="1">
+            <a:schemeClr val="accent1"/>
+          </a:lnRef>
+          <a:fillRef idx="3">
+            <a:schemeClr val="accent1"/>
+          </a:fillRef>
+          <a:effectRef idx="2">
+            <a:schemeClr val="accent1"/>
+          </a:effectRef>
+          <a:fontRef idx="minor">
+            <a:schemeClr val="lt1"/>
+          </a:fontRef>
+        </p:style>
+        <p:txBody>
+          <a:bodyPr rtlCol="0" anchor="ctr"/>
+          <a:lstStyle/>
+          <a:p>
+            <a:pPr algn="ctr"/>
+          </a:p>
+        </p:txBody>
+      </p:sp>
+      <p:sp>
+        <p:nvSpPr>
+          <p:cNvPr id="13" name="Rectangle 12"/>
+          <p:cNvSpPr/>
+          <p:nvPr/>
+        </p:nvSpPr>
+        <p:spPr>
+          <a:xfrm>
+            <a:off x="548640" y="2194560"/>
+            <a:ext cx="3611880" cy="320040"/>
+          </a:xfrm>
+          <a:prstGeom prst="rect">
+            <a:avLst/>
+          </a:prstGeom>
+          <a:solidFill>
+            <a:srgbClr val="059669"/>
+          </a:solidFill>
+          <a:ln>
+            <a:noFill/>
+          </a:ln>
+          <a:effectLst/>
+        </p:spPr>
+        <p:style>
+          <a:lnRef idx="1">
+            <a:schemeClr val="accent1"/>
+          </a:lnRef>
+          <a:fillRef idx="3">
+            <a:schemeClr val="accent1"/>
+          </a:fillRef>
+          <a:effectRef idx="2">
+            <a:schemeClr val="accent1"/>
+          </a:effectRef>
+          <a:fontRef idx="minor">
+            <a:schemeClr val="lt1"/>
+          </a:fontRef>
+        </p:style>
+        <p:txBody>
+          <a:bodyPr rtlCol="0" anchor="ctr"/>
+          <a:lstStyle/>
+          <a:p>
+            <a:pPr algn="ctr"/>
+          </a:p>
+        </p:txBody>
+      </p:sp>
+      <p:sp>
+        <p:nvSpPr>
+          <p:cNvPr id="14" name="TextBox 13"/>
+          <p:cNvSpPr txBox="1"/>
+          <p:nvPr/>
+        </p:nvSpPr>
+        <p:spPr>
+          <a:xfrm>
+            <a:off x="868680" y="1737360"/>
+            <a:ext cx="3017520" cy="457200"/>
+          </a:xfrm>
+          <a:prstGeom prst="rect">
+            <a:avLst/>
+          </a:prstGeom>
+          <a:noFill/>
+        </p:spPr>
+        <p:txBody>
+          <a:bodyPr wrap="square" anchor="t" lIns="0" rIns="0" tIns="0" bIns="0">
+            <a:spAutoFit/>
+          </a:bodyPr>
+          <a:lstStyle/>
+          <a:p>
+            <a:pPr algn="l">
+              <a:lnSpc>
+                <a:spcPct val="100000"/>
+              </a:lnSpc>
+            </a:pPr>
+            <a:r>
+              <a:rPr sz="2200" b="1" i="0">
+                <a:solidFill>
+                  <a:srgbClr val="FFFFFF"/>
+                </a:solidFill>
+                <a:latin typeface="Segoe UI Semibold"/>
+              </a:rPr>
+              <a:t>NOW</a:t>
+            </a:r>
+          </a:p>
+        </p:txBody>
+      </p:sp>
+      <p:sp>
+        <p:nvSpPr>
+          <p:cNvPr id="15" name="TextBox 14"/>
+          <p:cNvSpPr txBox="1"/>
+          <p:nvPr/>
+        </p:nvSpPr>
+        <p:spPr>
+          <a:xfrm>
+            <a:off x="868680" y="2176272"/>
+            <a:ext cx="3017520" cy="320040"/>
+          </a:xfrm>
+          <a:prstGeom prst="rect">
+            <a:avLst/>
+          </a:prstGeom>
+          <a:noFill/>
+        </p:spPr>
+        <p:txBody>
+          <a:bodyPr wrap="square" anchor="t" lIns="0" rIns="0" tIns="0" bIns="0">
+            <a:spAutoFit/>
+          </a:bodyPr>
+          <a:lstStyle/>
+          <a:p>
+            <a:pPr algn="l">
+              <a:lnSpc>
+                <a:spcPct val="100000"/>
+              </a:lnSpc>
+            </a:pPr>
+            <a:r>
+              <a:rPr sz="1200" b="1" i="0">
+                <a:solidFill>
+                  <a:srgbClr val="FFFFFF"/>
+                </a:solidFill>
+                <a:latin typeface="Segoe UI Semibold"/>
+              </a:rPr>
+              <a:t>Live today</a:t>
+            </a:r>
+          </a:p>
+        </p:txBody>
+      </p:sp>
+      <p:sp>
+        <p:nvSpPr>
+          <p:cNvPr id="16" name="Rounded Rectangle 15"/>
+          <p:cNvSpPr/>
+          <p:nvPr/>
+        </p:nvSpPr>
+        <p:spPr>
+          <a:xfrm>
+            <a:off x="804672" y="2743200"/>
+            <a:ext cx="292608" cy="292608"/>
+          </a:xfrm>
+          <a:prstGeom prst="roundRect">
+            <a:avLst/>
+          </a:prstGeom>
+          <a:solidFill>
+            <a:srgbClr val="059669"/>
+          </a:solidFill>
+          <a:ln>
+            <a:noFill/>
+          </a:ln>
+          <a:effectLst/>
+        </p:spPr>
+        <p:style>
+          <a:lnRef idx="1">
+            <a:schemeClr val="accent1"/>
+          </a:lnRef>
+          <a:fillRef idx="3">
+            <a:schemeClr val="accent1"/>
+          </a:fillRef>
+          <a:effectRef idx="2">
+            <a:schemeClr val="accent1"/>
+          </a:effectRef>
+          <a:fontRef idx="minor">
+            <a:schemeClr val="lt1"/>
+          </a:fontRef>
+        </p:style>
+        <p:txBody>
+          <a:bodyPr rtlCol="0" anchor="ctr"/>
+          <a:lstStyle/>
+          <a:p>
+            <a:pPr algn="ctr"/>
+          </a:p>
+        </p:txBody>
+      </p:sp>
+      <p:sp>
+        <p:nvSpPr>
+          <p:cNvPr id="17" name="TextBox 16"/>
+          <p:cNvSpPr txBox="1"/>
+          <p:nvPr/>
+        </p:nvSpPr>
+        <p:spPr>
+          <a:xfrm>
+            <a:off x="804672" y="2743200"/>
+            <a:ext cx="292608" cy="292608"/>
+          </a:xfrm>
+          <a:prstGeom prst="rect">
+            <a:avLst/>
+          </a:prstGeom>
+          <a:noFill/>
+        </p:spPr>
+        <p:txBody>
+          <a:bodyPr wrap="square" anchor="ctr" lIns="0" rIns="0" tIns="0" bIns="0">
+            <a:spAutoFit/>
+          </a:bodyPr>
+          <a:lstStyle/>
+          <a:p>
+            <a:pPr algn="ctr">
+              <a:lnSpc>
+                <a:spcPct val="100000"/>
+              </a:lnSpc>
+            </a:pPr>
+            <a:r>
+              <a:rPr sz="1800" b="1" i="0">
+                <a:solidFill>
+                  <a:srgbClr val="FFFFFF"/>
+                </a:solidFill>
+                <a:latin typeface="Arial"/>
+              </a:rPr>
+              <a:t>▪</a:t>
+            </a:r>
+          </a:p>
+        </p:txBody>
+      </p:sp>
+      <p:sp>
+        <p:nvSpPr>
+          <p:cNvPr id="18" name="TextBox 17"/>
+          <p:cNvSpPr txBox="1"/>
+          <p:nvPr/>
+        </p:nvSpPr>
+        <p:spPr>
+          <a:xfrm>
+            <a:off x="1188720" y="2724912"/>
+            <a:ext cx="2834640" cy="548640"/>
+          </a:xfrm>
+          <a:prstGeom prst="rect">
+            <a:avLst/>
+          </a:prstGeom>
+          <a:noFill/>
+        </p:spPr>
+        <p:txBody>
+          <a:bodyPr wrap="square" anchor="t" lIns="0" rIns="0" tIns="0" bIns="0">
+            <a:spAutoFit/>
+          </a:bodyPr>
+          <a:lstStyle/>
+          <a:p>
+            <a:pPr algn="l">
+              <a:lnSpc>
+                <a:spcPct val="102000"/>
+              </a:lnSpc>
+            </a:pPr>
+            <a:r>
+              <a:rPr sz="1150" b="0" i="0">
+                <a:solidFill>
+                  <a:srgbClr val="374558"/>
+                </a:solidFill>
+                <a:latin typeface="Segoe UI"/>
+              </a:rPr>
+              <a:t>Self-improving AI ideation + Deep Mode</a:t>
+            </a:r>
+          </a:p>
+        </p:txBody>
+      </p:sp>
+      <p:sp>
+        <p:nvSpPr>
+          <p:cNvPr id="19" name="Rounded Rectangle 18"/>
+          <p:cNvSpPr/>
+          <p:nvPr/>
+        </p:nvSpPr>
+        <p:spPr>
+          <a:xfrm>
+            <a:off x="804672" y="3364992"/>
+            <a:ext cx="292608" cy="292608"/>
+          </a:xfrm>
+          <a:prstGeom prst="roundRect">
+            <a:avLst/>
+          </a:prstGeom>
+          <a:solidFill>
+            <a:srgbClr val="059669"/>
+          </a:solidFill>
+          <a:ln>
+            <a:noFill/>
+          </a:ln>
+          <a:effectLst/>
+        </p:spPr>
+        <p:style>
+          <a:lnRef idx="1">
+            <a:schemeClr val="accent1"/>
+          </a:lnRef>
+          <a:fillRef idx="3">
+            <a:schemeClr val="accent1"/>
+          </a:fillRef>
+          <a:effectRef idx="2">
+            <a:schemeClr val="accent1"/>
+          </a:effectRef>
+          <a:fontRef idx="minor">
+            <a:schemeClr val="lt1"/>
+          </a:fontRef>
+        </p:style>
+        <p:txBody>
+          <a:bodyPr rtlCol="0" anchor="ctr"/>
+          <a:lstStyle/>
+          <a:p>
+            <a:pPr algn="ctr"/>
+          </a:p>
+        </p:txBody>
+      </p:sp>
+      <p:sp>
+        <p:nvSpPr>
+          <p:cNvPr id="20" name="TextBox 19"/>
+          <p:cNvSpPr txBox="1"/>
+          <p:nvPr/>
+        </p:nvSpPr>
+        <p:spPr>
+          <a:xfrm>
+            <a:off x="804672" y="3364992"/>
+            <a:ext cx="292608" cy="292608"/>
+          </a:xfrm>
+          <a:prstGeom prst="rect">
+            <a:avLst/>
+          </a:prstGeom>
+          <a:noFill/>
+        </p:spPr>
+        <p:txBody>
+          <a:bodyPr wrap="square" anchor="ctr" lIns="0" rIns="0" tIns="0" bIns="0">
+            <a:spAutoFit/>
+          </a:bodyPr>
+          <a:lstStyle/>
+          <a:p>
+            <a:pPr algn="ctr">
+              <a:lnSpc>
+                <a:spcPct val="100000"/>
+              </a:lnSpc>
+            </a:pPr>
+            <a:r>
+              <a:rPr sz="1800" b="1" i="0">
+                <a:solidFill>
+                  <a:srgbClr val="FFFFFF"/>
+                </a:solidFill>
+                <a:latin typeface="Arial"/>
+              </a:rPr>
+              <a:t>▪</a:t>
+            </a:r>
+          </a:p>
+        </p:txBody>
+      </p:sp>
+      <p:sp>
+        <p:nvSpPr>
+          <p:cNvPr id="21" name="TextBox 20"/>
+          <p:cNvSpPr txBox="1"/>
+          <p:nvPr/>
+        </p:nvSpPr>
+        <p:spPr>
+          <a:xfrm>
+            <a:off x="1188720" y="3346704"/>
+            <a:ext cx="2834640" cy="548640"/>
+          </a:xfrm>
+          <a:prstGeom prst="rect">
+            <a:avLst/>
+          </a:prstGeom>
+          <a:noFill/>
+        </p:spPr>
+        <p:txBody>
+          <a:bodyPr wrap="square" anchor="t" lIns="0" rIns="0" tIns="0" bIns="0">
+            <a:spAutoFit/>
+          </a:bodyPr>
+          <a:lstStyle/>
+          <a:p>
+            <a:pPr algn="l">
+              <a:lnSpc>
+                <a:spcPct val="102000"/>
+              </a:lnSpc>
+            </a:pPr>
+            <a:r>
+              <a:rPr sz="1150" b="0" i="0">
+                <a:solidFill>
+                  <a:srgbClr val="374558"/>
+                </a:solidFill>
+                <a:latin typeface="Segoe UI"/>
+              </a:rPr>
+              <a:t>PCB suite: photo → BOM → 12-country cost</a:t>
+            </a:r>
+          </a:p>
+        </p:txBody>
+      </p:sp>
+      <p:sp>
+        <p:nvSpPr>
+          <p:cNvPr id="22" name="Rounded Rectangle 21"/>
+          <p:cNvSpPr/>
+          <p:nvPr/>
+        </p:nvSpPr>
+        <p:spPr>
+          <a:xfrm>
+            <a:off x="804672" y="3986784"/>
+            <a:ext cx="292608" cy="292608"/>
+          </a:xfrm>
+          <a:prstGeom prst="roundRect">
+            <a:avLst/>
+          </a:prstGeom>
+          <a:solidFill>
+            <a:srgbClr val="059669"/>
+          </a:solidFill>
+          <a:ln>
+            <a:noFill/>
+          </a:ln>
+          <a:effectLst/>
+        </p:spPr>
+        <p:style>
+          <a:lnRef idx="1">
+            <a:schemeClr val="accent1"/>
+          </a:lnRef>
+          <a:fillRef idx="3">
+            <a:schemeClr val="accent1"/>
+          </a:fillRef>
+          <a:effectRef idx="2">
+            <a:schemeClr val="accent1"/>
+          </a:effectRef>
+          <a:fontRef idx="minor">
+            <a:schemeClr val="lt1"/>
+          </a:fontRef>
+        </p:style>
+        <p:txBody>
+          <a:bodyPr rtlCol="0" anchor="ctr"/>
+          <a:lstStyle/>
+          <a:p>
+            <a:pPr algn="ctr"/>
+          </a:p>
+        </p:txBody>
+      </p:sp>
+      <p:sp>
+        <p:nvSpPr>
+          <p:cNvPr id="23" name="TextBox 22"/>
+          <p:cNvSpPr txBox="1"/>
+          <p:nvPr/>
+        </p:nvSpPr>
+        <p:spPr>
+          <a:xfrm>
+            <a:off x="804672" y="3986784"/>
+            <a:ext cx="292608" cy="292608"/>
+          </a:xfrm>
+          <a:prstGeom prst="rect">
+            <a:avLst/>
+          </a:prstGeom>
+          <a:noFill/>
+        </p:spPr>
+        <p:txBody>
+          <a:bodyPr wrap="square" anchor="ctr" lIns="0" rIns="0" tIns="0" bIns="0">
+            <a:spAutoFit/>
+          </a:bodyPr>
+          <a:lstStyle/>
+          <a:p>
+            <a:pPr algn="ctr">
+              <a:lnSpc>
+                <a:spcPct val="100000"/>
+              </a:lnSpc>
+            </a:pPr>
+            <a:r>
+              <a:rPr sz="1800" b="1" i="0">
+                <a:solidFill>
+                  <a:srgbClr val="FFFFFF"/>
+                </a:solidFill>
+                <a:latin typeface="Arial"/>
+              </a:rPr>
+              <a:t>▪</a:t>
+            </a:r>
+          </a:p>
+        </p:txBody>
+      </p:sp>
+      <p:sp>
+        <p:nvSpPr>
+          <p:cNvPr id="24" name="TextBox 23"/>
+          <p:cNvSpPr txBox="1"/>
+          <p:nvPr/>
+        </p:nvSpPr>
+        <p:spPr>
+          <a:xfrm>
+            <a:off x="1188720" y="3968496"/>
+            <a:ext cx="2834640" cy="548640"/>
+          </a:xfrm>
+          <a:prstGeom prst="rect">
+            <a:avLst/>
+          </a:prstGeom>
+          <a:noFill/>
+        </p:spPr>
+        <p:txBody>
+          <a:bodyPr wrap="square" anchor="t" lIns="0" rIns="0" tIns="0" bIns="0">
+            <a:spAutoFit/>
+          </a:bodyPr>
+          <a:lstStyle/>
+          <a:p>
+            <a:pPr algn="l">
+              <a:lnSpc>
+                <a:spcPct val="102000"/>
+              </a:lnSpc>
+            </a:pPr>
+            <a:r>
+              <a:rPr sz="1150" b="0" i="0">
+                <a:solidFill>
+                  <a:srgbClr val="374558"/>
+                </a:solidFill>
+                <a:latin typeface="Segoe UI"/>
+              </a:rPr>
+              <a:t>Should-cost + quote-gap closure</a:t>
+            </a:r>
+          </a:p>
+        </p:txBody>
+      </p:sp>
+      <p:sp>
+        <p:nvSpPr>
+          <p:cNvPr id="25" name="Rounded Rectangle 24"/>
+          <p:cNvSpPr/>
+          <p:nvPr/>
+        </p:nvSpPr>
+        <p:spPr>
+          <a:xfrm>
+            <a:off x="804672" y="4608576"/>
+            <a:ext cx="292608" cy="292608"/>
+          </a:xfrm>
+          <a:prstGeom prst="roundRect">
+            <a:avLst/>
+          </a:prstGeom>
+          <a:solidFill>
+            <a:srgbClr val="059669"/>
+          </a:solidFill>
+          <a:ln>
+            <a:noFill/>
+          </a:ln>
+          <a:effectLst/>
+        </p:spPr>
+        <p:style>
+          <a:lnRef idx="1">
+            <a:schemeClr val="accent1"/>
+          </a:lnRef>
+          <a:fillRef idx="3">
+            <a:schemeClr val="accent1"/>
+          </a:fillRef>
+          <a:effectRef idx="2">
+            <a:schemeClr val="accent1"/>
+          </a:effectRef>
+          <a:fontRef idx="minor">
+            <a:schemeClr val="lt1"/>
+          </a:fontRef>
+        </p:style>
+        <p:txBody>
+          <a:bodyPr rtlCol="0" anchor="ctr"/>
+          <a:lstStyle/>
+          <a:p>
+            <a:pPr algn="ctr"/>
+          </a:p>
+        </p:txBody>
+      </p:sp>
+      <p:sp>
+        <p:nvSpPr>
+          <p:cNvPr id="26" name="TextBox 25"/>
+          <p:cNvSpPr txBox="1"/>
+          <p:nvPr/>
+        </p:nvSpPr>
+        <p:spPr>
+          <a:xfrm>
+            <a:off x="804672" y="4608576"/>
+            <a:ext cx="292608" cy="292608"/>
+          </a:xfrm>
+          <a:prstGeom prst="rect">
+            <a:avLst/>
+          </a:prstGeom>
+          <a:noFill/>
+        </p:spPr>
+        <p:txBody>
+          <a:bodyPr wrap="square" anchor="ctr" lIns="0" rIns="0" tIns="0" bIns="0">
+            <a:spAutoFit/>
+          </a:bodyPr>
+          <a:lstStyle/>
+          <a:p>
+            <a:pPr algn="ctr">
+              <a:lnSpc>
+                <a:spcPct val="100000"/>
+              </a:lnSpc>
+            </a:pPr>
+            <a:r>
+              <a:rPr sz="1800" b="1" i="0">
+                <a:solidFill>
+                  <a:srgbClr val="FFFFFF"/>
+                </a:solidFill>
+                <a:latin typeface="Arial"/>
+              </a:rPr>
+              <a:t>▪</a:t>
+            </a:r>
+          </a:p>
+        </p:txBody>
+      </p:sp>
+      <p:sp>
+        <p:nvSpPr>
+          <p:cNvPr id="27" name="TextBox 26"/>
+          <p:cNvSpPr txBox="1"/>
+          <p:nvPr/>
+        </p:nvSpPr>
+        <p:spPr>
+          <a:xfrm>
+            <a:off x="1188720" y="4590288"/>
+            <a:ext cx="2834640" cy="548640"/>
+          </a:xfrm>
+          <a:prstGeom prst="rect">
+            <a:avLst/>
+          </a:prstGeom>
+          <a:noFill/>
+        </p:spPr>
+        <p:txBody>
+          <a:bodyPr wrap="square" anchor="t" lIns="0" rIns="0" tIns="0" bIns="0">
+            <a:spAutoFit/>
+          </a:bodyPr>
+          <a:lstStyle/>
+          <a:p>
+            <a:pPr algn="l">
+              <a:lnSpc>
+                <a:spcPct val="102000"/>
+              </a:lnSpc>
+            </a:pPr>
+            <a:r>
+              <a:rPr sz="1150" b="0" i="0">
+                <a:solidFill>
+                  <a:srgbClr val="374558"/>
+                </a:solidFill>
+                <a:latin typeface="Segoe UI"/>
+              </a:rPr>
+              <a:t>11 innovation methods, engine-checked</a:t>
+            </a:r>
+          </a:p>
+        </p:txBody>
+      </p:sp>
+      <p:sp>
+        <p:nvSpPr>
+          <p:cNvPr id="28" name="Rounded Rectangle 27"/>
+          <p:cNvSpPr/>
+          <p:nvPr/>
+        </p:nvSpPr>
+        <p:spPr>
+          <a:xfrm>
+            <a:off x="804672" y="5230368"/>
+            <a:ext cx="292608" cy="292608"/>
+          </a:xfrm>
+          <a:prstGeom prst="roundRect">
+            <a:avLst/>
+          </a:prstGeom>
+          <a:solidFill>
+            <a:srgbClr val="059669"/>
+          </a:solidFill>
+          <a:ln>
+            <a:noFill/>
+          </a:ln>
+          <a:effectLst/>
+        </p:spPr>
+        <p:style>
+          <a:lnRef idx="1">
+            <a:schemeClr val="accent1"/>
+          </a:lnRef>
+          <a:fillRef idx="3">
+            <a:schemeClr val="accent1"/>
+          </a:fillRef>
+          <a:effectRef idx="2">
+            <a:schemeClr val="accent1"/>
+          </a:effectRef>
+          <a:fontRef idx="minor">
+            <a:schemeClr val="lt1"/>
+          </a:fontRef>
+        </p:style>
+        <p:txBody>
+          <a:bodyPr rtlCol="0" anchor="ctr"/>
+          <a:lstStyle/>
+          <a:p>
+            <a:pPr algn="ctr"/>
+          </a:p>
+        </p:txBody>
+      </p:sp>
+      <p:sp>
+        <p:nvSpPr>
+          <p:cNvPr id="29" name="TextBox 28"/>
+          <p:cNvSpPr txBox="1"/>
+          <p:nvPr/>
+        </p:nvSpPr>
+        <p:spPr>
+          <a:xfrm>
+            <a:off x="804672" y="5230368"/>
+            <a:ext cx="292608" cy="292608"/>
+          </a:xfrm>
+          <a:prstGeom prst="rect">
+            <a:avLst/>
+          </a:prstGeom>
+          <a:noFill/>
+        </p:spPr>
+        <p:txBody>
+          <a:bodyPr wrap="square" anchor="ctr" lIns="0" rIns="0" tIns="0" bIns="0">
+            <a:spAutoFit/>
+          </a:bodyPr>
+          <a:lstStyle/>
+          <a:p>
+            <a:pPr algn="ctr">
+              <a:lnSpc>
+                <a:spcPct val="100000"/>
+              </a:lnSpc>
+            </a:pPr>
+            <a:r>
+              <a:rPr sz="1800" b="1" i="0">
+                <a:solidFill>
+                  <a:srgbClr val="FFFFFF"/>
+                </a:solidFill>
+                <a:latin typeface="Arial"/>
+              </a:rPr>
+              <a:t>▪</a:t>
+            </a:r>
+          </a:p>
+        </p:txBody>
+      </p:sp>
+      <p:sp>
+        <p:nvSpPr>
+          <p:cNvPr id="30" name="TextBox 29"/>
+          <p:cNvSpPr txBox="1"/>
+          <p:nvPr/>
+        </p:nvSpPr>
+        <p:spPr>
+          <a:xfrm>
+            <a:off x="1188720" y="5212080"/>
+            <a:ext cx="2834640" cy="548640"/>
+          </a:xfrm>
+          <a:prstGeom prst="rect">
+            <a:avLst/>
+          </a:prstGeom>
+          <a:noFill/>
+        </p:spPr>
+        <p:txBody>
+          <a:bodyPr wrap="square" anchor="t" lIns="0" rIns="0" tIns="0" bIns="0">
+            <a:spAutoFit/>
+          </a:bodyPr>
+          <a:lstStyle/>
+          <a:p>
+            <a:pPr algn="l">
+              <a:lnSpc>
+                <a:spcPct val="102000"/>
+              </a:lnSpc>
+            </a:pPr>
+            <a:r>
+              <a:rPr sz="1150" b="0" i="0">
+                <a:solidFill>
+                  <a:srgbClr val="374558"/>
+                </a:solidFill>
+                <a:latin typeface="Segoe UI"/>
+              </a:rPr>
+              <a:t>Marketplace, scorecards &amp; patent check</a:t>
+            </a:r>
+          </a:p>
+        </p:txBody>
+      </p:sp>
+      <p:sp>
+        <p:nvSpPr>
+          <p:cNvPr id="31" name="Rounded Rectangle 30"/>
+          <p:cNvSpPr/>
+          <p:nvPr/>
+        </p:nvSpPr>
+        <p:spPr>
+          <a:xfrm>
+            <a:off x="4279392" y="1645920"/>
+            <a:ext cx="3611880" cy="4297680"/>
+          </a:xfrm>
+          <a:prstGeom prst="roundRect">
+            <a:avLst/>
+          </a:prstGeom>
+          <a:solidFill>
+            <a:srgbClr val="FFFFFF"/>
+          </a:solidFill>
+          <a:ln w="12700">
+            <a:solidFill>
+              <a:srgbClr val="D8E0EA"/>
+            </a:solidFill>
+          </a:ln>
+          <a:effectLst/>
+        </p:spPr>
+        <p:style>
+          <a:lnRef idx="1">
+            <a:schemeClr val="accent1"/>
+          </a:lnRef>
+          <a:fillRef idx="3">
+            <a:schemeClr val="accent1"/>
+          </a:fillRef>
+          <a:effectRef idx="2">
+            <a:schemeClr val="accent1"/>
+          </a:effectRef>
+          <a:fontRef idx="minor">
+            <a:schemeClr val="lt1"/>
+          </a:fontRef>
+        </p:style>
+        <p:txBody>
+          <a:bodyPr rtlCol="0" anchor="ctr"/>
+          <a:lstStyle/>
+          <a:p>
+            <a:pPr algn="ctr"/>
+          </a:p>
+        </p:txBody>
+      </p:sp>
+      <p:sp>
+        <p:nvSpPr>
+          <p:cNvPr id="32" name="Rounded Rectangle 31"/>
+          <p:cNvSpPr/>
+          <p:nvPr/>
+        </p:nvSpPr>
+        <p:spPr>
+          <a:xfrm>
+            <a:off x="4279392" y="1645920"/>
+            <a:ext cx="3611880" cy="868680"/>
+          </a:xfrm>
+          <a:prstGeom prst="roundRect">
+            <a:avLst/>
+          </a:prstGeom>
+          <a:solidFill>
+            <a:srgbClr val="B47609"/>
+          </a:solidFill>
+          <a:ln>
+            <a:noFill/>
+          </a:ln>
+          <a:effectLst/>
+        </p:spPr>
+        <p:style>
+          <a:lnRef idx="1">
+            <a:schemeClr val="accent1"/>
+          </a:lnRef>
+          <a:fillRef idx="3">
+            <a:schemeClr val="accent1"/>
+          </a:fillRef>
+          <a:effectRef idx="2">
+            <a:schemeClr val="accent1"/>
+          </a:effectRef>
+          <a:fontRef idx="minor">
+            <a:schemeClr val="lt1"/>
+          </a:fontRef>
+        </p:style>
+        <p:txBody>
+          <a:bodyPr rtlCol="0" anchor="ctr"/>
+          <a:lstStyle/>
+          <a:p>
+            <a:pPr algn="ctr"/>
+          </a:p>
+        </p:txBody>
+      </p:sp>
+      <p:sp>
+        <p:nvSpPr>
+          <p:cNvPr id="33" name="Rectangle 32"/>
+          <p:cNvSpPr/>
+          <p:nvPr/>
+        </p:nvSpPr>
+        <p:spPr>
+          <a:xfrm>
+            <a:off x="4279392" y="2194560"/>
+            <a:ext cx="3611880" cy="320040"/>
+          </a:xfrm>
+          <a:prstGeom prst="rect">
+            <a:avLst/>
+          </a:prstGeom>
+          <a:solidFill>
+            <a:srgbClr val="B47609"/>
+          </a:solidFill>
+          <a:ln>
+            <a:noFill/>
+          </a:ln>
+          <a:effectLst/>
+        </p:spPr>
+        <p:style>
+          <a:lnRef idx="1">
+            <a:schemeClr val="accent1"/>
+          </a:lnRef>
+          <a:fillRef idx="3">
+            <a:schemeClr val="accent1"/>
+          </a:fillRef>
+          <a:effectRef idx="2">
+            <a:schemeClr val="accent1"/>
+          </a:effectRef>
+          <a:fontRef idx="minor">
+            <a:schemeClr val="lt1"/>
+          </a:fontRef>
+        </p:style>
+        <p:txBody>
+          <a:bodyPr rtlCol="0" anchor="ctr"/>
+          <a:lstStyle/>
+          <a:p>
+            <a:pPr algn="ctr"/>
+          </a:p>
+        </p:txBody>
+      </p:sp>
+      <p:sp>
+        <p:nvSpPr>
+          <p:cNvPr id="34" name="TextBox 33"/>
+          <p:cNvSpPr txBox="1"/>
+          <p:nvPr/>
+        </p:nvSpPr>
+        <p:spPr>
+          <a:xfrm>
+            <a:off x="4599432" y="1737360"/>
+            <a:ext cx="3017520" cy="457200"/>
+          </a:xfrm>
+          <a:prstGeom prst="rect">
+            <a:avLst/>
+          </a:prstGeom>
+          <a:noFill/>
+        </p:spPr>
+        <p:txBody>
+          <a:bodyPr wrap="square" anchor="t" lIns="0" rIns="0" tIns="0" bIns="0">
+            <a:spAutoFit/>
+          </a:bodyPr>
+          <a:lstStyle/>
+          <a:p>
+            <a:pPr algn="l">
+              <a:lnSpc>
+                <a:spcPct val="100000"/>
+              </a:lnSpc>
+            </a:pPr>
+            <a:r>
+              <a:rPr sz="2200" b="1" i="0">
+                <a:solidFill>
+                  <a:srgbClr val="FFFFFF"/>
+                </a:solidFill>
+                <a:latin typeface="Segoe UI Semibold"/>
+              </a:rPr>
+              <a:t>NEXT</a:t>
+            </a:r>
+          </a:p>
+        </p:txBody>
+      </p:sp>
+      <p:sp>
+        <p:nvSpPr>
+          <p:cNvPr id="35" name="TextBox 34"/>
+          <p:cNvSpPr txBox="1"/>
+          <p:nvPr/>
+        </p:nvSpPr>
+        <p:spPr>
+          <a:xfrm>
+            <a:off x="4599432" y="2176272"/>
+            <a:ext cx="3017520" cy="320040"/>
+          </a:xfrm>
+          <a:prstGeom prst="rect">
+            <a:avLst/>
+          </a:prstGeom>
+          <a:noFill/>
+        </p:spPr>
+        <p:txBody>
+          <a:bodyPr wrap="square" anchor="t" lIns="0" rIns="0" tIns="0" bIns="0">
+            <a:spAutoFit/>
+          </a:bodyPr>
+          <a:lstStyle/>
+          <a:p>
+            <a:pPr algn="l">
+              <a:lnSpc>
+                <a:spcPct val="100000"/>
+              </a:lnSpc>
+            </a:pPr>
+            <a:r>
+              <a:rPr sz="1200" b="1" i="0">
+                <a:solidFill>
+                  <a:srgbClr val="FFFFFF"/>
+                </a:solidFill>
+                <a:latin typeface="Segoe UI Semibold"/>
+              </a:rPr>
+              <a:t>3–6 months</a:t>
+            </a:r>
+          </a:p>
+        </p:txBody>
+      </p:sp>
+      <p:sp>
+        <p:nvSpPr>
+          <p:cNvPr id="36" name="Rounded Rectangle 35"/>
+          <p:cNvSpPr/>
+          <p:nvPr/>
+        </p:nvSpPr>
+        <p:spPr>
+          <a:xfrm>
+            <a:off x="4535424" y="2743200"/>
+            <a:ext cx="292608" cy="292608"/>
+          </a:xfrm>
+          <a:prstGeom prst="roundRect">
+            <a:avLst/>
+          </a:prstGeom>
+          <a:solidFill>
+            <a:srgbClr val="B47609"/>
+          </a:solidFill>
+          <a:ln>
+            <a:noFill/>
+          </a:ln>
+          <a:effectLst/>
+        </p:spPr>
+        <p:style>
+          <a:lnRef idx="1">
+            <a:schemeClr val="accent1"/>
+          </a:lnRef>
+          <a:fillRef idx="3">
+            <a:schemeClr val="accent1"/>
+          </a:fillRef>
+          <a:effectRef idx="2">
+            <a:schemeClr val="accent1"/>
+          </a:effectRef>
+          <a:fontRef idx="minor">
+            <a:schemeClr val="lt1"/>
+          </a:fontRef>
+        </p:style>
+        <p:txBody>
+          <a:bodyPr rtlCol="0" anchor="ctr"/>
+          <a:lstStyle/>
+          <a:p>
+            <a:pPr algn="ctr"/>
+          </a:p>
+        </p:txBody>
+      </p:sp>
+      <p:sp>
+        <p:nvSpPr>
+          <p:cNvPr id="37" name="TextBox 36"/>
+          <p:cNvSpPr txBox="1"/>
+          <p:nvPr/>
+        </p:nvSpPr>
+        <p:spPr>
+          <a:xfrm>
+            <a:off x="4535424" y="2743200"/>
+            <a:ext cx="292608" cy="292608"/>
+          </a:xfrm>
+          <a:prstGeom prst="rect">
+            <a:avLst/>
+          </a:prstGeom>
+          <a:noFill/>
+        </p:spPr>
+        <p:txBody>
+          <a:bodyPr wrap="square" anchor="ctr" lIns="0" rIns="0" tIns="0" bIns="0">
+            <a:spAutoFit/>
+          </a:bodyPr>
+          <a:lstStyle/>
+          <a:p>
+            <a:pPr algn="ctr">
+              <a:lnSpc>
+                <a:spcPct val="100000"/>
+              </a:lnSpc>
+            </a:pPr>
+            <a:r>
+              <a:rPr sz="1800" b="1" i="0">
+                <a:solidFill>
+                  <a:srgbClr val="FFFFFF"/>
+                </a:solidFill>
+                <a:latin typeface="Arial"/>
+              </a:rPr>
+              <a:t>▪</a:t>
+            </a:r>
+          </a:p>
+        </p:txBody>
+      </p:sp>
+      <p:sp>
+        <p:nvSpPr>
+          <p:cNvPr id="38" name="TextBox 37"/>
+          <p:cNvSpPr txBox="1"/>
+          <p:nvPr/>
+        </p:nvSpPr>
+        <p:spPr>
+          <a:xfrm>
+            <a:off x="4919472" y="2724912"/>
+            <a:ext cx="2834640" cy="548640"/>
+          </a:xfrm>
+          <a:prstGeom prst="rect">
+            <a:avLst/>
+          </a:prstGeom>
+          <a:noFill/>
+        </p:spPr>
+        <p:txBody>
+          <a:bodyPr wrap="square" anchor="t" lIns="0" rIns="0" tIns="0" bIns="0">
+            <a:spAutoFit/>
+          </a:bodyPr>
+          <a:lstStyle/>
+          <a:p>
+            <a:pPr algn="l">
+              <a:lnSpc>
+                <a:spcPct val="102000"/>
+              </a:lnSpc>
+            </a:pPr>
+            <a:r>
+              <a:rPr sz="1150" b="0" i="0">
+                <a:solidFill>
+                  <a:srgbClr val="374558"/>
+                </a:solidFill>
+                <a:latin typeface="Segoe UI"/>
+              </a:rPr>
+              <a:t>Feature-based casting &amp; moulding</a:t>
+            </a:r>
+          </a:p>
+        </p:txBody>
+      </p:sp>
+      <p:sp>
+        <p:nvSpPr>
+          <p:cNvPr id="39" name="Rounded Rectangle 38"/>
+          <p:cNvSpPr/>
+          <p:nvPr/>
+        </p:nvSpPr>
+        <p:spPr>
+          <a:xfrm>
+            <a:off x="4535424" y="3364992"/>
+            <a:ext cx="292608" cy="292608"/>
+          </a:xfrm>
+          <a:prstGeom prst="roundRect">
+            <a:avLst/>
+          </a:prstGeom>
+          <a:solidFill>
+            <a:srgbClr val="B47609"/>
+          </a:solidFill>
+          <a:ln>
+            <a:noFill/>
+          </a:ln>
+          <a:effectLst/>
+        </p:spPr>
+        <p:style>
+          <a:lnRef idx="1">
+            <a:schemeClr val="accent1"/>
+          </a:lnRef>
+          <a:fillRef idx="3">
+            <a:schemeClr val="accent1"/>
+          </a:fillRef>
+          <a:effectRef idx="2">
+            <a:schemeClr val="accent1"/>
+          </a:effectRef>
+          <a:fontRef idx="minor">
+            <a:schemeClr val="lt1"/>
+          </a:fontRef>
+        </p:style>
+        <p:txBody>
+          <a:bodyPr rtlCol="0" anchor="ctr"/>
+          <a:lstStyle/>
+          <a:p>
+            <a:pPr algn="ctr"/>
+          </a:p>
+        </p:txBody>
+      </p:sp>
+      <p:sp>
+        <p:nvSpPr>
+          <p:cNvPr id="40" name="TextBox 39"/>
+          <p:cNvSpPr txBox="1"/>
+          <p:nvPr/>
+        </p:nvSpPr>
+        <p:spPr>
+          <a:xfrm>
+            <a:off x="4535424" y="3364992"/>
+            <a:ext cx="292608" cy="292608"/>
+          </a:xfrm>
+          <a:prstGeom prst="rect">
+            <a:avLst/>
+          </a:prstGeom>
+          <a:noFill/>
+        </p:spPr>
+        <p:txBody>
+          <a:bodyPr wrap="square" anchor="ctr" lIns="0" rIns="0" tIns="0" bIns="0">
+            <a:spAutoFit/>
+          </a:bodyPr>
+          <a:lstStyle/>
+          <a:p>
+            <a:pPr algn="ctr">
+              <a:lnSpc>
+                <a:spcPct val="100000"/>
+              </a:lnSpc>
+            </a:pPr>
+            <a:r>
+              <a:rPr sz="1800" b="1" i="0">
+                <a:solidFill>
+                  <a:srgbClr val="FFFFFF"/>
+                </a:solidFill>
+                <a:latin typeface="Arial"/>
+              </a:rPr>
+              <a:t>▪</a:t>
+            </a:r>
+          </a:p>
+        </p:txBody>
+      </p:sp>
+      <p:sp>
+        <p:nvSpPr>
+          <p:cNvPr id="41" name="TextBox 40"/>
+          <p:cNvSpPr txBox="1"/>
+          <p:nvPr/>
+        </p:nvSpPr>
+        <p:spPr>
+          <a:xfrm>
+            <a:off x="4919472" y="3346704"/>
+            <a:ext cx="2834640" cy="548640"/>
+          </a:xfrm>
+          <a:prstGeom prst="rect">
+            <a:avLst/>
+          </a:prstGeom>
+          <a:noFill/>
+        </p:spPr>
+        <p:txBody>
+          <a:bodyPr wrap="square" anchor="t" lIns="0" rIns="0" tIns="0" bIns="0">
+            <a:spAutoFit/>
+          </a:bodyPr>
+          <a:lstStyle/>
+          <a:p>
+            <a:pPr algn="l">
+              <a:lnSpc>
+                <a:spcPct val="102000"/>
+              </a:lnSpc>
+            </a:pPr>
+            <a:r>
+              <a:rPr sz="1150" b="0" i="0">
+                <a:solidFill>
+                  <a:srgbClr val="374558"/>
+                </a:solidFill>
+                <a:latin typeface="Segoe UI"/>
+              </a:rPr>
+              <a:t>Weld / assembly cost models</a:t>
+            </a:r>
+          </a:p>
+        </p:txBody>
+      </p:sp>
+      <p:sp>
+        <p:nvSpPr>
+          <p:cNvPr id="42" name="Rounded Rectangle 41"/>
+          <p:cNvSpPr/>
+          <p:nvPr/>
+        </p:nvSpPr>
+        <p:spPr>
+          <a:xfrm>
+            <a:off x="4535424" y="3986784"/>
+            <a:ext cx="292608" cy="292608"/>
+          </a:xfrm>
+          <a:prstGeom prst="roundRect">
+            <a:avLst/>
+          </a:prstGeom>
+          <a:solidFill>
+            <a:srgbClr val="B47609"/>
+          </a:solidFill>
+          <a:ln>
+            <a:noFill/>
+          </a:ln>
+          <a:effectLst/>
+        </p:spPr>
+        <p:style>
+          <a:lnRef idx="1">
+            <a:schemeClr val="accent1"/>
+          </a:lnRef>
+          <a:fillRef idx="3">
+            <a:schemeClr val="accent1"/>
+          </a:fillRef>
+          <a:effectRef idx="2">
+            <a:schemeClr val="accent1"/>
+          </a:effectRef>
+          <a:fontRef idx="minor">
+            <a:schemeClr val="lt1"/>
+          </a:fontRef>
+        </p:style>
+        <p:txBody>
+          <a:bodyPr rtlCol="0" anchor="ctr"/>
+          <a:lstStyle/>
+          <a:p>
+            <a:pPr algn="ctr"/>
+          </a:p>
+        </p:txBody>
+      </p:sp>
+      <p:sp>
+        <p:nvSpPr>
+          <p:cNvPr id="43" name="TextBox 42"/>
+          <p:cNvSpPr txBox="1"/>
+          <p:nvPr/>
+        </p:nvSpPr>
+        <p:spPr>
+          <a:xfrm>
+            <a:off x="4535424" y="3986784"/>
+            <a:ext cx="292608" cy="292608"/>
+          </a:xfrm>
+          <a:prstGeom prst="rect">
+            <a:avLst/>
+          </a:prstGeom>
+          <a:noFill/>
+        </p:spPr>
+        <p:txBody>
+          <a:bodyPr wrap="square" anchor="ctr" lIns="0" rIns="0" tIns="0" bIns="0">
+            <a:spAutoFit/>
+          </a:bodyPr>
+          <a:lstStyle/>
+          <a:p>
+            <a:pPr algn="ctr">
+              <a:lnSpc>
+                <a:spcPct val="100000"/>
+              </a:lnSpc>
+            </a:pPr>
+            <a:r>
+              <a:rPr sz="1800" b="1" i="0">
+                <a:solidFill>
+                  <a:srgbClr val="FFFFFF"/>
+                </a:solidFill>
+                <a:latin typeface="Arial"/>
+              </a:rPr>
+              <a:t>▪</a:t>
+            </a:r>
+          </a:p>
+        </p:txBody>
+      </p:sp>
+      <p:sp>
+        <p:nvSpPr>
+          <p:cNvPr id="44" name="TextBox 43"/>
+          <p:cNvSpPr txBox="1"/>
+          <p:nvPr/>
+        </p:nvSpPr>
+        <p:spPr>
+          <a:xfrm>
+            <a:off x="4919472" y="3968496"/>
+            <a:ext cx="2834640" cy="548640"/>
+          </a:xfrm>
+          <a:prstGeom prst="rect">
+            <a:avLst/>
+          </a:prstGeom>
+          <a:noFill/>
+        </p:spPr>
+        <p:txBody>
+          <a:bodyPr wrap="square" anchor="t" lIns="0" rIns="0" tIns="0" bIns="0">
+            <a:spAutoFit/>
+          </a:bodyPr>
+          <a:lstStyle/>
+          <a:p>
+            <a:pPr algn="l">
+              <a:lnSpc>
+                <a:spcPct val="102000"/>
+              </a:lnSpc>
+            </a:pPr>
+            <a:r>
+              <a:rPr sz="1150" b="0" i="0">
+                <a:solidFill>
+                  <a:srgbClr val="374558"/>
+                </a:solidFill>
+                <a:latin typeface="Segoe UI"/>
+              </a:rPr>
+              <a:t>Empirical confidence bands</a:t>
+            </a:r>
+          </a:p>
+        </p:txBody>
+      </p:sp>
+      <p:sp>
+        <p:nvSpPr>
+          <p:cNvPr id="45" name="Rounded Rectangle 44"/>
+          <p:cNvSpPr/>
+          <p:nvPr/>
+        </p:nvSpPr>
+        <p:spPr>
+          <a:xfrm>
+            <a:off x="4535424" y="4608576"/>
+            <a:ext cx="292608" cy="292608"/>
+          </a:xfrm>
+          <a:prstGeom prst="roundRect">
+            <a:avLst/>
+          </a:prstGeom>
+          <a:solidFill>
+            <a:srgbClr val="B47609"/>
+          </a:solidFill>
+          <a:ln>
+            <a:noFill/>
+          </a:ln>
+          <a:effectLst/>
+        </p:spPr>
+        <p:style>
+          <a:lnRef idx="1">
+            <a:schemeClr val="accent1"/>
+          </a:lnRef>
+          <a:fillRef idx="3">
+            <a:schemeClr val="accent1"/>
+          </a:fillRef>
+          <a:effectRef idx="2">
+            <a:schemeClr val="accent1"/>
+          </a:effectRef>
+          <a:fontRef idx="minor">
+            <a:schemeClr val="lt1"/>
+          </a:fontRef>
+        </p:style>
+        <p:txBody>
+          <a:bodyPr rtlCol="0" anchor="ctr"/>
+          <a:lstStyle/>
+          <a:p>
+            <a:pPr algn="ctr"/>
+          </a:p>
+        </p:txBody>
+      </p:sp>
+      <p:sp>
+        <p:nvSpPr>
+          <p:cNvPr id="46" name="TextBox 45"/>
+          <p:cNvSpPr txBox="1"/>
+          <p:nvPr/>
+        </p:nvSpPr>
+        <p:spPr>
+          <a:xfrm>
+            <a:off x="4535424" y="4608576"/>
+            <a:ext cx="292608" cy="292608"/>
+          </a:xfrm>
+          <a:prstGeom prst="rect">
+            <a:avLst/>
+          </a:prstGeom>
+          <a:noFill/>
+        </p:spPr>
+        <p:txBody>
+          <a:bodyPr wrap="square" anchor="ctr" lIns="0" rIns="0" tIns="0" bIns="0">
+            <a:spAutoFit/>
+          </a:bodyPr>
+          <a:lstStyle/>
+          <a:p>
+            <a:pPr algn="ctr">
+              <a:lnSpc>
+                <a:spcPct val="100000"/>
+              </a:lnSpc>
+            </a:pPr>
+            <a:r>
+              <a:rPr sz="1800" b="1" i="0">
+                <a:solidFill>
+                  <a:srgbClr val="FFFFFF"/>
+                </a:solidFill>
+                <a:latin typeface="Arial"/>
+              </a:rPr>
+              <a:t>▪</a:t>
+            </a:r>
+          </a:p>
+        </p:txBody>
+      </p:sp>
+      <p:sp>
+        <p:nvSpPr>
+          <p:cNvPr id="47" name="TextBox 46"/>
+          <p:cNvSpPr txBox="1"/>
+          <p:nvPr/>
+        </p:nvSpPr>
+        <p:spPr>
+          <a:xfrm>
+            <a:off x="4919472" y="4590288"/>
+            <a:ext cx="2834640" cy="548640"/>
+          </a:xfrm>
+          <a:prstGeom prst="rect">
+            <a:avLst/>
+          </a:prstGeom>
+          <a:noFill/>
+        </p:spPr>
+        <p:txBody>
+          <a:bodyPr wrap="square" anchor="t" lIns="0" rIns="0" tIns="0" bIns="0">
+            <a:spAutoFit/>
+          </a:bodyPr>
+          <a:lstStyle/>
+          <a:p>
+            <a:pPr algn="l">
+              <a:lnSpc>
+                <a:spcPct val="102000"/>
+              </a:lnSpc>
+            </a:pPr>
+            <a:r>
+              <a:rPr sz="1150" b="0" i="0">
+                <a:solidFill>
+                  <a:srgbClr val="374558"/>
+                </a:solidFill>
+                <a:latin typeface="Segoe UI"/>
+              </a:rPr>
+              <a:t>Commonality &amp; variant reduction</a:t>
+            </a:r>
+          </a:p>
+        </p:txBody>
+      </p:sp>
+      <p:sp>
+        <p:nvSpPr>
+          <p:cNvPr id="48" name="Rounded Rectangle 47"/>
+          <p:cNvSpPr/>
+          <p:nvPr/>
+        </p:nvSpPr>
+        <p:spPr>
+          <a:xfrm>
+            <a:off x="8010144" y="1645920"/>
+            <a:ext cx="3611880" cy="4297680"/>
+          </a:xfrm>
+          <a:prstGeom prst="roundRect">
+            <a:avLst/>
+          </a:prstGeom>
+          <a:solidFill>
+            <a:srgbClr val="FFFFFF"/>
+          </a:solidFill>
+          <a:ln w="12700">
+            <a:solidFill>
+              <a:srgbClr val="D8E0EA"/>
+            </a:solidFill>
+          </a:ln>
+          <a:effectLst/>
+        </p:spPr>
+        <p:style>
+          <a:lnRef idx="1">
+            <a:schemeClr val="accent1"/>
+          </a:lnRef>
+          <a:fillRef idx="3">
+            <a:schemeClr val="accent1"/>
+          </a:fillRef>
+          <a:effectRef idx="2">
+            <a:schemeClr val="accent1"/>
+          </a:effectRef>
+          <a:fontRef idx="minor">
+            <a:schemeClr val="lt1"/>
+          </a:fontRef>
+        </p:style>
+        <p:txBody>
+          <a:bodyPr rtlCol="0" anchor="ctr"/>
+          <a:lstStyle/>
+          <a:p>
+            <a:pPr algn="ctr"/>
+          </a:p>
+        </p:txBody>
+      </p:sp>
+      <p:sp>
+        <p:nvSpPr>
+          <p:cNvPr id="49" name="Rounded Rectangle 48"/>
+          <p:cNvSpPr/>
+          <p:nvPr/>
+        </p:nvSpPr>
+        <p:spPr>
+          <a:xfrm>
+            <a:off x="8010144" y="1645920"/>
+            <a:ext cx="3611880" cy="868680"/>
+          </a:xfrm>
+          <a:prstGeom prst="roundRect">
+            <a:avLst/>
+          </a:prstGeom>
+          <a:solidFill>
+            <a:srgbClr val="0D9488"/>
+          </a:solidFill>
+          <a:ln>
+            <a:noFill/>
+          </a:ln>
+          <a:effectLst/>
+        </p:spPr>
+        <p:style>
+          <a:lnRef idx="1">
+            <a:schemeClr val="accent1"/>
+          </a:lnRef>
+          <a:fillRef idx="3">
+            <a:schemeClr val="accent1"/>
+          </a:fillRef>
+          <a:effectRef idx="2">
+            <a:schemeClr val="accent1"/>
+          </a:effectRef>
+          <a:fontRef idx="minor">
+            <a:schemeClr val="lt1"/>
+          </a:fontRef>
+        </p:style>
+        <p:txBody>
+          <a:bodyPr rtlCol="0" anchor="ctr"/>
+          <a:lstStyle/>
+          <a:p>
+            <a:pPr algn="ctr"/>
+          </a:p>
+        </p:txBody>
+      </p:sp>
+      <p:sp>
+        <p:nvSpPr>
+          <p:cNvPr id="50" name="Rectangle 49"/>
+          <p:cNvSpPr/>
+          <p:nvPr/>
+        </p:nvSpPr>
+        <p:spPr>
+          <a:xfrm>
+            <a:off x="8010144" y="2194560"/>
+            <a:ext cx="3611880" cy="320040"/>
+          </a:xfrm>
+          <a:prstGeom prst="rect">
+            <a:avLst/>
+          </a:prstGeom>
+          <a:solidFill>
+            <a:srgbClr val="0D9488"/>
+          </a:solidFill>
+          <a:ln>
+            <a:noFill/>
+          </a:ln>
+          <a:effectLst/>
+        </p:spPr>
+        <p:style>
+          <a:lnRef idx="1">
+            <a:schemeClr val="accent1"/>
+          </a:lnRef>
+          <a:fillRef idx="3">
+            <a:schemeClr val="accent1"/>
+          </a:fillRef>
+          <a:effectRef idx="2">
+            <a:schemeClr val="accent1"/>
+          </a:effectRef>
+          <a:fontRef idx="minor">
+            <a:schemeClr val="lt1"/>
+          </a:fontRef>
+        </p:style>
+        <p:txBody>
+          <a:bodyPr rtlCol="0" anchor="ctr"/>
+          <a:lstStyle/>
+          <a:p>
+            <a:pPr algn="ctr"/>
+          </a:p>
+        </p:txBody>
+      </p:sp>
+      <p:sp>
+        <p:nvSpPr>
+          <p:cNvPr id="51" name="TextBox 50"/>
+          <p:cNvSpPr txBox="1"/>
+          <p:nvPr/>
+        </p:nvSpPr>
+        <p:spPr>
+          <a:xfrm>
+            <a:off x="8330184" y="1737360"/>
+            <a:ext cx="3017520" cy="457200"/>
+          </a:xfrm>
+          <a:prstGeom prst="rect">
+            <a:avLst/>
+          </a:prstGeom>
+          <a:noFill/>
+        </p:spPr>
+        <p:txBody>
+          <a:bodyPr wrap="square" anchor="t" lIns="0" rIns="0" tIns="0" bIns="0">
+            <a:spAutoFit/>
+          </a:bodyPr>
+          <a:lstStyle/>
+          <a:p>
+            <a:pPr algn="l">
+              <a:lnSpc>
+                <a:spcPct val="100000"/>
+              </a:lnSpc>
+            </a:pPr>
+            <a:r>
+              <a:rPr sz="2200" b="1" i="0">
+                <a:solidFill>
+                  <a:srgbClr val="FFFFFF"/>
+                </a:solidFill>
+                <a:latin typeface="Segoe UI Semibold"/>
+              </a:rPr>
+              <a:t>LATER</a:t>
+            </a:r>
+          </a:p>
+        </p:txBody>
+      </p:sp>
+      <p:sp>
+        <p:nvSpPr>
+          <p:cNvPr id="52" name="TextBox 51"/>
+          <p:cNvSpPr txBox="1"/>
+          <p:nvPr/>
+        </p:nvSpPr>
+        <p:spPr>
+          <a:xfrm>
+            <a:off x="8330184" y="2176272"/>
+            <a:ext cx="3017520" cy="320040"/>
+          </a:xfrm>
+          <a:prstGeom prst="rect">
+            <a:avLst/>
+          </a:prstGeom>
+          <a:noFill/>
+        </p:spPr>
+        <p:txBody>
+          <a:bodyPr wrap="square" anchor="t" lIns="0" rIns="0" tIns="0" bIns="0">
+            <a:spAutoFit/>
+          </a:bodyPr>
+          <a:lstStyle/>
+          <a:p>
+            <a:pPr algn="l">
+              <a:lnSpc>
+                <a:spcPct val="100000"/>
+              </a:lnSpc>
+            </a:pPr>
+            <a:r>
+              <a:rPr sz="1200" b="1" i="0">
+                <a:solidFill>
+                  <a:srgbClr val="FFFFFF"/>
+                </a:solidFill>
+                <a:latin typeface="Segoe UI Semibold"/>
+              </a:rPr>
+              <a:t>Vision</a:t>
+            </a:r>
+          </a:p>
+        </p:txBody>
+      </p:sp>
+      <p:sp>
+        <p:nvSpPr>
+          <p:cNvPr id="53" name="Rounded Rectangle 52"/>
+          <p:cNvSpPr/>
+          <p:nvPr/>
+        </p:nvSpPr>
+        <p:spPr>
+          <a:xfrm>
+            <a:off x="8266176" y="2743200"/>
+            <a:ext cx="292608" cy="292608"/>
+          </a:xfrm>
+          <a:prstGeom prst="roundRect">
+            <a:avLst/>
+          </a:prstGeom>
+          <a:solidFill>
+            <a:srgbClr val="0D9488"/>
+          </a:solidFill>
+          <a:ln>
+            <a:noFill/>
+          </a:ln>
+          <a:effectLst/>
+        </p:spPr>
+        <p:style>
+          <a:lnRef idx="1">
+            <a:schemeClr val="accent1"/>
+          </a:lnRef>
+          <a:fillRef idx="3">
+            <a:schemeClr val="accent1"/>
+          </a:fillRef>
+          <a:effectRef idx="2">
+            <a:schemeClr val="accent1"/>
+          </a:effectRef>
+          <a:fontRef idx="minor">
+            <a:schemeClr val="lt1"/>
+          </a:fontRef>
+        </p:style>
+        <p:txBody>
+          <a:bodyPr rtlCol="0" anchor="ctr"/>
+          <a:lstStyle/>
+          <a:p>
+            <a:pPr algn="ctr"/>
+          </a:p>
+        </p:txBody>
+      </p:sp>
+      <p:sp>
+        <p:nvSpPr>
+          <p:cNvPr id="54" name="TextBox 53"/>
+          <p:cNvSpPr txBox="1"/>
+          <p:nvPr/>
+        </p:nvSpPr>
+        <p:spPr>
+          <a:xfrm>
+            <a:off x="8266176" y="2743200"/>
+            <a:ext cx="292608" cy="292608"/>
+          </a:xfrm>
+          <a:prstGeom prst="rect">
+            <a:avLst/>
+          </a:prstGeom>
+          <a:noFill/>
+        </p:spPr>
+        <p:txBody>
+          <a:bodyPr wrap="square" anchor="ctr" lIns="0" rIns="0" tIns="0" bIns="0">
+            <a:spAutoFit/>
+          </a:bodyPr>
+          <a:lstStyle/>
+          <a:p>
+            <a:pPr algn="ctr">
+              <a:lnSpc>
+                <a:spcPct val="100000"/>
+              </a:lnSpc>
+            </a:pPr>
+            <a:r>
+              <a:rPr sz="1800" b="1" i="0">
+                <a:solidFill>
+                  <a:srgbClr val="FFFFFF"/>
+                </a:solidFill>
+                <a:latin typeface="Arial"/>
+              </a:rPr>
+              <a:t>▪</a:t>
+            </a:r>
+          </a:p>
+        </p:txBody>
+      </p:sp>
+      <p:sp>
+        <p:nvSpPr>
+          <p:cNvPr id="55" name="TextBox 54"/>
+          <p:cNvSpPr txBox="1"/>
+          <p:nvPr/>
+        </p:nvSpPr>
+        <p:spPr>
+          <a:xfrm>
+            <a:off x="8650224" y="2724912"/>
+            <a:ext cx="2834640" cy="548640"/>
+          </a:xfrm>
+          <a:prstGeom prst="rect">
+            <a:avLst/>
+          </a:prstGeom>
+          <a:noFill/>
+        </p:spPr>
+        <p:txBody>
+          <a:bodyPr wrap="square" anchor="t" lIns="0" rIns="0" tIns="0" bIns="0">
+            <a:spAutoFit/>
+          </a:bodyPr>
+          <a:lstStyle/>
+          <a:p>
+            <a:pPr algn="l">
+              <a:lnSpc>
+                <a:spcPct val="102000"/>
+              </a:lnSpc>
+            </a:pPr>
+            <a:r>
+              <a:rPr sz="1150" b="0" i="0">
+                <a:solidFill>
+                  <a:srgbClr val="374558"/>
+                </a:solidFill>
+                <a:latin typeface="Segoe UI"/>
+              </a:rPr>
+              <a:t>Composite &amp; paint models</a:t>
+            </a:r>
+          </a:p>
+        </p:txBody>
+      </p:sp>
+      <p:sp>
+        <p:nvSpPr>
+          <p:cNvPr id="56" name="Rounded Rectangle 55"/>
+          <p:cNvSpPr/>
+          <p:nvPr/>
+        </p:nvSpPr>
+        <p:spPr>
+          <a:xfrm>
+            <a:off x="8266176" y="3364992"/>
+            <a:ext cx="292608" cy="292608"/>
+          </a:xfrm>
+          <a:prstGeom prst="roundRect">
+            <a:avLst/>
+          </a:prstGeom>
+          <a:solidFill>
+            <a:srgbClr val="0D9488"/>
+          </a:solidFill>
+          <a:ln>
+            <a:noFill/>
+          </a:ln>
+          <a:effectLst/>
+        </p:spPr>
+        <p:style>
+          <a:lnRef idx="1">
+            <a:schemeClr val="accent1"/>
+          </a:lnRef>
+          <a:fillRef idx="3">
+            <a:schemeClr val="accent1"/>
+          </a:fillRef>
+          <a:effectRef idx="2">
+            <a:schemeClr val="accent1"/>
+          </a:effectRef>
+          <a:fontRef idx="minor">
+            <a:schemeClr val="lt1"/>
+          </a:fontRef>
+        </p:style>
+        <p:txBody>
+          <a:bodyPr rtlCol="0" anchor="ctr"/>
+          <a:lstStyle/>
+          <a:p>
+            <a:pPr algn="ctr"/>
+          </a:p>
+        </p:txBody>
+      </p:sp>
+      <p:sp>
+        <p:nvSpPr>
+          <p:cNvPr id="57" name="TextBox 56"/>
+          <p:cNvSpPr txBox="1"/>
+          <p:nvPr/>
+        </p:nvSpPr>
+        <p:spPr>
+          <a:xfrm>
+            <a:off x="8266176" y="3364992"/>
+            <a:ext cx="292608" cy="292608"/>
+          </a:xfrm>
+          <a:prstGeom prst="rect">
+            <a:avLst/>
+          </a:prstGeom>
+          <a:noFill/>
+        </p:spPr>
+        <p:txBody>
+          <a:bodyPr wrap="square" anchor="ctr" lIns="0" rIns="0" tIns="0" bIns="0">
+            <a:spAutoFit/>
+          </a:bodyPr>
+          <a:lstStyle/>
+          <a:p>
+            <a:pPr algn="ctr">
+              <a:lnSpc>
+                <a:spcPct val="100000"/>
+              </a:lnSpc>
+            </a:pPr>
+            <a:r>
+              <a:rPr sz="1800" b="1" i="0">
+                <a:solidFill>
+                  <a:srgbClr val="FFFFFF"/>
+                </a:solidFill>
+                <a:latin typeface="Arial"/>
+              </a:rPr>
+              <a:t>▪</a:t>
+            </a:r>
+          </a:p>
+        </p:txBody>
+      </p:sp>
+      <p:sp>
+        <p:nvSpPr>
+          <p:cNvPr id="58" name="TextBox 57"/>
+          <p:cNvSpPr txBox="1"/>
+          <p:nvPr/>
+        </p:nvSpPr>
+        <p:spPr>
+          <a:xfrm>
+            <a:off x="8650224" y="3346704"/>
+            <a:ext cx="2834640" cy="548640"/>
+          </a:xfrm>
+          <a:prstGeom prst="rect">
+            <a:avLst/>
+          </a:prstGeom>
+          <a:noFill/>
+        </p:spPr>
+        <p:txBody>
+          <a:bodyPr wrap="square" anchor="t" lIns="0" rIns="0" tIns="0" bIns="0">
+            <a:spAutoFit/>
+          </a:bodyPr>
+          <a:lstStyle/>
+          <a:p>
+            <a:pPr algn="l">
+              <a:lnSpc>
+                <a:spcPct val="102000"/>
+              </a:lnSpc>
+            </a:pPr>
+            <a:r>
+              <a:rPr sz="1150" b="0" i="0">
+                <a:solidFill>
+                  <a:srgbClr val="374558"/>
+                </a:solidFill>
+                <a:latin typeface="Segoe UI"/>
+              </a:rPr>
+              <a:t>Team collaboration &amp; approvals</a:t>
+            </a:r>
+          </a:p>
+        </p:txBody>
+      </p:sp>
+      <p:sp>
+        <p:nvSpPr>
+          <p:cNvPr id="59" name="Rounded Rectangle 58"/>
+          <p:cNvSpPr/>
+          <p:nvPr/>
+        </p:nvSpPr>
+        <p:spPr>
+          <a:xfrm>
+            <a:off x="8266176" y="3986784"/>
+            <a:ext cx="292608" cy="292608"/>
+          </a:xfrm>
+          <a:prstGeom prst="roundRect">
+            <a:avLst/>
+          </a:prstGeom>
+          <a:solidFill>
+            <a:srgbClr val="0D9488"/>
+          </a:solidFill>
+          <a:ln>
+            <a:noFill/>
+          </a:ln>
+          <a:effectLst/>
+        </p:spPr>
+        <p:style>
+          <a:lnRef idx="1">
+            <a:schemeClr val="accent1"/>
+          </a:lnRef>
+          <a:fillRef idx="3">
+            <a:schemeClr val="accent1"/>
+          </a:fillRef>
+          <a:effectRef idx="2">
+            <a:schemeClr val="accent1"/>
+          </a:effectRef>
+          <a:fontRef idx="minor">
+            <a:schemeClr val="lt1"/>
+          </a:fontRef>
+        </p:style>
+        <p:txBody>
+          <a:bodyPr rtlCol="0" anchor="ctr"/>
+          <a:lstStyle/>
+          <a:p>
+            <a:pPr algn="ctr"/>
+          </a:p>
+        </p:txBody>
+      </p:sp>
+      <p:sp>
+        <p:nvSpPr>
+          <p:cNvPr id="60" name="TextBox 59"/>
+          <p:cNvSpPr txBox="1"/>
+          <p:nvPr/>
+        </p:nvSpPr>
+        <p:spPr>
+          <a:xfrm>
+            <a:off x="8266176" y="3986784"/>
+            <a:ext cx="292608" cy="292608"/>
+          </a:xfrm>
+          <a:prstGeom prst="rect">
+            <a:avLst/>
+          </a:prstGeom>
+          <a:noFill/>
+        </p:spPr>
+        <p:txBody>
+          <a:bodyPr wrap="square" anchor="ctr" lIns="0" rIns="0" tIns="0" bIns="0">
+            <a:spAutoFit/>
+          </a:bodyPr>
+          <a:lstStyle/>
+          <a:p>
+            <a:pPr algn="ctr">
+              <a:lnSpc>
+                <a:spcPct val="100000"/>
+              </a:lnSpc>
+            </a:pPr>
+            <a:r>
+              <a:rPr sz="1800" b="1" i="0">
+                <a:solidFill>
+                  <a:srgbClr val="FFFFFF"/>
+                </a:solidFill>
+                <a:latin typeface="Arial"/>
+              </a:rPr>
+              <a:t>▪</a:t>
+            </a:r>
+          </a:p>
+        </p:txBody>
+      </p:sp>
+      <p:sp>
+        <p:nvSpPr>
+          <p:cNvPr id="61" name="TextBox 60"/>
+          <p:cNvSpPr txBox="1"/>
+          <p:nvPr/>
+        </p:nvSpPr>
+        <p:spPr>
+          <a:xfrm>
+            <a:off x="8650224" y="3968496"/>
+            <a:ext cx="2834640" cy="548640"/>
+          </a:xfrm>
+          <a:prstGeom prst="rect">
+            <a:avLst/>
+          </a:prstGeom>
+          <a:noFill/>
+        </p:spPr>
+        <p:txBody>
+          <a:bodyPr wrap="square" anchor="t" lIns="0" rIns="0" tIns="0" bIns="0">
+            <a:spAutoFit/>
+          </a:bodyPr>
+          <a:lstStyle/>
+          <a:p>
+            <a:pPr algn="l">
+              <a:lnSpc>
+                <a:spcPct val="102000"/>
+              </a:lnSpc>
+            </a:pPr>
+            <a:r>
+              <a:rPr sz="1150" b="0" i="0">
+                <a:solidFill>
+                  <a:srgbClr val="374558"/>
+                </a:solidFill>
+                <a:latin typeface="Segoe UI"/>
+              </a:rPr>
+              <a:t>ERP / PLM integration</a:t>
+            </a:r>
+          </a:p>
+        </p:txBody>
+      </p:sp>
+      <p:sp>
+        <p:nvSpPr>
+          <p:cNvPr id="62" name="Rounded Rectangle 61"/>
+          <p:cNvSpPr/>
+          <p:nvPr/>
+        </p:nvSpPr>
+        <p:spPr>
+          <a:xfrm>
+            <a:off x="8266176" y="4608576"/>
+            <a:ext cx="292608" cy="292608"/>
+          </a:xfrm>
+          <a:prstGeom prst="roundRect">
+            <a:avLst/>
+          </a:prstGeom>
+          <a:solidFill>
+            <a:srgbClr val="0D9488"/>
+          </a:solidFill>
+          <a:ln>
+            <a:noFill/>
+          </a:ln>
+          <a:effectLst/>
+        </p:spPr>
+        <p:style>
+          <a:lnRef idx="1">
+            <a:schemeClr val="accent1"/>
+          </a:lnRef>
+          <a:fillRef idx="3">
+            <a:schemeClr val="accent1"/>
+          </a:fillRef>
+          <a:effectRef idx="2">
+            <a:schemeClr val="accent1"/>
+          </a:effectRef>
+          <a:fontRef idx="minor">
+            <a:schemeClr val="lt1"/>
+          </a:fontRef>
+        </p:style>
+        <p:txBody>
+          <a:bodyPr rtlCol="0" anchor="ctr"/>
+          <a:lstStyle/>
+          <a:p>
+            <a:pPr algn="ctr"/>
+          </a:p>
+        </p:txBody>
+      </p:sp>
+      <p:sp>
+        <p:nvSpPr>
+          <p:cNvPr id="63" name="TextBox 62"/>
+          <p:cNvSpPr txBox="1"/>
+          <p:nvPr/>
+        </p:nvSpPr>
+        <p:spPr>
+          <a:xfrm>
+            <a:off x="8266176" y="4608576"/>
+            <a:ext cx="292608" cy="292608"/>
+          </a:xfrm>
+          <a:prstGeom prst="rect">
+            <a:avLst/>
+          </a:prstGeom>
+          <a:noFill/>
+        </p:spPr>
+        <p:txBody>
+          <a:bodyPr wrap="square" anchor="ctr" lIns="0" rIns="0" tIns="0" bIns="0">
+            <a:spAutoFit/>
+          </a:bodyPr>
+          <a:lstStyle/>
+          <a:p>
+            <a:pPr algn="ctr">
+              <a:lnSpc>
+                <a:spcPct val="100000"/>
+              </a:lnSpc>
+            </a:pPr>
+            <a:r>
+              <a:rPr sz="1800" b="1" i="0">
+                <a:solidFill>
+                  <a:srgbClr val="FFFFFF"/>
+                </a:solidFill>
+                <a:latin typeface="Arial"/>
+              </a:rPr>
+              <a:t>▪</a:t>
+            </a:r>
+          </a:p>
+        </p:txBody>
+      </p:sp>
+      <p:sp>
+        <p:nvSpPr>
+          <p:cNvPr id="64" name="TextBox 63"/>
+          <p:cNvSpPr txBox="1"/>
+          <p:nvPr/>
+        </p:nvSpPr>
+        <p:spPr>
+          <a:xfrm>
+            <a:off x="8650224" y="4590288"/>
+            <a:ext cx="2834640" cy="548640"/>
+          </a:xfrm>
+          <a:prstGeom prst="rect">
+            <a:avLst/>
+          </a:prstGeom>
+          <a:noFill/>
+        </p:spPr>
+        <p:txBody>
+          <a:bodyPr wrap="square" anchor="t" lIns="0" rIns="0" tIns="0" bIns="0">
+            <a:spAutoFit/>
+          </a:bodyPr>
+          <a:lstStyle/>
+          <a:p>
+            <a:pPr algn="l">
+              <a:lnSpc>
+                <a:spcPct val="102000"/>
+              </a:lnSpc>
+            </a:pPr>
+            <a:r>
+              <a:rPr sz="1150" b="0" i="0">
+                <a:solidFill>
+                  <a:srgbClr val="374558"/>
+                </a:solidFill>
+                <a:latin typeface="Segoe UI"/>
+              </a:rPr>
+              <a:t>Portfolio-level cost intelligence</a:t>
+            </a:r>
+          </a:p>
+        </p:txBody>
+      </p:sp>
+    </p:spTree>
+  </p:cSld>
+  <p:clrMapOvr>
+    <a:masterClrMapping/>
+  </p:clrMapOvr>
+</p:sld>
+</file>
+
+<file path=ppt/slides/slide21.xml><?xml version="1.0" encoding="utf-8"?>
 <p:sld xmlns:a="http://schemas.openxmlformats.org/drawingml/2006/main" xmlns:p="http://schemas.openxmlformats.org/presentationml/2006/main" xmlns:r="http://schemas.openxmlformats.org/officeDocument/2006/relationships">
   <p:cSld>
     <p:bg>

--- a/BrainSpark_Director_Presentation.pptx
+++ b/BrainSpark_Director_Presentation.pptx
@@ -1082,7 +1082,7 @@
           <a:lstStyle/>
           <a:p>
             <a:r>
-              <a:t>This slide is about the effort and the standard, not bragging about line counts. The headline: this is real software — over forty-two thousand lines of hand-written code across roughly one hundred and fifty files, built to production discipline on my own time, evenings and weekends. Walk the bars left to right: the biggest share is the app itself, then the cost engines and the AI pipeline, then something unusual — five and a half thousand lines of curated engineering knowledge, the levers and benchmarks that make the ideas automotive-grade rather than generic. And point at the ratio: roughly one line of test for every six and a half lines of product. That's why the numbers can be trusted — every engine is unit-tested, accuracy is proven on parts the model never saw, and even changes to the AI itself get A/B-measured before they ship. The quiet message for the Director: this wasn't a weekend hack, it's a sustained engineering effort — and it's already at the standard we'd hold a supplier to.</a:t>
+              <a:t>This slide is about the effort and the standard — and be upfront about how it was built, because it's the strongest part of the story: I built this with AI-assisted development. I set the direction, made the engineering decisions, reviewed and tested everything; AI did the heavy lifting on the code. In other words, I used exactly the human-plus-AI way of working this tool offers our engineers — and this is what one engineer can produce with it on personal time, evenings and weekends. Then walk the numbers: over forty-two thousand lines of production code, and note the unusual part — five and a half thousand lines of curated engineering knowledge, the levers and benchmarks that make ideas automotive-grade rather than generic. Land on the test ratio: one line of test for every six and a half of product. Every engine is unit-tested, accuracy is proven on parts the model never saw, and even changes to the AI itself get A/B-measured before they ship. The message for the Director: AI accelerated the build, but engineering discipline governed it — the same bargain the tool offers the whole team.</a:t>
             </a:r>
           </a:p>
         </p:txBody>
@@ -21229,7 +21229,7 @@
                 </a:solidFill>
                 <a:latin typeface="Segoe UI Semibold"/>
               </a:rPr>
-              <a:t>Built as real software, to production discipline — on personal time, evenings and weekends.</a:t>
+              <a:t>Engineer-directed, AI-accelerated development — the same human + AI leverage the tool itself delivers.</a:t>
             </a:r>
           </a:p>
         </p:txBody>
@@ -21353,7 +21353,7 @@
                 </a:solidFill>
                 <a:latin typeface="Segoe UI"/>
               </a:rPr>
-              <a:t>lines of hand-written code</a:t>
+              <a:t>lines of production code</a:t>
             </a:r>
           </a:p>
         </p:txBody>
@@ -22993,7 +22993,7 @@
                 </a:solidFill>
                 <a:latin typeface="Segoe UI"/>
               </a:rPr>
-              <a:t>One person, nights &amp; weekends — from idea to working platform</a:t>
+              <a:t>Directed, reviewed &amp; verified by an engineer — AI did the typing, on personal time</a:t>
             </a:r>
           </a:p>
         </p:txBody>

--- a/BrainSpark_Director_Presentation.pptx
+++ b/BrainSpark_Director_Presentation.pptx
@@ -802,7 +802,7 @@
           <a:lstStyle/>
           <a:p>
             <a:r>
-              <a:t>Two capabilities that make it a platform rather than a gadget. On the left, the marketplace is an institutional memory — over sixteen hundred verified ideas an engineer can pull from instead of starting blank, each already carrying an engine-checked cost. It now polices itself too: a coverage map shows where our thinking is thin, duplicate submissions get caught at the door, and ideas cluster into browsable themes. On the right, the analytics turn ideas into decisions: confidence bands so we're honest about uncertainty, an ROI calculator for the business case, and a savings pipeline with proper stage-gate scorecards — promoting an idea past an unfinished checklist warns you exactly what was skipped. Plus a patent check that cites real patent records, clearly labelled, with the standing caveat that it's awareness, not legal advice. That pipeline view is what a Director uses to see realised value.</a:t>
+              <a:t>Two capabilities that make it a platform rather than a gadget. On the left, the marketplace is an institutional memory — over sixteen hundred ideas an engineer can pull from instead of starting blank, each carrying an engine-checked cost. And note the honesty detail: every idea is labelled by origin — Curated means it came from benchmark and teardown curation, Community means one of us submitted it and it passed review. We never dress seeded content up as community wisdom; that's the same no-faking rule the cost figures follow. The library polices itself too: a coverage map shows where our thinking is thin, duplicate submissions get caught at the door, and ideas cluster into browsable themes. On the right, analytics turn ideas into decisions: confidence bands, an ROI calculator, and a savings pipeline with stage-gate scorecards — promoting an idea past an unfinished checklist warns you exactly what was skipped. Plus a patent check that cites real patent records, with the standing caveat that it's awareness, not legal advice.</a:t>
             </a:r>
           </a:p>
         </p:txBody>
@@ -1082,7 +1082,7 @@
           <a:lstStyle/>
           <a:p>
             <a:r>
-              <a:t>This slide is about the effort and the standard — and be upfront about how it was built, because it's the strongest part of the story: I built this with AI-assisted development. I set the direction, made the engineering decisions, reviewed and tested everything; AI did the heavy lifting on the code. In other words, I used exactly the human-plus-AI way of working this tool offers our engineers — and this is what one engineer can produce with it on personal time, evenings and weekends. Then walk the numbers: over forty-two thousand lines of production code, and note the unusual part — five and a half thousand lines of curated engineering knowledge, the levers and benchmarks that make ideas automotive-grade rather than generic. Land on the test ratio: one line of test for every six and a half of product. Every engine is unit-tested, accuracy is proven on parts the model never saw, and even changes to the AI itself get A/B-measured before they ship. The message for the Director: AI accelerated the build, but engineering discipline governed it — the same bargain the tool offers the whole team.</a:t>
+              <a:t>This slide is about the effort and the standard — and be upfront about how it was built, because it's the strongest part of the story: I built this with AI-assisted development. I set the direction, made the engineering decisions, reviewed and tested everything; AI did the heavy lifting on the code. In other words, I used exactly the human-plus-AI way of working this tool offers our engineers — and this is what one engineer can produce with it on personal time. Walk the numbers: over forty-two thousand lines of production code, including five and a half thousand lines of curated engineering knowledge — the levers and benchmarks that make ideas automotive-grade rather than generic. Then land on the discipline column: two hundred and eighty-five tests on every change, accuracy proven on held-out parts, AI changes A/B-measured with a debt report that flags anything still unmeasured, and it's run like a product — daily automatic backups, a written decision log, and an honest register of what's NOT production-ready yet. That last point is worth saying out loud: I keep a list of the gaps — monitoring, deployment, spend tracking — because knowing your limits is part of the engineering. AI accelerated the build; discipline governed it.</a:t>
             </a:r>
           </a:p>
         </p:txBody>
@@ -12635,7 +12635,7 @@
                 </a:solidFill>
                 <a:latin typeface="Segoe UI"/>
               </a:rPr>
-              <a:t>1,600+ OEM-benchmarked, verified cost ideas</a:t>
+              <a:t>1,600+ ideas — each labelled Curated (benchmark-sourced) or Community (user-submitted)</a:t>
             </a:r>
           </a:p>
         </p:txBody>
@@ -21738,8 +21738,8 @@
         </p:nvSpPr>
         <p:spPr>
           <a:xfrm>
-            <a:off x="548640" y="3200400"/>
-            <a:ext cx="6217920" cy="2834640"/>
+            <a:off x="548640" y="3127248"/>
+            <a:ext cx="6217920" cy="2971800"/>
           </a:xfrm>
           <a:prstGeom prst="roundRect">
             <a:avLst/>
@@ -21784,7 +21784,7 @@
         </p:nvSpPr>
         <p:spPr>
           <a:xfrm>
-            <a:off x="822960" y="3337560"/>
+            <a:off x="822960" y="3255264"/>
             <a:ext cx="5669280" cy="320040"/>
           </a:xfrm>
           <a:prstGeom prst="rect">
@@ -21823,7 +21823,7 @@
         </p:nvSpPr>
         <p:spPr>
           <a:xfrm>
-            <a:off x="822960" y="3730751"/>
+            <a:off x="822960" y="3639312"/>
             <a:ext cx="5577840" cy="274320"/>
           </a:xfrm>
           <a:prstGeom prst="rect">
@@ -21862,7 +21862,7 @@
         </p:nvSpPr>
         <p:spPr>
           <a:xfrm>
-            <a:off x="822960" y="3950207"/>
+            <a:off x="822960" y="3858768"/>
             <a:ext cx="3703320" cy="146304"/>
           </a:xfrm>
           <a:prstGeom prst="roundRect">
@@ -21906,7 +21906,7 @@
         </p:nvSpPr>
         <p:spPr>
           <a:xfrm>
-            <a:off x="4617720" y="3867911"/>
+            <a:off x="4617720" y="3776472"/>
             <a:ext cx="1097280" cy="274320"/>
           </a:xfrm>
           <a:prstGeom prst="rect">
@@ -21945,7 +21945,7 @@
         </p:nvSpPr>
         <p:spPr>
           <a:xfrm>
-            <a:off x="822960" y="4160519"/>
+            <a:off x="822960" y="4069080"/>
             <a:ext cx="5577840" cy="274320"/>
           </a:xfrm>
           <a:prstGeom prst="rect">
@@ -21984,7 +21984,7 @@
         </p:nvSpPr>
         <p:spPr>
           <a:xfrm>
-            <a:off x="822960" y="4379975"/>
+            <a:off x="822960" y="4288536"/>
             <a:ext cx="2051348" cy="146304"/>
           </a:xfrm>
           <a:prstGeom prst="roundRect">
@@ -22028,7 +22028,7 @@
         </p:nvSpPr>
         <p:spPr>
           <a:xfrm>
-            <a:off x="2965748" y="4297679"/>
+            <a:off x="2965748" y="4206240"/>
             <a:ext cx="1097280" cy="274320"/>
           </a:xfrm>
           <a:prstGeom prst="rect">
@@ -22067,7 +22067,7 @@
         </p:nvSpPr>
         <p:spPr>
           <a:xfrm>
-            <a:off x="822960" y="4590287"/>
+            <a:off x="822960" y="4498848"/>
             <a:ext cx="5577840" cy="274320"/>
           </a:xfrm>
           <a:prstGeom prst="rect">
@@ -22106,7 +22106,7 @@
         </p:nvSpPr>
         <p:spPr>
           <a:xfrm>
-            <a:off x="822960" y="4809743"/>
+            <a:off x="822960" y="4718304"/>
             <a:ext cx="998444" cy="146304"/>
           </a:xfrm>
           <a:prstGeom prst="roundRect">
@@ -22150,7 +22150,7 @@
         </p:nvSpPr>
         <p:spPr>
           <a:xfrm>
-            <a:off x="1912844" y="4727447"/>
+            <a:off x="1912844" y="4636008"/>
             <a:ext cx="1097280" cy="274320"/>
           </a:xfrm>
           <a:prstGeom prst="rect">
@@ -22189,7 +22189,7 @@
         </p:nvSpPr>
         <p:spPr>
           <a:xfrm>
-            <a:off x="822960" y="5020055"/>
+            <a:off x="822960" y="4928616"/>
             <a:ext cx="5577840" cy="274320"/>
           </a:xfrm>
           <a:prstGeom prst="rect">
@@ -22228,7 +22228,7 @@
         </p:nvSpPr>
         <p:spPr>
           <a:xfrm>
-            <a:off x="822960" y="5239511"/>
+            <a:off x="822960" y="5148072"/>
             <a:ext cx="544605" cy="146304"/>
           </a:xfrm>
           <a:prstGeom prst="roundRect">
@@ -22272,7 +22272,7 @@
         </p:nvSpPr>
         <p:spPr>
           <a:xfrm>
-            <a:off x="1459005" y="5157215"/>
+            <a:off x="1459005" y="5065776"/>
             <a:ext cx="1097280" cy="274320"/>
           </a:xfrm>
           <a:prstGeom prst="rect">
@@ -22311,7 +22311,7 @@
         </p:nvSpPr>
         <p:spPr>
           <a:xfrm>
-            <a:off x="822960" y="5449823"/>
+            <a:off x="822960" y="5358384"/>
             <a:ext cx="5577840" cy="274320"/>
           </a:xfrm>
           <a:prstGeom prst="rect">
@@ -22350,7 +22350,7 @@
         </p:nvSpPr>
         <p:spPr>
           <a:xfrm>
-            <a:off x="822960" y="5669279"/>
+            <a:off x="822960" y="5577840"/>
             <a:ext cx="326763" cy="146304"/>
           </a:xfrm>
           <a:prstGeom prst="roundRect">
@@ -22394,7 +22394,7 @@
         </p:nvSpPr>
         <p:spPr>
           <a:xfrm>
-            <a:off x="1241163" y="5586983"/>
+            <a:off x="1241163" y="5495544"/>
             <a:ext cx="1097280" cy="274320"/>
           </a:xfrm>
           <a:prstGeom prst="rect">
@@ -22433,8 +22433,8 @@
         </p:nvSpPr>
         <p:spPr>
           <a:xfrm>
-            <a:off x="6995160" y="3200400"/>
-            <a:ext cx="4645152" cy="2834640"/>
+            <a:off x="6995160" y="3127248"/>
+            <a:ext cx="4645152" cy="2971800"/>
           </a:xfrm>
           <a:prstGeom prst="roundRect">
             <a:avLst/>
@@ -22479,7 +22479,7 @@
         </p:nvSpPr>
         <p:spPr>
           <a:xfrm>
-            <a:off x="7269480" y="3337560"/>
+            <a:off x="7269480" y="3255264"/>
             <a:ext cx="4114800" cy="320040"/>
           </a:xfrm>
           <a:prstGeom prst="rect">
@@ -22518,8 +22518,8 @@
         </p:nvSpPr>
         <p:spPr>
           <a:xfrm>
-            <a:off x="7269480" y="3730752"/>
-            <a:ext cx="310896" cy="310896"/>
+            <a:off x="7269480" y="3621024"/>
+            <a:ext cx="292608" cy="292608"/>
           </a:xfrm>
           <a:prstGeom prst="roundRect">
             <a:avLst/>
@@ -22562,8 +22562,8 @@
         </p:nvSpPr>
         <p:spPr>
           <a:xfrm>
-            <a:off x="7269480" y="3730752"/>
-            <a:ext cx="310896" cy="310896"/>
+            <a:off x="7269480" y="3621024"/>
+            <a:ext cx="292608" cy="292608"/>
           </a:xfrm>
           <a:prstGeom prst="rect">
             <a:avLst/>
@@ -22601,8 +22601,8 @@
         </p:nvSpPr>
         <p:spPr>
           <a:xfrm>
-            <a:off x="7726679" y="3712464"/>
-            <a:ext cx="3749039" cy="548640"/>
+            <a:off x="7699248" y="3602736"/>
+            <a:ext cx="3794760" cy="502920"/>
           </a:xfrm>
           <a:prstGeom prst="rect">
             <a:avLst/>
@@ -22617,17 +22617,17 @@
           <a:p>
             <a:pPr algn="l">
               <a:lnSpc>
-                <a:spcPct val="103000"/>
-              </a:lnSpc>
-            </a:pPr>
-            <a:r>
-              <a:rPr sz="1050" b="0" i="0">
+                <a:spcPct val="102000"/>
+              </a:lnSpc>
+            </a:pPr>
+            <a:r>
+              <a:rPr sz="1000" b="0" i="0">
                 <a:solidFill>
                   <a:srgbClr val="374558"/>
                 </a:solidFill>
                 <a:latin typeface="Segoe UI"/>
               </a:rPr>
-              <a:t>Every cost engine ships with unit tests — 283 run on every change</a:t>
+              <a:t>Every cost engine ships with unit tests — 285 run on every change</a:t>
             </a:r>
           </a:p>
         </p:txBody>
@@ -22640,8 +22640,8 @@
         </p:nvSpPr>
         <p:spPr>
           <a:xfrm>
-            <a:off x="7269480" y="4297680"/>
-            <a:ext cx="310896" cy="310896"/>
+            <a:off x="7269480" y="4119372"/>
+            <a:ext cx="292608" cy="292608"/>
           </a:xfrm>
           <a:prstGeom prst="roundRect">
             <a:avLst/>
@@ -22684,8 +22684,8 @@
         </p:nvSpPr>
         <p:spPr>
           <a:xfrm>
-            <a:off x="7269480" y="4297680"/>
-            <a:ext cx="310896" cy="310896"/>
+            <a:off x="7269480" y="4119372"/>
+            <a:ext cx="292608" cy="292608"/>
           </a:xfrm>
           <a:prstGeom prst="rect">
             <a:avLst/>
@@ -22723,8 +22723,8 @@
         </p:nvSpPr>
         <p:spPr>
           <a:xfrm>
-            <a:off x="7726679" y="4279392"/>
-            <a:ext cx="3749039" cy="548640"/>
+            <a:off x="7699248" y="4101084"/>
+            <a:ext cx="3794760" cy="502920"/>
           </a:xfrm>
           <a:prstGeom prst="rect">
             <a:avLst/>
@@ -22739,11 +22739,11 @@
           <a:p>
             <a:pPr algn="l">
               <a:lnSpc>
-                <a:spcPct val="103000"/>
-              </a:lnSpc>
-            </a:pPr>
-            <a:r>
-              <a:rPr sz="1050" b="0" i="0">
+                <a:spcPct val="102000"/>
+              </a:lnSpc>
+            </a:pPr>
+            <a:r>
+              <a:rPr sz="1000" b="0" i="0">
                 <a:solidFill>
                   <a:srgbClr val="374558"/>
                 </a:solidFill>
@@ -22762,8 +22762,8 @@
         </p:nvSpPr>
         <p:spPr>
           <a:xfrm>
-            <a:off x="7269480" y="4864608"/>
-            <a:ext cx="310896" cy="310896"/>
+            <a:off x="7269480" y="4617720"/>
+            <a:ext cx="292608" cy="292608"/>
           </a:xfrm>
           <a:prstGeom prst="roundRect">
             <a:avLst/>
@@ -22806,8 +22806,8 @@
         </p:nvSpPr>
         <p:spPr>
           <a:xfrm>
-            <a:off x="7269480" y="4864608"/>
-            <a:ext cx="310896" cy="310896"/>
+            <a:off x="7269480" y="4617720"/>
+            <a:ext cx="292608" cy="292608"/>
           </a:xfrm>
           <a:prstGeom prst="rect">
             <a:avLst/>
@@ -22845,8 +22845,8 @@
         </p:nvSpPr>
         <p:spPr>
           <a:xfrm>
-            <a:off x="7726679" y="4846320"/>
-            <a:ext cx="3749039" cy="548640"/>
+            <a:off x="7699248" y="4599432"/>
+            <a:ext cx="3794760" cy="502920"/>
           </a:xfrm>
           <a:prstGeom prst="rect">
             <a:avLst/>
@@ -22861,17 +22861,17 @@
           <a:p>
             <a:pPr algn="l">
               <a:lnSpc>
-                <a:spcPct val="103000"/>
-              </a:lnSpc>
-            </a:pPr>
-            <a:r>
-              <a:rPr sz="1050" b="0" i="0">
+                <a:spcPct val="102000"/>
+              </a:lnSpc>
+            </a:pPr>
+            <a:r>
+              <a:rPr sz="1000" b="0" i="0">
                 <a:solidFill>
                   <a:srgbClr val="374558"/>
                 </a:solidFill>
                 <a:latin typeface="Segoe UI"/>
               </a:rPr>
-              <a:t>Even AI changes are A/B-measured by a benchmark harness</a:t>
+              <a:t>AI changes are A/B-measured; a debt report flags unmeasured claims</a:t>
             </a:r>
           </a:p>
         </p:txBody>
@@ -22884,8 +22884,8 @@
         </p:nvSpPr>
         <p:spPr>
           <a:xfrm>
-            <a:off x="7269480" y="5431536"/>
-            <a:ext cx="310896" cy="310896"/>
+            <a:off x="7269480" y="5116068"/>
+            <a:ext cx="292608" cy="292608"/>
           </a:xfrm>
           <a:prstGeom prst="roundRect">
             <a:avLst/>
@@ -22928,8 +22928,8 @@
         </p:nvSpPr>
         <p:spPr>
           <a:xfrm>
-            <a:off x="7269480" y="5431536"/>
-            <a:ext cx="310896" cy="310896"/>
+            <a:off x="7269480" y="5116068"/>
+            <a:ext cx="292608" cy="292608"/>
           </a:xfrm>
           <a:prstGeom prst="rect">
             <a:avLst/>
@@ -22967,8 +22967,8 @@
         </p:nvSpPr>
         <p:spPr>
           <a:xfrm>
-            <a:off x="7726679" y="5413248"/>
-            <a:ext cx="3749039" cy="548640"/>
+            <a:off x="7699248" y="5097780"/>
+            <a:ext cx="3794760" cy="502920"/>
           </a:xfrm>
           <a:prstGeom prst="rect">
             <a:avLst/>
@@ -22983,17 +22983,139 @@
           <a:p>
             <a:pPr algn="l">
               <a:lnSpc>
-                <a:spcPct val="103000"/>
-              </a:lnSpc>
-            </a:pPr>
-            <a:r>
-              <a:rPr sz="1050" b="0" i="0">
+                <a:spcPct val="102000"/>
+              </a:lnSpc>
+            </a:pPr>
+            <a:r>
+              <a:rPr sz="1000" b="0" i="0">
                 <a:solidFill>
                   <a:srgbClr val="374558"/>
                 </a:solidFill>
                 <a:latin typeface="Segoe UI"/>
               </a:rPr>
-              <a:t>Directed, reviewed &amp; verified by an engineer — AI did the typing, on personal time</a:t>
+              <a:t>Daily automatic backups, a decision log &amp; an honest known-gaps register</a:t>
+            </a:r>
+          </a:p>
+        </p:txBody>
+      </p:sp>
+      <p:sp>
+        <p:nvSpPr>
+          <p:cNvPr id="55" name="Rounded Rectangle 54"/>
+          <p:cNvSpPr/>
+          <p:nvPr/>
+        </p:nvSpPr>
+        <p:spPr>
+          <a:xfrm>
+            <a:off x="7269480" y="5614416"/>
+            <a:ext cx="292608" cy="292608"/>
+          </a:xfrm>
+          <a:prstGeom prst="roundRect">
+            <a:avLst/>
+          </a:prstGeom>
+          <a:solidFill>
+            <a:srgbClr val="059669"/>
+          </a:solidFill>
+          <a:ln>
+            <a:noFill/>
+          </a:ln>
+          <a:effectLst/>
+        </p:spPr>
+        <p:style>
+          <a:lnRef idx="1">
+            <a:schemeClr val="accent1"/>
+          </a:lnRef>
+          <a:fillRef idx="3">
+            <a:schemeClr val="accent1"/>
+          </a:fillRef>
+          <a:effectRef idx="2">
+            <a:schemeClr val="accent1"/>
+          </a:effectRef>
+          <a:fontRef idx="minor">
+            <a:schemeClr val="lt1"/>
+          </a:fontRef>
+        </p:style>
+        <p:txBody>
+          <a:bodyPr rtlCol="0" anchor="ctr"/>
+          <a:lstStyle/>
+          <a:p>
+            <a:pPr algn="ctr"/>
+          </a:p>
+        </p:txBody>
+      </p:sp>
+      <p:sp>
+        <p:nvSpPr>
+          <p:cNvPr id="56" name="TextBox 55"/>
+          <p:cNvSpPr txBox="1"/>
+          <p:nvPr/>
+        </p:nvSpPr>
+        <p:spPr>
+          <a:xfrm>
+            <a:off x="7269480" y="5614416"/>
+            <a:ext cx="292608" cy="292608"/>
+          </a:xfrm>
+          <a:prstGeom prst="rect">
+            <a:avLst/>
+          </a:prstGeom>
+          <a:noFill/>
+        </p:spPr>
+        <p:txBody>
+          <a:bodyPr wrap="square" anchor="ctr" lIns="0" rIns="0" tIns="0" bIns="0">
+            <a:spAutoFit/>
+          </a:bodyPr>
+          <a:lstStyle/>
+          <a:p>
+            <a:pPr algn="ctr">
+              <a:lnSpc>
+                <a:spcPct val="100000"/>
+              </a:lnSpc>
+            </a:pPr>
+            <a:r>
+              <a:rPr sz="1800" b="1" i="0">
+                <a:solidFill>
+                  <a:srgbClr val="FFFFFF"/>
+                </a:solidFill>
+                <a:latin typeface="Arial"/>
+              </a:rPr>
+              <a:t>✓</a:t>
+            </a:r>
+          </a:p>
+        </p:txBody>
+      </p:sp>
+      <p:sp>
+        <p:nvSpPr>
+          <p:cNvPr id="57" name="TextBox 56"/>
+          <p:cNvSpPr txBox="1"/>
+          <p:nvPr/>
+        </p:nvSpPr>
+        <p:spPr>
+          <a:xfrm>
+            <a:off x="7699248" y="5596128"/>
+            <a:ext cx="3794760" cy="502920"/>
+          </a:xfrm>
+          <a:prstGeom prst="rect">
+            <a:avLst/>
+          </a:prstGeom>
+          <a:noFill/>
+        </p:spPr>
+        <p:txBody>
+          <a:bodyPr wrap="square" anchor="t" lIns="0" rIns="0" tIns="0" bIns="0">
+            <a:spAutoFit/>
+          </a:bodyPr>
+          <a:lstStyle/>
+          <a:p>
+            <a:pPr algn="l">
+              <a:lnSpc>
+                <a:spcPct val="102000"/>
+              </a:lnSpc>
+            </a:pPr>
+            <a:r>
+              <a:rPr sz="1000" b="0" i="0">
+                <a:solidFill>
+                  <a:srgbClr val="374558"/>
+                </a:solidFill>
+                <a:latin typeface="Segoe UI"/>
+              </a:rPr>
+              <a:t>Directed, reviewed &amp; verified by an engineer — AI did the typing</a:t>
             </a:r>
           </a:p>
         </p:txBody>

--- a/BrainSpark_Director_Presentation.pptx
+++ b/BrainSpark_Director_Presentation.pptx
@@ -5024,25 +5024,50 @@
           </a:p>
         </p:txBody>
       </p:sp>
-      <p:sp>
-        <p:nvSpPr>
-          <p:cNvPr id="4" name="Oval 3"/>
+      <p:pic>
+        <p:nvPicPr>
+          <p:cNvPr id="4" name="Picture 3" descr="deck-hero.png"/>
+          <p:cNvPicPr>
+            <a:picLocks noChangeAspect="1"/>
+          </p:cNvPicPr>
+          <p:nvPr/>
+        </p:nvPicPr>
+        <p:blipFill>
+          <a:blip r:embed="rId2"/>
+          <a:srcRect t="11412" b="5370"/>
+          <a:stretch>
+            <a:fillRect/>
+          </a:stretch>
+        </p:blipFill>
+        <p:spPr>
+          <a:xfrm>
+            <a:off x="8183879" y="1234440"/>
+            <a:ext cx="3611880" cy="4251960"/>
+          </a:xfrm>
+          <a:prstGeom prst="rect">
+            <a:avLst/>
+          </a:prstGeom>
+        </p:spPr>
+      </p:pic>
+      <p:sp>
+        <p:nvSpPr>
+          <p:cNvPr id="5" name="Rectangle 4"/>
           <p:cNvSpPr/>
           <p:nvPr/>
         </p:nvSpPr>
         <p:spPr>
           <a:xfrm>
-            <a:off x="8961120" y="-1097280"/>
-            <a:ext cx="4572000" cy="4572000"/>
-          </a:xfrm>
-          <a:prstGeom prst="ellipse">
-            <a:avLst/>
-          </a:prstGeom>
-          <a:solidFill>
-            <a:srgbClr val="FFFFFF"/>
-          </a:solidFill>
-          <a:ln>
-            <a:noFill/>
+            <a:off x="8183879" y="1234440"/>
+            <a:ext cx="3611880" cy="4251960"/>
+          </a:xfrm>
+          <a:prstGeom prst="rect">
+            <a:avLst/>
+          </a:prstGeom>
+          <a:noFill/>
+          <a:ln w="12700">
+            <a:solidFill>
+              <a:srgbClr val="D8E0EA"/>
+            </a:solidFill>
           </a:ln>
           <a:effectLst/>
         </p:spPr>
@@ -5070,50 +5095,6 @@
       </p:sp>
       <p:sp>
         <p:nvSpPr>
-          <p:cNvPr id="5" name="Oval 4"/>
-          <p:cNvSpPr/>
-          <p:nvPr/>
-        </p:nvSpPr>
-        <p:spPr>
-          <a:xfrm>
-            <a:off x="10241280" y="4023360"/>
-            <a:ext cx="3657600" cy="3657600"/>
-          </a:xfrm>
-          <a:prstGeom prst="ellipse">
-            <a:avLst/>
-          </a:prstGeom>
-          <a:solidFill>
-            <a:srgbClr val="FFFFFF"/>
-          </a:solidFill>
-          <a:ln>
-            <a:noFill/>
-          </a:ln>
-          <a:effectLst/>
-        </p:spPr>
-        <p:style>
-          <a:lnRef idx="1">
-            <a:schemeClr val="accent1"/>
-          </a:lnRef>
-          <a:fillRef idx="3">
-            <a:schemeClr val="accent1"/>
-          </a:fillRef>
-          <a:effectRef idx="2">
-            <a:schemeClr val="accent1"/>
-          </a:effectRef>
-          <a:fontRef idx="minor">
-            <a:schemeClr val="lt1"/>
-          </a:fontRef>
-        </p:style>
-        <p:txBody>
-          <a:bodyPr rtlCol="0" anchor="ctr"/>
-          <a:lstStyle/>
-          <a:p>
-            <a:pPr algn="ctr"/>
-          </a:p>
-        </p:txBody>
-      </p:sp>
-      <p:sp>
-        <p:nvSpPr>
           <p:cNvPr id="6" name="TextBox 5"/>
           <p:cNvSpPr txBox="1"/>
           <p:nvPr/>
@@ -5121,7 +5102,7 @@
         <p:spPr>
           <a:xfrm>
             <a:off x="1005840" y="1371600"/>
-            <a:ext cx="8229600" cy="457200"/>
+            <a:ext cx="6949440" cy="457200"/>
           </a:xfrm>
           <a:prstGeom prst="rect">
             <a:avLst/>
@@ -5160,7 +5141,7 @@
         <p:spPr>
           <a:xfrm>
             <a:off x="960120" y="1965960"/>
-            <a:ext cx="9601200" cy="1463040"/>
+            <a:ext cx="7040880" cy="1463040"/>
           </a:xfrm>
           <a:prstGeom prst="rect">
             <a:avLst/>
@@ -5208,7 +5189,7 @@
         <p:spPr>
           <a:xfrm>
             <a:off x="1005840" y="3200400"/>
-            <a:ext cx="9692640" cy="914400"/>
+            <a:ext cx="6949440" cy="914400"/>
           </a:xfrm>
           <a:prstGeom prst="rect">
             <a:avLst/>
@@ -5227,7 +5208,7 @@
               </a:lnSpc>
             </a:pPr>
             <a:r>
-              <a:rPr sz="2000" b="0" i="0">
+              <a:rPr sz="1900" b="0" i="0">
                 <a:solidFill>
                   <a:srgbClr val="374558"/>
                 </a:solidFill>
@@ -5248,7 +5229,7 @@
         <p:spPr>
           <a:xfrm>
             <a:off x="1005840" y="4709160"/>
-            <a:ext cx="2331720" cy="960120"/>
+            <a:ext cx="1673352" cy="960120"/>
           </a:xfrm>
           <a:prstGeom prst="roundRect">
             <a:avLst/>
@@ -5293,8 +5274,8 @@
         </p:nvSpPr>
         <p:spPr>
           <a:xfrm>
-            <a:off x="1005840" y="4828032"/>
-            <a:ext cx="2331720" cy="457200"/>
+            <a:off x="1005840" y="4846320"/>
+            <a:ext cx="1673352" cy="411480"/>
           </a:xfrm>
           <a:prstGeom prst="rect">
             <a:avLst/>
@@ -5313,7 +5294,7 @@
               </a:lnSpc>
             </a:pPr>
             <a:r>
-              <a:rPr sz="2600" b="1" i="0">
+              <a:rPr sz="2000" b="1" i="0">
                 <a:solidFill>
                   <a:srgbClr val="B47609"/>
                 </a:solidFill>
@@ -5332,8 +5313,8 @@
         </p:nvSpPr>
         <p:spPr>
           <a:xfrm>
-            <a:off x="1005840" y="5321808"/>
-            <a:ext cx="2331720" cy="320040"/>
+            <a:off x="1005840" y="5303520"/>
+            <a:ext cx="1673352" cy="320040"/>
           </a:xfrm>
           <a:prstGeom prst="rect">
             <a:avLst/>
@@ -5352,7 +5333,7 @@
               </a:lnSpc>
             </a:pPr>
             <a:r>
-              <a:rPr sz="1100" b="0" i="0">
+              <a:rPr sz="950" b="0" i="0">
                 <a:solidFill>
                   <a:srgbClr val="556477"/>
                 </a:solidFill>
@@ -5371,8 +5352,8 @@
         </p:nvSpPr>
         <p:spPr>
           <a:xfrm>
-            <a:off x="3520440" y="4709160"/>
-            <a:ext cx="2331720" cy="960120"/>
+            <a:off x="2788920" y="4709160"/>
+            <a:ext cx="1673352" cy="960120"/>
           </a:xfrm>
           <a:prstGeom prst="roundRect">
             <a:avLst/>
@@ -5417,8 +5398,8 @@
         </p:nvSpPr>
         <p:spPr>
           <a:xfrm>
-            <a:off x="3520440" y="4828032"/>
-            <a:ext cx="2331720" cy="457200"/>
+            <a:off x="2788920" y="4846320"/>
+            <a:ext cx="1673352" cy="411480"/>
           </a:xfrm>
           <a:prstGeom prst="rect">
             <a:avLst/>
@@ -5437,7 +5418,7 @@
               </a:lnSpc>
             </a:pPr>
             <a:r>
-              <a:rPr sz="2600" b="1" i="0">
+              <a:rPr sz="2000" b="1" i="0">
                 <a:solidFill>
                   <a:srgbClr val="B47609"/>
                 </a:solidFill>
@@ -5456,8 +5437,8 @@
         </p:nvSpPr>
         <p:spPr>
           <a:xfrm>
-            <a:off x="3520440" y="5321808"/>
-            <a:ext cx="2331720" cy="320040"/>
+            <a:off x="2788920" y="5303520"/>
+            <a:ext cx="1673352" cy="320040"/>
           </a:xfrm>
           <a:prstGeom prst="rect">
             <a:avLst/>
@@ -5476,7 +5457,7 @@
               </a:lnSpc>
             </a:pPr>
             <a:r>
-              <a:rPr sz="1100" b="0" i="0">
+              <a:rPr sz="950" b="0" i="0">
                 <a:solidFill>
                   <a:srgbClr val="556477"/>
                 </a:solidFill>
@@ -5495,8 +5476,8 @@
         </p:nvSpPr>
         <p:spPr>
           <a:xfrm>
-            <a:off x="6035040" y="4709160"/>
-            <a:ext cx="2331720" cy="960120"/>
+            <a:off x="4572000" y="4709160"/>
+            <a:ext cx="1673352" cy="960120"/>
           </a:xfrm>
           <a:prstGeom prst="roundRect">
             <a:avLst/>
@@ -5541,8 +5522,8 @@
         </p:nvSpPr>
         <p:spPr>
           <a:xfrm>
-            <a:off x="6035040" y="4828032"/>
-            <a:ext cx="2331720" cy="457200"/>
+            <a:off x="4572000" y="4846320"/>
+            <a:ext cx="1673352" cy="411480"/>
           </a:xfrm>
           <a:prstGeom prst="rect">
             <a:avLst/>
@@ -5561,7 +5542,7 @@
               </a:lnSpc>
             </a:pPr>
             <a:r>
-              <a:rPr sz="2600" b="1" i="0">
+              <a:rPr sz="2000" b="1" i="0">
                 <a:solidFill>
                   <a:srgbClr val="B47609"/>
                 </a:solidFill>
@@ -5580,8 +5561,8 @@
         </p:nvSpPr>
         <p:spPr>
           <a:xfrm>
-            <a:off x="6035040" y="5321808"/>
-            <a:ext cx="2331720" cy="320040"/>
+            <a:off x="4572000" y="5303520"/>
+            <a:ext cx="1673352" cy="320040"/>
           </a:xfrm>
           <a:prstGeom prst="rect">
             <a:avLst/>
@@ -5600,7 +5581,7 @@
               </a:lnSpc>
             </a:pPr>
             <a:r>
-              <a:rPr sz="1100" b="0" i="0">
+              <a:rPr sz="950" b="0" i="0">
                 <a:solidFill>
                   <a:srgbClr val="556477"/>
                 </a:solidFill>
@@ -5619,8 +5600,8 @@
         </p:nvSpPr>
         <p:spPr>
           <a:xfrm>
-            <a:off x="8549640" y="4709160"/>
-            <a:ext cx="2331720" cy="960120"/>
+            <a:off x="6355080" y="4709160"/>
+            <a:ext cx="1673352" cy="960120"/>
           </a:xfrm>
           <a:prstGeom prst="roundRect">
             <a:avLst/>
@@ -5665,8 +5646,8 @@
         </p:nvSpPr>
         <p:spPr>
           <a:xfrm>
-            <a:off x="8549640" y="4828032"/>
-            <a:ext cx="2331720" cy="457200"/>
+            <a:off x="6355080" y="4846320"/>
+            <a:ext cx="1673352" cy="411480"/>
           </a:xfrm>
           <a:prstGeom prst="rect">
             <a:avLst/>
@@ -5685,7 +5666,7 @@
               </a:lnSpc>
             </a:pPr>
             <a:r>
-              <a:rPr sz="2600" b="1" i="0">
+              <a:rPr sz="2000" b="1" i="0">
                 <a:solidFill>
                   <a:srgbClr val="B47609"/>
                 </a:solidFill>
@@ -5704,8 +5685,8 @@
         </p:nvSpPr>
         <p:spPr>
           <a:xfrm>
-            <a:off x="8549640" y="5321808"/>
-            <a:ext cx="2331720" cy="320040"/>
+            <a:off x="6355080" y="5303520"/>
+            <a:ext cx="1673352" cy="320040"/>
           </a:xfrm>
           <a:prstGeom prst="rect">
             <a:avLst/>
@@ -5724,7 +5705,7 @@
               </a:lnSpc>
             </a:pPr>
             <a:r>
-              <a:rPr sz="1100" b="0" i="0">
+              <a:rPr sz="950" b="0" i="0">
                 <a:solidFill>
                   <a:srgbClr val="556477"/>
                 </a:solidFill>
@@ -24672,25 +24653,50 @@
           </a:p>
         </p:txBody>
       </p:sp>
-      <p:sp>
-        <p:nvSpPr>
-          <p:cNvPr id="4" name="Oval 3"/>
+      <p:pic>
+        <p:nvPicPr>
+          <p:cNvPr id="4" name="Picture 3" descr="deck-demo.png"/>
+          <p:cNvPicPr>
+            <a:picLocks noChangeAspect="1"/>
+          </p:cNvPicPr>
+          <p:nvPr/>
+        </p:nvPicPr>
+        <p:blipFill>
+          <a:blip r:embed="rId2"/>
+          <a:srcRect t="1718" b="2804"/>
+          <a:stretch>
+            <a:fillRect/>
+          </a:stretch>
+        </p:blipFill>
+        <p:spPr>
+          <a:xfrm>
+            <a:off x="8183879" y="1188720"/>
+            <a:ext cx="3520440" cy="4754880"/>
+          </a:xfrm>
+          <a:prstGeom prst="rect">
+            <a:avLst/>
+          </a:prstGeom>
+        </p:spPr>
+      </p:pic>
+      <p:sp>
+        <p:nvSpPr>
+          <p:cNvPr id="5" name="Rectangle 4"/>
           <p:cNvSpPr/>
           <p:nvPr/>
         </p:nvSpPr>
         <p:spPr>
           <a:xfrm>
-            <a:off x="8686800" y="-914400"/>
-            <a:ext cx="5029200" cy="5029200"/>
-          </a:xfrm>
-          <a:prstGeom prst="ellipse">
-            <a:avLst/>
-          </a:prstGeom>
-          <a:solidFill>
-            <a:srgbClr val="FFFFFF"/>
-          </a:solidFill>
-          <a:ln>
-            <a:noFill/>
+            <a:off x="8183879" y="1188720"/>
+            <a:ext cx="3520440" cy="4754880"/>
+          </a:xfrm>
+          <a:prstGeom prst="rect">
+            <a:avLst/>
+          </a:prstGeom>
+          <a:noFill/>
+          <a:ln w="12700">
+            <a:solidFill>
+              <a:srgbClr val="D8E0EA"/>
+            </a:solidFill>
           </a:ln>
           <a:effectLst/>
         </p:spPr>
@@ -24718,14 +24724,14 @@
       </p:sp>
       <p:sp>
         <p:nvSpPr>
-          <p:cNvPr id="5" name="TextBox 4"/>
+          <p:cNvPr id="6" name="TextBox 5"/>
           <p:cNvSpPr txBox="1"/>
           <p:nvPr/>
         </p:nvSpPr>
         <p:spPr>
           <a:xfrm>
             <a:off x="1005840" y="1371600"/>
-            <a:ext cx="7315200" cy="457200"/>
+            <a:ext cx="6949440" cy="457200"/>
           </a:xfrm>
           <a:prstGeom prst="rect">
             <a:avLst/>
@@ -24757,14 +24763,14 @@
       </p:sp>
       <p:sp>
         <p:nvSpPr>
-          <p:cNvPr id="6" name="TextBox 5"/>
+          <p:cNvPr id="7" name="TextBox 6"/>
           <p:cNvSpPr txBox="1"/>
           <p:nvPr/>
         </p:nvSpPr>
         <p:spPr>
           <a:xfrm>
             <a:off x="960120" y="1920240"/>
-            <a:ext cx="8229600" cy="914400"/>
+            <a:ext cx="7040880" cy="914400"/>
           </a:xfrm>
           <a:prstGeom prst="rect">
             <a:avLst/>
@@ -24796,14 +24802,14 @@
       </p:sp>
       <p:sp>
         <p:nvSpPr>
-          <p:cNvPr id="7" name="TextBox 6"/>
+          <p:cNvPr id="8" name="TextBox 7"/>
           <p:cNvSpPr txBox="1"/>
           <p:nvPr/>
         </p:nvSpPr>
         <p:spPr>
           <a:xfrm>
             <a:off x="1005840" y="3017520"/>
-            <a:ext cx="9601200" cy="457200"/>
+            <a:ext cx="6949440" cy="457200"/>
           </a:xfrm>
           <a:prstGeom prst="rect">
             <a:avLst/>
@@ -24835,7 +24841,7 @@
       </p:sp>
       <p:sp>
         <p:nvSpPr>
-          <p:cNvPr id="8" name="Rounded Rectangle 7"/>
+          <p:cNvPr id="9" name="Rounded Rectangle 8"/>
           <p:cNvSpPr/>
           <p:nvPr/>
         </p:nvSpPr>
@@ -24879,7 +24885,7 @@
       </p:sp>
       <p:sp>
         <p:nvSpPr>
-          <p:cNvPr id="9" name="TextBox 8"/>
+          <p:cNvPr id="10" name="TextBox 9"/>
           <p:cNvSpPr txBox="1"/>
           <p:nvPr/>
         </p:nvSpPr>
@@ -24918,14 +24924,14 @@
       </p:sp>
       <p:sp>
         <p:nvSpPr>
-          <p:cNvPr id="10" name="TextBox 9"/>
+          <p:cNvPr id="11" name="TextBox 10"/>
           <p:cNvSpPr txBox="1"/>
           <p:nvPr/>
         </p:nvSpPr>
         <p:spPr>
           <a:xfrm>
             <a:off x="1645920" y="3630168"/>
-            <a:ext cx="8686800" cy="457200"/>
+            <a:ext cx="6309360" cy="457200"/>
           </a:xfrm>
           <a:prstGeom prst="rect">
             <a:avLst/>
@@ -24944,7 +24950,7 @@
               </a:lnSpc>
             </a:pPr>
             <a:r>
-              <a:rPr sz="1500" b="0" i="0">
+              <a:rPr sz="1450" b="0" i="0">
                 <a:solidFill>
                   <a:srgbClr val="16273C"/>
                 </a:solidFill>
@@ -24957,7 +24963,7 @@
       </p:sp>
       <p:sp>
         <p:nvSpPr>
-          <p:cNvPr id="11" name="Rounded Rectangle 10"/>
+          <p:cNvPr id="12" name="Rounded Rectangle 11"/>
           <p:cNvSpPr/>
           <p:nvPr/>
         </p:nvSpPr>
@@ -25001,7 +25007,7 @@
       </p:sp>
       <p:sp>
         <p:nvSpPr>
-          <p:cNvPr id="12" name="TextBox 11"/>
+          <p:cNvPr id="13" name="TextBox 12"/>
           <p:cNvSpPr txBox="1"/>
           <p:nvPr/>
         </p:nvSpPr>
@@ -25040,14 +25046,14 @@
       </p:sp>
       <p:sp>
         <p:nvSpPr>
-          <p:cNvPr id="13" name="TextBox 12"/>
+          <p:cNvPr id="14" name="TextBox 13"/>
           <p:cNvSpPr txBox="1"/>
           <p:nvPr/>
         </p:nvSpPr>
         <p:spPr>
           <a:xfrm>
             <a:off x="1645920" y="4197096"/>
-            <a:ext cx="8686800" cy="457200"/>
+            <a:ext cx="6309360" cy="457200"/>
           </a:xfrm>
           <a:prstGeom prst="rect">
             <a:avLst/>
@@ -25066,7 +25072,7 @@
               </a:lnSpc>
             </a:pPr>
             <a:r>
-              <a:rPr sz="1500" b="0" i="0">
+              <a:rPr sz="1450" b="0" i="0">
                 <a:solidFill>
                   <a:srgbClr val="16273C"/>
                 </a:solidFill>
@@ -25079,7 +25085,7 @@
       </p:sp>
       <p:sp>
         <p:nvSpPr>
-          <p:cNvPr id="14" name="Rounded Rectangle 13"/>
+          <p:cNvPr id="15" name="Rounded Rectangle 14"/>
           <p:cNvSpPr/>
           <p:nvPr/>
         </p:nvSpPr>
@@ -25123,7 +25129,7 @@
       </p:sp>
       <p:sp>
         <p:nvSpPr>
-          <p:cNvPr id="15" name="TextBox 14"/>
+          <p:cNvPr id="16" name="TextBox 15"/>
           <p:cNvSpPr txBox="1"/>
           <p:nvPr/>
         </p:nvSpPr>
@@ -25162,14 +25168,14 @@
       </p:sp>
       <p:sp>
         <p:nvSpPr>
-          <p:cNvPr id="16" name="TextBox 15"/>
+          <p:cNvPr id="17" name="TextBox 16"/>
           <p:cNvSpPr txBox="1"/>
           <p:nvPr/>
         </p:nvSpPr>
         <p:spPr>
           <a:xfrm>
             <a:off x="1645920" y="4764024"/>
-            <a:ext cx="8686800" cy="457200"/>
+            <a:ext cx="6309360" cy="457200"/>
           </a:xfrm>
           <a:prstGeom prst="rect">
             <a:avLst/>
@@ -25188,7 +25194,7 @@
               </a:lnSpc>
             </a:pPr>
             <a:r>
-              <a:rPr sz="1500" b="0" i="0">
+              <a:rPr sz="1450" b="0" i="0">
                 <a:solidFill>
                   <a:srgbClr val="16273C"/>
                 </a:solidFill>
@@ -25201,7 +25207,7 @@
       </p:sp>
       <p:sp>
         <p:nvSpPr>
-          <p:cNvPr id="17" name="Rounded Rectangle 16"/>
+          <p:cNvPr id="18" name="Rounded Rectangle 17"/>
           <p:cNvSpPr/>
           <p:nvPr/>
         </p:nvSpPr>
@@ -25245,7 +25251,7 @@
       </p:sp>
       <p:sp>
         <p:nvSpPr>
-          <p:cNvPr id="18" name="TextBox 17"/>
+          <p:cNvPr id="19" name="TextBox 18"/>
           <p:cNvSpPr txBox="1"/>
           <p:nvPr/>
         </p:nvSpPr>
@@ -25284,14 +25290,14 @@
       </p:sp>
       <p:sp>
         <p:nvSpPr>
-          <p:cNvPr id="19" name="TextBox 18"/>
+          <p:cNvPr id="20" name="TextBox 19"/>
           <p:cNvSpPr txBox="1"/>
           <p:nvPr/>
         </p:nvSpPr>
         <p:spPr>
           <a:xfrm>
             <a:off x="1645920" y="5330952"/>
-            <a:ext cx="8686800" cy="457200"/>
+            <a:ext cx="6309360" cy="457200"/>
           </a:xfrm>
           <a:prstGeom prst="rect">
             <a:avLst/>
@@ -25310,7 +25316,7 @@
               </a:lnSpc>
             </a:pPr>
             <a:r>
-              <a:rPr sz="1500" b="0" i="0">
+              <a:rPr sz="1450" b="0" i="0">
                 <a:solidFill>
                   <a:srgbClr val="16273C"/>
                 </a:solidFill>
@@ -25323,7 +25329,7 @@
       </p:sp>
       <p:sp>
         <p:nvSpPr>
-          <p:cNvPr id="20" name="Rounded Rectangle 19"/>
+          <p:cNvPr id="21" name="Rounded Rectangle 20"/>
           <p:cNvSpPr/>
           <p:nvPr/>
         </p:nvSpPr>
@@ -25367,7 +25373,7 @@
       </p:sp>
       <p:sp>
         <p:nvSpPr>
-          <p:cNvPr id="21" name="TextBox 20"/>
+          <p:cNvPr id="22" name="TextBox 21"/>
           <p:cNvSpPr txBox="1"/>
           <p:nvPr/>
         </p:nvSpPr>
@@ -25406,14 +25412,14 @@
       </p:sp>
       <p:sp>
         <p:nvSpPr>
-          <p:cNvPr id="22" name="TextBox 21"/>
+          <p:cNvPr id="23" name="TextBox 22"/>
           <p:cNvSpPr txBox="1"/>
           <p:nvPr/>
         </p:nvSpPr>
         <p:spPr>
           <a:xfrm>
             <a:off x="1645920" y="5897880"/>
-            <a:ext cx="8686800" cy="457200"/>
+            <a:ext cx="6309360" cy="457200"/>
           </a:xfrm>
           <a:prstGeom prst="rect">
             <a:avLst/>
@@ -25432,7 +25438,7 @@
               </a:lnSpc>
             </a:pPr>
             <a:r>
-              <a:rPr sz="1500" b="0" i="0">
+              <a:rPr sz="1450" b="0" i="0">
                 <a:solidFill>
                   <a:srgbClr val="16273C"/>
                 </a:solidFill>
@@ -29751,25 +29757,50 @@
           </a:p>
         </p:txBody>
       </p:sp>
-      <p:sp>
-        <p:nvSpPr>
-          <p:cNvPr id="4" name="Oval 3"/>
+      <p:pic>
+        <p:nvPicPr>
+          <p:cNvPr id="4" name="Picture 3" descr="deck-close.png"/>
+          <p:cNvPicPr>
+            <a:picLocks noChangeAspect="1"/>
+          </p:cNvPicPr>
+          <p:nvPr/>
+        </p:nvPicPr>
+        <p:blipFill>
+          <a:blip r:embed="rId2"/>
+          <a:srcRect t="12310" b="17000"/>
+          <a:stretch>
+            <a:fillRect/>
+          </a:stretch>
+        </p:blipFill>
+        <p:spPr>
+          <a:xfrm>
+            <a:off x="8549640" y="2651760"/>
+            <a:ext cx="3108960" cy="3108960"/>
+          </a:xfrm>
+          <a:prstGeom prst="rect">
+            <a:avLst/>
+          </a:prstGeom>
+        </p:spPr>
+      </p:pic>
+      <p:sp>
+        <p:nvSpPr>
+          <p:cNvPr id="5" name="Rectangle 4"/>
           <p:cNvSpPr/>
           <p:nvPr/>
         </p:nvSpPr>
         <p:spPr>
           <a:xfrm>
-            <a:off x="8961120" y="3200400"/>
-            <a:ext cx="4572000" cy="4572000"/>
-          </a:xfrm>
-          <a:prstGeom prst="ellipse">
-            <a:avLst/>
-          </a:prstGeom>
-          <a:solidFill>
-            <a:srgbClr val="FFFFFF"/>
-          </a:solidFill>
-          <a:ln>
-            <a:noFill/>
+            <a:off x="8549640" y="2651760"/>
+            <a:ext cx="3108960" cy="3108960"/>
+          </a:xfrm>
+          <a:prstGeom prst="rect">
+            <a:avLst/>
+          </a:prstGeom>
+          <a:noFill/>
+          <a:ln w="12700">
+            <a:solidFill>
+              <a:srgbClr val="D8E0EA"/>
+            </a:solidFill>
           </a:ln>
           <a:effectLst/>
         </p:spPr>
@@ -29797,7 +29828,7 @@
       </p:sp>
       <p:sp>
         <p:nvSpPr>
-          <p:cNvPr id="5" name="TextBox 4"/>
+          <p:cNvPr id="6" name="TextBox 5"/>
           <p:cNvSpPr txBox="1"/>
           <p:nvPr/>
         </p:nvSpPr>
@@ -29836,7 +29867,7 @@
       </p:sp>
       <p:sp>
         <p:nvSpPr>
-          <p:cNvPr id="6" name="TextBox 5"/>
+          <p:cNvPr id="7" name="TextBox 6"/>
           <p:cNvSpPr txBox="1"/>
           <p:nvPr/>
         </p:nvSpPr>
@@ -29875,7 +29906,7 @@
       </p:sp>
       <p:sp>
         <p:nvSpPr>
-          <p:cNvPr id="7" name="Rounded Rectangle 6"/>
+          <p:cNvPr id="8" name="Rounded Rectangle 7"/>
           <p:cNvSpPr/>
           <p:nvPr/>
         </p:nvSpPr>
@@ -29919,7 +29950,7 @@
       </p:sp>
       <p:sp>
         <p:nvSpPr>
-          <p:cNvPr id="8" name="TextBox 7"/>
+          <p:cNvPr id="9" name="TextBox 8"/>
           <p:cNvSpPr txBox="1"/>
           <p:nvPr/>
         </p:nvSpPr>
@@ -29958,14 +29989,14 @@
       </p:sp>
       <p:sp>
         <p:nvSpPr>
-          <p:cNvPr id="9" name="TextBox 8"/>
+          <p:cNvPr id="10" name="TextBox 9"/>
           <p:cNvSpPr txBox="1"/>
           <p:nvPr/>
         </p:nvSpPr>
         <p:spPr>
           <a:xfrm>
             <a:off x="1783080" y="2743200"/>
-            <a:ext cx="9144000" cy="411480"/>
+            <a:ext cx="6583680" cy="411480"/>
           </a:xfrm>
           <a:prstGeom prst="rect">
             <a:avLst/>
@@ -29997,14 +30028,14 @@
       </p:sp>
       <p:sp>
         <p:nvSpPr>
-          <p:cNvPr id="10" name="TextBox 9"/>
+          <p:cNvPr id="11" name="TextBox 10"/>
           <p:cNvSpPr txBox="1"/>
           <p:nvPr/>
         </p:nvSpPr>
         <p:spPr>
           <a:xfrm>
             <a:off x="1783080" y="3172968"/>
-            <a:ext cx="9144000" cy="411480"/>
+            <a:ext cx="6583680" cy="411480"/>
           </a:xfrm>
           <a:prstGeom prst="rect">
             <a:avLst/>
@@ -30036,7 +30067,7 @@
       </p:sp>
       <p:sp>
         <p:nvSpPr>
-          <p:cNvPr id="11" name="Rounded Rectangle 10"/>
+          <p:cNvPr id="12" name="Rounded Rectangle 11"/>
           <p:cNvSpPr/>
           <p:nvPr/>
         </p:nvSpPr>
@@ -30080,7 +30111,7 @@
       </p:sp>
       <p:sp>
         <p:nvSpPr>
-          <p:cNvPr id="12" name="TextBox 11"/>
+          <p:cNvPr id="13" name="TextBox 12"/>
           <p:cNvSpPr txBox="1"/>
           <p:nvPr/>
         </p:nvSpPr>
@@ -30119,14 +30150,14 @@
       </p:sp>
       <p:sp>
         <p:nvSpPr>
-          <p:cNvPr id="13" name="TextBox 12"/>
+          <p:cNvPr id="14" name="TextBox 13"/>
           <p:cNvSpPr txBox="1"/>
           <p:nvPr/>
         </p:nvSpPr>
         <p:spPr>
           <a:xfrm>
             <a:off x="1783080" y="3794760"/>
-            <a:ext cx="9144000" cy="411480"/>
+            <a:ext cx="6583680" cy="411480"/>
           </a:xfrm>
           <a:prstGeom prst="rect">
             <a:avLst/>
@@ -30158,14 +30189,14 @@
       </p:sp>
       <p:sp>
         <p:nvSpPr>
-          <p:cNvPr id="14" name="TextBox 13"/>
+          <p:cNvPr id="15" name="TextBox 14"/>
           <p:cNvSpPr txBox="1"/>
           <p:nvPr/>
         </p:nvSpPr>
         <p:spPr>
           <a:xfrm>
             <a:off x="1783080" y="4224528"/>
-            <a:ext cx="9144000" cy="411480"/>
+            <a:ext cx="6583680" cy="411480"/>
           </a:xfrm>
           <a:prstGeom prst="rect">
             <a:avLst/>
@@ -30197,7 +30228,7 @@
       </p:sp>
       <p:sp>
         <p:nvSpPr>
-          <p:cNvPr id="15" name="Rounded Rectangle 14"/>
+          <p:cNvPr id="16" name="Rounded Rectangle 15"/>
           <p:cNvSpPr/>
           <p:nvPr/>
         </p:nvSpPr>
@@ -30241,7 +30272,7 @@
       </p:sp>
       <p:sp>
         <p:nvSpPr>
-          <p:cNvPr id="16" name="TextBox 15"/>
+          <p:cNvPr id="17" name="TextBox 16"/>
           <p:cNvSpPr txBox="1"/>
           <p:nvPr/>
         </p:nvSpPr>
@@ -30280,14 +30311,14 @@
       </p:sp>
       <p:sp>
         <p:nvSpPr>
-          <p:cNvPr id="17" name="TextBox 16"/>
+          <p:cNvPr id="18" name="TextBox 17"/>
           <p:cNvSpPr txBox="1"/>
           <p:nvPr/>
         </p:nvSpPr>
         <p:spPr>
           <a:xfrm>
             <a:off x="1783080" y="4846320"/>
-            <a:ext cx="9144000" cy="411480"/>
+            <a:ext cx="6583680" cy="411480"/>
           </a:xfrm>
           <a:prstGeom prst="rect">
             <a:avLst/>
@@ -30319,14 +30350,14 @@
       </p:sp>
       <p:sp>
         <p:nvSpPr>
-          <p:cNvPr id="18" name="TextBox 17"/>
+          <p:cNvPr id="19" name="TextBox 18"/>
           <p:cNvSpPr txBox="1"/>
           <p:nvPr/>
         </p:nvSpPr>
         <p:spPr>
           <a:xfrm>
             <a:off x="1783080" y="5276088"/>
-            <a:ext cx="9144000" cy="411480"/>
+            <a:ext cx="6583680" cy="411480"/>
           </a:xfrm>
           <a:prstGeom prst="rect">
             <a:avLst/>
@@ -30358,7 +30389,7 @@
       </p:sp>
       <p:sp>
         <p:nvSpPr>
-          <p:cNvPr id="19" name="Rectangle 18"/>
+          <p:cNvPr id="20" name="Rectangle 19"/>
           <p:cNvSpPr/>
           <p:nvPr/>
         </p:nvSpPr>
@@ -30402,7 +30433,7 @@
       </p:sp>
       <p:sp>
         <p:nvSpPr>
-          <p:cNvPr id="20" name="TextBox 19"/>
+          <p:cNvPr id="21" name="TextBox 20"/>
           <p:cNvSpPr txBox="1"/>
           <p:nvPr/>
         </p:nvSpPr>

--- a/BrainSpark_Director_Presentation.pptx
+++ b/BrainSpark_Director_Presentation.pptx
@@ -592,7 +592,7 @@
           <a:lstStyle/>
           <a:p>
             <a:r>
-              <a:t>Proof, not claims. This is a held-out benchmark — parts the model wasn't tuned on. The grey bars are the old weight-based estimate; the teal bars are the new feature-based method. Error roughly halves on both commodities, and the biggest jump is on stamping, where the old approach was worst — from about 75% error down to 39%. Be candid: these are engineering-grade estimates, not supplier quotes, and I deliberately stopped tuning to avoid overfitting. That honesty is the point — we show ranges and we don't pretend to a precision we don't have.</a:t>
+              <a:t>Proof, not claims. This is a held-out benchmark — parts the model wasn't tuned on. The grey bars are the old weight-based estimate; the teal bars are the new feature-based method. The biggest jump is on stamping, where the old approach was worst — error halves from about 75% down to 39%; machining improves from 44% to 34%. And note the second bullet: the core should-cost engine itself — the one behind every number in the tool — scores a 100% hit-rate with 8.3% average error on sixteen held-out reference parts, and CI fails if that regresses. Be candid: the CAD-feature figures are engineering-grade estimates, not supplier quotes, and I deliberately stopped tuning to avoid overfitting the benchmark. That honesty is the point — we show ranges and we don't pretend to precision we don't have.</a:t>
             </a:r>
           </a:p>
         </p:txBody>
@@ -1082,7 +1082,7 @@
           <a:lstStyle/>
           <a:p>
             <a:r>
-              <a:t>This slide is about the effort and the standard — and be upfront about how it was built, because it's the strongest part of the story: I built this with AI-assisted development. I set the direction, made the engineering decisions, reviewed and tested everything; AI did the heavy lifting on the code. In other words, I used exactly the human-plus-AI way of working this tool offers our engineers — and this is what one engineer can produce with it on personal time. Walk the numbers: over forty-two thousand lines of production code, including five and a half thousand lines of curated engineering knowledge — the levers and benchmarks that make ideas automotive-grade rather than generic. Then land on the discipline column: two hundred and eighty-five tests on every change, accuracy proven on held-out parts, AI changes A/B-measured with a debt report that flags anything still unmeasured, and it's run like a product — daily automatic backups, a written decision log, and an honest register of what's NOT production-ready yet. That last point is worth saying out loud: I keep a list of the gaps — monitoring, deployment, spend tracking — because knowing your limits is part of the engineering. AI accelerated the build; discipline governed it.</a:t>
+              <a:t>This slide is about the effort and the standard — and be upfront about how it was built, because it's the strongest part of the story: I built this with AI-assisted development. I set the direction, made the engineering decisions, reviewed and tested everything; AI did the heavy lifting on the code. In other words, I used exactly the human-plus-AI way of working this tool offers our engineers — and this is what one engineer can produce with it on personal time. Walk the numbers: over forty-two thousand lines of production code, including five and a half thousand lines of curated engineering knowledge — the levers and benchmarks that make ideas automotive-grade rather than generic — and roughly one line of test or benchmark code for every eight lines of product. Then land on the discipline column: two hundred and eighty-five tests on every change, accuracy proven on held-out parts, AI changes A/B-measured with a debt report that flags anything still unmeasured, and it's run like a product — daily automatic backups, a written decision log, and an honest register of what's NOT production-ready yet. That last point is worth saying out loud: I keep a list of the gaps — monitoring, deployment, spend tracking — because knowing your limits is part of the engineering. AI accelerated the build; discipline governed it.</a:t>
             </a:r>
           </a:p>
         </p:txBody>
@@ -5587,7 +5587,7 @@
                 </a:solidFill>
                 <a:latin typeface="Segoe UI"/>
               </a:rPr>
-              <a:t>verified ideas</a:t>
+              <a:t>curated ideas</a:t>
             </a:r>
           </a:p>
         </p:txBody>
@@ -5777,7 +5777,7 @@
                 </a:solidFill>
                 <a:latin typeface="Segoe UI"/>
               </a:rPr>
-              <a:t>[Your Name]</a:t>
+              <a:t>Avinash Bhosale</a:t>
             </a:r>
           </a:p>
         </p:txBody>
@@ -6650,8 +6650,8 @@
         </p:nvSpPr>
         <p:spPr>
           <a:xfrm>
-            <a:off x="1965960" y="4191381"/>
-            <a:ext cx="822960" cy="1340739"/>
+            <a:off x="1965960" y="3833851"/>
+            <a:ext cx="822960" cy="1698269"/>
           </a:xfrm>
           <a:prstGeom prst="roundRect">
             <a:avLst/>
@@ -6694,7 +6694,7 @@
         </p:nvSpPr>
         <p:spPr>
           <a:xfrm>
-            <a:off x="1828800" y="3862197"/>
+            <a:off x="1828800" y="3504667"/>
             <a:ext cx="1097280" cy="274320"/>
           </a:xfrm>
           <a:prstGeom prst="rect">
@@ -6720,7 +6720,7 @@
                 </a:solidFill>
                 <a:latin typeface="Segoe UI Semibold"/>
               </a:rPr>
-              <a:t>34.5%</a:t>
+              <a:t>43.7%</a:t>
             </a:r>
           </a:p>
         </p:txBody>
@@ -6733,8 +6733,8 @@
         </p:nvSpPr>
         <p:spPr>
           <a:xfrm>
-            <a:off x="2926080" y="4910328"/>
-            <a:ext cx="822960" cy="621792"/>
+            <a:off x="2926080" y="4191381"/>
+            <a:ext cx="822960" cy="1340739"/>
           </a:xfrm>
           <a:prstGeom prst="roundRect">
             <a:avLst/>
@@ -6777,7 +6777,7 @@
         </p:nvSpPr>
         <p:spPr>
           <a:xfrm>
-            <a:off x="2788920" y="4581144"/>
+            <a:off x="2788920" y="3862197"/>
             <a:ext cx="1097280" cy="274320"/>
           </a:xfrm>
           <a:prstGeom prst="rect">
@@ -6803,7 +6803,7 @@
                 </a:solidFill>
                 <a:latin typeface="Segoe UI Semibold"/>
               </a:rPr>
-              <a:t>16.0%</a:t>
+              <a:t>34.5%</a:t>
             </a:r>
           </a:p>
         </p:txBody>
@@ -7459,7 +7459,7 @@
                 </a:solidFill>
                 <a:latin typeface="Segoe UI"/>
               </a:rPr>
-              <a:t>Feature-based roughly halves the error on both commodities.</a:t>
+              <a:t>Feature-based cuts error on both — stamping error halves (75% → 39%).</a:t>
             </a:r>
           </a:p>
         </p:txBody>
@@ -7581,7 +7581,7 @@
                 </a:solidFill>
                 <a:latin typeface="Segoe UI"/>
               </a:rPr>
-              <a:t>Biggest win where the old model is weakest — stamping (75% → 39%).</a:t>
+              <a:t>Core should-cost engine: 100% hit-rate, 8.3% MAPE on 16 held-out parts (CI-gated).</a:t>
             </a:r>
           </a:p>
         </p:txBody>
@@ -10139,7 +10139,7 @@
                 </a:solidFill>
                 <a:latin typeface="Segoe UI Semibold"/>
               </a:rPr>
-              <a:t>Effects · Circularity · Biomimicry</a:t>
+              <a:t>Effects &amp; Trends · Circularity</a:t>
             </a:r>
           </a:p>
         </p:txBody>
@@ -10178,7 +10178,7 @@
                 </a:solidFill>
                 <a:latin typeface="Segoe UI"/>
               </a:rPr>
-              <a:t>Physical effects, EU ELV design, nature's solutions</a:t>
+              <a:t>Cheaper physical effects, next-gen jumps, EU ELV design</a:t>
             </a:r>
           </a:p>
         </p:txBody>
@@ -21543,7 +21543,7 @@
                 </a:solidFill>
                 <a:latin typeface="Segoe UI Semibold"/>
               </a:rPr>
-              <a:t>283</a:t>
+              <a:t>285</a:t>
             </a:r>
           </a:p>
         </p:txBody>
@@ -21667,7 +21667,7 @@
                 </a:solidFill>
                 <a:latin typeface="Segoe UI Semibold"/>
               </a:rPr>
-              <a:t>1 : 6.5</a:t>
+              <a:t>1 : 7.7</a:t>
             </a:r>
           </a:p>
         </p:txBody>
@@ -21706,7 +21706,7 @@
                 </a:solidFill>
                 <a:latin typeface="Segoe UI"/>
               </a:rPr>
-              <a:t>test lines per product lines</a:t>
+              <a:t>test-to-product code ratio</a:t>
             </a:r>
           </a:p>
         </p:txBody>
@@ -30483,7 +30483,7 @@
                 </a:solidFill>
                 <a:latin typeface="Segoe UI"/>
               </a:rPr>
-              <a:t>[Your Name] · [email]</a:t>
+              <a:t>Avinash Bhosale · Cost Engineering</a:t>
             </a:r>
           </a:p>
         </p:txBody>
